--- a/EIA_Agent_System_Presentation.pptx
+++ b/EIA_Agent_System_Presentation.pptx
@@ -11,23 +11,23 @@
     <p:handoutMasterId r:id="rId11"/>
   </p:handoutMasterIdLst>
   <p:sldIdLst>
-    <p:sldId id="256" r:id="rId17"/>
-    <p:sldId id="257" r:id="rId18"/>
-    <p:sldId id="258" r:id="rId19"/>
-    <p:sldId id="259" r:id="rId20"/>
-    <p:sldId id="260" r:id="rId21"/>
-    <p:sldId id="261" r:id="rId22"/>
-    <p:sldId id="262" r:id="rId23"/>
-    <p:sldId id="263" r:id="rId24"/>
-    <p:sldId id="264" r:id="rId25"/>
-    <p:sldId id="265" r:id="rId26"/>
-    <p:sldId id="266" r:id="rId27"/>
-    <p:sldId id="267" r:id="rId28"/>
-    <p:sldId id="268" r:id="rId29"/>
-    <p:sldId id="269" r:id="rId30"/>
-    <p:sldId id="270" r:id="rId31"/>
+    <p:sldId id="256" r:id="rId9"/>
+    <p:sldId id="257" r:id="rId8"/>
+    <p:sldId id="258" r:id="rId7"/>
+    <p:sldId id="259" r:id="rId6"/>
+    <p:sldId id="260" r:id="rId5"/>
+    <p:sldId id="261" r:id="rId4"/>
+    <p:sldId id="262" r:id="rId3"/>
+    <p:sldId id="263" r:id="rId2"/>
+    <p:sldId id="264" r:id="rId17"/>
+    <p:sldId id="265" r:id="rId18"/>
+    <p:sldId id="266" r:id="rId19"/>
+    <p:sldId id="267" r:id="rId20"/>
+    <p:sldId id="268" r:id="rId21"/>
+    <p:sldId id="269" r:id="rId22"/>
+    <p:sldId id="270" r:id="rId23"/>
   </p:sldIdLst>
-  <p:sldSz cx="9144000" cy="5143500" type="screen16x9"/>
+  <p:sldSz cx="12188952" cy="6858000" type="screen16x9"/>
   <p:notesSz cx="6858000" cy="9144000"/>
   <p:defaultTextStyle>
     <a:defPPr>
@@ -835,562 +835,6 @@
     </a:lvl9pPr>
   </p:notesStyle>
 </p:notesMaster>
-</file>
-
-<file path=ppt/notesSlides/notesSlide1.xml><?xml version="1.0" encoding="utf-8"?>
-<p:notes xmlns:a="http://schemas.openxmlformats.org/drawingml/2006/main" xmlns:r="http://schemas.openxmlformats.org/officeDocument/2006/relationships" xmlns:p="http://schemas.openxmlformats.org/presentationml/2006/main">
-  <p:cSld>
-    <p:spTree>
-      <p:nvGrpSpPr>
-        <p:cNvPr id="1" name=""/>
-        <p:cNvGrpSpPr/>
-        <p:nvPr/>
-      </p:nvGrpSpPr>
-      <p:grpSpPr>
-        <a:xfrm>
-          <a:off x="0" y="0"/>
-          <a:ext cx="0" cy="0"/>
-          <a:chOff x="0" y="0"/>
-          <a:chExt cx="0" cy="0"/>
-        </a:xfrm>
-      </p:grpSpPr>
-      <p:sp>
-        <p:nvSpPr>
-          <p:cNvPr id="6145" name="Rectangle 7"/>
-          <p:cNvSpPr>
-            <a:spLocks noGrp="1" noChangeArrowheads="1"/>
-          </p:cNvSpPr>
-          <p:nvPr>
-            <p:ph type="sldNum" sz="quarter" idx="5"/>
-          </p:nvPr>
-        </p:nvSpPr>
-        <p:spPr>
-          <a:noFill/>
-          <a:ln/>
-          <a:extLst>
-            <a:ext uri="{909E8E84-426E-40DD-AFC4-6F175D3DCCD1}">
-              <a14:hiddenFill xmlns:a14="http://schemas.microsoft.com/office/drawing/2010/main">
-                <a:solidFill>
-                  <a:srgbClr val="FFFFFF"/>
-                </a:solidFill>
-              </a14:hiddenFill>
-            </a:ext>
-            <a:ext uri="{91240B29-F687-4F45-9708-019B960494DF}">
-              <a14:hiddenLine xmlns:a14="http://schemas.microsoft.com/office/drawing/2010/main" w="9525">
-                <a:solidFill>
-                  <a:srgbClr val="000000"/>
-                </a:solidFill>
-                <a:miter lim="800000"/>
-                <a:headEnd/>
-                <a:tailEnd/>
-              </a14:hiddenLine>
-            </a:ext>
-          </a:extLst>
-        </p:spPr>
-        <p:txBody>
-          <a:bodyPr/>
-          <a:lstStyle>
-            <a:lvl1pPr>
-              <a:defRPr sz="2400">
-                <a:solidFill>
-                  <a:schemeClr val="tx1"/>
-                </a:solidFill>
-                <a:latin typeface="45 Helvetica Light" charset="0"/>
-                <a:ea typeface="ＭＳ Ｐゴシック" charset="-128"/>
-              </a:defRPr>
-            </a:lvl1pPr>
-            <a:lvl2pPr marL="742950" indent="-285750">
-              <a:defRPr sz="2400">
-                <a:solidFill>
-                  <a:schemeClr val="tx1"/>
-                </a:solidFill>
-                <a:latin typeface="45 Helvetica Light" charset="0"/>
-                <a:ea typeface="ＭＳ Ｐゴシック" charset="-128"/>
-              </a:defRPr>
-            </a:lvl2pPr>
-            <a:lvl3pPr marL="1143000" indent="-228600">
-              <a:defRPr sz="2400">
-                <a:solidFill>
-                  <a:schemeClr val="tx1"/>
-                </a:solidFill>
-                <a:latin typeface="45 Helvetica Light" charset="0"/>
-                <a:ea typeface="ＭＳ Ｐゴシック" charset="-128"/>
-              </a:defRPr>
-            </a:lvl3pPr>
-            <a:lvl4pPr marL="1600200" indent="-228600">
-              <a:defRPr sz="2400">
-                <a:solidFill>
-                  <a:schemeClr val="tx1"/>
-                </a:solidFill>
-                <a:latin typeface="45 Helvetica Light" charset="0"/>
-                <a:ea typeface="ＭＳ Ｐゴシック" charset="-128"/>
-              </a:defRPr>
-            </a:lvl4pPr>
-            <a:lvl5pPr marL="2057400" indent="-228600">
-              <a:defRPr sz="2400">
-                <a:solidFill>
-                  <a:schemeClr val="tx1"/>
-                </a:solidFill>
-                <a:latin typeface="45 Helvetica Light" charset="0"/>
-                <a:ea typeface="ＭＳ Ｐゴシック" charset="-128"/>
-              </a:defRPr>
-            </a:lvl5pPr>
-            <a:lvl6pPr marL="2514600" indent="-228600" eaLnBrk="0" fontAlgn="base" hangingPunct="0">
-              <a:spcBef>
-                <a:spcPct val="0"/>
-              </a:spcBef>
-              <a:spcAft>
-                <a:spcPct val="0"/>
-              </a:spcAft>
-              <a:defRPr sz="2400">
-                <a:solidFill>
-                  <a:schemeClr val="tx1"/>
-                </a:solidFill>
-                <a:latin typeface="45 Helvetica Light" charset="0"/>
-                <a:ea typeface="ＭＳ Ｐゴシック" charset="-128"/>
-              </a:defRPr>
-            </a:lvl6pPr>
-            <a:lvl7pPr marL="2971800" indent="-228600" eaLnBrk="0" fontAlgn="base" hangingPunct="0">
-              <a:spcBef>
-                <a:spcPct val="0"/>
-              </a:spcBef>
-              <a:spcAft>
-                <a:spcPct val="0"/>
-              </a:spcAft>
-              <a:defRPr sz="2400">
-                <a:solidFill>
-                  <a:schemeClr val="tx1"/>
-                </a:solidFill>
-                <a:latin typeface="45 Helvetica Light" charset="0"/>
-                <a:ea typeface="ＭＳ Ｐゴシック" charset="-128"/>
-              </a:defRPr>
-            </a:lvl7pPr>
-            <a:lvl8pPr marL="3429000" indent="-228600" eaLnBrk="0" fontAlgn="base" hangingPunct="0">
-              <a:spcBef>
-                <a:spcPct val="0"/>
-              </a:spcBef>
-              <a:spcAft>
-                <a:spcPct val="0"/>
-              </a:spcAft>
-              <a:defRPr sz="2400">
-                <a:solidFill>
-                  <a:schemeClr val="tx1"/>
-                </a:solidFill>
-                <a:latin typeface="45 Helvetica Light" charset="0"/>
-                <a:ea typeface="ＭＳ Ｐゴシック" charset="-128"/>
-              </a:defRPr>
-            </a:lvl8pPr>
-            <a:lvl9pPr marL="3886200" indent="-228600" eaLnBrk="0" fontAlgn="base" hangingPunct="0">
-              <a:spcBef>
-                <a:spcPct val="0"/>
-              </a:spcBef>
-              <a:spcAft>
-                <a:spcPct val="0"/>
-              </a:spcAft>
-              <a:defRPr sz="2400">
-                <a:solidFill>
-                  <a:schemeClr val="tx1"/>
-                </a:solidFill>
-                <a:latin typeface="45 Helvetica Light" charset="0"/>
-                <a:ea typeface="ＭＳ Ｐゴシック" charset="-128"/>
-              </a:defRPr>
-            </a:lvl9pPr>
-          </a:lstStyle>
-          <a:p>
-            <a:fld id="{A4676FBE-E17B-9F40-B294-2A0EC4B80004}" type="slidenum">
-              <a:rPr lang="en-US" altLang="x-none" sz="1200">
-                <a:latin typeface="Open Sans" charset="0"/>
-              </a:rPr>
-              <a:pPr/>
-              <a:t>1</a:t>
-            </a:fld>
-            <a:endParaRPr lang="en-US" altLang="x-none" sz="1200">
-              <a:latin typeface="Open Sans" charset="0"/>
-            </a:endParaRPr>
-          </a:p>
-        </p:txBody>
-      </p:sp>
-      <p:sp>
-        <p:nvSpPr>
-          <p:cNvPr id="6146" name="Rectangle 2"/>
-          <p:cNvSpPr>
-            <a:spLocks noGrp="1" noRot="1" noChangeAspect="1" noChangeArrowheads="1" noTextEdit="1"/>
-          </p:cNvSpPr>
-          <p:nvPr>
-            <p:ph type="sldImg"/>
-          </p:nvPr>
-        </p:nvSpPr>
-        <p:spPr>
-          <a:ln/>
-        </p:spPr>
-      </p:sp>
-      <p:sp>
-        <p:nvSpPr>
-          <p:cNvPr id="6147" name="Rectangle 3"/>
-          <p:cNvSpPr>
-            <a:spLocks noGrp="1" noChangeArrowheads="1"/>
-          </p:cNvSpPr>
-          <p:nvPr>
-            <p:ph type="body" idx="1"/>
-          </p:nvPr>
-        </p:nvSpPr>
-        <p:spPr>
-          <a:noFill/>
-          <a:ln/>
-          <a:extLst>
-            <a:ext uri="{909E8E84-426E-40DD-AFC4-6F175D3DCCD1}">
-              <a14:hiddenFill xmlns:a14="http://schemas.microsoft.com/office/drawing/2010/main">
-                <a:solidFill>
-                  <a:srgbClr val="FFFFFF"/>
-                </a:solidFill>
-              </a14:hiddenFill>
-            </a:ext>
-            <a:ext uri="{91240B29-F687-4F45-9708-019B960494DF}">
-              <a14:hiddenLine xmlns:a14="http://schemas.microsoft.com/office/drawing/2010/main" w="9525">
-                <a:solidFill>
-                  <a:srgbClr val="000000"/>
-                </a:solidFill>
-                <a:miter lim="800000"/>
-                <a:headEnd/>
-                <a:tailEnd/>
-              </a14:hiddenLine>
-            </a:ext>
-          </a:extLst>
-        </p:spPr>
-        <p:txBody>
-          <a:bodyPr/>
-          <a:lstStyle/>
-          <a:p>
-            <a:pPr eaLnBrk="1" hangingPunct="1"/>
-            <a:r>
-              <a:rPr lang="en-US" altLang="x-none">
-                <a:ea typeface="ＭＳ Ｐゴシック" charset="-128"/>
-                <a:cs typeface="Geneva" charset="0"/>
-              </a:rPr>
-              <a:t>Hi everyone,</a:t>
-            </a:r>
-          </a:p>
-          <a:p>
-            <a:pPr eaLnBrk="1" hangingPunct="1"/>
-            <a:endParaRPr lang="en-US" altLang="x-none">
-              <a:ea typeface="ＭＳ Ｐゴシック" charset="-128"/>
-              <a:cs typeface="Geneva" charset="0"/>
-            </a:endParaRPr>
-          </a:p>
-          <a:p>
-            <a:pPr eaLnBrk="1" hangingPunct="1"/>
-            <a:r>
-              <a:rPr lang="en-US" altLang="x-none">
-                <a:ea typeface="ＭＳ Ｐゴシック" charset="-128"/>
-                <a:cs typeface="Geneva" charset="0"/>
-              </a:rPr>
-              <a:t>Thank you for attending my Thesis Proposal</a:t>
-            </a:r>
-          </a:p>
-          <a:p>
-            <a:pPr eaLnBrk="1" hangingPunct="1"/>
-            <a:endParaRPr lang="en-US" altLang="x-none">
-              <a:ea typeface="ＭＳ Ｐゴシック" charset="-128"/>
-              <a:cs typeface="Geneva" charset="0"/>
-            </a:endParaRPr>
-          </a:p>
-          <a:p>
-            <a:pPr eaLnBrk="1" hangingPunct="1"/>
-            <a:r>
-              <a:rPr lang="en-US" altLang="x-none">
-                <a:ea typeface="ＭＳ Ｐゴシック" charset="-128"/>
-                <a:cs typeface="Geneva" charset="0"/>
-              </a:rPr>
-              <a:t>Today I’ll be talking about</a:t>
-            </a:r>
-          </a:p>
-          <a:p>
-            <a:pPr eaLnBrk="1" hangingPunct="1"/>
-            <a:endParaRPr lang="en-US" altLang="x-none">
-              <a:ea typeface="ＭＳ Ｐゴシック" charset="-128"/>
-              <a:cs typeface="Geneva" charset="0"/>
-            </a:endParaRPr>
-          </a:p>
-          <a:p>
-            <a:pPr eaLnBrk="1" hangingPunct="1"/>
-            <a:r>
-              <a:rPr lang="en-US" altLang="x-none">
-                <a:ea typeface="ＭＳ Ｐゴシック" charset="-128"/>
-                <a:cs typeface="Geneva" charset="0"/>
-              </a:rPr>
-              <a:t>[READ TITLE]</a:t>
-            </a:r>
-          </a:p>
-          <a:p>
-            <a:pPr eaLnBrk="1" hangingPunct="1"/>
-            <a:endParaRPr lang="en-US" altLang="x-none">
-              <a:ea typeface="ＭＳ Ｐゴシック" charset="-128"/>
-              <a:cs typeface="Geneva" charset="0"/>
-            </a:endParaRPr>
-          </a:p>
-          <a:p>
-            <a:pPr eaLnBrk="1" hangingPunct="1"/>
-            <a:r>
-              <a:rPr lang="en-US" altLang="x-none">
-                <a:ea typeface="ＭＳ Ｐゴシック" charset="-128"/>
-                <a:cs typeface="Geneva" charset="0"/>
-              </a:rPr>
-              <a:t>I’d first like to thank my thesis advisor</a:t>
-            </a:r>
-          </a:p>
-          <a:p>
-            <a:pPr eaLnBrk="1" hangingPunct="1"/>
-            <a:endParaRPr lang="en-US" altLang="x-none">
-              <a:ea typeface="ＭＳ Ｐゴシック" charset="-128"/>
-              <a:cs typeface="Geneva" charset="0"/>
-            </a:endParaRPr>
-          </a:p>
-          <a:p>
-            <a:pPr eaLnBrk="1" hangingPunct="1"/>
-            <a:r>
-              <a:rPr lang="en-US" altLang="x-none">
-                <a:ea typeface="ＭＳ Ｐゴシック" charset="-128"/>
-                <a:cs typeface="Geneva" charset="0"/>
-              </a:rPr>
-              <a:t>Dr. Amir Barati </a:t>
-            </a:r>
-            <a:r>
-              <a:rPr lang="en-US" altLang="x-none" err="1">
-                <a:ea typeface="ＭＳ Ｐゴシック" charset="-128"/>
-                <a:cs typeface="Geneva" charset="0"/>
-              </a:rPr>
-              <a:t>Farimani</a:t>
-            </a:r>
-            <a:endParaRPr lang="en-US" altLang="x-none">
-              <a:ea typeface="ＭＳ Ｐゴシック" charset="-128"/>
-              <a:cs typeface="Geneva" charset="0"/>
-            </a:endParaRPr>
-          </a:p>
-          <a:p>
-            <a:pPr eaLnBrk="1" hangingPunct="1"/>
-            <a:endParaRPr lang="en-US" altLang="x-none">
-              <a:ea typeface="ＭＳ Ｐゴシック" charset="-128"/>
-              <a:cs typeface="Geneva" charset="0"/>
-            </a:endParaRPr>
-          </a:p>
-          <a:p>
-            <a:pPr eaLnBrk="1" hangingPunct="1"/>
-            <a:r>
-              <a:rPr lang="en-US" altLang="x-none">
-                <a:ea typeface="ＭＳ Ｐゴシック" charset="-128"/>
-                <a:cs typeface="Geneva" charset="0"/>
-              </a:rPr>
-              <a:t>For all of his mentorship and guidance</a:t>
-            </a:r>
-          </a:p>
-          <a:p>
-            <a:pPr eaLnBrk="1" hangingPunct="1"/>
-            <a:endParaRPr lang="en-US" altLang="x-none">
-              <a:ea typeface="ＭＳ Ｐゴシック" charset="-128"/>
-              <a:cs typeface="Geneva" charset="0"/>
-            </a:endParaRPr>
-          </a:p>
-          <a:p>
-            <a:pPr eaLnBrk="1" hangingPunct="1"/>
-            <a:r>
-              <a:rPr lang="en-US" altLang="x-none">
-                <a:ea typeface="ＭＳ Ｐゴシック" charset="-128"/>
-                <a:cs typeface="Geneva" charset="0"/>
-              </a:rPr>
-              <a:t>I’d also like to thank the members of my thesis committee</a:t>
-            </a:r>
-          </a:p>
-          <a:p>
-            <a:pPr eaLnBrk="1" hangingPunct="1"/>
-            <a:endParaRPr lang="en-US" altLang="x-none">
-              <a:ea typeface="ＭＳ Ｐゴシック" charset="-128"/>
-              <a:cs typeface="Geneva" charset="0"/>
-            </a:endParaRPr>
-          </a:p>
-          <a:p>
-            <a:pPr eaLnBrk="1" hangingPunct="1"/>
-            <a:r>
-              <a:rPr lang="en-US" altLang="x-none">
-                <a:ea typeface="ＭＳ Ｐゴシック" charset="-128"/>
-                <a:cs typeface="Geneva" charset="0"/>
-              </a:rPr>
-              <a:t>Dr. Anthony Rollett</a:t>
-            </a:r>
-          </a:p>
-          <a:p>
-            <a:pPr eaLnBrk="1" hangingPunct="1"/>
-            <a:endParaRPr lang="en-US" altLang="x-none">
-              <a:ea typeface="ＭＳ Ｐゴシック" charset="-128"/>
-              <a:cs typeface="Geneva" charset="0"/>
-            </a:endParaRPr>
-          </a:p>
-          <a:p>
-            <a:pPr eaLnBrk="1" hangingPunct="1"/>
-            <a:r>
-              <a:rPr lang="en-US" altLang="x-none">
-                <a:ea typeface="ＭＳ Ｐゴシック" charset="-128"/>
-                <a:cs typeface="Geneva" charset="0"/>
-              </a:rPr>
-              <a:t>Dr. Jonathan Malen</a:t>
-            </a:r>
-          </a:p>
-          <a:p>
-            <a:pPr eaLnBrk="1" hangingPunct="1"/>
-            <a:endParaRPr lang="en-US" altLang="x-none">
-              <a:ea typeface="ＭＳ Ｐゴシック" charset="-128"/>
-              <a:cs typeface="Geneva" charset="0"/>
-            </a:endParaRPr>
-          </a:p>
-          <a:p>
-            <a:pPr eaLnBrk="1" hangingPunct="1"/>
-            <a:r>
-              <a:rPr lang="en-US" altLang="x-none">
-                <a:ea typeface="ＭＳ Ｐゴシック" charset="-128"/>
-                <a:cs typeface="Geneva" charset="0"/>
-              </a:rPr>
-              <a:t>Dr. Sneha Narra</a:t>
-            </a:r>
-          </a:p>
-          <a:p>
-            <a:pPr eaLnBrk="1" hangingPunct="1"/>
-            <a:endParaRPr lang="en-US" altLang="x-none">
-              <a:ea typeface="ＭＳ Ｐゴシック" charset="-128"/>
-              <a:cs typeface="Geneva" charset="0"/>
-            </a:endParaRPr>
-          </a:p>
-          <a:p>
-            <a:pPr eaLnBrk="1" hangingPunct="1"/>
-            <a:r>
-              <a:rPr lang="en-US" altLang="x-none">
-                <a:ea typeface="ＭＳ Ｐゴシック" charset="-128"/>
-                <a:cs typeface="Geneva" charset="0"/>
-              </a:rPr>
-              <a:t>For accepting my committee invitation.</a:t>
-            </a:r>
-          </a:p>
-          <a:p>
-            <a:pPr eaLnBrk="1" hangingPunct="1"/>
-            <a:endParaRPr lang="en-US" altLang="x-none">
-              <a:ea typeface="ＭＳ Ｐゴシック" charset="-128"/>
-              <a:cs typeface="Geneva" charset="0"/>
-            </a:endParaRPr>
-          </a:p>
-          <a:p>
-            <a:pPr eaLnBrk="1" hangingPunct="1"/>
-            <a:r>
-              <a:rPr lang="en-US" altLang="x-none">
-                <a:ea typeface="ＭＳ Ｐゴシック" charset="-128"/>
-                <a:cs typeface="Geneva" charset="0"/>
-              </a:rPr>
-              <a:t>Alright, let’s get started.</a:t>
-            </a:r>
-          </a:p>
-        </p:txBody>
-      </p:sp>
-    </p:spTree>
-    <p:extLst>
-      <p:ext uri="{BB962C8B-B14F-4D97-AF65-F5344CB8AC3E}">
-        <p14:creationId xmlns:p14="http://schemas.microsoft.com/office/powerpoint/2010/main" val="298275553"/>
-      </p:ext>
-    </p:extLst>
-  </p:cSld>
-  <p:clrMapOvr>
-    <a:masterClrMapping/>
-  </p:clrMapOvr>
-</p:notes>
-</file>
-
-<file path=ppt/notesSlides/notesSlide2.xml><?xml version="1.0" encoding="utf-8"?>
-<p:notes xmlns:a="http://schemas.openxmlformats.org/drawingml/2006/main" xmlns:r="http://schemas.openxmlformats.org/officeDocument/2006/relationships" xmlns:p="http://schemas.openxmlformats.org/presentationml/2006/main">
-  <p:cSld>
-    <p:spTree>
-      <p:nvGrpSpPr>
-        <p:cNvPr id="1" name=""/>
-        <p:cNvGrpSpPr/>
-        <p:nvPr/>
-      </p:nvGrpSpPr>
-      <p:grpSpPr>
-        <a:xfrm>
-          <a:off x="0" y="0"/>
-          <a:ext cx="0" cy="0"/>
-          <a:chOff x="0" y="0"/>
-          <a:chExt cx="0" cy="0"/>
-        </a:xfrm>
-      </p:grpSpPr>
-      <p:sp>
-        <p:nvSpPr>
-          <p:cNvPr id="2" name="Slide Image Placeholder 1"/>
-          <p:cNvSpPr>
-            <a:spLocks noGrp="1" noRot="1" noChangeAspect="1"/>
-          </p:cNvSpPr>
-          <p:nvPr>
-            <p:ph type="sldImg"/>
-          </p:nvPr>
-        </p:nvSpPr>
-        <p:spPr/>
-      </p:sp>
-      <p:sp>
-        <p:nvSpPr>
-          <p:cNvPr id="3" name="Notes Placeholder 2"/>
-          <p:cNvSpPr>
-            <a:spLocks noGrp="1"/>
-          </p:cNvSpPr>
-          <p:nvPr>
-            <p:ph type="body" idx="1"/>
-          </p:nvPr>
-        </p:nvSpPr>
-        <p:spPr/>
-        <p:txBody>
-          <a:bodyPr/>
-          <a:lstStyle/>
-          <a:p>
-            <a:r>
-              <a:rPr lang="en-US"/>
-              <a:t>Additive manufacturing, specifically laser powder bed fusion, is a multi-faceted complex process that is becoming more complex with advances such as multi-laser and multi-material based approaches.</a:t>
-            </a:r>
-          </a:p>
-        </p:txBody>
-      </p:sp>
-      <p:sp>
-        <p:nvSpPr>
-          <p:cNvPr id="4" name="Slide Number Placeholder 3"/>
-          <p:cNvSpPr>
-            <a:spLocks noGrp="1"/>
-          </p:cNvSpPr>
-          <p:nvPr>
-            <p:ph type="sldNum" sz="quarter" idx="5"/>
-          </p:nvPr>
-        </p:nvSpPr>
-        <p:spPr/>
-        <p:txBody>
-          <a:bodyPr/>
-          <a:lstStyle/>
-          <a:p>
-            <a:pPr>
-              <a:defRPr/>
-            </a:pPr>
-            <a:fld id="{2B24F439-14CB-B64A-A38E-43868DBA8F9B}" type="slidenum">
-              <a:rPr lang="en-US" altLang="x-none" smtClean="0"/>
-              <a:pPr>
-                <a:defRPr/>
-              </a:pPr>
-              <a:t>8</a:t>
-            </a:fld>
-            <a:endParaRPr lang="en-US" altLang="x-none"/>
-          </a:p>
-        </p:txBody>
-      </p:sp>
-    </p:spTree>
-    <p:extLst>
-      <p:ext uri="{BB962C8B-B14F-4D97-AF65-F5344CB8AC3E}">
-        <p14:creationId xmlns:p14="http://schemas.microsoft.com/office/powerpoint/2010/main" val="719224396"/>
-      </p:ext>
-    </p:extLst>
-  </p:cSld>
-  <p:clrMapOvr>
-    <a:masterClrMapping/>
-  </p:clrMapOvr>
-</p:notes>
 </file>
 
 <file path=ppt/slideLayouts/slideLayout1.xml><?xml version="1.0" encoding="utf-8"?>
@@ -4797,299 +4241,6 @@
 </p:sld>
 </file>
 
-<file path=ppt/slides/slide1.xml><?xml version="1.0" encoding="utf-8"?>
-<p:sld xmlns:a="http://schemas.openxmlformats.org/drawingml/2006/main" xmlns:p="http://schemas.openxmlformats.org/presentationml/2006/main" xmlns:r="http://schemas.openxmlformats.org/officeDocument/2006/relationships">
-  <p:cSld>
-    <p:bg>
-      <p:bgPr>
-        <a:solidFill>
-          <a:srgbClr val="1F2833"/>
-        </a:solidFill>
-        <a:effectLst/>
-      </p:bgPr>
-    </p:bg>
-    <p:spTree>
-      <p:nvGrpSpPr>
-        <p:cNvPr id="1" name=""/>
-        <p:cNvGrpSpPr/>
-        <p:nvPr/>
-      </p:nvGrpSpPr>
-      <p:grpSpPr/>
-      <p:sp>
-        <p:nvSpPr>
-          <p:cNvPr id="2" name="Text Placeholder 1"/>
-          <p:cNvSpPr>
-            <a:spLocks noGrp="1"/>
-          </p:cNvSpPr>
-          <p:nvPr>
-            <p:ph type="body" idx="10" sz="quarter"/>
-          </p:nvPr>
-        </p:nvSpPr>
-        <p:spPr/>
-        <p:txBody>
-          <a:bodyPr/>
-          <a:lstStyle/>
-          <a:p/>
-        </p:txBody>
-      </p:sp>
-      <p:sp>
-        <p:nvSpPr>
-          <p:cNvPr id="3" name="Rectangle 2"/>
-          <p:cNvSpPr/>
-          <p:nvPr/>
-        </p:nvSpPr>
-        <p:spPr>
-          <a:xfrm>
-            <a:off x="0" y="0"/>
-            <a:ext cx="12188952" cy="1554480"/>
-          </a:xfrm>
-          <a:prstGeom prst="rect">
-            <a:avLst/>
-          </a:prstGeom>
-          <a:solidFill>
-            <a:srgbClr val="F97316"/>
-          </a:solidFill>
-        </p:spPr>
-        <p:style>
-          <a:lnRef idx="1">
-            <a:schemeClr val="accent1"/>
-          </a:lnRef>
-          <a:fillRef idx="3">
-            <a:schemeClr val="accent1"/>
-          </a:fillRef>
-          <a:effectRef idx="2">
-            <a:schemeClr val="accent1"/>
-          </a:effectRef>
-          <a:fontRef idx="minor">
-            <a:schemeClr val="lt1"/>
-          </a:fontRef>
-        </p:style>
-        <p:txBody>
-          <a:bodyPr rtlCol="0" anchor="ctr"/>
-          <a:lstStyle/>
-          <a:p>
-            <a:pPr algn="ctr"/>
-          </a:p>
-        </p:txBody>
-      </p:sp>
-      <p:sp>
-        <p:nvSpPr>
-          <p:cNvPr id="4" name="TextBox 3"/>
-          <p:cNvSpPr txBox="1"/>
-          <p:nvPr/>
-        </p:nvSpPr>
-        <p:spPr>
-          <a:xfrm>
-            <a:off x="640080" y="164592"/>
-            <a:ext cx="10515600" cy="1005840"/>
-          </a:xfrm>
-          <a:prstGeom prst="rect">
-            <a:avLst/>
-          </a:prstGeom>
-          <a:noFill/>
-        </p:spPr>
-        <p:txBody>
-          <a:bodyPr wrap="square">
-            <a:spAutoFit/>
-          </a:bodyPr>
-          <a:lstStyle/>
-          <a:p>
-            <a:pPr algn="l"/>
-            <a:r>
-              <a:rPr sz="4200" b="1" i="0">
-                <a:solidFill>
-                  <a:srgbClr val="FFFFFF"/>
-                </a:solidFill>
-              </a:rPr>
-              <a:t>EIA AGENT SYSTEM</a:t>
-            </a:r>
-          </a:p>
-        </p:txBody>
-      </p:sp>
-      <p:sp>
-        <p:nvSpPr>
-          <p:cNvPr id="5" name="TextBox 4"/>
-          <p:cNvSpPr txBox="1"/>
-          <p:nvPr/>
-        </p:nvSpPr>
-        <p:spPr>
-          <a:xfrm>
-            <a:off x="640080" y="1737360"/>
-            <a:ext cx="10515600" cy="822960"/>
-          </a:xfrm>
-          <a:prstGeom prst="rect">
-            <a:avLst/>
-          </a:prstGeom>
-          <a:noFill/>
-        </p:spPr>
-        <p:txBody>
-          <a:bodyPr wrap="square">
-            <a:spAutoFit/>
-          </a:bodyPr>
-          <a:lstStyle/>
-          <a:p>
-            <a:pPr algn="l"/>
-            <a:r>
-              <a:rPr sz="2200" b="0" i="0">
-                <a:solidFill>
-                  <a:srgbClr val="E5E7EB"/>
-                </a:solidFill>
-              </a:rPr>
-              <a:t>Automated Environmental Impact Assessment via Multi-Agent AI Pipeline</a:t>
-            </a:r>
-          </a:p>
-        </p:txBody>
-      </p:sp>
-      <p:sp>
-        <p:nvSpPr>
-          <p:cNvPr id="6" name="TextBox 5"/>
-          <p:cNvSpPr txBox="1"/>
-          <p:nvPr/>
-        </p:nvSpPr>
-        <p:spPr>
-          <a:xfrm>
-            <a:off x="640080" y="2743200"/>
-            <a:ext cx="10515600" cy="457200"/>
-          </a:xfrm>
-          <a:prstGeom prst="rect">
-            <a:avLst/>
-          </a:prstGeom>
-          <a:noFill/>
-        </p:spPr>
-        <p:txBody>
-          <a:bodyPr wrap="square">
-            <a:spAutoFit/>
-          </a:bodyPr>
-          <a:lstStyle/>
-          <a:p>
-            <a:pPr algn="l"/>
-            <a:r>
-              <a:rPr sz="1700" b="0" i="0">
-                <a:solidFill>
-                  <a:srgbClr val="F97316"/>
-                </a:solidFill>
-              </a:rPr>
-              <a:t>24-880  AI Agents for Engineers  |  Carnegie Mellon University</a:t>
-            </a:r>
-          </a:p>
-        </p:txBody>
-      </p:sp>
-      <p:sp>
-        <p:nvSpPr>
-          <p:cNvPr id="7" name="TextBox 6"/>
-          <p:cNvSpPr txBox="1"/>
-          <p:nvPr/>
-        </p:nvSpPr>
-        <p:spPr>
-          <a:xfrm>
-            <a:off x="640080" y="3383280"/>
-            <a:ext cx="10515600" cy="365760"/>
-          </a:xfrm>
-          <a:prstGeom prst="rect">
-            <a:avLst/>
-          </a:prstGeom>
-          <a:noFill/>
-        </p:spPr>
-        <p:txBody>
-          <a:bodyPr wrap="square">
-            <a:spAutoFit/>
-          </a:bodyPr>
-          <a:lstStyle/>
-          <a:p>
-            <a:pPr algn="l"/>
-            <a:r>
-              <a:rPr sz="1500" b="0" i="0">
-                <a:solidFill>
-                  <a:srgbClr val="E5E7EB"/>
-                </a:solidFill>
-              </a:rPr>
-              <a:t>[ Group Member Name(s) ]</a:t>
-            </a:r>
-          </a:p>
-        </p:txBody>
-      </p:sp>
-      <p:sp>
-        <p:nvSpPr>
-          <p:cNvPr id="8" name="TextBox 7"/>
-          <p:cNvSpPr txBox="1"/>
-          <p:nvPr/>
-        </p:nvSpPr>
-        <p:spPr>
-          <a:xfrm>
-            <a:off x="640080" y="3840480"/>
-            <a:ext cx="10515600" cy="365760"/>
-          </a:xfrm>
-          <a:prstGeom prst="rect">
-            <a:avLst/>
-          </a:prstGeom>
-          <a:noFill/>
-        </p:spPr>
-        <p:txBody>
-          <a:bodyPr wrap="square">
-            <a:spAutoFit/>
-          </a:bodyPr>
-          <a:lstStyle/>
-          <a:p>
-            <a:pPr algn="l"/>
-            <a:r>
-              <a:rPr sz="1500" b="0" i="0">
-                <a:solidFill>
-                  <a:srgbClr val="E5E7EB"/>
-                </a:solidFill>
-              </a:rPr>
-              <a:t>[ Presentation Date ]</a:t>
-            </a:r>
-          </a:p>
-        </p:txBody>
-      </p:sp>
-      <p:sp>
-        <p:nvSpPr>
-          <p:cNvPr id="9" name="Rectangle 8"/>
-          <p:cNvSpPr/>
-          <p:nvPr/>
-        </p:nvSpPr>
-        <p:spPr>
-          <a:xfrm>
-            <a:off x="0" y="6720840"/>
-            <a:ext cx="12188952" cy="137160"/>
-          </a:xfrm>
-          <a:prstGeom prst="rect">
-            <a:avLst/>
-          </a:prstGeom>
-          <a:solidFill>
-            <a:srgbClr val="F97316"/>
-          </a:solidFill>
-        </p:spPr>
-        <p:style>
-          <a:lnRef idx="1">
-            <a:schemeClr val="accent1"/>
-          </a:lnRef>
-          <a:fillRef idx="3">
-            <a:schemeClr val="accent1"/>
-          </a:fillRef>
-          <a:effectRef idx="2">
-            <a:schemeClr val="accent1"/>
-          </a:effectRef>
-          <a:fontRef idx="minor">
-            <a:schemeClr val="lt1"/>
-          </a:fontRef>
-        </p:style>
-        <p:txBody>
-          <a:bodyPr rtlCol="0" anchor="ctr"/>
-          <a:lstStyle/>
-          <a:p>
-            <a:pPr algn="ctr"/>
-          </a:p>
-        </p:txBody>
-      </p:sp>
-    </p:spTree>
-  </p:cSld>
-  <p:clrMapOvr>
-    <a:masterClrMapping/>
-  </p:clrMapOvr>
-</p:sld>
-</file>
-
 <file path=ppt/slides/slide10.xml><?xml version="1.0" encoding="utf-8"?>
 <p:sld xmlns:a="http://schemas.openxmlformats.org/drawingml/2006/main" xmlns:p="http://schemas.openxmlformats.org/presentationml/2006/main" xmlns:r="http://schemas.openxmlformats.org/officeDocument/2006/relationships">
   <p:cSld>
@@ -12592,1464 +11743,6 @@
 </p:sld>
 </file>
 
-<file path=ppt/slides/slide2.xml><?xml version="1.0" encoding="utf-8"?>
-<p:sld xmlns:a="http://schemas.openxmlformats.org/drawingml/2006/main" xmlns:p="http://schemas.openxmlformats.org/presentationml/2006/main" xmlns:r="http://schemas.openxmlformats.org/officeDocument/2006/relationships">
-  <p:cSld>
-    <p:bg>
-      <p:bgPr>
-        <a:solidFill>
-          <a:srgbClr val="1F2833"/>
-        </a:solidFill>
-        <a:effectLst/>
-      </p:bgPr>
-    </p:bg>
-    <p:spTree>
-      <p:nvGrpSpPr>
-        <p:cNvPr id="1" name=""/>
-        <p:cNvGrpSpPr/>
-        <p:nvPr/>
-      </p:nvGrpSpPr>
-      <p:grpSpPr/>
-      <p:sp>
-        <p:nvSpPr>
-          <p:cNvPr id="2" name="Text Placeholder 1"/>
-          <p:cNvSpPr>
-            <a:spLocks noGrp="1"/>
-          </p:cNvSpPr>
-          <p:nvPr>
-            <p:ph type="body" idx="10" sz="quarter"/>
-          </p:nvPr>
-        </p:nvSpPr>
-        <p:spPr/>
-        <p:txBody>
-          <a:bodyPr/>
-          <a:lstStyle/>
-          <a:p/>
-        </p:txBody>
-      </p:sp>
-      <p:sp>
-        <p:nvSpPr>
-          <p:cNvPr id="3" name="Rectangle 2"/>
-          <p:cNvSpPr/>
-          <p:nvPr/>
-        </p:nvSpPr>
-        <p:spPr>
-          <a:xfrm>
-            <a:off x="0" y="0"/>
-            <a:ext cx="12188952" cy="73152"/>
-          </a:xfrm>
-          <a:prstGeom prst="rect">
-            <a:avLst/>
-          </a:prstGeom>
-          <a:solidFill>
-            <a:srgbClr val="F97316"/>
-          </a:solidFill>
-        </p:spPr>
-        <p:style>
-          <a:lnRef idx="1">
-            <a:schemeClr val="accent1"/>
-          </a:lnRef>
-          <a:fillRef idx="3">
-            <a:schemeClr val="accent1"/>
-          </a:fillRef>
-          <a:effectRef idx="2">
-            <a:schemeClr val="accent1"/>
-          </a:effectRef>
-          <a:fontRef idx="minor">
-            <a:schemeClr val="lt1"/>
-          </a:fontRef>
-        </p:style>
-        <p:txBody>
-          <a:bodyPr rtlCol="0" anchor="ctr"/>
-          <a:lstStyle/>
-          <a:p>
-            <a:pPr algn="ctr"/>
-          </a:p>
-        </p:txBody>
-      </p:sp>
-      <p:sp>
-        <p:nvSpPr>
-          <p:cNvPr id="4" name="TextBox 3"/>
-          <p:cNvSpPr txBox="1"/>
-          <p:nvPr/>
-        </p:nvSpPr>
-        <p:spPr>
-          <a:xfrm>
-            <a:off x="548640" y="164592"/>
-            <a:ext cx="11430000" cy="685800"/>
-          </a:xfrm>
-          <a:prstGeom prst="rect">
-            <a:avLst/>
-          </a:prstGeom>
-          <a:noFill/>
-        </p:spPr>
-        <p:txBody>
-          <a:bodyPr wrap="square">
-            <a:spAutoFit/>
-          </a:bodyPr>
-          <a:lstStyle/>
-          <a:p>
-            <a:pPr algn="l"/>
-            <a:r>
-              <a:rPr sz="2800" b="1" i="0">
-                <a:solidFill>
-                  <a:srgbClr val="F97316"/>
-                </a:solidFill>
-              </a:rPr>
-              <a:t>Background</a:t>
-            </a:r>
-          </a:p>
-        </p:txBody>
-      </p:sp>
-      <p:sp>
-        <p:nvSpPr>
-          <p:cNvPr id="5" name="Rectangle 4"/>
-          <p:cNvSpPr/>
-          <p:nvPr/>
-        </p:nvSpPr>
-        <p:spPr>
-          <a:xfrm>
-            <a:off x="548640" y="914400"/>
-            <a:ext cx="11064240" cy="18288"/>
-          </a:xfrm>
-          <a:prstGeom prst="rect">
-            <a:avLst/>
-          </a:prstGeom>
-          <a:solidFill>
-            <a:srgbClr val="3D4A5C"/>
-          </a:solidFill>
-        </p:spPr>
-        <p:style>
-          <a:lnRef idx="1">
-            <a:schemeClr val="accent1"/>
-          </a:lnRef>
-          <a:fillRef idx="3">
-            <a:schemeClr val="accent1"/>
-          </a:fillRef>
-          <a:effectRef idx="2">
-            <a:schemeClr val="accent1"/>
-          </a:effectRef>
-          <a:fontRef idx="minor">
-            <a:schemeClr val="lt1"/>
-          </a:fontRef>
-        </p:style>
-        <p:txBody>
-          <a:bodyPr rtlCol="0" anchor="ctr"/>
-          <a:lstStyle/>
-          <a:p>
-            <a:pPr algn="ctr"/>
-          </a:p>
-        </p:txBody>
-      </p:sp>
-      <p:sp>
-        <p:nvSpPr>
-          <p:cNvPr id="6" name="TextBox 5"/>
-          <p:cNvSpPr txBox="1"/>
-          <p:nvPr/>
-        </p:nvSpPr>
-        <p:spPr>
-          <a:xfrm>
-            <a:off x="548640" y="1005840"/>
-            <a:ext cx="11064240" cy="411480"/>
-          </a:xfrm>
-          <a:prstGeom prst="rect">
-            <a:avLst/>
-          </a:prstGeom>
-          <a:noFill/>
-        </p:spPr>
-        <p:txBody>
-          <a:bodyPr wrap="square">
-            <a:spAutoFit/>
-          </a:bodyPr>
-          <a:lstStyle/>
-          <a:p>
-            <a:pPr algn="l"/>
-            <a:r>
-              <a:rPr sz="1400" b="0" i="1">
-                <a:solidFill>
-                  <a:srgbClr val="E5E7EB"/>
-                </a:solidFill>
-              </a:rPr>
-              <a:t>Environmental review is a legal prerequisite for major infrastructure projects in the United States.</a:t>
-            </a:r>
-          </a:p>
-        </p:txBody>
-      </p:sp>
-      <p:sp>
-        <p:nvSpPr>
-          <p:cNvPr id="7" name="TextBox 6"/>
-          <p:cNvSpPr txBox="1"/>
-          <p:nvPr/>
-        </p:nvSpPr>
-        <p:spPr>
-          <a:xfrm>
-            <a:off x="548640" y="1508760"/>
-            <a:ext cx="5669280" cy="5120640"/>
-          </a:xfrm>
-          <a:prstGeom prst="rect">
-            <a:avLst/>
-          </a:prstGeom>
-          <a:noFill/>
-        </p:spPr>
-        <p:txBody>
-          <a:bodyPr wrap="square">
-            <a:spAutoFit/>
-          </a:bodyPr>
-          <a:lstStyle/>
-          <a:p>
-            <a:pPr>
-              <a:spcBef>
-                <a:spcPts val="400"/>
-              </a:spcBef>
-            </a:pPr>
-            <a:r>
-              <a:rPr sz="1500" b="1">
-                <a:solidFill>
-                  <a:srgbClr val="FFFFFF"/>
-                </a:solidFill>
-              </a:rPr>
-              <a:t>▸ National Environmental Policy Act (NEPA)</a:t>
-            </a:r>
-          </a:p>
-          <a:p>
-            <a:pPr lvl="1">
-              <a:spcBef>
-                <a:spcPts val="200"/>
-              </a:spcBef>
-            </a:pPr>
-            <a:r>
-              <a:rPr sz="1300" b="0">
-                <a:solidFill>
-                  <a:srgbClr val="E5E7EB"/>
-                </a:solidFill>
-              </a:rPr>
-              <a:t>    · Signed 1970 — applies to all major federal actions</a:t>
-            </a:r>
-          </a:p>
-          <a:p>
-            <a:pPr lvl="1">
-              <a:spcBef>
-                <a:spcPts val="200"/>
-              </a:spcBef>
-            </a:pPr>
-            <a:r>
-              <a:rPr sz="1300" b="0">
-                <a:solidFill>
-                  <a:srgbClr val="E5E7EB"/>
-                </a:solidFill>
-              </a:rPr>
-              <a:t>    · Requires agencies to evaluate environmental consequences</a:t>
-            </a:r>
-          </a:p>
-          <a:p>
-            <a:pPr lvl="1">
-              <a:spcBef>
-                <a:spcPts val="200"/>
-              </a:spcBef>
-            </a:pPr>
-            <a:r>
-              <a:rPr sz="1300" b="0">
-                <a:solidFill>
-                  <a:srgbClr val="E5E7EB"/>
-                </a:solidFill>
-              </a:rPr>
-              <a:t>    · Two-tier review: Environmental Assessment (EA) + full EIS</a:t>
-            </a:r>
-          </a:p>
-          <a:p>
-            <a:pPr>
-              <a:spcBef>
-                <a:spcPts val="400"/>
-              </a:spcBef>
-            </a:pPr>
-            <a:r>
-              <a:rPr sz="1500" b="1">
-                <a:solidFill>
-                  <a:srgbClr val="FFFFFF"/>
-                </a:solidFill>
-              </a:rPr>
-              <a:t>▸ Environmental Assessment (EA)</a:t>
-            </a:r>
-          </a:p>
-          <a:p>
-            <a:pPr lvl="1">
-              <a:spcBef>
-                <a:spcPts val="200"/>
-              </a:spcBef>
-            </a:pPr>
-            <a:r>
-              <a:rPr sz="1300" b="0">
-                <a:solidFill>
-                  <a:srgbClr val="E5E7EB"/>
-                </a:solidFill>
-              </a:rPr>
-              <a:t>    · Screening-level review: does this project need a full EIS?</a:t>
-            </a:r>
-          </a:p>
-          <a:p>
-            <a:pPr lvl="1">
-              <a:spcBef>
-                <a:spcPts val="200"/>
-              </a:spcBef>
-            </a:pPr>
-            <a:r>
-              <a:rPr sz="1300" b="0">
-                <a:solidFill>
-                  <a:srgbClr val="E5E7EB"/>
-                </a:solidFill>
-              </a:rPr>
-              <a:t>    · Involves querying federal environmental databases</a:t>
-            </a:r>
-          </a:p>
-          <a:p>
-            <a:pPr lvl="1">
-              <a:spcBef>
-                <a:spcPts val="200"/>
-              </a:spcBef>
-            </a:pPr>
-            <a:r>
-              <a:rPr sz="1300" b="0">
-                <a:solidFill>
-                  <a:srgbClr val="E5E7EB"/>
-                </a:solidFill>
-              </a:rPr>
-              <a:t>    · Applies applicable federal and state regulations</a:t>
-            </a:r>
-          </a:p>
-          <a:p>
-            <a:pPr lvl="1">
-              <a:spcBef>
-                <a:spcPts val="200"/>
-              </a:spcBef>
-            </a:pPr>
-            <a:r>
-              <a:rPr sz="1300" b="0">
-                <a:solidFill>
-                  <a:srgbClr val="E5E7EB"/>
-                </a:solidFill>
-              </a:rPr>
-              <a:t>    · Produces written impact determinations by resource category</a:t>
-            </a:r>
-          </a:p>
-          <a:p>
-            <a:pPr>
-              <a:spcBef>
-                <a:spcPts val="400"/>
-              </a:spcBef>
-            </a:pPr>
-            <a:r>
-              <a:rPr sz="1500" b="1">
-                <a:solidFill>
-                  <a:srgbClr val="FFFFFF"/>
-                </a:solidFill>
-              </a:rPr>
-              <a:t>▸ Environmental Impact Statement (EIS)</a:t>
-            </a:r>
-          </a:p>
-          <a:p>
-            <a:pPr lvl="1">
-              <a:spcBef>
-                <a:spcPts val="200"/>
-              </a:spcBef>
-            </a:pPr>
-            <a:r>
-              <a:rPr sz="1300" b="0">
-                <a:solidFill>
-                  <a:srgbClr val="E5E7EB"/>
-                </a:solidFill>
-              </a:rPr>
-              <a:t>    · Full-scale analysis required when EA finds significant impacts</a:t>
-            </a:r>
-          </a:p>
-          <a:p>
-            <a:pPr lvl="1">
-              <a:spcBef>
-                <a:spcPts val="200"/>
-              </a:spcBef>
-            </a:pPr>
-            <a:r>
-              <a:rPr sz="1300" b="0">
-                <a:solidFill>
-                  <a:srgbClr val="E5E7EB"/>
-                </a:solidFill>
-              </a:rPr>
-              <a:t>    · Can take 2–5 years and cost millions of dollars</a:t>
-            </a:r>
-          </a:p>
-          <a:p>
-            <a:pPr lvl="1">
-              <a:spcBef>
-                <a:spcPts val="200"/>
-              </a:spcBef>
-            </a:pPr>
-            <a:r>
-              <a:rPr sz="1300" b="0">
-                <a:solidFill>
-                  <a:srgbClr val="E5E7EB"/>
-                </a:solidFill>
-              </a:rPr>
-              <a:t>    · Publicly available — used as ground truth in this project</a:t>
-            </a:r>
-          </a:p>
-        </p:txBody>
-      </p:sp>
-      <p:sp>
-        <p:nvSpPr>
-          <p:cNvPr id="8" name="TextBox 7"/>
-          <p:cNvSpPr txBox="1"/>
-          <p:nvPr/>
-        </p:nvSpPr>
-        <p:spPr>
-          <a:xfrm>
-            <a:off x="6492240" y="1508760"/>
-            <a:ext cx="5303520" cy="320040"/>
-          </a:xfrm>
-          <a:prstGeom prst="rect">
-            <a:avLst/>
-          </a:prstGeom>
-          <a:noFill/>
-        </p:spPr>
-        <p:txBody>
-          <a:bodyPr wrap="square">
-            <a:spAutoFit/>
-          </a:bodyPr>
-          <a:lstStyle/>
-          <a:p>
-            <a:pPr algn="l"/>
-            <a:r>
-              <a:rPr sz="1200" b="1" i="0">
-                <a:solidFill>
-                  <a:srgbClr val="F97316"/>
-                </a:solidFill>
-              </a:rPr>
-              <a:t>KEY FEDERAL DATA SOURCES</a:t>
-            </a:r>
-          </a:p>
-        </p:txBody>
-      </p:sp>
-      <p:sp>
-        <p:nvSpPr>
-          <p:cNvPr id="9" name="Rectangle 8"/>
-          <p:cNvSpPr/>
-          <p:nvPr/>
-        </p:nvSpPr>
-        <p:spPr>
-          <a:xfrm>
-            <a:off x="6492240" y="1920240"/>
-            <a:ext cx="5303520" cy="777240"/>
-          </a:xfrm>
-          <a:prstGeom prst="rect">
-            <a:avLst/>
-          </a:prstGeom>
-          <a:solidFill>
-            <a:srgbClr val="2D3748"/>
-          </a:solidFill>
-          <a:ln w="15240">
-            <a:solidFill>
-              <a:srgbClr val="EAB308"/>
-            </a:solidFill>
-          </a:ln>
-        </p:spPr>
-        <p:style>
-          <a:lnRef idx="1">
-            <a:schemeClr val="accent1"/>
-          </a:lnRef>
-          <a:fillRef idx="3">
-            <a:schemeClr val="accent1"/>
-          </a:fillRef>
-          <a:effectRef idx="2">
-            <a:schemeClr val="accent1"/>
-          </a:effectRef>
-          <a:fontRef idx="minor">
-            <a:schemeClr val="lt1"/>
-          </a:fontRef>
-        </p:style>
-        <p:txBody>
-          <a:bodyPr rtlCol="0" anchor="ctr"/>
-          <a:lstStyle/>
-          <a:p>
-            <a:pPr algn="ctr"/>
-          </a:p>
-        </p:txBody>
-      </p:sp>
-      <p:sp>
-        <p:nvSpPr>
-          <p:cNvPr id="10" name="TextBox 9"/>
-          <p:cNvSpPr txBox="1"/>
-          <p:nvPr/>
-        </p:nvSpPr>
-        <p:spPr>
-          <a:xfrm>
-            <a:off x="6629400" y="1975104"/>
-            <a:ext cx="5029200" cy="256032"/>
-          </a:xfrm>
-          <a:prstGeom prst="rect">
-            <a:avLst/>
-          </a:prstGeom>
-          <a:noFill/>
-        </p:spPr>
-        <p:txBody>
-          <a:bodyPr wrap="square">
-            <a:spAutoFit/>
-          </a:bodyPr>
-          <a:lstStyle/>
-          <a:p>
-            <a:pPr algn="l"/>
-            <a:r>
-              <a:rPr sz="1200" b="1" i="0">
-                <a:solidFill>
-                  <a:srgbClr val="EAB308"/>
-                </a:solidFill>
-              </a:rPr>
-              <a:t>USFWS IPaC</a:t>
-            </a:r>
-          </a:p>
-        </p:txBody>
-      </p:sp>
-      <p:sp>
-        <p:nvSpPr>
-          <p:cNvPr id="11" name="TextBox 10"/>
-          <p:cNvSpPr txBox="1"/>
-          <p:nvPr/>
-        </p:nvSpPr>
-        <p:spPr>
-          <a:xfrm>
-            <a:off x="6629400" y="2240280"/>
-            <a:ext cx="5029200" cy="365760"/>
-          </a:xfrm>
-          <a:prstGeom prst="rect">
-            <a:avLst/>
-          </a:prstGeom>
-          <a:noFill/>
-        </p:spPr>
-        <p:txBody>
-          <a:bodyPr wrap="square">
-            <a:spAutoFit/>
-          </a:bodyPr>
-          <a:lstStyle/>
-          <a:p>
-            <a:pPr algn="l"/>
-            <a:r>
-              <a:rPr sz="1100" b="0" i="0">
-                <a:solidFill>
-                  <a:srgbClr val="E5E7EB"/>
-                </a:solidFill>
-              </a:rPr>
-              <a:t>Threatened &amp; endangered species by location</a:t>
-            </a:r>
-          </a:p>
-        </p:txBody>
-      </p:sp>
-      <p:sp>
-        <p:nvSpPr>
-          <p:cNvPr id="12" name="Rectangle 11"/>
-          <p:cNvSpPr/>
-          <p:nvPr/>
-        </p:nvSpPr>
-        <p:spPr>
-          <a:xfrm>
-            <a:off x="6492240" y="2788920"/>
-            <a:ext cx="5303520" cy="777240"/>
-          </a:xfrm>
-          <a:prstGeom prst="rect">
-            <a:avLst/>
-          </a:prstGeom>
-          <a:solidFill>
-            <a:srgbClr val="2D3748"/>
-          </a:solidFill>
-          <a:ln w="15240">
-            <a:solidFill>
-              <a:srgbClr val="06B6D3"/>
-            </a:solidFill>
-          </a:ln>
-        </p:spPr>
-        <p:style>
-          <a:lnRef idx="1">
-            <a:schemeClr val="accent1"/>
-          </a:lnRef>
-          <a:fillRef idx="3">
-            <a:schemeClr val="accent1"/>
-          </a:fillRef>
-          <a:effectRef idx="2">
-            <a:schemeClr val="accent1"/>
-          </a:effectRef>
-          <a:fontRef idx="minor">
-            <a:schemeClr val="lt1"/>
-          </a:fontRef>
-        </p:style>
-        <p:txBody>
-          <a:bodyPr rtlCol="0" anchor="ctr"/>
-          <a:lstStyle/>
-          <a:p>
-            <a:pPr algn="ctr"/>
-          </a:p>
-        </p:txBody>
-      </p:sp>
-      <p:sp>
-        <p:nvSpPr>
-          <p:cNvPr id="13" name="TextBox 12"/>
-          <p:cNvSpPr txBox="1"/>
-          <p:nvPr/>
-        </p:nvSpPr>
-        <p:spPr>
-          <a:xfrm>
-            <a:off x="6629400" y="2843784"/>
-            <a:ext cx="5029200" cy="256032"/>
-          </a:xfrm>
-          <a:prstGeom prst="rect">
-            <a:avLst/>
-          </a:prstGeom>
-          <a:noFill/>
-        </p:spPr>
-        <p:txBody>
-          <a:bodyPr wrap="square">
-            <a:spAutoFit/>
-          </a:bodyPr>
-          <a:lstStyle/>
-          <a:p>
-            <a:pPr algn="l"/>
-            <a:r>
-              <a:rPr sz="1200" b="1" i="0">
-                <a:solidFill>
-                  <a:srgbClr val="06B6D3"/>
-                </a:solidFill>
-              </a:rPr>
-              <a:t>National Wetlands Inventory</a:t>
-            </a:r>
-          </a:p>
-        </p:txBody>
-      </p:sp>
-      <p:sp>
-        <p:nvSpPr>
-          <p:cNvPr id="14" name="TextBox 13"/>
-          <p:cNvSpPr txBox="1"/>
-          <p:nvPr/>
-        </p:nvSpPr>
-        <p:spPr>
-          <a:xfrm>
-            <a:off x="6629400" y="3108960"/>
-            <a:ext cx="5029200" cy="365760"/>
-          </a:xfrm>
-          <a:prstGeom prst="rect">
-            <a:avLst/>
-          </a:prstGeom>
-          <a:noFill/>
-        </p:spPr>
-        <p:txBody>
-          <a:bodyPr wrap="square">
-            <a:spAutoFit/>
-          </a:bodyPr>
-          <a:lstStyle/>
-          <a:p>
-            <a:pPr algn="l"/>
-            <a:r>
-              <a:rPr sz="1100" b="0" i="0">
-                <a:solidFill>
-                  <a:srgbClr val="E5E7EB"/>
-                </a:solidFill>
-              </a:rPr>
-              <a:t>Wetland presence, type, and acreage</a:t>
-            </a:r>
-          </a:p>
-        </p:txBody>
-      </p:sp>
-      <p:sp>
-        <p:nvSpPr>
-          <p:cNvPr id="15" name="Rectangle 14"/>
-          <p:cNvSpPr/>
-          <p:nvPr/>
-        </p:nvSpPr>
-        <p:spPr>
-          <a:xfrm>
-            <a:off x="6492240" y="3657600"/>
-            <a:ext cx="5303520" cy="777240"/>
-          </a:xfrm>
-          <a:prstGeom prst="rect">
-            <a:avLst/>
-          </a:prstGeom>
-          <a:solidFill>
-            <a:srgbClr val="2D3748"/>
-          </a:solidFill>
-          <a:ln w="15240">
-            <a:solidFill>
-              <a:srgbClr val="3B82F6"/>
-            </a:solidFill>
-          </a:ln>
-        </p:spPr>
-        <p:style>
-          <a:lnRef idx="1">
-            <a:schemeClr val="accent1"/>
-          </a:lnRef>
-          <a:fillRef idx="3">
-            <a:schemeClr val="accent1"/>
-          </a:fillRef>
-          <a:effectRef idx="2">
-            <a:schemeClr val="accent1"/>
-          </a:effectRef>
-          <a:fontRef idx="minor">
-            <a:schemeClr val="lt1"/>
-          </a:fontRef>
-        </p:style>
-        <p:txBody>
-          <a:bodyPr rtlCol="0" anchor="ctr"/>
-          <a:lstStyle/>
-          <a:p>
-            <a:pPr algn="ctr"/>
-          </a:p>
-        </p:txBody>
-      </p:sp>
-      <p:sp>
-        <p:nvSpPr>
-          <p:cNvPr id="16" name="TextBox 15"/>
-          <p:cNvSpPr txBox="1"/>
-          <p:nvPr/>
-        </p:nvSpPr>
-        <p:spPr>
-          <a:xfrm>
-            <a:off x="6629400" y="3712464"/>
-            <a:ext cx="5029200" cy="256032"/>
-          </a:xfrm>
-          <a:prstGeom prst="rect">
-            <a:avLst/>
-          </a:prstGeom>
-          <a:noFill/>
-        </p:spPr>
-        <p:txBody>
-          <a:bodyPr wrap="square">
-            <a:spAutoFit/>
-          </a:bodyPr>
-          <a:lstStyle/>
-          <a:p>
-            <a:pPr algn="l"/>
-            <a:r>
-              <a:rPr sz="1200" b="1" i="0">
-                <a:solidFill>
-                  <a:srgbClr val="3B82F6"/>
-                </a:solidFill>
-              </a:rPr>
-              <a:t>FEMA National Flood Hazard</a:t>
-            </a:r>
-          </a:p>
-        </p:txBody>
-      </p:sp>
-      <p:sp>
-        <p:nvSpPr>
-          <p:cNvPr id="17" name="TextBox 16"/>
-          <p:cNvSpPr txBox="1"/>
-          <p:nvPr/>
-        </p:nvSpPr>
-        <p:spPr>
-          <a:xfrm>
-            <a:off x="6629400" y="3977640"/>
-            <a:ext cx="5029200" cy="365760"/>
-          </a:xfrm>
-          <a:prstGeom prst="rect">
-            <a:avLst/>
-          </a:prstGeom>
-          <a:noFill/>
-        </p:spPr>
-        <p:txBody>
-          <a:bodyPr wrap="square">
-            <a:spAutoFit/>
-          </a:bodyPr>
-          <a:lstStyle/>
-          <a:p>
-            <a:pPr algn="l"/>
-            <a:r>
-              <a:rPr sz="1100" b="0" i="0">
-                <a:solidFill>
-                  <a:srgbClr val="E5E7EB"/>
-                </a:solidFill>
-              </a:rPr>
-              <a:t>100- and 500-year floodplain boundaries</a:t>
-            </a:r>
-          </a:p>
-        </p:txBody>
-      </p:sp>
-      <p:sp>
-        <p:nvSpPr>
-          <p:cNvPr id="18" name="Rectangle 17"/>
-          <p:cNvSpPr/>
-          <p:nvPr/>
-        </p:nvSpPr>
-        <p:spPr>
-          <a:xfrm>
-            <a:off x="6492240" y="4526280"/>
-            <a:ext cx="5303520" cy="777240"/>
-          </a:xfrm>
-          <a:prstGeom prst="rect">
-            <a:avLst/>
-          </a:prstGeom>
-          <a:solidFill>
-            <a:srgbClr val="2D3748"/>
-          </a:solidFill>
-          <a:ln w="15240">
-            <a:solidFill>
-              <a:srgbClr val="22C55E"/>
-            </a:solidFill>
-          </a:ln>
-        </p:spPr>
-        <p:style>
-          <a:lnRef idx="1">
-            <a:schemeClr val="accent1"/>
-          </a:lnRef>
-          <a:fillRef idx="3">
-            <a:schemeClr val="accent1"/>
-          </a:fillRef>
-          <a:effectRef idx="2">
-            <a:schemeClr val="accent1"/>
-          </a:effectRef>
-          <a:fontRef idx="minor">
-            <a:schemeClr val="lt1"/>
-          </a:fontRef>
-        </p:style>
-        <p:txBody>
-          <a:bodyPr rtlCol="0" anchor="ctr"/>
-          <a:lstStyle/>
-          <a:p>
-            <a:pPr algn="ctr"/>
-          </a:p>
-        </p:txBody>
-      </p:sp>
-      <p:sp>
-        <p:nvSpPr>
-          <p:cNvPr id="19" name="TextBox 18"/>
-          <p:cNvSpPr txBox="1"/>
-          <p:nvPr/>
-        </p:nvSpPr>
-        <p:spPr>
-          <a:xfrm>
-            <a:off x="6629400" y="4581144"/>
-            <a:ext cx="5029200" cy="256032"/>
-          </a:xfrm>
-          <a:prstGeom prst="rect">
-            <a:avLst/>
-          </a:prstGeom>
-          <a:noFill/>
-        </p:spPr>
-        <p:txBody>
-          <a:bodyPr wrap="square">
-            <a:spAutoFit/>
-          </a:bodyPr>
-          <a:lstStyle/>
-          <a:p>
-            <a:pPr algn="l"/>
-            <a:r>
-              <a:rPr sz="1200" b="1" i="0">
-                <a:solidFill>
-                  <a:srgbClr val="22C55E"/>
-                </a:solidFill>
-              </a:rPr>
-              <a:t>USDA Farmland Layer</a:t>
-            </a:r>
-          </a:p>
-        </p:txBody>
-      </p:sp>
-      <p:sp>
-        <p:nvSpPr>
-          <p:cNvPr id="20" name="TextBox 19"/>
-          <p:cNvSpPr txBox="1"/>
-          <p:nvPr/>
-        </p:nvSpPr>
-        <p:spPr>
-          <a:xfrm>
-            <a:off x="6629400" y="4846320"/>
-            <a:ext cx="5029200" cy="365760"/>
-          </a:xfrm>
-          <a:prstGeom prst="rect">
-            <a:avLst/>
-          </a:prstGeom>
-          <a:noFill/>
-        </p:spPr>
-        <p:txBody>
-          <a:bodyPr wrap="square">
-            <a:spAutoFit/>
-          </a:bodyPr>
-          <a:lstStyle/>
-          <a:p>
-            <a:pPr algn="l"/>
-            <a:r>
-              <a:rPr sz="1100" b="0" i="0">
-                <a:solidFill>
-                  <a:srgbClr val="E5E7EB"/>
-                </a:solidFill>
-              </a:rPr>
-              <a:t>Prime and unique farmland parcels</a:t>
-            </a:r>
-          </a:p>
-        </p:txBody>
-      </p:sp>
-      <p:sp>
-        <p:nvSpPr>
-          <p:cNvPr id="21" name="Rectangle 20"/>
-          <p:cNvSpPr/>
-          <p:nvPr/>
-        </p:nvSpPr>
-        <p:spPr>
-          <a:xfrm>
-            <a:off x="6492240" y="5394960"/>
-            <a:ext cx="5303520" cy="777240"/>
-          </a:xfrm>
-          <a:prstGeom prst="rect">
-            <a:avLst/>
-          </a:prstGeom>
-          <a:solidFill>
-            <a:srgbClr val="2D3748"/>
-          </a:solidFill>
-          <a:ln w="15240">
-            <a:solidFill>
-              <a:srgbClr val="F97316"/>
-            </a:solidFill>
-          </a:ln>
-        </p:spPr>
-        <p:style>
-          <a:lnRef idx="1">
-            <a:schemeClr val="accent1"/>
-          </a:lnRef>
-          <a:fillRef idx="3">
-            <a:schemeClr val="accent1"/>
-          </a:fillRef>
-          <a:effectRef idx="2">
-            <a:schemeClr val="accent1"/>
-          </a:effectRef>
-          <a:fontRef idx="minor">
-            <a:schemeClr val="lt1"/>
-          </a:fontRef>
-        </p:style>
-        <p:txBody>
-          <a:bodyPr rtlCol="0" anchor="ctr"/>
-          <a:lstStyle/>
-          <a:p>
-            <a:pPr algn="ctr"/>
-          </a:p>
-        </p:txBody>
-      </p:sp>
-      <p:sp>
-        <p:nvSpPr>
-          <p:cNvPr id="22" name="TextBox 21"/>
-          <p:cNvSpPr txBox="1"/>
-          <p:nvPr/>
-        </p:nvSpPr>
-        <p:spPr>
-          <a:xfrm>
-            <a:off x="6629400" y="5449824"/>
-            <a:ext cx="5029200" cy="256032"/>
-          </a:xfrm>
-          <a:prstGeom prst="rect">
-            <a:avLst/>
-          </a:prstGeom>
-          <a:noFill/>
-        </p:spPr>
-        <p:txBody>
-          <a:bodyPr wrap="square">
-            <a:spAutoFit/>
-          </a:bodyPr>
-          <a:lstStyle/>
-          <a:p>
-            <a:pPr algn="l"/>
-            <a:r>
-              <a:rPr sz="1200" b="1" i="0">
-                <a:solidFill>
-                  <a:srgbClr val="F97316"/>
-                </a:solidFill>
-              </a:rPr>
-              <a:t>EPA EJScreen</a:t>
-            </a:r>
-          </a:p>
-        </p:txBody>
-      </p:sp>
-      <p:sp>
-        <p:nvSpPr>
-          <p:cNvPr id="23" name="TextBox 22"/>
-          <p:cNvSpPr txBox="1"/>
-          <p:nvPr/>
-        </p:nvSpPr>
-        <p:spPr>
-          <a:xfrm>
-            <a:off x="6629400" y="5715000"/>
-            <a:ext cx="5029200" cy="365760"/>
-          </a:xfrm>
-          <a:prstGeom prst="rect">
-            <a:avLst/>
-          </a:prstGeom>
-          <a:noFill/>
-        </p:spPr>
-        <p:txBody>
-          <a:bodyPr wrap="square">
-            <a:spAutoFit/>
-          </a:bodyPr>
-          <a:lstStyle/>
-          <a:p>
-            <a:pPr algn="l"/>
-            <a:r>
-              <a:rPr sz="1100" b="0" i="0">
-                <a:solidFill>
-                  <a:srgbClr val="E5E7EB"/>
-                </a:solidFill>
-              </a:rPr>
-              <a:t>Environmental justice + demographic indicators</a:t>
-            </a:r>
-          </a:p>
-        </p:txBody>
-      </p:sp>
-    </p:spTree>
-  </p:cSld>
-  <p:clrMapOvr>
-    <a:masterClrMapping/>
-  </p:clrMapOvr>
-</p:sld>
-</file>
-
-<file path=ppt/slides/slide3.xml><?xml version="1.0" encoding="utf-8"?>
-<p:sld xmlns:a="http://schemas.openxmlformats.org/drawingml/2006/main" xmlns:p="http://schemas.openxmlformats.org/presentationml/2006/main" xmlns:r="http://schemas.openxmlformats.org/officeDocument/2006/relationships">
-  <p:cSld>
-    <p:bg>
-      <p:bgPr>
-        <a:solidFill>
-          <a:srgbClr val="1F2833"/>
-        </a:solidFill>
-        <a:effectLst/>
-      </p:bgPr>
-    </p:bg>
-    <p:spTree>
-      <p:nvGrpSpPr>
-        <p:cNvPr id="1" name=""/>
-        <p:cNvGrpSpPr/>
-        <p:nvPr/>
-      </p:nvGrpSpPr>
-      <p:grpSpPr/>
-      <p:sp>
-        <p:nvSpPr>
-          <p:cNvPr id="2" name="Text Placeholder 1"/>
-          <p:cNvSpPr>
-            <a:spLocks noGrp="1"/>
-          </p:cNvSpPr>
-          <p:nvPr>
-            <p:ph type="body" idx="10" sz="quarter"/>
-          </p:nvPr>
-        </p:nvSpPr>
-        <p:spPr/>
-        <p:txBody>
-          <a:bodyPr/>
-          <a:lstStyle/>
-          <a:p/>
-        </p:txBody>
-      </p:sp>
-      <p:sp>
-        <p:nvSpPr>
-          <p:cNvPr id="3" name="Rectangle 2"/>
-          <p:cNvSpPr/>
-          <p:nvPr/>
-        </p:nvSpPr>
-        <p:spPr>
-          <a:xfrm>
-            <a:off x="0" y="0"/>
-            <a:ext cx="12188952" cy="73152"/>
-          </a:xfrm>
-          <a:prstGeom prst="rect">
-            <a:avLst/>
-          </a:prstGeom>
-          <a:solidFill>
-            <a:srgbClr val="F97316"/>
-          </a:solidFill>
-        </p:spPr>
-        <p:style>
-          <a:lnRef idx="1">
-            <a:schemeClr val="accent1"/>
-          </a:lnRef>
-          <a:fillRef idx="3">
-            <a:schemeClr val="accent1"/>
-          </a:fillRef>
-          <a:effectRef idx="2">
-            <a:schemeClr val="accent1"/>
-          </a:effectRef>
-          <a:fontRef idx="minor">
-            <a:schemeClr val="lt1"/>
-          </a:fontRef>
-        </p:style>
-        <p:txBody>
-          <a:bodyPr rtlCol="0" anchor="ctr"/>
-          <a:lstStyle/>
-          <a:p>
-            <a:pPr algn="ctr"/>
-          </a:p>
-        </p:txBody>
-      </p:sp>
-      <p:sp>
-        <p:nvSpPr>
-          <p:cNvPr id="4" name="TextBox 3"/>
-          <p:cNvSpPr txBox="1"/>
-          <p:nvPr/>
-        </p:nvSpPr>
-        <p:spPr>
-          <a:xfrm>
-            <a:off x="548640" y="164592"/>
-            <a:ext cx="11430000" cy="685800"/>
-          </a:xfrm>
-          <a:prstGeom prst="rect">
-            <a:avLst/>
-          </a:prstGeom>
-          <a:noFill/>
-        </p:spPr>
-        <p:txBody>
-          <a:bodyPr wrap="square">
-            <a:spAutoFit/>
-          </a:bodyPr>
-          <a:lstStyle/>
-          <a:p>
-            <a:pPr algn="l"/>
-            <a:r>
-              <a:rPr sz="2800" b="1" i="0">
-                <a:solidFill>
-                  <a:srgbClr val="F97316"/>
-                </a:solidFill>
-              </a:rPr>
-              <a:t>Problem Statement</a:t>
-            </a:r>
-          </a:p>
-        </p:txBody>
-      </p:sp>
-      <p:sp>
-        <p:nvSpPr>
-          <p:cNvPr id="5" name="Rectangle 4"/>
-          <p:cNvSpPr/>
-          <p:nvPr/>
-        </p:nvSpPr>
-        <p:spPr>
-          <a:xfrm>
-            <a:off x="548640" y="914400"/>
-            <a:ext cx="11064240" cy="18288"/>
-          </a:xfrm>
-          <a:prstGeom prst="rect">
-            <a:avLst/>
-          </a:prstGeom>
-          <a:solidFill>
-            <a:srgbClr val="3D4A5C"/>
-          </a:solidFill>
-        </p:spPr>
-        <p:style>
-          <a:lnRef idx="1">
-            <a:schemeClr val="accent1"/>
-          </a:lnRef>
-          <a:fillRef idx="3">
-            <a:schemeClr val="accent1"/>
-          </a:fillRef>
-          <a:effectRef idx="2">
-            <a:schemeClr val="accent1"/>
-          </a:effectRef>
-          <a:fontRef idx="minor">
-            <a:schemeClr val="lt1"/>
-          </a:fontRef>
-        </p:style>
-        <p:txBody>
-          <a:bodyPr rtlCol="0" anchor="ctr"/>
-          <a:lstStyle/>
-          <a:p>
-            <a:pPr algn="ctr"/>
-          </a:p>
-        </p:txBody>
-      </p:sp>
-      <p:sp>
-        <p:nvSpPr>
-          <p:cNvPr id="6" name="TextBox 5"/>
-          <p:cNvSpPr txBox="1"/>
-          <p:nvPr/>
-        </p:nvSpPr>
-        <p:spPr>
-          <a:xfrm>
-            <a:off x="548640" y="1051560"/>
-            <a:ext cx="11064240" cy="5577840"/>
-          </a:xfrm>
-          <a:prstGeom prst="rect">
-            <a:avLst/>
-          </a:prstGeom>
-          <a:noFill/>
-        </p:spPr>
-        <p:txBody>
-          <a:bodyPr wrap="square">
-            <a:spAutoFit/>
-          </a:bodyPr>
-          <a:lstStyle/>
-          <a:p>
-            <a:pPr>
-              <a:spcBef>
-                <a:spcPts val="500"/>
-              </a:spcBef>
-            </a:pPr>
-            <a:r>
-              <a:rPr sz="1700" b="1">
-                <a:solidFill>
-                  <a:srgbClr val="FFFFFF"/>
-                </a:solidFill>
-              </a:rPr>
-              <a:t>▸ Environmental reviews are a bottleneck for infrastructure</a:t>
-            </a:r>
-          </a:p>
-          <a:p>
-            <a:pPr lvl="1">
-              <a:spcBef>
-                <a:spcPts val="200"/>
-              </a:spcBef>
-            </a:pPr>
-            <a:r>
-              <a:rPr sz="1400" b="0">
-                <a:solidFill>
-                  <a:srgbClr val="E5E7EB"/>
-                </a:solidFill>
-              </a:rPr>
-              <a:t>    · NEPA EA requires querying 5+ federal databases per project</a:t>
-            </a:r>
-          </a:p>
-          <a:p>
-            <a:pPr lvl="1">
-              <a:spcBef>
-                <a:spcPts val="200"/>
-              </a:spcBef>
-            </a:pPr>
-            <a:r>
-              <a:rPr sz="1400" b="0">
-                <a:solidFill>
-                  <a:srgbClr val="E5E7EB"/>
-                </a:solidFill>
-              </a:rPr>
-              <a:t>    · Analysts must screen hundreds of regulations for applicability</a:t>
-            </a:r>
-          </a:p>
-          <a:p>
-            <a:pPr lvl="1">
-              <a:spcBef>
-                <a:spcPts val="200"/>
-              </a:spcBef>
-            </a:pPr>
-            <a:r>
-              <a:rPr sz="1400" b="0">
-                <a:solidFill>
-                  <a:srgbClr val="E5E7EB"/>
-                </a:solidFill>
-              </a:rPr>
-              <a:t>    · Writing impact determinations with citations takes weeks of expert time</a:t>
-            </a:r>
-          </a:p>
-          <a:p>
-            <a:pPr>
-              <a:spcBef>
-                <a:spcPts val="500"/>
-              </a:spcBef>
-            </a:pPr>
-            <a:r>
-              <a:rPr sz="1700" b="1">
-                <a:solidFill>
-                  <a:srgbClr val="FFFFFF"/>
-                </a:solidFill>
-              </a:rPr>
-              <a:t>▸ </a:t>
-            </a:r>
-          </a:p>
-          <a:p>
-            <a:pPr>
-              <a:spcBef>
-                <a:spcPts val="500"/>
-              </a:spcBef>
-            </a:pPr>
-            <a:r>
-              <a:rPr sz="1700" b="1">
-                <a:solidFill>
-                  <a:srgbClr val="FFFFFF"/>
-                </a:solidFill>
-              </a:rPr>
-              <a:t>▸ Existing tools don't explain their reasoning</a:t>
-            </a:r>
-          </a:p>
-          <a:p>
-            <a:pPr lvl="1">
-              <a:spcBef>
-                <a:spcPts val="200"/>
-              </a:spcBef>
-            </a:pPr>
-            <a:r>
-              <a:rPr sz="1400" b="0">
-                <a:solidFill>
-                  <a:srgbClr val="E5E7EB"/>
-                </a:solidFill>
-              </a:rPr>
-              <a:t>    · Black-box outputs cannot be used in regulatory proceedings</a:t>
-            </a:r>
-          </a:p>
-          <a:p>
-            <a:pPr lvl="1">
-              <a:spcBef>
-                <a:spcPts val="200"/>
-              </a:spcBef>
-            </a:pPr>
-            <a:r>
-              <a:rPr sz="1400" b="0">
-                <a:solidFill>
-                  <a:srgbClr val="E5E7EB"/>
-                </a:solidFill>
-              </a:rPr>
-              <a:t>    · Agencies require traceable citations and data-backed determinations</a:t>
-            </a:r>
-          </a:p>
-          <a:p>
-            <a:pPr lvl="1">
-              <a:spcBef>
-                <a:spcPts val="200"/>
-              </a:spcBef>
-            </a:pPr>
-            <a:r>
-              <a:rPr sz="1400" b="0">
-                <a:solidFill>
-                  <a:srgbClr val="E5E7EB"/>
-                </a:solidFill>
-              </a:rPr>
-              <a:t>    · Reviewing agencies need to audit how each conclusion was reached</a:t>
-            </a:r>
-          </a:p>
-          <a:p>
-            <a:pPr>
-              <a:spcBef>
-                <a:spcPts val="500"/>
-              </a:spcBef>
-            </a:pPr>
-            <a:r>
-              <a:rPr sz="1700" b="1">
-                <a:solidFill>
-                  <a:srgbClr val="FFFFFF"/>
-                </a:solidFill>
-              </a:rPr>
-              <a:t>▸ </a:t>
-            </a:r>
-          </a:p>
-          <a:p>
-            <a:pPr>
-              <a:spcBef>
-                <a:spcPts val="500"/>
-              </a:spcBef>
-            </a:pPr>
-            <a:r>
-              <a:rPr sz="1700" b="1">
-                <a:solidFill>
-                  <a:srgbClr val="FFFFFF"/>
-                </a:solidFill>
-              </a:rPr>
-              <a:t>▸ There is no objective quality metric for AI-generated EIA outputs</a:t>
-            </a:r>
-          </a:p>
-          <a:p>
-            <a:pPr lvl="1">
-              <a:spcBef>
-                <a:spcPts val="200"/>
-              </a:spcBef>
-            </a:pPr>
-            <a:r>
-              <a:rPr sz="1400" b="0">
-                <a:solidFill>
-                  <a:srgbClr val="E5E7EB"/>
-                </a:solidFill>
-              </a:rPr>
-              <a:t>    · How do we know if the agent identified the right impacts?</a:t>
-            </a:r>
-          </a:p>
-          <a:p>
-            <a:pPr lvl="1">
-              <a:spcBef>
-                <a:spcPts val="200"/>
-              </a:spcBef>
-            </a:pPr>
-            <a:r>
-              <a:rPr sz="1400" b="0">
-                <a:solidFill>
-                  <a:srgbClr val="E5E7EB"/>
-                </a:solidFill>
-              </a:rPr>
-              <a:t>    · No existing benchmark — real EIS documents must serve as ground truth</a:t>
-            </a:r>
-          </a:p>
-          <a:p>
-            <a:pPr>
-              <a:spcBef>
-                <a:spcPts val="500"/>
-              </a:spcBef>
-            </a:pPr>
-            <a:r>
-              <a:rPr sz="1700" b="1">
-                <a:solidFill>
-                  <a:srgbClr val="FFFFFF"/>
-                </a:solidFill>
-              </a:rPr>
-              <a:t>▸ </a:t>
-            </a:r>
-          </a:p>
-          <a:p>
-            <a:pPr>
-              <a:spcBef>
-                <a:spcPts val="500"/>
-              </a:spcBef>
-            </a:pPr>
-            <a:r>
-              <a:rPr sz="1700" b="1">
-                <a:solidFill>
-                  <a:srgbClr val="F97316"/>
-                </a:solidFill>
-              </a:rPr>
-              <a:t>▸ Goal: automate EIA screening with explainable, confidence-aware AI</a:t>
-            </a:r>
-          </a:p>
-          <a:p>
-            <a:pPr lvl="1">
-              <a:spcBef>
-                <a:spcPts val="200"/>
-              </a:spcBef>
-            </a:pPr>
-            <a:r>
-              <a:rPr sz="1400" b="0">
-                <a:solidFill>
-                  <a:srgbClr val="E5E7EB"/>
-                </a:solidFill>
-              </a:rPr>
-              <a:t>    · Reduce time from weeks to minutes; preserve full regulatory traceability</a:t>
-            </a:r>
-          </a:p>
-          <a:p>
-            <a:pPr lvl="1">
-              <a:spcBef>
-                <a:spcPts val="200"/>
-              </a:spcBef>
-            </a:pPr>
-            <a:r>
-              <a:rPr sz="1400" b="0">
-                <a:solidFill>
-                  <a:srgbClr val="E5E7EB"/>
-                </a:solidFill>
-              </a:rPr>
-              <a:t>    · Flag low-confidence cells for human review — keep experts in the loop</a:t>
-            </a:r>
-          </a:p>
-          <a:p>
-            <a:pPr lvl="1">
-              <a:spcBef>
-                <a:spcPts val="200"/>
-              </a:spcBef>
-            </a:pPr>
-            <a:r>
-              <a:rPr sz="1400" b="0">
-                <a:solidFill>
-                  <a:srgbClr val="E5E7EB"/>
-                </a:solidFill>
-              </a:rPr>
-              <a:t>    · Evaluate agent quality against real EIS documents quantitatively</a:t>
-            </a:r>
-          </a:p>
-        </p:txBody>
-      </p:sp>
-    </p:spTree>
-  </p:cSld>
-  <p:clrMapOvr>
-    <a:masterClrMapping/>
-  </p:clrMapOvr>
-</p:sld>
-</file>
-
 <file path=ppt/slides/slide3.xml><?xml version="1.0" encoding="utf-8"?>
 <p:sld xmlns:a="http://schemas.openxmlformats.org/drawingml/2006/main" xmlns:p="http://schemas.openxmlformats.org/presentationml/2006/main" xmlns:r="http://schemas.openxmlformats.org/officeDocument/2006/relationships">
   <p:cSld>
@@ -15890,2136 +13583,6 @@
 </p:sld>
 </file>
 
-<file path=ppt/slides/slide4.xml><?xml version="1.0" encoding="utf-8"?>
-<p:sld xmlns:a="http://schemas.openxmlformats.org/drawingml/2006/main" xmlns:p="http://schemas.openxmlformats.org/presentationml/2006/main" xmlns:r="http://schemas.openxmlformats.org/officeDocument/2006/relationships">
-  <p:cSld>
-    <p:bg>
-      <p:bgPr>
-        <a:solidFill>
-          <a:srgbClr val="1F2833"/>
-        </a:solidFill>
-        <a:effectLst/>
-      </p:bgPr>
-    </p:bg>
-    <p:spTree>
-      <p:nvGrpSpPr>
-        <p:cNvPr id="1" name=""/>
-        <p:cNvGrpSpPr/>
-        <p:nvPr/>
-      </p:nvGrpSpPr>
-      <p:grpSpPr/>
-      <p:sp>
-        <p:nvSpPr>
-          <p:cNvPr id="2" name="Text Placeholder 1"/>
-          <p:cNvSpPr>
-            <a:spLocks noGrp="1"/>
-          </p:cNvSpPr>
-          <p:nvPr>
-            <p:ph type="body" idx="10" sz="quarter"/>
-          </p:nvPr>
-        </p:nvSpPr>
-        <p:spPr/>
-        <p:txBody>
-          <a:bodyPr/>
-          <a:lstStyle/>
-          <a:p/>
-        </p:txBody>
-      </p:sp>
-      <p:sp>
-        <p:nvSpPr>
-          <p:cNvPr id="3" name="Rectangle 2"/>
-          <p:cNvSpPr/>
-          <p:nvPr/>
-        </p:nvSpPr>
-        <p:spPr>
-          <a:xfrm>
-            <a:off x="0" y="0"/>
-            <a:ext cx="12188952" cy="73152"/>
-          </a:xfrm>
-          <a:prstGeom prst="rect">
-            <a:avLst/>
-          </a:prstGeom>
-          <a:solidFill>
-            <a:srgbClr val="F97316"/>
-          </a:solidFill>
-        </p:spPr>
-        <p:style>
-          <a:lnRef idx="1">
-            <a:schemeClr val="accent1"/>
-          </a:lnRef>
-          <a:fillRef idx="3">
-            <a:schemeClr val="accent1"/>
-          </a:fillRef>
-          <a:effectRef idx="2">
-            <a:schemeClr val="accent1"/>
-          </a:effectRef>
-          <a:fontRef idx="minor">
-            <a:schemeClr val="lt1"/>
-          </a:fontRef>
-        </p:style>
-        <p:txBody>
-          <a:bodyPr rtlCol="0" anchor="ctr"/>
-          <a:lstStyle/>
-          <a:p>
-            <a:pPr algn="ctr"/>
-          </a:p>
-        </p:txBody>
-      </p:sp>
-      <p:sp>
-        <p:nvSpPr>
-          <p:cNvPr id="4" name="TextBox 3"/>
-          <p:cNvSpPr txBox="1"/>
-          <p:nvPr/>
-        </p:nvSpPr>
-        <p:spPr>
-          <a:xfrm>
-            <a:off x="548640" y="164592"/>
-            <a:ext cx="11430000" cy="685800"/>
-          </a:xfrm>
-          <a:prstGeom prst="rect">
-            <a:avLst/>
-          </a:prstGeom>
-          <a:noFill/>
-        </p:spPr>
-        <p:txBody>
-          <a:bodyPr wrap="square">
-            <a:spAutoFit/>
-          </a:bodyPr>
-          <a:lstStyle/>
-          <a:p>
-            <a:pPr algn="l"/>
-            <a:r>
-              <a:rPr sz="2800" b="1" i="0">
-                <a:solidFill>
-                  <a:srgbClr val="F97316"/>
-                </a:solidFill>
-              </a:rPr>
-              <a:t>Methodology — System Architecture</a:t>
-            </a:r>
-          </a:p>
-        </p:txBody>
-      </p:sp>
-      <p:sp>
-        <p:nvSpPr>
-          <p:cNvPr id="5" name="Rectangle 4"/>
-          <p:cNvSpPr/>
-          <p:nvPr/>
-        </p:nvSpPr>
-        <p:spPr>
-          <a:xfrm>
-            <a:off x="548640" y="914400"/>
-            <a:ext cx="11064240" cy="18288"/>
-          </a:xfrm>
-          <a:prstGeom prst="rect">
-            <a:avLst/>
-          </a:prstGeom>
-          <a:solidFill>
-            <a:srgbClr val="3D4A5C"/>
-          </a:solidFill>
-        </p:spPr>
-        <p:style>
-          <a:lnRef idx="1">
-            <a:schemeClr val="accent1"/>
-          </a:lnRef>
-          <a:fillRef idx="3">
-            <a:schemeClr val="accent1"/>
-          </a:fillRef>
-          <a:effectRef idx="2">
-            <a:schemeClr val="accent1"/>
-          </a:effectRef>
-          <a:fontRef idx="minor">
-            <a:schemeClr val="lt1"/>
-          </a:fontRef>
-        </p:style>
-        <p:txBody>
-          <a:bodyPr rtlCol="0" anchor="ctr"/>
-          <a:lstStyle/>
-          <a:p>
-            <a:pPr algn="ctr"/>
-          </a:p>
-        </p:txBody>
-      </p:sp>
-      <p:sp>
-        <p:nvSpPr>
-          <p:cNvPr id="6" name="TextBox 5"/>
-          <p:cNvSpPr txBox="1"/>
-          <p:nvPr/>
-        </p:nvSpPr>
-        <p:spPr>
-          <a:xfrm>
-            <a:off x="548640" y="1005840"/>
-            <a:ext cx="11064240" cy="548640"/>
-          </a:xfrm>
-          <a:prstGeom prst="rect">
-            <a:avLst/>
-          </a:prstGeom>
-          <a:noFill/>
-        </p:spPr>
-        <p:txBody>
-          <a:bodyPr wrap="square">
-            <a:spAutoFit/>
-          </a:bodyPr>
-          <a:lstStyle/>
-          <a:p>
-            <a:pPr algn="l"/>
-            <a:r>
-              <a:rPr sz="1300" b="0" i="0">
-                <a:solidFill>
-                  <a:srgbClr val="E5E7EB"/>
-                </a:solidFill>
-              </a:rPr>
-              <a:t>A LangGraph sequential pipeline orchestrates 5 specialized agents, each with typed inputs/outputs, streamed in real-time to a React frontend via Server-Sent Events.</a:t>
-            </a:r>
-          </a:p>
-        </p:txBody>
-      </p:sp>
-      <p:sp>
-        <p:nvSpPr>
-          <p:cNvPr id="7" name="Rectangle 6"/>
-          <p:cNvSpPr/>
-          <p:nvPr/>
-        </p:nvSpPr>
-        <p:spPr>
-          <a:xfrm>
-            <a:off x="457200" y="1691640"/>
-            <a:ext cx="2029968" cy="1371600"/>
-          </a:xfrm>
-          <a:prstGeom prst="rect">
-            <a:avLst/>
-          </a:prstGeom>
-          <a:solidFill>
-            <a:srgbClr val="2D3748"/>
-          </a:solidFill>
-          <a:ln w="25400">
-            <a:solidFill>
-              <a:srgbClr val="3B82F6"/>
-            </a:solidFill>
-          </a:ln>
-        </p:spPr>
-        <p:style>
-          <a:lnRef idx="1">
-            <a:schemeClr val="accent1"/>
-          </a:lnRef>
-          <a:fillRef idx="3">
-            <a:schemeClr val="accent1"/>
-          </a:fillRef>
-          <a:effectRef idx="2">
-            <a:schemeClr val="accent1"/>
-          </a:effectRef>
-          <a:fontRef idx="minor">
-            <a:schemeClr val="lt1"/>
-          </a:fontRef>
-        </p:style>
-        <p:txBody>
-          <a:bodyPr rtlCol="0" anchor="ctr"/>
-          <a:lstStyle/>
-          <a:p>
-            <a:pPr algn="ctr"/>
-          </a:p>
-        </p:txBody>
-      </p:sp>
-      <p:sp>
-        <p:nvSpPr>
-          <p:cNvPr id="8" name="Rectangle 7"/>
-          <p:cNvSpPr/>
-          <p:nvPr/>
-        </p:nvSpPr>
-        <p:spPr>
-          <a:xfrm>
-            <a:off x="457200" y="1691640"/>
-            <a:ext cx="2029968" cy="411480"/>
-          </a:xfrm>
-          <a:prstGeom prst="rect">
-            <a:avLst/>
-          </a:prstGeom>
-          <a:solidFill>
-            <a:srgbClr val="3B82F6"/>
-          </a:solidFill>
-        </p:spPr>
-        <p:style>
-          <a:lnRef idx="1">
-            <a:schemeClr val="accent1"/>
-          </a:lnRef>
-          <a:fillRef idx="3">
-            <a:schemeClr val="accent1"/>
-          </a:fillRef>
-          <a:effectRef idx="2">
-            <a:schemeClr val="accent1"/>
-          </a:effectRef>
-          <a:fontRef idx="minor">
-            <a:schemeClr val="lt1"/>
-          </a:fontRef>
-        </p:style>
-        <p:txBody>
-          <a:bodyPr rtlCol="0" anchor="ctr"/>
-          <a:lstStyle/>
-          <a:p>
-            <a:pPr algn="ctr"/>
-          </a:p>
-        </p:txBody>
-      </p:sp>
-      <p:sp>
-        <p:nvSpPr>
-          <p:cNvPr id="9" name="TextBox 8"/>
-          <p:cNvSpPr txBox="1"/>
-          <p:nvPr/>
-        </p:nvSpPr>
-        <p:spPr>
-          <a:xfrm>
-            <a:off x="548640" y="1737360"/>
-            <a:ext cx="1847088" cy="822960"/>
-          </a:xfrm>
-          <a:prstGeom prst="rect">
-            <a:avLst/>
-          </a:prstGeom>
-          <a:noFill/>
-        </p:spPr>
-        <p:txBody>
-          <a:bodyPr wrap="square">
-            <a:spAutoFit/>
-          </a:bodyPr>
-          <a:lstStyle/>
-          <a:p>
-            <a:pPr algn="l"/>
-            <a:r>
-              <a:rPr sz="1000" b="1" i="0">
-                <a:solidFill>
-                  <a:srgbClr val="FFFFFF"/>
-                </a:solidFill>
-              </a:rPr>
-              <a:t>1  PROJECT
-PARSER</a:t>
-            </a:r>
-          </a:p>
-        </p:txBody>
-      </p:sp>
-      <p:sp>
-        <p:nvSpPr>
-          <p:cNvPr id="10" name="Rectangle 9"/>
-          <p:cNvSpPr/>
-          <p:nvPr/>
-        </p:nvSpPr>
-        <p:spPr>
-          <a:xfrm>
-            <a:off x="2688336" y="1691640"/>
-            <a:ext cx="2029968" cy="1371600"/>
-          </a:xfrm>
-          <a:prstGeom prst="rect">
-            <a:avLst/>
-          </a:prstGeom>
-          <a:solidFill>
-            <a:srgbClr val="2D3748"/>
-          </a:solidFill>
-          <a:ln w="25400">
-            <a:solidFill>
-              <a:srgbClr val="06B6D3"/>
-            </a:solidFill>
-          </a:ln>
-        </p:spPr>
-        <p:style>
-          <a:lnRef idx="1">
-            <a:schemeClr val="accent1"/>
-          </a:lnRef>
-          <a:fillRef idx="3">
-            <a:schemeClr val="accent1"/>
-          </a:fillRef>
-          <a:effectRef idx="2">
-            <a:schemeClr val="accent1"/>
-          </a:effectRef>
-          <a:fontRef idx="minor">
-            <a:schemeClr val="lt1"/>
-          </a:fontRef>
-        </p:style>
-        <p:txBody>
-          <a:bodyPr rtlCol="0" anchor="ctr"/>
-          <a:lstStyle/>
-          <a:p>
-            <a:pPr algn="ctr"/>
-          </a:p>
-        </p:txBody>
-      </p:sp>
-      <p:sp>
-        <p:nvSpPr>
-          <p:cNvPr id="11" name="Rectangle 10"/>
-          <p:cNvSpPr/>
-          <p:nvPr/>
-        </p:nvSpPr>
-        <p:spPr>
-          <a:xfrm>
-            <a:off x="2688336" y="1691640"/>
-            <a:ext cx="2029968" cy="411480"/>
-          </a:xfrm>
-          <a:prstGeom prst="rect">
-            <a:avLst/>
-          </a:prstGeom>
-          <a:solidFill>
-            <a:srgbClr val="06B6D3"/>
-          </a:solidFill>
-        </p:spPr>
-        <p:style>
-          <a:lnRef idx="1">
-            <a:schemeClr val="accent1"/>
-          </a:lnRef>
-          <a:fillRef idx="3">
-            <a:schemeClr val="accent1"/>
-          </a:fillRef>
-          <a:effectRef idx="2">
-            <a:schemeClr val="accent1"/>
-          </a:effectRef>
-          <a:fontRef idx="minor">
-            <a:schemeClr val="lt1"/>
-          </a:fontRef>
-        </p:style>
-        <p:txBody>
-          <a:bodyPr rtlCol="0" anchor="ctr"/>
-          <a:lstStyle/>
-          <a:p>
-            <a:pPr algn="ctr"/>
-          </a:p>
-        </p:txBody>
-      </p:sp>
-      <p:sp>
-        <p:nvSpPr>
-          <p:cNvPr id="12" name="TextBox 11"/>
-          <p:cNvSpPr txBox="1"/>
-          <p:nvPr/>
-        </p:nvSpPr>
-        <p:spPr>
-          <a:xfrm>
-            <a:off x="2779776" y="1737360"/>
-            <a:ext cx="1847088" cy="822960"/>
-          </a:xfrm>
-          <a:prstGeom prst="rect">
-            <a:avLst/>
-          </a:prstGeom>
-          <a:noFill/>
-        </p:spPr>
-        <p:txBody>
-          <a:bodyPr wrap="square">
-            <a:spAutoFit/>
-          </a:bodyPr>
-          <a:lstStyle/>
-          <a:p>
-            <a:pPr algn="l"/>
-            <a:r>
-              <a:rPr sz="1000" b="1" i="0">
-                <a:solidFill>
-                  <a:srgbClr val="FFFFFF"/>
-                </a:solidFill>
-              </a:rPr>
-              <a:t>2  ENVIRONMENTAL
-DATA</a:t>
-            </a:r>
-          </a:p>
-        </p:txBody>
-      </p:sp>
-      <p:sp>
-        <p:nvSpPr>
-          <p:cNvPr id="13" name="Rectangle 12"/>
-          <p:cNvSpPr/>
-          <p:nvPr/>
-        </p:nvSpPr>
-        <p:spPr>
-          <a:xfrm>
-            <a:off x="4919472" y="1691640"/>
-            <a:ext cx="2029968" cy="1371600"/>
-          </a:xfrm>
-          <a:prstGeom prst="rect">
-            <a:avLst/>
-          </a:prstGeom>
-          <a:solidFill>
-            <a:srgbClr val="2D3748"/>
-          </a:solidFill>
-          <a:ln w="25400">
-            <a:solidFill>
-              <a:srgbClr val="22C55E"/>
-            </a:solidFill>
-          </a:ln>
-        </p:spPr>
-        <p:style>
-          <a:lnRef idx="1">
-            <a:schemeClr val="accent1"/>
-          </a:lnRef>
-          <a:fillRef idx="3">
-            <a:schemeClr val="accent1"/>
-          </a:fillRef>
-          <a:effectRef idx="2">
-            <a:schemeClr val="accent1"/>
-          </a:effectRef>
-          <a:fontRef idx="minor">
-            <a:schemeClr val="lt1"/>
-          </a:fontRef>
-        </p:style>
-        <p:txBody>
-          <a:bodyPr rtlCol="0" anchor="ctr"/>
-          <a:lstStyle/>
-          <a:p>
-            <a:pPr algn="ctr"/>
-          </a:p>
-        </p:txBody>
-      </p:sp>
-      <p:sp>
-        <p:nvSpPr>
-          <p:cNvPr id="14" name="Rectangle 13"/>
-          <p:cNvSpPr/>
-          <p:nvPr/>
-        </p:nvSpPr>
-        <p:spPr>
-          <a:xfrm>
-            <a:off x="4919472" y="1691640"/>
-            <a:ext cx="2029968" cy="411480"/>
-          </a:xfrm>
-          <a:prstGeom prst="rect">
-            <a:avLst/>
-          </a:prstGeom>
-          <a:solidFill>
-            <a:srgbClr val="22C55E"/>
-          </a:solidFill>
-        </p:spPr>
-        <p:style>
-          <a:lnRef idx="1">
-            <a:schemeClr val="accent1"/>
-          </a:lnRef>
-          <a:fillRef idx="3">
-            <a:schemeClr val="accent1"/>
-          </a:fillRef>
-          <a:effectRef idx="2">
-            <a:schemeClr val="accent1"/>
-          </a:effectRef>
-          <a:fontRef idx="minor">
-            <a:schemeClr val="lt1"/>
-          </a:fontRef>
-        </p:style>
-        <p:txBody>
-          <a:bodyPr rtlCol="0" anchor="ctr"/>
-          <a:lstStyle/>
-          <a:p>
-            <a:pPr algn="ctr"/>
-          </a:p>
-        </p:txBody>
-      </p:sp>
-      <p:sp>
-        <p:nvSpPr>
-          <p:cNvPr id="15" name="TextBox 14"/>
-          <p:cNvSpPr txBox="1"/>
-          <p:nvPr/>
-        </p:nvSpPr>
-        <p:spPr>
-          <a:xfrm>
-            <a:off x="5010912" y="1737360"/>
-            <a:ext cx="1847088" cy="822960"/>
-          </a:xfrm>
-          <a:prstGeom prst="rect">
-            <a:avLst/>
-          </a:prstGeom>
-          <a:noFill/>
-        </p:spPr>
-        <p:txBody>
-          <a:bodyPr wrap="square">
-            <a:spAutoFit/>
-          </a:bodyPr>
-          <a:lstStyle/>
-          <a:p>
-            <a:pPr algn="l"/>
-            <a:r>
-              <a:rPr sz="1000" b="1" i="0">
-                <a:solidFill>
-                  <a:srgbClr val="FFFFFF"/>
-                </a:solidFill>
-              </a:rPr>
-              <a:t>3  REGULATORY
-SCREENING</a:t>
-            </a:r>
-          </a:p>
-        </p:txBody>
-      </p:sp>
-      <p:sp>
-        <p:nvSpPr>
-          <p:cNvPr id="16" name="Rectangle 15"/>
-          <p:cNvSpPr/>
-          <p:nvPr/>
-        </p:nvSpPr>
-        <p:spPr>
-          <a:xfrm>
-            <a:off x="7150608" y="1691640"/>
-            <a:ext cx="2029968" cy="1371600"/>
-          </a:xfrm>
-          <a:prstGeom prst="rect">
-            <a:avLst/>
-          </a:prstGeom>
-          <a:solidFill>
-            <a:srgbClr val="2D3748"/>
-          </a:solidFill>
-          <a:ln w="25400">
-            <a:solidFill>
-              <a:srgbClr val="F97316"/>
-            </a:solidFill>
-          </a:ln>
-        </p:spPr>
-        <p:style>
-          <a:lnRef idx="1">
-            <a:schemeClr val="accent1"/>
-          </a:lnRef>
-          <a:fillRef idx="3">
-            <a:schemeClr val="accent1"/>
-          </a:fillRef>
-          <a:effectRef idx="2">
-            <a:schemeClr val="accent1"/>
-          </a:effectRef>
-          <a:fontRef idx="minor">
-            <a:schemeClr val="lt1"/>
-          </a:fontRef>
-        </p:style>
-        <p:txBody>
-          <a:bodyPr rtlCol="0" anchor="ctr"/>
-          <a:lstStyle/>
-          <a:p>
-            <a:pPr algn="ctr"/>
-          </a:p>
-        </p:txBody>
-      </p:sp>
-      <p:sp>
-        <p:nvSpPr>
-          <p:cNvPr id="17" name="Rectangle 16"/>
-          <p:cNvSpPr/>
-          <p:nvPr/>
-        </p:nvSpPr>
-        <p:spPr>
-          <a:xfrm>
-            <a:off x="7150608" y="1691640"/>
-            <a:ext cx="2029968" cy="411480"/>
-          </a:xfrm>
-          <a:prstGeom prst="rect">
-            <a:avLst/>
-          </a:prstGeom>
-          <a:solidFill>
-            <a:srgbClr val="F97316"/>
-          </a:solidFill>
-        </p:spPr>
-        <p:style>
-          <a:lnRef idx="1">
-            <a:schemeClr val="accent1"/>
-          </a:lnRef>
-          <a:fillRef idx="3">
-            <a:schemeClr val="accent1"/>
-          </a:fillRef>
-          <a:effectRef idx="2">
-            <a:schemeClr val="accent1"/>
-          </a:effectRef>
-          <a:fontRef idx="minor">
-            <a:schemeClr val="lt1"/>
-          </a:fontRef>
-        </p:style>
-        <p:txBody>
-          <a:bodyPr rtlCol="0" anchor="ctr"/>
-          <a:lstStyle/>
-          <a:p>
-            <a:pPr algn="ctr"/>
-          </a:p>
-        </p:txBody>
-      </p:sp>
-      <p:sp>
-        <p:nvSpPr>
-          <p:cNvPr id="18" name="TextBox 17"/>
-          <p:cNvSpPr txBox="1"/>
-          <p:nvPr/>
-        </p:nvSpPr>
-        <p:spPr>
-          <a:xfrm>
-            <a:off x="7242048" y="1737360"/>
-            <a:ext cx="1847088" cy="822960"/>
-          </a:xfrm>
-          <a:prstGeom prst="rect">
-            <a:avLst/>
-          </a:prstGeom>
-          <a:noFill/>
-        </p:spPr>
-        <p:txBody>
-          <a:bodyPr wrap="square">
-            <a:spAutoFit/>
-          </a:bodyPr>
-          <a:lstStyle/>
-          <a:p>
-            <a:pPr algn="l"/>
-            <a:r>
-              <a:rPr sz="1000" b="1" i="0">
-                <a:solidFill>
-                  <a:srgbClr val="FFFFFF"/>
-                </a:solidFill>
-              </a:rPr>
-              <a:t>4  IMPACT
-ANALYSIS</a:t>
-            </a:r>
-          </a:p>
-        </p:txBody>
-      </p:sp>
-      <p:sp>
-        <p:nvSpPr>
-          <p:cNvPr id="19" name="Rectangle 18"/>
-          <p:cNvSpPr/>
-          <p:nvPr/>
-        </p:nvSpPr>
-        <p:spPr>
-          <a:xfrm>
-            <a:off x="9381744" y="1691640"/>
-            <a:ext cx="2029968" cy="1371600"/>
-          </a:xfrm>
-          <a:prstGeom prst="rect">
-            <a:avLst/>
-          </a:prstGeom>
-          <a:solidFill>
-            <a:srgbClr val="2D3748"/>
-          </a:solidFill>
-          <a:ln w="25400">
-            <a:solidFill>
-              <a:srgbClr val="EAB308"/>
-            </a:solidFill>
-          </a:ln>
-        </p:spPr>
-        <p:style>
-          <a:lnRef idx="1">
-            <a:schemeClr val="accent1"/>
-          </a:lnRef>
-          <a:fillRef idx="3">
-            <a:schemeClr val="accent1"/>
-          </a:fillRef>
-          <a:effectRef idx="2">
-            <a:schemeClr val="accent1"/>
-          </a:effectRef>
-          <a:fontRef idx="minor">
-            <a:schemeClr val="lt1"/>
-          </a:fontRef>
-        </p:style>
-        <p:txBody>
-          <a:bodyPr rtlCol="0" anchor="ctr"/>
-          <a:lstStyle/>
-          <a:p>
-            <a:pPr algn="ctr"/>
-          </a:p>
-        </p:txBody>
-      </p:sp>
-      <p:sp>
-        <p:nvSpPr>
-          <p:cNvPr id="20" name="Rectangle 19"/>
-          <p:cNvSpPr/>
-          <p:nvPr/>
-        </p:nvSpPr>
-        <p:spPr>
-          <a:xfrm>
-            <a:off x="9381744" y="1691640"/>
-            <a:ext cx="2029968" cy="411480"/>
-          </a:xfrm>
-          <a:prstGeom prst="rect">
-            <a:avLst/>
-          </a:prstGeom>
-          <a:solidFill>
-            <a:srgbClr val="EAB308"/>
-          </a:solidFill>
-        </p:spPr>
-        <p:style>
-          <a:lnRef idx="1">
-            <a:schemeClr val="accent1"/>
-          </a:lnRef>
-          <a:fillRef idx="3">
-            <a:schemeClr val="accent1"/>
-          </a:fillRef>
-          <a:effectRef idx="2">
-            <a:schemeClr val="accent1"/>
-          </a:effectRef>
-          <a:fontRef idx="minor">
-            <a:schemeClr val="lt1"/>
-          </a:fontRef>
-        </p:style>
-        <p:txBody>
-          <a:bodyPr rtlCol="0" anchor="ctr"/>
-          <a:lstStyle/>
-          <a:p>
-            <a:pPr algn="ctr"/>
-          </a:p>
-        </p:txBody>
-      </p:sp>
-      <p:sp>
-        <p:nvSpPr>
-          <p:cNvPr id="21" name="TextBox 20"/>
-          <p:cNvSpPr txBox="1"/>
-          <p:nvPr/>
-        </p:nvSpPr>
-        <p:spPr>
-          <a:xfrm>
-            <a:off x="9473184" y="1737360"/>
-            <a:ext cx="1847088" cy="822960"/>
-          </a:xfrm>
-          <a:prstGeom prst="rect">
-            <a:avLst/>
-          </a:prstGeom>
-          <a:noFill/>
-        </p:spPr>
-        <p:txBody>
-          <a:bodyPr wrap="square">
-            <a:spAutoFit/>
-          </a:bodyPr>
-          <a:lstStyle/>
-          <a:p>
-            <a:pPr algn="l"/>
-            <a:r>
-              <a:rPr sz="1000" b="1" i="0">
-                <a:solidFill>
-                  <a:srgbClr val="FFFFFF"/>
-                </a:solidFill>
-              </a:rPr>
-              <a:t>5  REPORT
-SYNTHESIS</a:t>
-            </a:r>
-          </a:p>
-        </p:txBody>
-      </p:sp>
-      <p:sp>
-        <p:nvSpPr>
-          <p:cNvPr id="22" name="TextBox 21"/>
-          <p:cNvSpPr txBox="1"/>
-          <p:nvPr/>
-        </p:nvSpPr>
-        <p:spPr>
-          <a:xfrm>
-            <a:off x="457200" y="3154680"/>
-            <a:ext cx="11338560" cy="274320"/>
-          </a:xfrm>
-          <a:prstGeom prst="rect">
-            <a:avLst/>
-          </a:prstGeom>
-          <a:noFill/>
-        </p:spPr>
-        <p:txBody>
-          <a:bodyPr wrap="square">
-            <a:spAutoFit/>
-          </a:bodyPr>
-          <a:lstStyle/>
-          <a:p>
-            <a:pPr algn="ctr"/>
-            <a:r>
-              <a:rPr sz="900" b="0" i="0">
-                <a:solidFill>
-                  <a:srgbClr val="4B5563"/>
-                </a:solidFill>
-              </a:rPr>
-              <a:t>─────────────────────────────────────── sequential flow ───────────────────────────────────────</a:t>
-            </a:r>
-          </a:p>
-        </p:txBody>
-      </p:sp>
-      <p:sp>
-        <p:nvSpPr>
-          <p:cNvPr id="23" name="Rectangle 22"/>
-          <p:cNvSpPr/>
-          <p:nvPr/>
-        </p:nvSpPr>
-        <p:spPr>
-          <a:xfrm>
-            <a:off x="548640" y="3337560"/>
-            <a:ext cx="11109960" cy="475488"/>
-          </a:xfrm>
-          <a:prstGeom prst="rect">
-            <a:avLst/>
-          </a:prstGeom>
-          <a:solidFill>
-            <a:srgbClr val="2D3748"/>
-          </a:solidFill>
-          <a:ln w="12700">
-            <a:solidFill>
-              <a:srgbClr val="3B82F6"/>
-            </a:solidFill>
-          </a:ln>
-        </p:spPr>
-        <p:style>
-          <a:lnRef idx="1">
-            <a:schemeClr val="accent1"/>
-          </a:lnRef>
-          <a:fillRef idx="3">
-            <a:schemeClr val="accent1"/>
-          </a:fillRef>
-          <a:effectRef idx="2">
-            <a:schemeClr val="accent1"/>
-          </a:effectRef>
-          <a:fontRef idx="minor">
-            <a:schemeClr val="lt1"/>
-          </a:fontRef>
-        </p:style>
-        <p:txBody>
-          <a:bodyPr rtlCol="0" anchor="ctr"/>
-          <a:lstStyle/>
-          <a:p>
-            <a:pPr algn="ctr"/>
-          </a:p>
-        </p:txBody>
-      </p:sp>
-      <p:sp>
-        <p:nvSpPr>
-          <p:cNvPr id="24" name="TextBox 23"/>
-          <p:cNvSpPr txBox="1"/>
-          <p:nvPr/>
-        </p:nvSpPr>
-        <p:spPr>
-          <a:xfrm>
-            <a:off x="685800" y="3392424"/>
-            <a:ext cx="2011680" cy="347472"/>
-          </a:xfrm>
-          <a:prstGeom prst="rect">
-            <a:avLst/>
-          </a:prstGeom>
-          <a:noFill/>
-        </p:spPr>
-        <p:txBody>
-          <a:bodyPr wrap="square">
-            <a:spAutoFit/>
-          </a:bodyPr>
-          <a:lstStyle/>
-          <a:p>
-            <a:pPr algn="l"/>
-            <a:r>
-              <a:rPr sz="1200" b="1" i="0">
-                <a:solidFill>
-                  <a:srgbClr val="3B82F6"/>
-                </a:solidFill>
-              </a:rPr>
-              <a:t>React Frontend</a:t>
-            </a:r>
-          </a:p>
-        </p:txBody>
-      </p:sp>
-      <p:sp>
-        <p:nvSpPr>
-          <p:cNvPr id="25" name="TextBox 24"/>
-          <p:cNvSpPr txBox="1"/>
-          <p:nvPr/>
-        </p:nvSpPr>
-        <p:spPr>
-          <a:xfrm>
-            <a:off x="2834640" y="3410712"/>
-            <a:ext cx="8686800" cy="347472"/>
-          </a:xfrm>
-          <a:prstGeom prst="rect">
-            <a:avLst/>
-          </a:prstGeom>
-          <a:noFill/>
-        </p:spPr>
-        <p:txBody>
-          <a:bodyPr wrap="square">
-            <a:spAutoFit/>
-          </a:bodyPr>
-          <a:lstStyle/>
-          <a:p>
-            <a:pPr algn="l"/>
-            <a:r>
-              <a:rPr sz="1200" b="0" i="0">
-                <a:solidFill>
-                  <a:srgbClr val="E5E7EB"/>
-                </a:solidFill>
-              </a:rPr>
-              <a:t>SSE streaming · real-time status dots · cost tracking · Brain Scanner log</a:t>
-            </a:r>
-          </a:p>
-        </p:txBody>
-      </p:sp>
-      <p:sp>
-        <p:nvSpPr>
-          <p:cNvPr id="26" name="Rectangle 25"/>
-          <p:cNvSpPr/>
-          <p:nvPr/>
-        </p:nvSpPr>
-        <p:spPr>
-          <a:xfrm>
-            <a:off x="548640" y="3867912"/>
-            <a:ext cx="11109960" cy="475488"/>
-          </a:xfrm>
-          <a:prstGeom prst="rect">
-            <a:avLst/>
-          </a:prstGeom>
-          <a:solidFill>
-            <a:srgbClr val="2D3748"/>
-          </a:solidFill>
-          <a:ln w="12700">
-            <a:solidFill>
-              <a:srgbClr val="06B6D3"/>
-            </a:solidFill>
-          </a:ln>
-        </p:spPr>
-        <p:style>
-          <a:lnRef idx="1">
-            <a:schemeClr val="accent1"/>
-          </a:lnRef>
-          <a:fillRef idx="3">
-            <a:schemeClr val="accent1"/>
-          </a:fillRef>
-          <a:effectRef idx="2">
-            <a:schemeClr val="accent1"/>
-          </a:effectRef>
-          <a:fontRef idx="minor">
-            <a:schemeClr val="lt1"/>
-          </a:fontRef>
-        </p:style>
-        <p:txBody>
-          <a:bodyPr rtlCol="0" anchor="ctr"/>
-          <a:lstStyle/>
-          <a:p>
-            <a:pPr algn="ctr"/>
-          </a:p>
-        </p:txBody>
-      </p:sp>
-      <p:sp>
-        <p:nvSpPr>
-          <p:cNvPr id="27" name="TextBox 26"/>
-          <p:cNvSpPr txBox="1"/>
-          <p:nvPr/>
-        </p:nvSpPr>
-        <p:spPr>
-          <a:xfrm>
-            <a:off x="685800" y="3922776"/>
-            <a:ext cx="2011680" cy="347472"/>
-          </a:xfrm>
-          <a:prstGeom prst="rect">
-            <a:avLst/>
-          </a:prstGeom>
-          <a:noFill/>
-        </p:spPr>
-        <p:txBody>
-          <a:bodyPr wrap="square">
-            <a:spAutoFit/>
-          </a:bodyPr>
-          <a:lstStyle/>
-          <a:p>
-            <a:pPr algn="l"/>
-            <a:r>
-              <a:rPr sz="1200" b="1" i="0">
-                <a:solidFill>
-                  <a:srgbClr val="06B6D3"/>
-                </a:solidFill>
-              </a:rPr>
-              <a:t>FastAPI Backend</a:t>
-            </a:r>
-          </a:p>
-        </p:txBody>
-      </p:sp>
-      <p:sp>
-        <p:nvSpPr>
-          <p:cNvPr id="28" name="TextBox 27"/>
-          <p:cNvSpPr txBox="1"/>
-          <p:nvPr/>
-        </p:nvSpPr>
-        <p:spPr>
-          <a:xfrm>
-            <a:off x="2834640" y="3941064"/>
-            <a:ext cx="8686800" cy="347472"/>
-          </a:xfrm>
-          <a:prstGeom prst="rect">
-            <a:avLst/>
-          </a:prstGeom>
-          <a:noFill/>
-        </p:spPr>
-        <p:txBody>
-          <a:bodyPr wrap="square">
-            <a:spAutoFit/>
-          </a:bodyPr>
-          <a:lstStyle/>
-          <a:p>
-            <a:pPr algn="l"/>
-            <a:r>
-              <a:rPr sz="1200" b="0" i="0">
-                <a:solidFill>
-                  <a:srgbClr val="E5E7EB"/>
-                </a:solidFill>
-              </a:rPr>
-              <a:t>POST /api/run → state machine → SSE generator yields per-agent events</a:t>
-            </a:r>
-          </a:p>
-        </p:txBody>
-      </p:sp>
-      <p:sp>
-        <p:nvSpPr>
-          <p:cNvPr id="29" name="Rectangle 28"/>
-          <p:cNvSpPr/>
-          <p:nvPr/>
-        </p:nvSpPr>
-        <p:spPr>
-          <a:xfrm>
-            <a:off x="548640" y="4398264"/>
-            <a:ext cx="11109960" cy="475488"/>
-          </a:xfrm>
-          <a:prstGeom prst="rect">
-            <a:avLst/>
-          </a:prstGeom>
-          <a:solidFill>
-            <a:srgbClr val="2D3748"/>
-          </a:solidFill>
-          <a:ln w="12700">
-            <a:solidFill>
-              <a:srgbClr val="22C55E"/>
-            </a:solidFill>
-          </a:ln>
-        </p:spPr>
-        <p:style>
-          <a:lnRef idx="1">
-            <a:schemeClr val="accent1"/>
-          </a:lnRef>
-          <a:fillRef idx="3">
-            <a:schemeClr val="accent1"/>
-          </a:fillRef>
-          <a:effectRef idx="2">
-            <a:schemeClr val="accent1"/>
-          </a:effectRef>
-          <a:fontRef idx="minor">
-            <a:schemeClr val="lt1"/>
-          </a:fontRef>
-        </p:style>
-        <p:txBody>
-          <a:bodyPr rtlCol="0" anchor="ctr"/>
-          <a:lstStyle/>
-          <a:p>
-            <a:pPr algn="ctr"/>
-          </a:p>
-        </p:txBody>
-      </p:sp>
-      <p:sp>
-        <p:nvSpPr>
-          <p:cNvPr id="30" name="TextBox 29"/>
-          <p:cNvSpPr txBox="1"/>
-          <p:nvPr/>
-        </p:nvSpPr>
-        <p:spPr>
-          <a:xfrm>
-            <a:off x="685800" y="4453128"/>
-            <a:ext cx="2011680" cy="347472"/>
-          </a:xfrm>
-          <a:prstGeom prst="rect">
-            <a:avLst/>
-          </a:prstGeom>
-          <a:noFill/>
-        </p:spPr>
-        <p:txBody>
-          <a:bodyPr wrap="square">
-            <a:spAutoFit/>
-          </a:bodyPr>
-          <a:lstStyle/>
-          <a:p>
-            <a:pPr algn="l"/>
-            <a:r>
-              <a:rPr sz="1200" b="1" i="0">
-                <a:solidFill>
-                  <a:srgbClr val="22C55E"/>
-                </a:solidFill>
-              </a:rPr>
-              <a:t>LangGraph</a:t>
-            </a:r>
-          </a:p>
-        </p:txBody>
-      </p:sp>
-      <p:sp>
-        <p:nvSpPr>
-          <p:cNvPr id="31" name="TextBox 30"/>
-          <p:cNvSpPr txBox="1"/>
-          <p:nvPr/>
-        </p:nvSpPr>
-        <p:spPr>
-          <a:xfrm>
-            <a:off x="2834640" y="4471416"/>
-            <a:ext cx="8686800" cy="347472"/>
-          </a:xfrm>
-          <a:prstGeom prst="rect">
-            <a:avLst/>
-          </a:prstGeom>
-          <a:noFill/>
-        </p:spPr>
-        <p:txBody>
-          <a:bodyPr wrap="square">
-            <a:spAutoFit/>
-          </a:bodyPr>
-          <a:lstStyle/>
-          <a:p>
-            <a:pPr algn="l"/>
-            <a:r>
-              <a:rPr sz="1200" b="0" i="0">
-                <a:solidFill>
-                  <a:srgbClr val="E5E7EB"/>
-                </a:solidFill>
-              </a:rPr>
-              <a:t>Typed EIAPipelineState flows through sequential graph nodes</a:t>
-            </a:r>
-          </a:p>
-        </p:txBody>
-      </p:sp>
-      <p:sp>
-        <p:nvSpPr>
-          <p:cNvPr id="32" name="Rectangle 31"/>
-          <p:cNvSpPr/>
-          <p:nvPr/>
-        </p:nvSpPr>
-        <p:spPr>
-          <a:xfrm>
-            <a:off x="548640" y="4928616"/>
-            <a:ext cx="11109960" cy="475488"/>
-          </a:xfrm>
-          <a:prstGeom prst="rect">
-            <a:avLst/>
-          </a:prstGeom>
-          <a:solidFill>
-            <a:srgbClr val="2D3748"/>
-          </a:solidFill>
-          <a:ln w="12700">
-            <a:solidFill>
-              <a:srgbClr val="F97316"/>
-            </a:solidFill>
-          </a:ln>
-        </p:spPr>
-        <p:style>
-          <a:lnRef idx="1">
-            <a:schemeClr val="accent1"/>
-          </a:lnRef>
-          <a:fillRef idx="3">
-            <a:schemeClr val="accent1"/>
-          </a:fillRef>
-          <a:effectRef idx="2">
-            <a:schemeClr val="accent1"/>
-          </a:effectRef>
-          <a:fontRef idx="minor">
-            <a:schemeClr val="lt1"/>
-          </a:fontRef>
-        </p:style>
-        <p:txBody>
-          <a:bodyPr rtlCol="0" anchor="ctr"/>
-          <a:lstStyle/>
-          <a:p>
-            <a:pPr algn="ctr"/>
-          </a:p>
-        </p:txBody>
-      </p:sp>
-      <p:sp>
-        <p:nvSpPr>
-          <p:cNvPr id="33" name="TextBox 32"/>
-          <p:cNvSpPr txBox="1"/>
-          <p:nvPr/>
-        </p:nvSpPr>
-        <p:spPr>
-          <a:xfrm>
-            <a:off x="685800" y="4983480"/>
-            <a:ext cx="2011680" cy="347472"/>
-          </a:xfrm>
-          <a:prstGeom prst="rect">
-            <a:avLst/>
-          </a:prstGeom>
-          <a:noFill/>
-        </p:spPr>
-        <p:txBody>
-          <a:bodyPr wrap="square">
-            <a:spAutoFit/>
-          </a:bodyPr>
-          <a:lstStyle/>
-          <a:p>
-            <a:pPr algn="l"/>
-            <a:r>
-              <a:rPr sz="1200" b="1" i="0">
-                <a:solidFill>
-                  <a:srgbClr val="F97316"/>
-                </a:solidFill>
-              </a:rPr>
-              <a:t>PostgreSQL + pgvector</a:t>
-            </a:r>
-          </a:p>
-        </p:txBody>
-      </p:sp>
-      <p:sp>
-        <p:nvSpPr>
-          <p:cNvPr id="34" name="TextBox 33"/>
-          <p:cNvSpPr txBox="1"/>
-          <p:nvPr/>
-        </p:nvSpPr>
-        <p:spPr>
-          <a:xfrm>
-            <a:off x="2834640" y="5001768"/>
-            <a:ext cx="8686800" cy="347472"/>
-          </a:xfrm>
-          <a:prstGeom prst="rect">
-            <a:avLst/>
-          </a:prstGeom>
-          <a:noFill/>
-        </p:spPr>
-        <p:txBody>
-          <a:bodyPr wrap="square">
-            <a:spAutoFit/>
-          </a:bodyPr>
-          <a:lstStyle/>
-          <a:p>
-            <a:pPr algn="l"/>
-            <a:r>
-              <a:rPr sz="1200" b="0" i="0">
-                <a:solidFill>
-                  <a:srgbClr val="E5E7EB"/>
-                </a:solidFill>
-              </a:rPr>
-              <a:t>Agent outputs stored as JSONB · HNSW index for RAG similarity search</a:t>
-            </a:r>
-          </a:p>
-        </p:txBody>
-      </p:sp>
-      <p:sp>
-        <p:nvSpPr>
-          <p:cNvPr id="35" name="Rectangle 34"/>
-          <p:cNvSpPr/>
-          <p:nvPr/>
-        </p:nvSpPr>
-        <p:spPr>
-          <a:xfrm>
-            <a:off x="548640" y="5458968"/>
-            <a:ext cx="11109960" cy="475488"/>
-          </a:xfrm>
-          <a:prstGeom prst="rect">
-            <a:avLst/>
-          </a:prstGeom>
-          <a:solidFill>
-            <a:srgbClr val="2D3748"/>
-          </a:solidFill>
-          <a:ln w="12700">
-            <a:solidFill>
-              <a:srgbClr val="EAB308"/>
-            </a:solidFill>
-          </a:ln>
-        </p:spPr>
-        <p:style>
-          <a:lnRef idx="1">
-            <a:schemeClr val="accent1"/>
-          </a:lnRef>
-          <a:fillRef idx="3">
-            <a:schemeClr val="accent1"/>
-          </a:fillRef>
-          <a:effectRef idx="2">
-            <a:schemeClr val="accent1"/>
-          </a:effectRef>
-          <a:fontRef idx="minor">
-            <a:schemeClr val="lt1"/>
-          </a:fontRef>
-        </p:style>
-        <p:txBody>
-          <a:bodyPr rtlCol="0" anchor="ctr"/>
-          <a:lstStyle/>
-          <a:p>
-            <a:pPr algn="ctr"/>
-          </a:p>
-        </p:txBody>
-      </p:sp>
-      <p:sp>
-        <p:nvSpPr>
-          <p:cNvPr id="36" name="TextBox 35"/>
-          <p:cNvSpPr txBox="1"/>
-          <p:nvPr/>
-        </p:nvSpPr>
-        <p:spPr>
-          <a:xfrm>
-            <a:off x="685800" y="5513832"/>
-            <a:ext cx="2011680" cy="347472"/>
-          </a:xfrm>
-          <a:prstGeom prst="rect">
-            <a:avLst/>
-          </a:prstGeom>
-          <a:noFill/>
-        </p:spPr>
-        <p:txBody>
-          <a:bodyPr wrap="square">
-            <a:spAutoFit/>
-          </a:bodyPr>
-          <a:lstStyle/>
-          <a:p>
-            <a:pPr algn="l"/>
-            <a:r>
-              <a:rPr sz="1200" b="1" i="0">
-                <a:solidFill>
-                  <a:srgbClr val="EAB308"/>
-                </a:solidFill>
-              </a:rPr>
-              <a:t>LLM Providers</a:t>
-            </a:r>
-          </a:p>
-        </p:txBody>
-      </p:sp>
-      <p:sp>
-        <p:nvSpPr>
-          <p:cNvPr id="37" name="TextBox 36"/>
-          <p:cNvSpPr txBox="1"/>
-          <p:nvPr/>
-        </p:nvSpPr>
-        <p:spPr>
-          <a:xfrm>
-            <a:off x="2834640" y="5532120"/>
-            <a:ext cx="8686800" cy="347472"/>
-          </a:xfrm>
-          <a:prstGeom prst="rect">
-            <a:avLst/>
-          </a:prstGeom>
-          <a:noFill/>
-        </p:spPr>
-        <p:txBody>
-          <a:bodyPr wrap="square">
-            <a:spAutoFit/>
-          </a:bodyPr>
-          <a:lstStyle/>
-          <a:p>
-            <a:pPr algn="l"/>
-            <a:r>
-              <a:rPr sz="1200" b="0" i="0">
-                <a:solidFill>
-                  <a:srgbClr val="E5E7EB"/>
-                </a:solidFill>
-              </a:rPr>
-              <a:t>OpenAI · Anthropic · Ollama — switchable via env vars, no code changes</a:t>
-            </a:r>
-          </a:p>
-        </p:txBody>
-      </p:sp>
-    </p:spTree>
-  </p:cSld>
-  <p:clrMapOvr>
-    <a:masterClrMapping/>
-  </p:clrMapOvr>
-</p:sld>
-</file>
-
-<file path=ppt/slides/slide5.xml><?xml version="1.0" encoding="utf-8"?>
-<p:sld xmlns:a="http://schemas.openxmlformats.org/drawingml/2006/main" xmlns:p="http://schemas.openxmlformats.org/presentationml/2006/main" xmlns:r="http://schemas.openxmlformats.org/officeDocument/2006/relationships">
-  <p:cSld>
-    <p:bg>
-      <p:bgPr>
-        <a:solidFill>
-          <a:srgbClr val="1F2833"/>
-        </a:solidFill>
-        <a:effectLst/>
-      </p:bgPr>
-    </p:bg>
-    <p:spTree>
-      <p:nvGrpSpPr>
-        <p:cNvPr id="1" name=""/>
-        <p:cNvGrpSpPr/>
-        <p:nvPr/>
-      </p:nvGrpSpPr>
-      <p:grpSpPr/>
-      <p:sp>
-        <p:nvSpPr>
-          <p:cNvPr id="2" name="Text Placeholder 1"/>
-          <p:cNvSpPr>
-            <a:spLocks noGrp="1"/>
-          </p:cNvSpPr>
-          <p:nvPr>
-            <p:ph type="body" idx="10" sz="quarter"/>
-          </p:nvPr>
-        </p:nvSpPr>
-        <p:spPr/>
-        <p:txBody>
-          <a:bodyPr/>
-          <a:lstStyle/>
-          <a:p/>
-        </p:txBody>
-      </p:sp>
-      <p:sp>
-        <p:nvSpPr>
-          <p:cNvPr id="3" name="Rectangle 2"/>
-          <p:cNvSpPr/>
-          <p:nvPr/>
-        </p:nvSpPr>
-        <p:spPr>
-          <a:xfrm>
-            <a:off x="0" y="0"/>
-            <a:ext cx="12188952" cy="73152"/>
-          </a:xfrm>
-          <a:prstGeom prst="rect">
-            <a:avLst/>
-          </a:prstGeom>
-          <a:solidFill>
-            <a:srgbClr val="F97316"/>
-          </a:solidFill>
-        </p:spPr>
-        <p:style>
-          <a:lnRef idx="1">
-            <a:schemeClr val="accent1"/>
-          </a:lnRef>
-          <a:fillRef idx="3">
-            <a:schemeClr val="accent1"/>
-          </a:fillRef>
-          <a:effectRef idx="2">
-            <a:schemeClr val="accent1"/>
-          </a:effectRef>
-          <a:fontRef idx="minor">
-            <a:schemeClr val="lt1"/>
-          </a:fontRef>
-        </p:style>
-        <p:txBody>
-          <a:bodyPr rtlCol="0" anchor="ctr"/>
-          <a:lstStyle/>
-          <a:p>
-            <a:pPr algn="ctr"/>
-          </a:p>
-        </p:txBody>
-      </p:sp>
-      <p:sp>
-        <p:nvSpPr>
-          <p:cNvPr id="4" name="TextBox 3"/>
-          <p:cNvSpPr txBox="1"/>
-          <p:nvPr/>
-        </p:nvSpPr>
-        <p:spPr>
-          <a:xfrm>
-            <a:off x="548640" y="164592"/>
-            <a:ext cx="11430000" cy="685800"/>
-          </a:xfrm>
-          <a:prstGeom prst="rect">
-            <a:avLst/>
-          </a:prstGeom>
-          <a:noFill/>
-        </p:spPr>
-        <p:txBody>
-          <a:bodyPr wrap="square">
-            <a:spAutoFit/>
-          </a:bodyPr>
-          <a:lstStyle/>
-          <a:p>
-            <a:pPr algn="l"/>
-            <a:r>
-              <a:rPr sz="2800" b="1" i="0">
-                <a:solidFill>
-                  <a:srgbClr val="F97316"/>
-                </a:solidFill>
-              </a:rPr>
-              <a:t>Methodology — Agent 1: Project Parser</a:t>
-            </a:r>
-          </a:p>
-        </p:txBody>
-      </p:sp>
-      <p:sp>
-        <p:nvSpPr>
-          <p:cNvPr id="5" name="Rectangle 4"/>
-          <p:cNvSpPr/>
-          <p:nvPr/>
-        </p:nvSpPr>
-        <p:spPr>
-          <a:xfrm>
-            <a:off x="548640" y="914400"/>
-            <a:ext cx="11064240" cy="18288"/>
-          </a:xfrm>
-          <a:prstGeom prst="rect">
-            <a:avLst/>
-          </a:prstGeom>
-          <a:solidFill>
-            <a:srgbClr val="3D4A5C"/>
-          </a:solidFill>
-        </p:spPr>
-        <p:style>
-          <a:lnRef idx="1">
-            <a:schemeClr val="accent1"/>
-          </a:lnRef>
-          <a:fillRef idx="3">
-            <a:schemeClr val="accent1"/>
-          </a:fillRef>
-          <a:effectRef idx="2">
-            <a:schemeClr val="accent1"/>
-          </a:effectRef>
-          <a:fontRef idx="minor">
-            <a:schemeClr val="lt1"/>
-          </a:fontRef>
-        </p:style>
-        <p:txBody>
-          <a:bodyPr rtlCol="0" anchor="ctr"/>
-          <a:lstStyle/>
-          <a:p>
-            <a:pPr algn="ctr"/>
-          </a:p>
-        </p:txBody>
-      </p:sp>
-      <p:sp>
-        <p:nvSpPr>
-          <p:cNvPr id="6" name="Rectangle 5"/>
-          <p:cNvSpPr/>
-          <p:nvPr/>
-        </p:nvSpPr>
-        <p:spPr>
-          <a:xfrm>
-            <a:off x="548640" y="950976"/>
-            <a:ext cx="11064240" cy="54864"/>
-          </a:xfrm>
-          <a:prstGeom prst="rect">
-            <a:avLst/>
-          </a:prstGeom>
-          <a:solidFill>
-            <a:srgbClr val="3B82F6"/>
-          </a:solidFill>
-        </p:spPr>
-        <p:style>
-          <a:lnRef idx="1">
-            <a:schemeClr val="accent1"/>
-          </a:lnRef>
-          <a:fillRef idx="3">
-            <a:schemeClr val="accent1"/>
-          </a:fillRef>
-          <a:effectRef idx="2">
-            <a:schemeClr val="accent1"/>
-          </a:effectRef>
-          <a:fontRef idx="minor">
-            <a:schemeClr val="lt1"/>
-          </a:fontRef>
-        </p:style>
-        <p:txBody>
-          <a:bodyPr rtlCol="0" anchor="ctr"/>
-          <a:lstStyle/>
-          <a:p>
-            <a:pPr algn="ctr"/>
-          </a:p>
-        </p:txBody>
-      </p:sp>
-      <p:sp>
-        <p:nvSpPr>
-          <p:cNvPr id="7" name="TextBox 6"/>
-          <p:cNvSpPr txBox="1"/>
-          <p:nvPr/>
-        </p:nvSpPr>
-        <p:spPr>
-          <a:xfrm>
-            <a:off x="548640" y="1078992"/>
-            <a:ext cx="5029200" cy="274320"/>
-          </a:xfrm>
-          <a:prstGeom prst="rect">
-            <a:avLst/>
-          </a:prstGeom>
-          <a:noFill/>
-        </p:spPr>
-        <p:txBody>
-          <a:bodyPr wrap="square">
-            <a:spAutoFit/>
-          </a:bodyPr>
-          <a:lstStyle/>
-          <a:p>
-            <a:pPr algn="l"/>
-            <a:r>
-              <a:rPr sz="1100" b="1" i="0">
-                <a:solidFill>
-                  <a:srgbClr val="3B82F6"/>
-                </a:solidFill>
-              </a:rPr>
-              <a:t>WHAT IT DOES</a:t>
-            </a:r>
-          </a:p>
-        </p:txBody>
-      </p:sp>
-      <p:sp>
-        <p:nvSpPr>
-          <p:cNvPr id="8" name="TextBox 7"/>
-          <p:cNvSpPr txBox="1"/>
-          <p:nvPr/>
-        </p:nvSpPr>
-        <p:spPr>
-          <a:xfrm>
-            <a:off x="548640" y="1371600"/>
-            <a:ext cx="5029200" cy="1371600"/>
-          </a:xfrm>
-          <a:prstGeom prst="rect">
-            <a:avLst/>
-          </a:prstGeom>
-          <a:noFill/>
-        </p:spPr>
-        <p:txBody>
-          <a:bodyPr wrap="square">
-            <a:spAutoFit/>
-          </a:bodyPr>
-          <a:lstStyle/>
-          <a:p>
-            <a:pPr algn="l"/>
-            <a:r>
-              <a:rPr sz="1300" b="0" i="0">
-                <a:solidFill>
-                  <a:srgbClr val="E5E7EB"/>
-                </a:solidFill>
-              </a:rPr>
-              <a:t>Parses a natural-language project description and GPS coordinates into a structured metadata object that all downstream agents consume. Uses an LLM (Gemini 2.5 Flash) to extract semantic fields from free-form text.</a:t>
-            </a:r>
-          </a:p>
-        </p:txBody>
-      </p:sp>
-      <p:sp>
-        <p:nvSpPr>
-          <p:cNvPr id="9" name="TextBox 8"/>
-          <p:cNvSpPr txBox="1"/>
-          <p:nvPr/>
-        </p:nvSpPr>
-        <p:spPr>
-          <a:xfrm>
-            <a:off x="548640" y="2816352"/>
-            <a:ext cx="5029200" cy="274320"/>
-          </a:xfrm>
-          <a:prstGeom prst="rect">
-            <a:avLst/>
-          </a:prstGeom>
-          <a:noFill/>
-        </p:spPr>
-        <p:txBody>
-          <a:bodyPr wrap="square">
-            <a:spAutoFit/>
-          </a:bodyPr>
-          <a:lstStyle/>
-          <a:p>
-            <a:pPr algn="l"/>
-            <a:r>
-              <a:rPr sz="1100" b="1" i="0">
-                <a:solidFill>
-                  <a:srgbClr val="3B82F6"/>
-                </a:solidFill>
-              </a:rPr>
-              <a:t>PROCESSING STEPS</a:t>
-            </a:r>
-          </a:p>
-        </p:txBody>
-      </p:sp>
-      <p:sp>
-        <p:nvSpPr>
-          <p:cNvPr id="10" name="TextBox 9"/>
-          <p:cNvSpPr txBox="1"/>
-          <p:nvPr/>
-        </p:nvSpPr>
-        <p:spPr>
-          <a:xfrm>
-            <a:off x="548640" y="3108960"/>
-            <a:ext cx="5029200" cy="3200400"/>
-          </a:xfrm>
-          <a:prstGeom prst="rect">
-            <a:avLst/>
-          </a:prstGeom>
-          <a:noFill/>
-        </p:spPr>
-        <p:txBody>
-          <a:bodyPr wrap="square">
-            <a:spAutoFit/>
-          </a:bodyPr>
-          <a:lstStyle/>
-          <a:p>
-            <a:pPr>
-              <a:spcBef>
-                <a:spcPts val="300"/>
-              </a:spcBef>
-            </a:pPr>
-            <a:r>
-              <a:rPr sz="1300">
-                <a:solidFill>
-                  <a:srgbClr val="E5E7EB"/>
-                </a:solidFill>
-              </a:rPr>
-              <a:t>  1.  parse_description — LLM reads free-form project text</a:t>
-            </a:r>
-          </a:p>
-          <a:p>
-            <a:pPr>
-              <a:spcBef>
-                <a:spcPts val="300"/>
-              </a:spcBef>
-            </a:pPr>
-            <a:r>
-              <a:rPr sz="1300">
-                <a:solidFill>
-                  <a:srgbClr val="E5E7EB"/>
-                </a:solidFill>
-              </a:rPr>
-              <a:t>  2.  extract_metadata — structured fields extracted via JSON schema</a:t>
-            </a:r>
-          </a:p>
-          <a:p>
-            <a:pPr>
-              <a:spcBef>
-                <a:spcPts val="300"/>
-              </a:spcBef>
-            </a:pPr>
-            <a:r>
-              <a:rPr sz="1300">
-                <a:solidFill>
-                  <a:srgbClr val="E5E7EB"/>
-                </a:solidFill>
-              </a:rPr>
-              <a:t>  3.  geocode_coordinates — GPS coordinates validated and formatted</a:t>
-            </a:r>
-          </a:p>
-        </p:txBody>
-      </p:sp>
-      <p:sp>
-        <p:nvSpPr>
-          <p:cNvPr id="11" name="Rectangle 10"/>
-          <p:cNvSpPr/>
-          <p:nvPr/>
-        </p:nvSpPr>
-        <p:spPr>
-          <a:xfrm>
-            <a:off x="5943600" y="1078992"/>
-            <a:ext cx="5852160" cy="2468880"/>
-          </a:xfrm>
-          <a:prstGeom prst="rect">
-            <a:avLst/>
-          </a:prstGeom>
-          <a:solidFill>
-            <a:srgbClr val="2D3748"/>
-          </a:solidFill>
-          <a:ln w="12700">
-            <a:solidFill>
-              <a:srgbClr val="06B6D3"/>
-            </a:solidFill>
-          </a:ln>
-        </p:spPr>
-        <p:style>
-          <a:lnRef idx="1">
-            <a:schemeClr val="accent1"/>
-          </a:lnRef>
-          <a:fillRef idx="3">
-            <a:schemeClr val="accent1"/>
-          </a:fillRef>
-          <a:effectRef idx="2">
-            <a:schemeClr val="accent1"/>
-          </a:effectRef>
-          <a:fontRef idx="minor">
-            <a:schemeClr val="lt1"/>
-          </a:fontRef>
-        </p:style>
-        <p:txBody>
-          <a:bodyPr rtlCol="0" anchor="ctr"/>
-          <a:lstStyle/>
-          <a:p>
-            <a:pPr algn="ctr"/>
-          </a:p>
-        </p:txBody>
-      </p:sp>
-      <p:sp>
-        <p:nvSpPr>
-          <p:cNvPr id="12" name="TextBox 11"/>
-          <p:cNvSpPr txBox="1"/>
-          <p:nvPr/>
-        </p:nvSpPr>
-        <p:spPr>
-          <a:xfrm>
-            <a:off x="6080760" y="1170432"/>
-            <a:ext cx="5577840" cy="256032"/>
-          </a:xfrm>
-          <a:prstGeom prst="rect">
-            <a:avLst/>
-          </a:prstGeom>
-          <a:noFill/>
-        </p:spPr>
-        <p:txBody>
-          <a:bodyPr wrap="square">
-            <a:spAutoFit/>
-          </a:bodyPr>
-          <a:lstStyle/>
-          <a:p>
-            <a:pPr algn="l"/>
-            <a:r>
-              <a:rPr sz="1100" b="1" i="0">
-                <a:solidFill>
-                  <a:srgbClr val="06B6D3"/>
-                </a:solidFill>
-              </a:rPr>
-              <a:t>INPUTS</a:t>
-            </a:r>
-          </a:p>
-        </p:txBody>
-      </p:sp>
-      <p:sp>
-        <p:nvSpPr>
-          <p:cNvPr id="13" name="TextBox 12"/>
-          <p:cNvSpPr txBox="1"/>
-          <p:nvPr/>
-        </p:nvSpPr>
-        <p:spPr>
-          <a:xfrm>
-            <a:off x="6080760" y="1444752"/>
-            <a:ext cx="5577840" cy="2011680"/>
-          </a:xfrm>
-          <a:prstGeom prst="rect">
-            <a:avLst/>
-          </a:prstGeom>
-          <a:noFill/>
-        </p:spPr>
-        <p:txBody>
-          <a:bodyPr wrap="square">
-            <a:spAutoFit/>
-          </a:bodyPr>
-          <a:lstStyle/>
-          <a:p>
-            <a:pPr>
-              <a:spcBef>
-                <a:spcPts val="200"/>
-              </a:spcBef>
-            </a:pPr>
-            <a:r>
-              <a:rPr sz="1200">
-                <a:solidFill>
-                  <a:srgbClr val="E5E7EB"/>
-                </a:solidFill>
-              </a:rPr>
-              <a:t>· project_name (string)</a:t>
-            </a:r>
-          </a:p>
-          <a:p>
-            <a:pPr>
-              <a:spcBef>
-                <a:spcPts val="200"/>
-              </a:spcBef>
-            </a:pPr>
-            <a:r>
-              <a:rPr sz="1200">
-                <a:solidFill>
-                  <a:srgbClr val="E5E7EB"/>
-                </a:solidFill>
-              </a:rPr>
-              <a:t>· coordinates (lat, lon string)</a:t>
-            </a:r>
-          </a:p>
-          <a:p>
-            <a:pPr>
-              <a:spcBef>
-                <a:spcPts val="200"/>
-              </a:spcBef>
-            </a:pPr>
-            <a:r>
-              <a:rPr sz="1200">
-                <a:solidFill>
-                  <a:srgbClr val="E5E7EB"/>
-                </a:solidFill>
-              </a:rPr>
-              <a:t>· description (free-form natural language)</a:t>
-            </a:r>
-          </a:p>
-        </p:txBody>
-      </p:sp>
-      <p:sp>
-        <p:nvSpPr>
-          <p:cNvPr id="14" name="Rectangle 13"/>
-          <p:cNvSpPr/>
-          <p:nvPr/>
-        </p:nvSpPr>
-        <p:spPr>
-          <a:xfrm>
-            <a:off x="5943600" y="3685032"/>
-            <a:ext cx="5852160" cy="2468880"/>
-          </a:xfrm>
-          <a:prstGeom prst="rect">
-            <a:avLst/>
-          </a:prstGeom>
-          <a:solidFill>
-            <a:srgbClr val="2D3748"/>
-          </a:solidFill>
-          <a:ln w="12700">
-            <a:solidFill>
-              <a:srgbClr val="3B82F6"/>
-            </a:solidFill>
-          </a:ln>
-        </p:spPr>
-        <p:style>
-          <a:lnRef idx="1">
-            <a:schemeClr val="accent1"/>
-          </a:lnRef>
-          <a:fillRef idx="3">
-            <a:schemeClr val="accent1"/>
-          </a:fillRef>
-          <a:effectRef idx="2">
-            <a:schemeClr val="accent1"/>
-          </a:effectRef>
-          <a:fontRef idx="minor">
-            <a:schemeClr val="lt1"/>
-          </a:fontRef>
-        </p:style>
-        <p:txBody>
-          <a:bodyPr rtlCol="0" anchor="ctr"/>
-          <a:lstStyle/>
-          <a:p>
-            <a:pPr algn="ctr"/>
-          </a:p>
-        </p:txBody>
-      </p:sp>
-      <p:sp>
-        <p:nvSpPr>
-          <p:cNvPr id="15" name="TextBox 14"/>
-          <p:cNvSpPr txBox="1"/>
-          <p:nvPr/>
-        </p:nvSpPr>
-        <p:spPr>
-          <a:xfrm>
-            <a:off x="6080760" y="3776472"/>
-            <a:ext cx="5577840" cy="256032"/>
-          </a:xfrm>
-          <a:prstGeom prst="rect">
-            <a:avLst/>
-          </a:prstGeom>
-          <a:noFill/>
-        </p:spPr>
-        <p:txBody>
-          <a:bodyPr wrap="square">
-            <a:spAutoFit/>
-          </a:bodyPr>
-          <a:lstStyle/>
-          <a:p>
-            <a:pPr algn="l"/>
-            <a:r>
-              <a:rPr sz="1100" b="1" i="0">
-                <a:solidFill>
-                  <a:srgbClr val="3B82F6"/>
-                </a:solidFill>
-              </a:rPr>
-              <a:t>OUTPUTS</a:t>
-            </a:r>
-          </a:p>
-        </p:txBody>
-      </p:sp>
-      <p:sp>
-        <p:nvSpPr>
-          <p:cNvPr id="16" name="TextBox 15"/>
-          <p:cNvSpPr txBox="1"/>
-          <p:nvPr/>
-        </p:nvSpPr>
-        <p:spPr>
-          <a:xfrm>
-            <a:off x="6080760" y="4050792"/>
-            <a:ext cx="5577840" cy="2011680"/>
-          </a:xfrm>
-          <a:prstGeom prst="rect">
-            <a:avLst/>
-          </a:prstGeom>
-          <a:noFill/>
-        </p:spPr>
-        <p:txBody>
-          <a:bodyPr wrap="square">
-            <a:spAutoFit/>
-          </a:bodyPr>
-          <a:lstStyle/>
-          <a:p>
-            <a:pPr>
-              <a:spcBef>
-                <a:spcPts val="200"/>
-              </a:spcBef>
-            </a:pPr>
-            <a:r>
-              <a:rPr sz="1200">
-                <a:solidFill>
-                  <a:srgbClr val="E5E7EB"/>
-                </a:solidFill>
-              </a:rPr>
-              <a:t>· project_type  (e.g. 'highway', 'pipeline', 'solar farm')</a:t>
-            </a:r>
-          </a:p>
-          <a:p>
-            <a:pPr>
-              <a:spcBef>
-                <a:spcPts val="200"/>
-              </a:spcBef>
-            </a:pPr>
-            <a:r>
-              <a:rPr sz="1200">
-                <a:solidFill>
-                  <a:srgbClr val="E5E7EB"/>
-                </a:solidFill>
-              </a:rPr>
-              <a:t>· scale  (small / medium / large)</a:t>
-            </a:r>
-          </a:p>
-          <a:p>
-            <a:pPr>
-              <a:spcBef>
-                <a:spcPts val="200"/>
-              </a:spcBef>
-            </a:pPr>
-            <a:r>
-              <a:rPr sz="1200">
-                <a:solidFill>
-                  <a:srgbClr val="E5E7EB"/>
-                </a:solidFill>
-              </a:rPr>
-              <a:t>· location  (city, county, state)</a:t>
-            </a:r>
-          </a:p>
-          <a:p>
-            <a:pPr>
-              <a:spcBef>
-                <a:spcPts val="200"/>
-              </a:spcBef>
-            </a:pPr>
-            <a:r>
-              <a:rPr sz="1200">
-                <a:solidFill>
-                  <a:srgbClr val="E5E7EB"/>
-                </a:solidFill>
-              </a:rPr>
-              <a:t>· actions  (list of distinct project activities)</a:t>
-            </a:r>
-          </a:p>
-          <a:p>
-            <a:pPr>
-              <a:spcBef>
-                <a:spcPts val="200"/>
-              </a:spcBef>
-            </a:pPr>
-            <a:r>
-              <a:rPr sz="1200">
-                <a:solidFill>
-                  <a:srgbClr val="E5E7EB"/>
-                </a:solidFill>
-              </a:rPr>
-              <a:t>· duration  (construction + operation timeline)</a:t>
-            </a:r>
-          </a:p>
-          <a:p>
-            <a:pPr>
-              <a:spcBef>
-                <a:spcPts val="200"/>
-              </a:spcBef>
-            </a:pPr>
-            <a:r>
-              <a:rPr sz="1200">
-                <a:solidFill>
-                  <a:srgbClr val="E5E7EB"/>
-                </a:solidFill>
-              </a:rPr>
-              <a:t>· federal_nexus  (boolean — triggers NEPA applicability)</a:t>
-            </a:r>
-          </a:p>
-        </p:txBody>
-      </p:sp>
-      <p:sp>
-        <p:nvSpPr>
-          <p:cNvPr id="17" name="TextBox 16"/>
-          <p:cNvSpPr txBox="1"/>
-          <p:nvPr/>
-        </p:nvSpPr>
-        <p:spPr>
-          <a:xfrm>
-            <a:off x="548640" y="6446520"/>
-            <a:ext cx="11064240" cy="320040"/>
-          </a:xfrm>
-          <a:prstGeom prst="rect">
-            <a:avLst/>
-          </a:prstGeom>
-          <a:noFill/>
-        </p:spPr>
-        <p:txBody>
-          <a:bodyPr wrap="square">
-            <a:spAutoFit/>
-          </a:bodyPr>
-          <a:lstStyle/>
-          <a:p>
-            <a:pPr algn="l"/>
-            <a:r>
-              <a:rPr sz="1100" b="0" i="1">
-                <a:solidFill>
-                  <a:srgbClr val="F97316"/>
-                </a:solidFill>
-              </a:rPr>
-              <a:t>⚑  Output feeds the impact matrix column headers (project actions) and scopes all downstream API queries.</a:t>
-            </a:r>
-          </a:p>
-        </p:txBody>
-      </p:sp>
-    </p:spTree>
-  </p:cSld>
-  <p:clrMapOvr>
-    <a:masterClrMapping/>
-  </p:clrMapOvr>
-</p:sld>
-</file>
-
 <file path=ppt/slides/slide5.xml><?xml version="1.0" encoding="utf-8"?>
 <p:sld xmlns:a="http://schemas.openxmlformats.org/drawingml/2006/main" xmlns:p="http://schemas.openxmlformats.org/presentationml/2006/main" xmlns:r="http://schemas.openxmlformats.org/officeDocument/2006/relationships">
   <p:cSld>
@@ -19500,746 +15063,6 @@
 </p:sld>
 </file>
 
-<file path=ppt/slides/slide6.xml><?xml version="1.0" encoding="utf-8"?>
-<p:sld xmlns:a="http://schemas.openxmlformats.org/drawingml/2006/main" xmlns:p="http://schemas.openxmlformats.org/presentationml/2006/main" xmlns:r="http://schemas.openxmlformats.org/officeDocument/2006/relationships">
-  <p:cSld>
-    <p:bg>
-      <p:bgPr>
-        <a:solidFill>
-          <a:srgbClr val="1F2833"/>
-        </a:solidFill>
-        <a:effectLst/>
-      </p:bgPr>
-    </p:bg>
-    <p:spTree>
-      <p:nvGrpSpPr>
-        <p:cNvPr id="1" name=""/>
-        <p:cNvGrpSpPr/>
-        <p:nvPr/>
-      </p:nvGrpSpPr>
-      <p:grpSpPr/>
-      <p:sp>
-        <p:nvSpPr>
-          <p:cNvPr id="2" name="Text Placeholder 1"/>
-          <p:cNvSpPr>
-            <a:spLocks noGrp="1"/>
-          </p:cNvSpPr>
-          <p:nvPr>
-            <p:ph type="body" idx="10" sz="quarter"/>
-          </p:nvPr>
-        </p:nvSpPr>
-        <p:spPr/>
-        <p:txBody>
-          <a:bodyPr/>
-          <a:lstStyle/>
-          <a:p/>
-        </p:txBody>
-      </p:sp>
-      <p:sp>
-        <p:nvSpPr>
-          <p:cNvPr id="3" name="Rectangle 2"/>
-          <p:cNvSpPr/>
-          <p:nvPr/>
-        </p:nvSpPr>
-        <p:spPr>
-          <a:xfrm>
-            <a:off x="0" y="0"/>
-            <a:ext cx="12188952" cy="73152"/>
-          </a:xfrm>
-          <a:prstGeom prst="rect">
-            <a:avLst/>
-          </a:prstGeom>
-          <a:solidFill>
-            <a:srgbClr val="F97316"/>
-          </a:solidFill>
-        </p:spPr>
-        <p:style>
-          <a:lnRef idx="1">
-            <a:schemeClr val="accent1"/>
-          </a:lnRef>
-          <a:fillRef idx="3">
-            <a:schemeClr val="accent1"/>
-          </a:fillRef>
-          <a:effectRef idx="2">
-            <a:schemeClr val="accent1"/>
-          </a:effectRef>
-          <a:fontRef idx="minor">
-            <a:schemeClr val="lt1"/>
-          </a:fontRef>
-        </p:style>
-        <p:txBody>
-          <a:bodyPr rtlCol="0" anchor="ctr"/>
-          <a:lstStyle/>
-          <a:p>
-            <a:pPr algn="ctr"/>
-          </a:p>
-        </p:txBody>
-      </p:sp>
-      <p:sp>
-        <p:nvSpPr>
-          <p:cNvPr id="4" name="TextBox 3"/>
-          <p:cNvSpPr txBox="1"/>
-          <p:nvPr/>
-        </p:nvSpPr>
-        <p:spPr>
-          <a:xfrm>
-            <a:off x="548640" y="164592"/>
-            <a:ext cx="11430000" cy="685800"/>
-          </a:xfrm>
-          <a:prstGeom prst="rect">
-            <a:avLst/>
-          </a:prstGeom>
-          <a:noFill/>
-        </p:spPr>
-        <p:txBody>
-          <a:bodyPr wrap="square">
-            <a:spAutoFit/>
-          </a:bodyPr>
-          <a:lstStyle/>
-          <a:p>
-            <a:pPr algn="l"/>
-            <a:r>
-              <a:rPr sz="2800" b="1" i="0">
-                <a:solidFill>
-                  <a:srgbClr val="F97316"/>
-                </a:solidFill>
-              </a:rPr>
-              <a:t>Methodology — Agent 2: Environmental Data Agent</a:t>
-            </a:r>
-          </a:p>
-        </p:txBody>
-      </p:sp>
-      <p:sp>
-        <p:nvSpPr>
-          <p:cNvPr id="5" name="Rectangle 4"/>
-          <p:cNvSpPr/>
-          <p:nvPr/>
-        </p:nvSpPr>
-        <p:spPr>
-          <a:xfrm>
-            <a:off x="548640" y="914400"/>
-            <a:ext cx="11064240" cy="18288"/>
-          </a:xfrm>
-          <a:prstGeom prst="rect">
-            <a:avLst/>
-          </a:prstGeom>
-          <a:solidFill>
-            <a:srgbClr val="3D4A5C"/>
-          </a:solidFill>
-        </p:spPr>
-        <p:style>
-          <a:lnRef idx="1">
-            <a:schemeClr val="accent1"/>
-          </a:lnRef>
-          <a:fillRef idx="3">
-            <a:schemeClr val="accent1"/>
-          </a:fillRef>
-          <a:effectRef idx="2">
-            <a:schemeClr val="accent1"/>
-          </a:effectRef>
-          <a:fontRef idx="minor">
-            <a:schemeClr val="lt1"/>
-          </a:fontRef>
-        </p:style>
-        <p:txBody>
-          <a:bodyPr rtlCol="0" anchor="ctr"/>
-          <a:lstStyle/>
-          <a:p>
-            <a:pPr algn="ctr"/>
-          </a:p>
-        </p:txBody>
-      </p:sp>
-      <p:sp>
-        <p:nvSpPr>
-          <p:cNvPr id="6" name="Rectangle 5"/>
-          <p:cNvSpPr/>
-          <p:nvPr/>
-        </p:nvSpPr>
-        <p:spPr>
-          <a:xfrm>
-            <a:off x="548640" y="950976"/>
-            <a:ext cx="11064240" cy="54864"/>
-          </a:xfrm>
-          <a:prstGeom prst="rect">
-            <a:avLst/>
-          </a:prstGeom>
-          <a:solidFill>
-            <a:srgbClr val="06B6D3"/>
-          </a:solidFill>
-        </p:spPr>
-        <p:style>
-          <a:lnRef idx="1">
-            <a:schemeClr val="accent1"/>
-          </a:lnRef>
-          <a:fillRef idx="3">
-            <a:schemeClr val="accent1"/>
-          </a:fillRef>
-          <a:effectRef idx="2">
-            <a:schemeClr val="accent1"/>
-          </a:effectRef>
-          <a:fontRef idx="minor">
-            <a:schemeClr val="lt1"/>
-          </a:fontRef>
-        </p:style>
-        <p:txBody>
-          <a:bodyPr rtlCol="0" anchor="ctr"/>
-          <a:lstStyle/>
-          <a:p>
-            <a:pPr algn="ctr"/>
-          </a:p>
-        </p:txBody>
-      </p:sp>
-      <p:sp>
-        <p:nvSpPr>
-          <p:cNvPr id="7" name="TextBox 6"/>
-          <p:cNvSpPr txBox="1"/>
-          <p:nvPr/>
-        </p:nvSpPr>
-        <p:spPr>
-          <a:xfrm>
-            <a:off x="548640" y="1078992"/>
-            <a:ext cx="5029200" cy="274320"/>
-          </a:xfrm>
-          <a:prstGeom prst="rect">
-            <a:avLst/>
-          </a:prstGeom>
-          <a:noFill/>
-        </p:spPr>
-        <p:txBody>
-          <a:bodyPr wrap="square">
-            <a:spAutoFit/>
-          </a:bodyPr>
-          <a:lstStyle/>
-          <a:p>
-            <a:pPr algn="l"/>
-            <a:r>
-              <a:rPr sz="1100" b="1" i="0">
-                <a:solidFill>
-                  <a:srgbClr val="06B6D3"/>
-                </a:solidFill>
-              </a:rPr>
-              <a:t>WHAT IT DOES</a:t>
-            </a:r>
-          </a:p>
-        </p:txBody>
-      </p:sp>
-      <p:sp>
-        <p:nvSpPr>
-          <p:cNvPr id="8" name="TextBox 7"/>
-          <p:cNvSpPr txBox="1"/>
-          <p:nvPr/>
-        </p:nvSpPr>
-        <p:spPr>
-          <a:xfrm>
-            <a:off x="548640" y="1371600"/>
-            <a:ext cx="5029200" cy="1371600"/>
-          </a:xfrm>
-          <a:prstGeom prst="rect">
-            <a:avLst/>
-          </a:prstGeom>
-          <a:noFill/>
-        </p:spPr>
-        <p:txBody>
-          <a:bodyPr wrap="square">
-            <a:spAutoFit/>
-          </a:bodyPr>
-          <a:lstStyle/>
-          <a:p>
-            <a:pPr algn="l"/>
-            <a:r>
-              <a:rPr sz="1300" b="0" i="0">
-                <a:solidFill>
-                  <a:srgbClr val="E5E7EB"/>
-                </a:solidFill>
-              </a:rPr>
-              <a:t>Queries 5 federal environmental REST APIs using the GPS coordinates from the Project Parser. This is the only non-LLM agent — pure API orchestration with structured response parsing.</a:t>
-            </a:r>
-          </a:p>
-        </p:txBody>
-      </p:sp>
-      <p:sp>
-        <p:nvSpPr>
-          <p:cNvPr id="9" name="TextBox 8"/>
-          <p:cNvSpPr txBox="1"/>
-          <p:nvPr/>
-        </p:nvSpPr>
-        <p:spPr>
-          <a:xfrm>
-            <a:off x="548640" y="2816352"/>
-            <a:ext cx="5029200" cy="274320"/>
-          </a:xfrm>
-          <a:prstGeom prst="rect">
-            <a:avLst/>
-          </a:prstGeom>
-          <a:noFill/>
-        </p:spPr>
-        <p:txBody>
-          <a:bodyPr wrap="square">
-            <a:spAutoFit/>
-          </a:bodyPr>
-          <a:lstStyle/>
-          <a:p>
-            <a:pPr algn="l"/>
-            <a:r>
-              <a:rPr sz="1100" b="1" i="0">
-                <a:solidFill>
-                  <a:srgbClr val="06B6D3"/>
-                </a:solidFill>
-              </a:rPr>
-              <a:t>PROCESSING STEPS</a:t>
-            </a:r>
-          </a:p>
-        </p:txBody>
-      </p:sp>
-      <p:sp>
-        <p:nvSpPr>
-          <p:cNvPr id="10" name="TextBox 9"/>
-          <p:cNvSpPr txBox="1"/>
-          <p:nvPr/>
-        </p:nvSpPr>
-        <p:spPr>
-          <a:xfrm>
-            <a:off x="548640" y="3108960"/>
-            <a:ext cx="5029200" cy="3200400"/>
-          </a:xfrm>
-          <a:prstGeom prst="rect">
-            <a:avLst/>
-          </a:prstGeom>
-          <a:noFill/>
-        </p:spPr>
-        <p:txBody>
-          <a:bodyPr wrap="square">
-            <a:spAutoFit/>
-          </a:bodyPr>
-          <a:lstStyle/>
-          <a:p>
-            <a:pPr>
-              <a:spcBef>
-                <a:spcPts val="300"/>
-              </a:spcBef>
-            </a:pPr>
-            <a:r>
-              <a:rPr sz="1300">
-                <a:solidFill>
-                  <a:srgbClr val="E5E7EB"/>
-                </a:solidFill>
-              </a:rPr>
-              <a:t>  1.  query_usfws — USFWS IPaC API, species by bounding box</a:t>
-            </a:r>
-          </a:p>
-          <a:p>
-            <a:pPr>
-              <a:spcBef>
-                <a:spcPts val="300"/>
-              </a:spcBef>
-            </a:pPr>
-            <a:r>
-              <a:rPr sz="1300">
-                <a:solidFill>
-                  <a:srgbClr val="E5E7EB"/>
-                </a:solidFill>
-              </a:rPr>
-              <a:t>  2.  query_nwi — National Wetlands Inventory WMS/WFS</a:t>
-            </a:r>
-          </a:p>
-          <a:p>
-            <a:pPr>
-              <a:spcBef>
-                <a:spcPts val="300"/>
-              </a:spcBef>
-            </a:pPr>
-            <a:r>
-              <a:rPr sz="1300">
-                <a:solidFill>
-                  <a:srgbClr val="E5E7EB"/>
-                </a:solidFill>
-              </a:rPr>
-              <a:t>  3.  query_fema — FEMA National Flood Hazard Layer REST API</a:t>
-            </a:r>
-          </a:p>
-          <a:p>
-            <a:pPr>
-              <a:spcBef>
-                <a:spcPts val="300"/>
-              </a:spcBef>
-            </a:pPr>
-            <a:r>
-              <a:rPr sz="1300">
-                <a:solidFill>
-                  <a:srgbClr val="E5E7EB"/>
-                </a:solidFill>
-              </a:rPr>
-              <a:t>  4.  query_farmland — USDA Web Soil Survey spatial API</a:t>
-            </a:r>
-          </a:p>
-          <a:p>
-            <a:pPr>
-              <a:spcBef>
-                <a:spcPts val="300"/>
-              </a:spcBef>
-            </a:pPr>
-            <a:r>
-              <a:rPr sz="1300">
-                <a:solidFill>
-                  <a:srgbClr val="E5E7EB"/>
-                </a:solidFill>
-              </a:rPr>
-              <a:t>  5.  query_ejscreen — EPA EJScreen REST API by census block</a:t>
-            </a:r>
-          </a:p>
-        </p:txBody>
-      </p:sp>
-      <p:sp>
-        <p:nvSpPr>
-          <p:cNvPr id="11" name="Rectangle 10"/>
-          <p:cNvSpPr/>
-          <p:nvPr/>
-        </p:nvSpPr>
-        <p:spPr>
-          <a:xfrm>
-            <a:off x="5943600" y="1078992"/>
-            <a:ext cx="5852160" cy="2468880"/>
-          </a:xfrm>
-          <a:prstGeom prst="rect">
-            <a:avLst/>
-          </a:prstGeom>
-          <a:solidFill>
-            <a:srgbClr val="2D3748"/>
-          </a:solidFill>
-          <a:ln w="12700">
-            <a:solidFill>
-              <a:srgbClr val="06B6D3"/>
-            </a:solidFill>
-          </a:ln>
-        </p:spPr>
-        <p:style>
-          <a:lnRef idx="1">
-            <a:schemeClr val="accent1"/>
-          </a:lnRef>
-          <a:fillRef idx="3">
-            <a:schemeClr val="accent1"/>
-          </a:fillRef>
-          <a:effectRef idx="2">
-            <a:schemeClr val="accent1"/>
-          </a:effectRef>
-          <a:fontRef idx="minor">
-            <a:schemeClr val="lt1"/>
-          </a:fontRef>
-        </p:style>
-        <p:txBody>
-          <a:bodyPr rtlCol="0" anchor="ctr"/>
-          <a:lstStyle/>
-          <a:p>
-            <a:pPr algn="ctr"/>
-          </a:p>
-        </p:txBody>
-      </p:sp>
-      <p:sp>
-        <p:nvSpPr>
-          <p:cNvPr id="12" name="TextBox 11"/>
-          <p:cNvSpPr txBox="1"/>
-          <p:nvPr/>
-        </p:nvSpPr>
-        <p:spPr>
-          <a:xfrm>
-            <a:off x="6080760" y="1170432"/>
-            <a:ext cx="5577840" cy="256032"/>
-          </a:xfrm>
-          <a:prstGeom prst="rect">
-            <a:avLst/>
-          </a:prstGeom>
-          <a:noFill/>
-        </p:spPr>
-        <p:txBody>
-          <a:bodyPr wrap="square">
-            <a:spAutoFit/>
-          </a:bodyPr>
-          <a:lstStyle/>
-          <a:p>
-            <a:pPr algn="l"/>
-            <a:r>
-              <a:rPr sz="1100" b="1" i="0">
-                <a:solidFill>
-                  <a:srgbClr val="06B6D3"/>
-                </a:solidFill>
-              </a:rPr>
-              <a:t>INPUTS</a:t>
-            </a:r>
-          </a:p>
-        </p:txBody>
-      </p:sp>
-      <p:sp>
-        <p:nvSpPr>
-          <p:cNvPr id="13" name="TextBox 12"/>
-          <p:cNvSpPr txBox="1"/>
-          <p:nvPr/>
-        </p:nvSpPr>
-        <p:spPr>
-          <a:xfrm>
-            <a:off x="6080760" y="1444752"/>
-            <a:ext cx="5577840" cy="2011680"/>
-          </a:xfrm>
-          <a:prstGeom prst="rect">
-            <a:avLst/>
-          </a:prstGeom>
-          <a:noFill/>
-        </p:spPr>
-        <p:txBody>
-          <a:bodyPr wrap="square">
-            <a:spAutoFit/>
-          </a:bodyPr>
-          <a:lstStyle/>
-          <a:p>
-            <a:pPr>
-              <a:spcBef>
-                <a:spcPts val="200"/>
-              </a:spcBef>
-            </a:pPr>
-            <a:r>
-              <a:rPr sz="1200">
-                <a:solidFill>
-                  <a:srgbClr val="E5E7EB"/>
-                </a:solidFill>
-              </a:rPr>
-              <a:t>· coordinates (from Project Parser output)</a:t>
-            </a:r>
-          </a:p>
-          <a:p>
-            <a:pPr>
-              <a:spcBef>
-                <a:spcPts val="200"/>
-              </a:spcBef>
-            </a:pPr>
-            <a:r>
-              <a:rPr sz="1200">
-                <a:solidFill>
-                  <a:srgbClr val="E5E7EB"/>
-                </a:solidFill>
-              </a:rPr>
-              <a:t>· project_type (to determine buffer radii)</a:t>
-            </a:r>
-          </a:p>
-        </p:txBody>
-      </p:sp>
-      <p:sp>
-        <p:nvSpPr>
-          <p:cNvPr id="14" name="Rectangle 13"/>
-          <p:cNvSpPr/>
-          <p:nvPr/>
-        </p:nvSpPr>
-        <p:spPr>
-          <a:xfrm>
-            <a:off x="5943600" y="3685032"/>
-            <a:ext cx="5852160" cy="2468880"/>
-          </a:xfrm>
-          <a:prstGeom prst="rect">
-            <a:avLst/>
-          </a:prstGeom>
-          <a:solidFill>
-            <a:srgbClr val="2D3748"/>
-          </a:solidFill>
-          <a:ln w="12700">
-            <a:solidFill>
-              <a:srgbClr val="06B6D3"/>
-            </a:solidFill>
-          </a:ln>
-        </p:spPr>
-        <p:style>
-          <a:lnRef idx="1">
-            <a:schemeClr val="accent1"/>
-          </a:lnRef>
-          <a:fillRef idx="3">
-            <a:schemeClr val="accent1"/>
-          </a:fillRef>
-          <a:effectRef idx="2">
-            <a:schemeClr val="accent1"/>
-          </a:effectRef>
-          <a:fontRef idx="minor">
-            <a:schemeClr val="lt1"/>
-          </a:fontRef>
-        </p:style>
-        <p:txBody>
-          <a:bodyPr rtlCol="0" anchor="ctr"/>
-          <a:lstStyle/>
-          <a:p>
-            <a:pPr algn="ctr"/>
-          </a:p>
-        </p:txBody>
-      </p:sp>
-      <p:sp>
-        <p:nvSpPr>
-          <p:cNvPr id="15" name="TextBox 14"/>
-          <p:cNvSpPr txBox="1"/>
-          <p:nvPr/>
-        </p:nvSpPr>
-        <p:spPr>
-          <a:xfrm>
-            <a:off x="6080760" y="3776472"/>
-            <a:ext cx="5577840" cy="256032"/>
-          </a:xfrm>
-          <a:prstGeom prst="rect">
-            <a:avLst/>
-          </a:prstGeom>
-          <a:noFill/>
-        </p:spPr>
-        <p:txBody>
-          <a:bodyPr wrap="square">
-            <a:spAutoFit/>
-          </a:bodyPr>
-          <a:lstStyle/>
-          <a:p>
-            <a:pPr algn="l"/>
-            <a:r>
-              <a:rPr sz="1100" b="1" i="0">
-                <a:solidFill>
-                  <a:srgbClr val="06B6D3"/>
-                </a:solidFill>
-              </a:rPr>
-              <a:t>OUTPUTS</a:t>
-            </a:r>
-          </a:p>
-        </p:txBody>
-      </p:sp>
-      <p:sp>
-        <p:nvSpPr>
-          <p:cNvPr id="16" name="TextBox 15"/>
-          <p:cNvSpPr txBox="1"/>
-          <p:nvPr/>
-        </p:nvSpPr>
-        <p:spPr>
-          <a:xfrm>
-            <a:off x="6080760" y="4050792"/>
-            <a:ext cx="5577840" cy="2011680"/>
-          </a:xfrm>
-          <a:prstGeom prst="rect">
-            <a:avLst/>
-          </a:prstGeom>
-          <a:noFill/>
-        </p:spPr>
-        <p:txBody>
-          <a:bodyPr wrap="square">
-            <a:spAutoFit/>
-          </a:bodyPr>
-          <a:lstStyle/>
-          <a:p>
-            <a:pPr>
-              <a:spcBef>
-                <a:spcPts val="200"/>
-              </a:spcBef>
-            </a:pPr>
-            <a:r>
-              <a:rPr sz="1200">
-                <a:solidFill>
-                  <a:srgbClr val="E5E7EB"/>
-                </a:solidFill>
-              </a:rPr>
-              <a:t>· USFWS IPaC — threatened &amp; endangered species list</a:t>
-            </a:r>
-          </a:p>
-          <a:p>
-            <a:pPr>
-              <a:spcBef>
-                <a:spcPts val="200"/>
-              </a:spcBef>
-            </a:pPr>
-            <a:r>
-              <a:rPr sz="1200">
-                <a:solidFill>
-                  <a:srgbClr val="E5E7EB"/>
-                </a:solidFill>
-              </a:rPr>
-              <a:t>· NWI — wetland polygons within project footprint</a:t>
-            </a:r>
-          </a:p>
-          <a:p>
-            <a:pPr>
-              <a:spcBef>
-                <a:spcPts val="200"/>
-              </a:spcBef>
-            </a:pPr>
-            <a:r>
-              <a:rPr sz="1200">
-                <a:solidFill>
-                  <a:srgbClr val="E5E7EB"/>
-                </a:solidFill>
-              </a:rPr>
-              <a:t>· FEMA NFHL — flood zone designations (AE, X, etc.)</a:t>
-            </a:r>
-          </a:p>
-          <a:p>
-            <a:pPr>
-              <a:spcBef>
-                <a:spcPts val="200"/>
-              </a:spcBef>
-            </a:pPr>
-            <a:r>
-              <a:rPr sz="1200">
-                <a:solidFill>
-                  <a:srgbClr val="E5E7EB"/>
-                </a:solidFill>
-              </a:rPr>
-              <a:t>· USDA — prime farmland and unique farmland presence</a:t>
-            </a:r>
-          </a:p>
-          <a:p>
-            <a:pPr>
-              <a:spcBef>
-                <a:spcPts val="200"/>
-              </a:spcBef>
-            </a:pPr>
-            <a:r>
-              <a:rPr sz="1200">
-                <a:solidFill>
-                  <a:srgbClr val="E5E7EB"/>
-                </a:solidFill>
-              </a:rPr>
-              <a:t>· EJScreen — demographic percentiles, pollution burden index</a:t>
-            </a:r>
-          </a:p>
-        </p:txBody>
-      </p:sp>
-      <p:sp>
-        <p:nvSpPr>
-          <p:cNvPr id="17" name="TextBox 16"/>
-          <p:cNvSpPr txBox="1"/>
-          <p:nvPr/>
-        </p:nvSpPr>
-        <p:spPr>
-          <a:xfrm>
-            <a:off x="548640" y="6446520"/>
-            <a:ext cx="11064240" cy="320040"/>
-          </a:xfrm>
-          <a:prstGeom prst="rect">
-            <a:avLst/>
-          </a:prstGeom>
-          <a:noFill/>
-        </p:spPr>
-        <p:txBody>
-          <a:bodyPr wrap="square">
-            <a:spAutoFit/>
-          </a:bodyPr>
-          <a:lstStyle/>
-          <a:p>
-            <a:pPr algn="l"/>
-            <a:r>
-              <a:rPr sz="1100" b="0" i="1">
-                <a:solidFill>
-                  <a:srgbClr val="F97316"/>
-                </a:solidFill>
-              </a:rPr>
-              <a:t>⚑  No LLM used — deterministic API calls. API errors are caught per-source; partial results still flow downstream.</a:t>
-            </a:r>
-          </a:p>
-        </p:txBody>
-      </p:sp>
-    </p:spTree>
-  </p:cSld>
-  <p:clrMapOvr>
-    <a:masterClrMapping/>
-  </p:clrMapOvr>
-</p:sld>
-</file>
-
 <file path=ppt/slides/slide7.xml><?xml version="1.0" encoding="utf-8"?>
 <p:sld xmlns:a="http://schemas.openxmlformats.org/drawingml/2006/main" xmlns:p="http://schemas.openxmlformats.org/presentationml/2006/main" xmlns:r="http://schemas.openxmlformats.org/officeDocument/2006/relationships">
   <p:cSld>
@@ -20952,4249 +15775,6 @@
                 </a:solidFill>
               </a:rPr>
               <a:t>Model: claude-haiku-4-5  ·  Embedding: text-embedding-3-small  ·  Vector DB: pgvector (HNSW cosine index)</a:t>
-            </a:r>
-          </a:p>
-        </p:txBody>
-      </p:sp>
-    </p:spTree>
-  </p:cSld>
-  <p:clrMapOvr>
-    <a:masterClrMapping/>
-  </p:clrMapOvr>
-</p:sld>
-</file>
-
-<file path=ppt/slides/slide7.xml><?xml version="1.0" encoding="utf-8"?>
-<p:sld xmlns:a="http://schemas.openxmlformats.org/drawingml/2006/main" xmlns:p="http://schemas.openxmlformats.org/presentationml/2006/main" xmlns:r="http://schemas.openxmlformats.org/officeDocument/2006/relationships">
-  <p:cSld>
-    <p:bg>
-      <p:bgPr>
-        <a:solidFill>
-          <a:srgbClr val="1F2833"/>
-        </a:solidFill>
-        <a:effectLst/>
-      </p:bgPr>
-    </p:bg>
-    <p:spTree>
-      <p:nvGrpSpPr>
-        <p:cNvPr id="1" name=""/>
-        <p:cNvGrpSpPr/>
-        <p:nvPr/>
-      </p:nvGrpSpPr>
-      <p:grpSpPr/>
-      <p:sp>
-        <p:nvSpPr>
-          <p:cNvPr id="2" name="Text Placeholder 1"/>
-          <p:cNvSpPr>
-            <a:spLocks noGrp="1"/>
-          </p:cNvSpPr>
-          <p:nvPr>
-            <p:ph type="body" idx="10" sz="quarter"/>
-          </p:nvPr>
-        </p:nvSpPr>
-        <p:spPr/>
-        <p:txBody>
-          <a:bodyPr/>
-          <a:lstStyle/>
-          <a:p/>
-        </p:txBody>
-      </p:sp>
-      <p:sp>
-        <p:nvSpPr>
-          <p:cNvPr id="3" name="Rectangle 2"/>
-          <p:cNvSpPr/>
-          <p:nvPr/>
-        </p:nvSpPr>
-        <p:spPr>
-          <a:xfrm>
-            <a:off x="0" y="0"/>
-            <a:ext cx="12188952" cy="73152"/>
-          </a:xfrm>
-          <a:prstGeom prst="rect">
-            <a:avLst/>
-          </a:prstGeom>
-          <a:solidFill>
-            <a:srgbClr val="F97316"/>
-          </a:solidFill>
-        </p:spPr>
-        <p:style>
-          <a:lnRef idx="1">
-            <a:schemeClr val="accent1"/>
-          </a:lnRef>
-          <a:fillRef idx="3">
-            <a:schemeClr val="accent1"/>
-          </a:fillRef>
-          <a:effectRef idx="2">
-            <a:schemeClr val="accent1"/>
-          </a:effectRef>
-          <a:fontRef idx="minor">
-            <a:schemeClr val="lt1"/>
-          </a:fontRef>
-        </p:style>
-        <p:txBody>
-          <a:bodyPr rtlCol="0" anchor="ctr"/>
-          <a:lstStyle/>
-          <a:p>
-            <a:pPr algn="ctr"/>
-          </a:p>
-        </p:txBody>
-      </p:sp>
-      <p:sp>
-        <p:nvSpPr>
-          <p:cNvPr id="4" name="TextBox 3"/>
-          <p:cNvSpPr txBox="1"/>
-          <p:nvPr/>
-        </p:nvSpPr>
-        <p:spPr>
-          <a:xfrm>
-            <a:off x="548640" y="164592"/>
-            <a:ext cx="11430000" cy="685800"/>
-          </a:xfrm>
-          <a:prstGeom prst="rect">
-            <a:avLst/>
-          </a:prstGeom>
-          <a:noFill/>
-        </p:spPr>
-        <p:txBody>
-          <a:bodyPr wrap="square">
-            <a:spAutoFit/>
-          </a:bodyPr>
-          <a:lstStyle/>
-          <a:p>
-            <a:pPr algn="l"/>
-            <a:r>
-              <a:rPr sz="2800" b="1" i="0">
-                <a:solidFill>
-                  <a:srgbClr val="F97316"/>
-                </a:solidFill>
-              </a:rPr>
-              <a:t>Methodology — Agent 3: Regulatory Screening (RAG)</a:t>
-            </a:r>
-          </a:p>
-        </p:txBody>
-      </p:sp>
-      <p:sp>
-        <p:nvSpPr>
-          <p:cNvPr id="5" name="Rectangle 4"/>
-          <p:cNvSpPr/>
-          <p:nvPr/>
-        </p:nvSpPr>
-        <p:spPr>
-          <a:xfrm>
-            <a:off x="548640" y="914400"/>
-            <a:ext cx="11064240" cy="18288"/>
-          </a:xfrm>
-          <a:prstGeom prst="rect">
-            <a:avLst/>
-          </a:prstGeom>
-          <a:solidFill>
-            <a:srgbClr val="3D4A5C"/>
-          </a:solidFill>
-        </p:spPr>
-        <p:style>
-          <a:lnRef idx="1">
-            <a:schemeClr val="accent1"/>
-          </a:lnRef>
-          <a:fillRef idx="3">
-            <a:schemeClr val="accent1"/>
-          </a:fillRef>
-          <a:effectRef idx="2">
-            <a:schemeClr val="accent1"/>
-          </a:effectRef>
-          <a:fontRef idx="minor">
-            <a:schemeClr val="lt1"/>
-          </a:fontRef>
-        </p:style>
-        <p:txBody>
-          <a:bodyPr rtlCol="0" anchor="ctr"/>
-          <a:lstStyle/>
-          <a:p>
-            <a:pPr algn="ctr"/>
-          </a:p>
-        </p:txBody>
-      </p:sp>
-      <p:sp>
-        <p:nvSpPr>
-          <p:cNvPr id="6" name="Rectangle 5"/>
-          <p:cNvSpPr/>
-          <p:nvPr/>
-        </p:nvSpPr>
-        <p:spPr>
-          <a:xfrm>
-            <a:off x="548640" y="950976"/>
-            <a:ext cx="11064240" cy="54864"/>
-          </a:xfrm>
-          <a:prstGeom prst="rect">
-            <a:avLst/>
-          </a:prstGeom>
-          <a:solidFill>
-            <a:srgbClr val="22C55E"/>
-          </a:solidFill>
-        </p:spPr>
-        <p:style>
-          <a:lnRef idx="1">
-            <a:schemeClr val="accent1"/>
-          </a:lnRef>
-          <a:fillRef idx="3">
-            <a:schemeClr val="accent1"/>
-          </a:fillRef>
-          <a:effectRef idx="2">
-            <a:schemeClr val="accent1"/>
-          </a:effectRef>
-          <a:fontRef idx="minor">
-            <a:schemeClr val="lt1"/>
-          </a:fontRef>
-        </p:style>
-        <p:txBody>
-          <a:bodyPr rtlCol="0" anchor="ctr"/>
-          <a:lstStyle/>
-          <a:p>
-            <a:pPr algn="ctr"/>
-          </a:p>
-        </p:txBody>
-      </p:sp>
-      <p:sp>
-        <p:nvSpPr>
-          <p:cNvPr id="7" name="TextBox 6"/>
-          <p:cNvSpPr txBox="1"/>
-          <p:nvPr/>
-        </p:nvSpPr>
-        <p:spPr>
-          <a:xfrm>
-            <a:off x="548640" y="1078992"/>
-            <a:ext cx="11064240" cy="548640"/>
-          </a:xfrm>
-          <a:prstGeom prst="rect">
-            <a:avLst/>
-          </a:prstGeom>
-          <a:noFill/>
-        </p:spPr>
-        <p:txBody>
-          <a:bodyPr wrap="square">
-            <a:spAutoFit/>
-          </a:bodyPr>
-          <a:lstStyle/>
-          <a:p>
-            <a:pPr algn="l"/>
-            <a:r>
-              <a:rPr sz="1300" b="0" i="0">
-                <a:solidFill>
-                  <a:srgbClr val="E5E7EB"/>
-                </a:solidFill>
-              </a:rPr>
-              <a:t>Retrieves applicable NEPA regulations using Retrieval-Augmented Generation (RAG) over an indexed corpus of federal CFR parts and state environmental codes.</a:t>
-            </a:r>
-          </a:p>
-        </p:txBody>
-      </p:sp>
-      <p:sp>
-        <p:nvSpPr>
-          <p:cNvPr id="8" name="Rectangle 7"/>
-          <p:cNvSpPr/>
-          <p:nvPr/>
-        </p:nvSpPr>
-        <p:spPr>
-          <a:xfrm>
-            <a:off x="548640" y="1737360"/>
-            <a:ext cx="5303520" cy="329184"/>
-          </a:xfrm>
-          <a:prstGeom prst="rect">
-            <a:avLst/>
-          </a:prstGeom>
-          <a:solidFill>
-            <a:srgbClr val="2D3748"/>
-          </a:solidFill>
-        </p:spPr>
-        <p:style>
-          <a:lnRef idx="1">
-            <a:schemeClr val="accent1"/>
-          </a:lnRef>
-          <a:fillRef idx="3">
-            <a:schemeClr val="accent1"/>
-          </a:fillRef>
-          <a:effectRef idx="2">
-            <a:schemeClr val="accent1"/>
-          </a:effectRef>
-          <a:fontRef idx="minor">
-            <a:schemeClr val="lt1"/>
-          </a:fontRef>
-        </p:style>
-        <p:txBody>
-          <a:bodyPr rtlCol="0" anchor="ctr"/>
-          <a:lstStyle/>
-          <a:p>
-            <a:pPr algn="ctr"/>
-          </a:p>
-        </p:txBody>
-      </p:sp>
-      <p:sp>
-        <p:nvSpPr>
-          <p:cNvPr id="9" name="TextBox 8"/>
-          <p:cNvSpPr txBox="1"/>
-          <p:nvPr/>
-        </p:nvSpPr>
-        <p:spPr>
-          <a:xfrm>
-            <a:off x="640080" y="1764792"/>
-            <a:ext cx="5303520" cy="274320"/>
-          </a:xfrm>
-          <a:prstGeom prst="rect">
-            <a:avLst/>
-          </a:prstGeom>
-          <a:noFill/>
-        </p:spPr>
-        <p:txBody>
-          <a:bodyPr wrap="square">
-            <a:spAutoFit/>
-          </a:bodyPr>
-          <a:lstStyle/>
-          <a:p>
-            <a:pPr algn="l"/>
-            <a:r>
-              <a:rPr sz="1200" b="1" i="0">
-                <a:solidFill>
-                  <a:srgbClr val="06B6D3"/>
-                </a:solidFill>
-              </a:rPr>
-              <a:t>INGESTION PIPELINE</a:t>
-            </a:r>
-          </a:p>
-        </p:txBody>
-      </p:sp>
-      <p:sp>
-        <p:nvSpPr>
-          <p:cNvPr id="10" name="TextBox 9"/>
-          <p:cNvSpPr txBox="1"/>
-          <p:nvPr/>
-        </p:nvSpPr>
-        <p:spPr>
-          <a:xfrm>
-            <a:off x="548640" y="2121408"/>
-            <a:ext cx="5303520" cy="4389120"/>
-          </a:xfrm>
-          <a:prstGeom prst="rect">
-            <a:avLst/>
-          </a:prstGeom>
-          <a:noFill/>
-        </p:spPr>
-        <p:txBody>
-          <a:bodyPr wrap="square">
-            <a:spAutoFit/>
-          </a:bodyPr>
-          <a:lstStyle/>
-          <a:p>
-            <a:pPr>
-              <a:spcBef>
-                <a:spcPts val="300"/>
-              </a:spcBef>
-            </a:pPr>
-            <a:r>
-              <a:rPr sz="1400" b="1">
-                <a:solidFill>
-                  <a:srgbClr val="FFFFFF"/>
-                </a:solidFill>
-              </a:rPr>
-              <a:t>▸ PDF uploads via /api/regulations/sources</a:t>
-            </a:r>
-          </a:p>
-          <a:p>
-            <a:pPr>
-              <a:spcBef>
-                <a:spcPts val="300"/>
-              </a:spcBef>
-            </a:pPr>
-            <a:r>
-              <a:rPr sz="1200" b="0">
-                <a:solidFill>
-                  <a:srgbClr val="E5E7EB"/>
-                </a:solidFill>
-              </a:rPr>
-              <a:t>    · Federal CFR/statute PDFs, Pennsylvania Code</a:t>
-            </a:r>
-          </a:p>
-          <a:p>
-            <a:pPr>
-              <a:spcBef>
-                <a:spcPts val="300"/>
-              </a:spcBef>
-            </a:pPr>
-            <a:r>
-              <a:rPr sz="1400" b="1">
-                <a:solidFill>
-                  <a:srgbClr val="FFFFFF"/>
-                </a:solidFill>
-              </a:rPr>
-              <a:t>▸ eCFR live XML via /api/regulations/sources/ecfr</a:t>
-            </a:r>
-          </a:p>
-          <a:p>
-            <a:pPr>
-              <a:spcBef>
-                <a:spcPts val="300"/>
-              </a:spcBef>
-            </a:pPr>
-            <a:r>
-              <a:rPr sz="1200" b="0">
-                <a:solidFill>
-                  <a:srgbClr val="E5E7EB"/>
-                </a:solidFill>
-              </a:rPr>
-              <a:t>    · Versioner API fetches any CFR title+part by date</a:t>
-            </a:r>
-          </a:p>
-          <a:p>
-            <a:pPr>
-              <a:spcBef>
-                <a:spcPts val="300"/>
-              </a:spcBef>
-            </a:pPr>
-            <a:r>
-              <a:rPr sz="1400" b="1">
-                <a:solidFill>
-                  <a:srgbClr val="FFFFFF"/>
-                </a:solidFill>
-              </a:rPr>
-              <a:t>▸ Parsed → chunked → embedded → pgvector</a:t>
-            </a:r>
-          </a:p>
-          <a:p>
-            <a:pPr>
-              <a:spcBef>
-                <a:spcPts val="300"/>
-              </a:spcBef>
-            </a:pPr>
-            <a:r>
-              <a:rPr sz="1200" b="0">
-                <a:solidFill>
-                  <a:srgbClr val="E5E7EB"/>
-                </a:solidFill>
-              </a:rPr>
-              <a:t>    · HNSW cosine index for sub-millisecond ANN retrieval</a:t>
-            </a:r>
-          </a:p>
-          <a:p>
-            <a:pPr>
-              <a:spcBef>
-                <a:spcPts val="300"/>
-              </a:spcBef>
-            </a:pPr>
-            <a:r>
-              <a:rPr sz="1400" b="1">
-                <a:solidFill>
-                  <a:srgbClr val="FFFFFF"/>
-                </a:solidFill>
-              </a:rPr>
-              <a:t>▸ Sources assigned to specific projects via UI</a:t>
-            </a:r>
-          </a:p>
-          <a:p>
-            <a:pPr>
-              <a:spcBef>
-                <a:spcPts val="300"/>
-              </a:spcBef>
-            </a:pPr>
-            <a:r>
-              <a:rPr sz="1200" b="0">
-                <a:solidFill>
-                  <a:srgbClr val="E5E7EB"/>
-                </a:solidFill>
-              </a:rPr>
-              <a:t>    · Agent restricts retrieval to project-assigned sources</a:t>
-            </a:r>
-          </a:p>
-        </p:txBody>
-      </p:sp>
-      <p:sp>
-        <p:nvSpPr>
-          <p:cNvPr id="11" name="Rectangle 10"/>
-          <p:cNvSpPr/>
-          <p:nvPr/>
-        </p:nvSpPr>
-        <p:spPr>
-          <a:xfrm>
-            <a:off x="6400800" y="1737360"/>
-            <a:ext cx="5303520" cy="329184"/>
-          </a:xfrm>
-          <a:prstGeom prst="rect">
-            <a:avLst/>
-          </a:prstGeom>
-          <a:solidFill>
-            <a:srgbClr val="2D3748"/>
-          </a:solidFill>
-        </p:spPr>
-        <p:style>
-          <a:lnRef idx="1">
-            <a:schemeClr val="accent1"/>
-          </a:lnRef>
-          <a:fillRef idx="3">
-            <a:schemeClr val="accent1"/>
-          </a:fillRef>
-          <a:effectRef idx="2">
-            <a:schemeClr val="accent1"/>
-          </a:effectRef>
-          <a:fontRef idx="minor">
-            <a:schemeClr val="lt1"/>
-          </a:fontRef>
-        </p:style>
-        <p:txBody>
-          <a:bodyPr rtlCol="0" anchor="ctr"/>
-          <a:lstStyle/>
-          <a:p>
-            <a:pPr algn="ctr"/>
-          </a:p>
-        </p:txBody>
-      </p:sp>
-      <p:sp>
-        <p:nvSpPr>
-          <p:cNvPr id="12" name="TextBox 11"/>
-          <p:cNvSpPr txBox="1"/>
-          <p:nvPr/>
-        </p:nvSpPr>
-        <p:spPr>
-          <a:xfrm>
-            <a:off x="6492240" y="1764792"/>
-            <a:ext cx="5303520" cy="274320"/>
-          </a:xfrm>
-          <a:prstGeom prst="rect">
-            <a:avLst/>
-          </a:prstGeom>
-          <a:noFill/>
-        </p:spPr>
-        <p:txBody>
-          <a:bodyPr wrap="square">
-            <a:spAutoFit/>
-          </a:bodyPr>
-          <a:lstStyle/>
-          <a:p>
-            <a:pPr algn="l"/>
-            <a:r>
-              <a:rPr sz="1200" b="1" i="0">
-                <a:solidFill>
-                  <a:srgbClr val="22C55E"/>
-                </a:solidFill>
-              </a:rPr>
-              <a:t>RUNTIME RETRIEVAL</a:t>
-            </a:r>
-          </a:p>
-        </p:txBody>
-      </p:sp>
-      <p:sp>
-        <p:nvSpPr>
-          <p:cNvPr id="13" name="TextBox 12"/>
-          <p:cNvSpPr txBox="1"/>
-          <p:nvPr/>
-        </p:nvSpPr>
-        <p:spPr>
-          <a:xfrm>
-            <a:off x="6400800" y="2121408"/>
-            <a:ext cx="5303520" cy="4389120"/>
-          </a:xfrm>
-          <a:prstGeom prst="rect">
-            <a:avLst/>
-          </a:prstGeom>
-          <a:noFill/>
-        </p:spPr>
-        <p:txBody>
-          <a:bodyPr wrap="square">
-            <a:spAutoFit/>
-          </a:bodyPr>
-          <a:lstStyle/>
-          <a:p>
-            <a:pPr>
-              <a:spcBef>
-                <a:spcPts val="300"/>
-              </a:spcBef>
-            </a:pPr>
-            <a:r>
-              <a:rPr sz="1400" b="1">
-                <a:solidFill>
-                  <a:srgbClr val="FFFFFF"/>
-                </a:solidFill>
-              </a:rPr>
-              <a:t>▸ Project context string embedded by LLM</a:t>
-            </a:r>
-          </a:p>
-          <a:p>
-            <a:pPr>
-              <a:spcBef>
-                <a:spcPts val="300"/>
-              </a:spcBef>
-            </a:pPr>
-            <a:r>
-              <a:rPr sz="1200" b="0">
-                <a:solidFill>
-                  <a:srgbClr val="FFFFFF"/>
-                </a:solidFill>
-              </a:rPr>
-              <a:t>    · Top-K similarity search scoped to project sources</a:t>
-            </a:r>
-          </a:p>
-          <a:p>
-            <a:pPr>
-              <a:spcBef>
-                <a:spcPts val="300"/>
-              </a:spcBef>
-            </a:pPr>
-            <a:r>
-              <a:rPr sz="1400" b="1">
-                <a:solidFill>
-                  <a:srgbClr val="E5E7EB"/>
-                </a:solidFill>
-              </a:rPr>
-              <a:t>▸ Falls back to all sources if none assigned</a:t>
-            </a:r>
-          </a:p>
-          <a:p>
-            <a:pPr>
-              <a:spcBef>
-                <a:spcPts val="300"/>
-              </a:spcBef>
-            </a:pPr>
-            <a:r>
-              <a:rPr sz="1200" b="0">
-                <a:solidFill>
-                  <a:srgbClr val="FFFFFF"/>
-                </a:solidFill>
-              </a:rPr>
-              <a:t>    · LLM reasons over chunks → identifies regulations</a:t>
-            </a:r>
-          </a:p>
-          <a:p>
-            <a:pPr>
-              <a:spcBef>
-                <a:spcPts val="300"/>
-              </a:spcBef>
-            </a:pPr>
-            <a:r>
-              <a:rPr sz="1400" b="1">
-                <a:solidFill>
-                  <a:srgbClr val="E5E7EB"/>
-                </a:solidFill>
-              </a:rPr>
-              <a:t>▸ Outputs name, citation, jurisdiction, why triggered</a:t>
-            </a:r>
-          </a:p>
-          <a:p>
-            <a:pPr>
-              <a:spcBef>
-                <a:spcPts val="300"/>
-              </a:spcBef>
-            </a:pPr>
-            <a:r>
-              <a:rPr sz="1200" b="0">
-                <a:solidFill>
-                  <a:srgbClr val="FFFFFF"/>
-                </a:solidFill>
-              </a:rPr>
-              <a:t>    · Result feeds directly into Impact Analysis prompt</a:t>
-            </a:r>
-          </a:p>
-          <a:p>
-            <a:pPr>
-              <a:spcBef>
-                <a:spcPts val="300"/>
-              </a:spcBef>
-            </a:pPr>
-            <a:r>
-              <a:rPr sz="1400" b="1">
-                <a:solidFill>
-                  <a:srgbClr val="E5E7EB"/>
-                </a:solidFill>
-              </a:rPr>
-              <a:t>▸ Every impact cell carries explicit regulation citation</a:t>
-            </a:r>
-          </a:p>
-        </p:txBody>
-      </p:sp>
-      <p:sp>
-        <p:nvSpPr>
-          <p:cNvPr id="14" name="Rectangle 13"/>
-          <p:cNvSpPr/>
-          <p:nvPr/>
-        </p:nvSpPr>
-        <p:spPr>
-          <a:xfrm>
-            <a:off x="548640" y="6446520"/>
-            <a:ext cx="11064240" cy="320040"/>
-          </a:xfrm>
-          <a:prstGeom prst="rect">
-            <a:avLst/>
-          </a:prstGeom>
-          <a:solidFill>
-            <a:srgbClr val="2D3748"/>
-          </a:solidFill>
-        </p:spPr>
-        <p:style>
-          <a:lnRef idx="1">
-            <a:schemeClr val="accent1"/>
-          </a:lnRef>
-          <a:fillRef idx="3">
-            <a:schemeClr val="accent1"/>
-          </a:fillRef>
-          <a:effectRef idx="2">
-            <a:schemeClr val="accent1"/>
-          </a:effectRef>
-          <a:fontRef idx="minor">
-            <a:schemeClr val="lt1"/>
-          </a:fontRef>
-        </p:style>
-        <p:txBody>
-          <a:bodyPr rtlCol="0" anchor="ctr"/>
-          <a:lstStyle/>
-          <a:p>
-            <a:pPr algn="ctr"/>
-          </a:p>
-        </p:txBody>
-      </p:sp>
-      <p:sp>
-        <p:nvSpPr>
-          <p:cNvPr id="15" name="TextBox 14"/>
-          <p:cNvSpPr txBox="1"/>
-          <p:nvPr/>
-        </p:nvSpPr>
-        <p:spPr>
-          <a:xfrm>
-            <a:off x="685800" y="6473952"/>
-            <a:ext cx="10789920" cy="256032"/>
-          </a:xfrm>
-          <a:prstGeom prst="rect">
-            <a:avLst/>
-          </a:prstGeom>
-          <a:noFill/>
-        </p:spPr>
-        <p:txBody>
-          <a:bodyPr wrap="square">
-            <a:spAutoFit/>
-          </a:bodyPr>
-          <a:lstStyle/>
-          <a:p>
-            <a:pPr algn="l"/>
-            <a:r>
-              <a:rPr sz="1100" b="0" i="0">
-                <a:solidFill>
-                  <a:srgbClr val="E5E7EB"/>
-                </a:solidFill>
-              </a:rPr>
-              <a:t>Model: claude-haiku-4-5  ·  Embedding: text-embedding-3-small  ·  Vector DB: pgvector (HNSW cosine index)</a:t>
-            </a:r>
-          </a:p>
-        </p:txBody>
-      </p:sp>
-    </p:spTree>
-  </p:cSld>
-  <p:clrMapOvr>
-    <a:masterClrMapping/>
-  </p:clrMapOvr>
-</p:sld>
-</file>
-
-<file path=ppt/slides/slide8.xml><?xml version="1.0" encoding="utf-8"?>
-<p:sld xmlns:a="http://schemas.openxmlformats.org/drawingml/2006/main" xmlns:p="http://schemas.openxmlformats.org/presentationml/2006/main" xmlns:r="http://schemas.openxmlformats.org/officeDocument/2006/relationships">
-  <p:cSld>
-    <p:bg>
-      <p:bgPr>
-        <a:solidFill>
-          <a:srgbClr val="1F2833"/>
-        </a:solidFill>
-        <a:effectLst/>
-      </p:bgPr>
-    </p:bg>
-    <p:spTree>
-      <p:nvGrpSpPr>
-        <p:cNvPr id="1" name=""/>
-        <p:cNvGrpSpPr/>
-        <p:nvPr/>
-      </p:nvGrpSpPr>
-      <p:grpSpPr/>
-      <p:sp>
-        <p:nvSpPr>
-          <p:cNvPr id="2" name="Text Placeholder 1"/>
-          <p:cNvSpPr>
-            <a:spLocks noGrp="1"/>
-          </p:cNvSpPr>
-          <p:nvPr>
-            <p:ph type="body" idx="10" sz="quarter"/>
-          </p:nvPr>
-        </p:nvSpPr>
-        <p:spPr/>
-        <p:txBody>
-          <a:bodyPr/>
-          <a:lstStyle/>
-          <a:p/>
-        </p:txBody>
-      </p:sp>
-      <p:sp>
-        <p:nvSpPr>
-          <p:cNvPr id="3" name="Rectangle 2"/>
-          <p:cNvSpPr/>
-          <p:nvPr/>
-        </p:nvSpPr>
-        <p:spPr>
-          <a:xfrm>
-            <a:off x="0" y="0"/>
-            <a:ext cx="12188952" cy="73152"/>
-          </a:xfrm>
-          <a:prstGeom prst="rect">
-            <a:avLst/>
-          </a:prstGeom>
-          <a:solidFill>
-            <a:srgbClr val="F97316"/>
-          </a:solidFill>
-        </p:spPr>
-        <p:style>
-          <a:lnRef idx="1">
-            <a:schemeClr val="accent1"/>
-          </a:lnRef>
-          <a:fillRef idx="3">
-            <a:schemeClr val="accent1"/>
-          </a:fillRef>
-          <a:effectRef idx="2">
-            <a:schemeClr val="accent1"/>
-          </a:effectRef>
-          <a:fontRef idx="minor">
-            <a:schemeClr val="lt1"/>
-          </a:fontRef>
-        </p:style>
-        <p:txBody>
-          <a:bodyPr rtlCol="0" anchor="ctr"/>
-          <a:lstStyle/>
-          <a:p>
-            <a:pPr algn="ctr"/>
-          </a:p>
-        </p:txBody>
-      </p:sp>
-      <p:sp>
-        <p:nvSpPr>
-          <p:cNvPr id="4" name="TextBox 3"/>
-          <p:cNvSpPr txBox="1"/>
-          <p:nvPr/>
-        </p:nvSpPr>
-        <p:spPr>
-          <a:xfrm>
-            <a:off x="548640" y="164592"/>
-            <a:ext cx="11430000" cy="685800"/>
-          </a:xfrm>
-          <a:prstGeom prst="rect">
-            <a:avLst/>
-          </a:prstGeom>
-          <a:noFill/>
-        </p:spPr>
-        <p:txBody>
-          <a:bodyPr wrap="square">
-            <a:spAutoFit/>
-          </a:bodyPr>
-          <a:lstStyle/>
-          <a:p>
-            <a:pPr algn="l"/>
-            <a:r>
-              <a:rPr sz="2800" b="1" i="0">
-                <a:solidFill>
-                  <a:srgbClr val="F97316"/>
-                </a:solidFill>
-              </a:rPr>
-              <a:t>Methodology — Agent 4: Impact Analysis</a:t>
-            </a:r>
-          </a:p>
-        </p:txBody>
-      </p:sp>
-      <p:sp>
-        <p:nvSpPr>
-          <p:cNvPr id="5" name="Rectangle 4"/>
-          <p:cNvSpPr/>
-          <p:nvPr/>
-        </p:nvSpPr>
-        <p:spPr>
-          <a:xfrm>
-            <a:off x="548640" y="914400"/>
-            <a:ext cx="11064240" cy="18288"/>
-          </a:xfrm>
-          <a:prstGeom prst="rect">
-            <a:avLst/>
-          </a:prstGeom>
-          <a:solidFill>
-            <a:srgbClr val="3D4A5C"/>
-          </a:solidFill>
-        </p:spPr>
-        <p:style>
-          <a:lnRef idx="1">
-            <a:schemeClr val="accent1"/>
-          </a:lnRef>
-          <a:fillRef idx="3">
-            <a:schemeClr val="accent1"/>
-          </a:fillRef>
-          <a:effectRef idx="2">
-            <a:schemeClr val="accent1"/>
-          </a:effectRef>
-          <a:fontRef idx="minor">
-            <a:schemeClr val="lt1"/>
-          </a:fontRef>
-        </p:style>
-        <p:txBody>
-          <a:bodyPr rtlCol="0" anchor="ctr"/>
-          <a:lstStyle/>
-          <a:p>
-            <a:pPr algn="ctr"/>
-          </a:p>
-        </p:txBody>
-      </p:sp>
-      <p:sp>
-        <p:nvSpPr>
-          <p:cNvPr id="6" name="Rectangle 5"/>
-          <p:cNvSpPr/>
-          <p:nvPr/>
-        </p:nvSpPr>
-        <p:spPr>
-          <a:xfrm>
-            <a:off x="548640" y="950976"/>
-            <a:ext cx="11064240" cy="54864"/>
-          </a:xfrm>
-          <a:prstGeom prst="rect">
-            <a:avLst/>
-          </a:prstGeom>
-          <a:solidFill>
-            <a:srgbClr val="F97316"/>
-          </a:solidFill>
-        </p:spPr>
-        <p:style>
-          <a:lnRef idx="1">
-            <a:schemeClr val="accent1"/>
-          </a:lnRef>
-          <a:fillRef idx="3">
-            <a:schemeClr val="accent1"/>
-          </a:fillRef>
-          <a:effectRef idx="2">
-            <a:schemeClr val="accent1"/>
-          </a:effectRef>
-          <a:fontRef idx="minor">
-            <a:schemeClr val="lt1"/>
-          </a:fontRef>
-        </p:style>
-        <p:txBody>
-          <a:bodyPr rtlCol="0" anchor="ctr"/>
-          <a:lstStyle/>
-          <a:p>
-            <a:pPr algn="ctr"/>
-          </a:p>
-        </p:txBody>
-      </p:sp>
-      <p:sp>
-        <p:nvSpPr>
-          <p:cNvPr id="7" name="TextBox 6"/>
-          <p:cNvSpPr txBox="1"/>
-          <p:nvPr/>
-        </p:nvSpPr>
-        <p:spPr>
-          <a:xfrm>
-            <a:off x="548640" y="1078992"/>
-            <a:ext cx="11064240" cy="548640"/>
-          </a:xfrm>
-          <a:prstGeom prst="rect">
-            <a:avLst/>
-          </a:prstGeom>
-          <a:noFill/>
-        </p:spPr>
-        <p:txBody>
-          <a:bodyPr wrap="square">
-            <a:spAutoFit/>
-          </a:bodyPr>
-          <a:lstStyle/>
-          <a:p>
-            <a:pPr algn="l"/>
-            <a:r>
-              <a:rPr sz="1300" b="0" i="0">
-                <a:solidFill>
-                  <a:srgbClr val="E5E7EB"/>
-                </a:solidFill>
-              </a:rPr>
-              <a:t>Populates a significance matrix across all (project action × resource category) pairs. Each cell carries a significance determination, confidence score, reasoning, and mitigation options.</a:t>
-            </a:r>
-          </a:p>
-        </p:txBody>
-      </p:sp>
-      <p:sp>
-        <p:nvSpPr>
-          <p:cNvPr id="8" name="Rectangle 7"/>
-          <p:cNvSpPr/>
-          <p:nvPr/>
-        </p:nvSpPr>
-        <p:spPr>
-          <a:xfrm>
-            <a:off x="548640" y="1755648"/>
-            <a:ext cx="1892808" cy="402336"/>
-          </a:xfrm>
-          <a:prstGeom prst="rect">
-            <a:avLst/>
-          </a:prstGeom>
-          <a:solidFill>
-            <a:srgbClr val="1A202C"/>
-          </a:solidFill>
-          <a:ln w="9525">
-            <a:solidFill>
-              <a:srgbClr val="3D4A5C"/>
-            </a:solidFill>
-          </a:ln>
-        </p:spPr>
-        <p:style>
-          <a:lnRef idx="1">
-            <a:schemeClr val="accent1"/>
-          </a:lnRef>
-          <a:fillRef idx="3">
-            <a:schemeClr val="accent1"/>
-          </a:fillRef>
-          <a:effectRef idx="2">
-            <a:schemeClr val="accent1"/>
-          </a:effectRef>
-          <a:fontRef idx="minor">
-            <a:schemeClr val="lt1"/>
-          </a:fontRef>
-        </p:style>
-        <p:txBody>
-          <a:bodyPr rtlCol="0" anchor="ctr"/>
-          <a:lstStyle/>
-          <a:p>
-            <a:pPr algn="ctr"/>
-          </a:p>
-        </p:txBody>
-      </p:sp>
-      <p:sp>
-        <p:nvSpPr>
-          <p:cNvPr id="9" name="TextBox 8"/>
-          <p:cNvSpPr txBox="1"/>
-          <p:nvPr/>
-        </p:nvSpPr>
-        <p:spPr>
-          <a:xfrm>
-            <a:off x="612648" y="1810512"/>
-            <a:ext cx="1755648" cy="329184"/>
-          </a:xfrm>
-          <a:prstGeom prst="rect">
-            <a:avLst/>
-          </a:prstGeom>
-          <a:noFill/>
-        </p:spPr>
-        <p:txBody>
-          <a:bodyPr wrap="square">
-            <a:spAutoFit/>
-          </a:bodyPr>
-          <a:lstStyle/>
-          <a:p>
-            <a:pPr algn="l"/>
-            <a:r>
-              <a:rPr sz="1100" b="1" i="0">
-                <a:solidFill>
-                  <a:srgbClr val="F97316"/>
-                </a:solidFill>
-              </a:rPr>
-              <a:t>Category</a:t>
-            </a:r>
-          </a:p>
-        </p:txBody>
-      </p:sp>
-      <p:sp>
-        <p:nvSpPr>
-          <p:cNvPr id="10" name="Rectangle 9"/>
-          <p:cNvSpPr/>
-          <p:nvPr/>
-        </p:nvSpPr>
-        <p:spPr>
-          <a:xfrm>
-            <a:off x="2468880" y="1755648"/>
-            <a:ext cx="1892808" cy="402336"/>
-          </a:xfrm>
-          <a:prstGeom prst="rect">
-            <a:avLst/>
-          </a:prstGeom>
-          <a:solidFill>
-            <a:srgbClr val="1A202C"/>
-          </a:solidFill>
-          <a:ln w="9525">
-            <a:solidFill>
-              <a:srgbClr val="3D4A5C"/>
-            </a:solidFill>
-          </a:ln>
-        </p:spPr>
-        <p:style>
-          <a:lnRef idx="1">
-            <a:schemeClr val="accent1"/>
-          </a:lnRef>
-          <a:fillRef idx="3">
-            <a:schemeClr val="accent1"/>
-          </a:fillRef>
-          <a:effectRef idx="2">
-            <a:schemeClr val="accent1"/>
-          </a:effectRef>
-          <a:fontRef idx="minor">
-            <a:schemeClr val="lt1"/>
-          </a:fontRef>
-        </p:style>
-        <p:txBody>
-          <a:bodyPr rtlCol="0" anchor="ctr"/>
-          <a:lstStyle/>
-          <a:p>
-            <a:pPr algn="ctr"/>
-          </a:p>
-        </p:txBody>
-      </p:sp>
-      <p:sp>
-        <p:nvSpPr>
-          <p:cNvPr id="11" name="TextBox 10"/>
-          <p:cNvSpPr txBox="1"/>
-          <p:nvPr/>
-        </p:nvSpPr>
-        <p:spPr>
-          <a:xfrm>
-            <a:off x="2532888" y="1810512"/>
-            <a:ext cx="1755648" cy="329184"/>
-          </a:xfrm>
-          <a:prstGeom prst="rect">
-            <a:avLst/>
-          </a:prstGeom>
-          <a:noFill/>
-        </p:spPr>
-        <p:txBody>
-          <a:bodyPr wrap="square">
-            <a:spAutoFit/>
-          </a:bodyPr>
-          <a:lstStyle/>
-          <a:p>
-            <a:pPr algn="l"/>
-            <a:r>
-              <a:rPr sz="1100" b="1" i="0">
-                <a:solidFill>
-                  <a:srgbClr val="F97316"/>
-                </a:solidFill>
-              </a:rPr>
-              <a:t>Site Prep</a:t>
-            </a:r>
-          </a:p>
-        </p:txBody>
-      </p:sp>
-      <p:sp>
-        <p:nvSpPr>
-          <p:cNvPr id="12" name="Rectangle 11"/>
-          <p:cNvSpPr/>
-          <p:nvPr/>
-        </p:nvSpPr>
-        <p:spPr>
-          <a:xfrm>
-            <a:off x="4389120" y="1755648"/>
-            <a:ext cx="1892808" cy="402336"/>
-          </a:xfrm>
-          <a:prstGeom prst="rect">
-            <a:avLst/>
-          </a:prstGeom>
-          <a:solidFill>
-            <a:srgbClr val="1A202C"/>
-          </a:solidFill>
-          <a:ln w="9525">
-            <a:solidFill>
-              <a:srgbClr val="3D4A5C"/>
-            </a:solidFill>
-          </a:ln>
-        </p:spPr>
-        <p:style>
-          <a:lnRef idx="1">
-            <a:schemeClr val="accent1"/>
-          </a:lnRef>
-          <a:fillRef idx="3">
-            <a:schemeClr val="accent1"/>
-          </a:fillRef>
-          <a:effectRef idx="2">
-            <a:schemeClr val="accent1"/>
-          </a:effectRef>
-          <a:fontRef idx="minor">
-            <a:schemeClr val="lt1"/>
-          </a:fontRef>
-        </p:style>
-        <p:txBody>
-          <a:bodyPr rtlCol="0" anchor="ctr"/>
-          <a:lstStyle/>
-          <a:p>
-            <a:pPr algn="ctr"/>
-          </a:p>
-        </p:txBody>
-      </p:sp>
-      <p:sp>
-        <p:nvSpPr>
-          <p:cNvPr id="13" name="TextBox 12"/>
-          <p:cNvSpPr txBox="1"/>
-          <p:nvPr/>
-        </p:nvSpPr>
-        <p:spPr>
-          <a:xfrm>
-            <a:off x="4453128" y="1810512"/>
-            <a:ext cx="1755648" cy="329184"/>
-          </a:xfrm>
-          <a:prstGeom prst="rect">
-            <a:avLst/>
-          </a:prstGeom>
-          <a:noFill/>
-        </p:spPr>
-        <p:txBody>
-          <a:bodyPr wrap="square">
-            <a:spAutoFit/>
-          </a:bodyPr>
-          <a:lstStyle/>
-          <a:p>
-            <a:pPr algn="l"/>
-            <a:r>
-              <a:rPr sz="1100" b="1" i="0">
-                <a:solidFill>
-                  <a:srgbClr val="F97316"/>
-                </a:solidFill>
-              </a:rPr>
-              <a:t>Construction</a:t>
-            </a:r>
-          </a:p>
-        </p:txBody>
-      </p:sp>
-      <p:sp>
-        <p:nvSpPr>
-          <p:cNvPr id="14" name="Rectangle 13"/>
-          <p:cNvSpPr/>
-          <p:nvPr/>
-        </p:nvSpPr>
-        <p:spPr>
-          <a:xfrm>
-            <a:off x="6309360" y="1755648"/>
-            <a:ext cx="1892808" cy="402336"/>
-          </a:xfrm>
-          <a:prstGeom prst="rect">
-            <a:avLst/>
-          </a:prstGeom>
-          <a:solidFill>
-            <a:srgbClr val="1A202C"/>
-          </a:solidFill>
-          <a:ln w="9525">
-            <a:solidFill>
-              <a:srgbClr val="3D4A5C"/>
-            </a:solidFill>
-          </a:ln>
-        </p:spPr>
-        <p:style>
-          <a:lnRef idx="1">
-            <a:schemeClr val="accent1"/>
-          </a:lnRef>
-          <a:fillRef idx="3">
-            <a:schemeClr val="accent1"/>
-          </a:fillRef>
-          <a:effectRef idx="2">
-            <a:schemeClr val="accent1"/>
-          </a:effectRef>
-          <a:fontRef idx="minor">
-            <a:schemeClr val="lt1"/>
-          </a:fontRef>
-        </p:style>
-        <p:txBody>
-          <a:bodyPr rtlCol="0" anchor="ctr"/>
-          <a:lstStyle/>
-          <a:p>
-            <a:pPr algn="ctr"/>
-          </a:p>
-        </p:txBody>
-      </p:sp>
-      <p:sp>
-        <p:nvSpPr>
-          <p:cNvPr id="15" name="TextBox 14"/>
-          <p:cNvSpPr txBox="1"/>
-          <p:nvPr/>
-        </p:nvSpPr>
-        <p:spPr>
-          <a:xfrm>
-            <a:off x="6373368" y="1810512"/>
-            <a:ext cx="1755648" cy="329184"/>
-          </a:xfrm>
-          <a:prstGeom prst="rect">
-            <a:avLst/>
-          </a:prstGeom>
-          <a:noFill/>
-        </p:spPr>
-        <p:txBody>
-          <a:bodyPr wrap="square">
-            <a:spAutoFit/>
-          </a:bodyPr>
-          <a:lstStyle/>
-          <a:p>
-            <a:pPr algn="l"/>
-            <a:r>
-              <a:rPr sz="1100" b="1" i="0">
-                <a:solidFill>
-                  <a:srgbClr val="F97316"/>
-                </a:solidFill>
-              </a:rPr>
-              <a:t>Operation</a:t>
-            </a:r>
-          </a:p>
-        </p:txBody>
-      </p:sp>
-      <p:sp>
-        <p:nvSpPr>
-          <p:cNvPr id="16" name="Rectangle 15"/>
-          <p:cNvSpPr/>
-          <p:nvPr/>
-        </p:nvSpPr>
-        <p:spPr>
-          <a:xfrm>
-            <a:off x="548640" y="2176272"/>
-            <a:ext cx="1892808" cy="402336"/>
-          </a:xfrm>
-          <a:prstGeom prst="rect">
-            <a:avLst/>
-          </a:prstGeom>
-          <a:solidFill>
-            <a:srgbClr val="1A202C"/>
-          </a:solidFill>
-          <a:ln w="9525">
-            <a:solidFill>
-              <a:srgbClr val="3D4A5C"/>
-            </a:solidFill>
-          </a:ln>
-        </p:spPr>
-        <p:style>
-          <a:lnRef idx="1">
-            <a:schemeClr val="accent1"/>
-          </a:lnRef>
-          <a:fillRef idx="3">
-            <a:schemeClr val="accent1"/>
-          </a:fillRef>
-          <a:effectRef idx="2">
-            <a:schemeClr val="accent1"/>
-          </a:effectRef>
-          <a:fontRef idx="minor">
-            <a:schemeClr val="lt1"/>
-          </a:fontRef>
-        </p:style>
-        <p:txBody>
-          <a:bodyPr rtlCol="0" anchor="ctr"/>
-          <a:lstStyle/>
-          <a:p>
-            <a:pPr algn="ctr"/>
-          </a:p>
-        </p:txBody>
-      </p:sp>
-      <p:sp>
-        <p:nvSpPr>
-          <p:cNvPr id="17" name="TextBox 16"/>
-          <p:cNvSpPr txBox="1"/>
-          <p:nvPr/>
-        </p:nvSpPr>
-        <p:spPr>
-          <a:xfrm>
-            <a:off x="612648" y="2231136"/>
-            <a:ext cx="1755648" cy="329184"/>
-          </a:xfrm>
-          <a:prstGeom prst="rect">
-            <a:avLst/>
-          </a:prstGeom>
-          <a:noFill/>
-        </p:spPr>
-        <p:txBody>
-          <a:bodyPr wrap="square">
-            <a:spAutoFit/>
-          </a:bodyPr>
-          <a:lstStyle/>
-          <a:p>
-            <a:pPr algn="l"/>
-            <a:r>
-              <a:rPr sz="1100" b="1" i="0">
-                <a:solidFill>
-                  <a:srgbClr val="FFFFFF"/>
-                </a:solidFill>
-              </a:rPr>
-              <a:t>Wetlands</a:t>
-            </a:r>
-          </a:p>
-        </p:txBody>
-      </p:sp>
-      <p:sp>
-        <p:nvSpPr>
-          <p:cNvPr id="18" name="Rectangle 17"/>
-          <p:cNvSpPr/>
-          <p:nvPr/>
-        </p:nvSpPr>
-        <p:spPr>
-          <a:xfrm>
-            <a:off x="2468880" y="2176272"/>
-            <a:ext cx="1892808" cy="402336"/>
-          </a:xfrm>
-          <a:prstGeom prst="rect">
-            <a:avLst/>
-          </a:prstGeom>
-          <a:solidFill>
-            <a:srgbClr val="2D3748"/>
-          </a:solidFill>
-          <a:ln w="9525">
-            <a:solidFill>
-              <a:srgbClr val="3D4A5C"/>
-            </a:solidFill>
-          </a:ln>
-        </p:spPr>
-        <p:style>
-          <a:lnRef idx="1">
-            <a:schemeClr val="accent1"/>
-          </a:lnRef>
-          <a:fillRef idx="3">
-            <a:schemeClr val="accent1"/>
-          </a:fillRef>
-          <a:effectRef idx="2">
-            <a:schemeClr val="accent1"/>
-          </a:effectRef>
-          <a:fontRef idx="minor">
-            <a:schemeClr val="lt1"/>
-          </a:fontRef>
-        </p:style>
-        <p:txBody>
-          <a:bodyPr rtlCol="0" anchor="ctr"/>
-          <a:lstStyle/>
-          <a:p>
-            <a:pPr algn="ctr"/>
-          </a:p>
-        </p:txBody>
-      </p:sp>
-      <p:sp>
-        <p:nvSpPr>
-          <p:cNvPr id="19" name="TextBox 18"/>
-          <p:cNvSpPr txBox="1"/>
-          <p:nvPr/>
-        </p:nvSpPr>
-        <p:spPr>
-          <a:xfrm>
-            <a:off x="2532888" y="2231136"/>
-            <a:ext cx="1755648" cy="329184"/>
-          </a:xfrm>
-          <a:prstGeom prst="rect">
-            <a:avLst/>
-          </a:prstGeom>
-          <a:noFill/>
-        </p:spPr>
-        <p:txBody>
-          <a:bodyPr wrap="square">
-            <a:spAutoFit/>
-          </a:bodyPr>
-          <a:lstStyle/>
-          <a:p>
-            <a:pPr algn="l"/>
-            <a:r>
-              <a:rPr sz="1100" b="0" i="0">
-                <a:solidFill>
-                  <a:srgbClr val="EAB308"/>
-                </a:solidFill>
-              </a:rPr>
-              <a:t>moderate</a:t>
-            </a:r>
-          </a:p>
-        </p:txBody>
-      </p:sp>
-      <p:sp>
-        <p:nvSpPr>
-          <p:cNvPr id="20" name="Rectangle 19"/>
-          <p:cNvSpPr/>
-          <p:nvPr/>
-        </p:nvSpPr>
-        <p:spPr>
-          <a:xfrm>
-            <a:off x="4389120" y="2176272"/>
-            <a:ext cx="1892808" cy="402336"/>
-          </a:xfrm>
-          <a:prstGeom prst="rect">
-            <a:avLst/>
-          </a:prstGeom>
-          <a:solidFill>
-            <a:srgbClr val="2D3748"/>
-          </a:solidFill>
-          <a:ln w="9525">
-            <a:solidFill>
-              <a:srgbClr val="3D4A5C"/>
-            </a:solidFill>
-          </a:ln>
-        </p:spPr>
-        <p:style>
-          <a:lnRef idx="1">
-            <a:schemeClr val="accent1"/>
-          </a:lnRef>
-          <a:fillRef idx="3">
-            <a:schemeClr val="accent1"/>
-          </a:fillRef>
-          <a:effectRef idx="2">
-            <a:schemeClr val="accent1"/>
-          </a:effectRef>
-          <a:fontRef idx="minor">
-            <a:schemeClr val="lt1"/>
-          </a:fontRef>
-        </p:style>
-        <p:txBody>
-          <a:bodyPr rtlCol="0" anchor="ctr"/>
-          <a:lstStyle/>
-          <a:p>
-            <a:pPr algn="ctr"/>
-          </a:p>
-        </p:txBody>
-      </p:sp>
-      <p:sp>
-        <p:nvSpPr>
-          <p:cNvPr id="21" name="TextBox 20"/>
-          <p:cNvSpPr txBox="1"/>
-          <p:nvPr/>
-        </p:nvSpPr>
-        <p:spPr>
-          <a:xfrm>
-            <a:off x="4453128" y="2231136"/>
-            <a:ext cx="1755648" cy="329184"/>
-          </a:xfrm>
-          <a:prstGeom prst="rect">
-            <a:avLst/>
-          </a:prstGeom>
-          <a:noFill/>
-        </p:spPr>
-        <p:txBody>
-          <a:bodyPr wrap="square">
-            <a:spAutoFit/>
-          </a:bodyPr>
-          <a:lstStyle/>
-          <a:p>
-            <a:pPr algn="l"/>
-            <a:r>
-              <a:rPr sz="1100" b="0" i="0">
-                <a:solidFill>
-                  <a:srgbClr val="EF4444"/>
-                </a:solidFill>
-              </a:rPr>
-              <a:t>significant</a:t>
-            </a:r>
-          </a:p>
-        </p:txBody>
-      </p:sp>
-      <p:sp>
-        <p:nvSpPr>
-          <p:cNvPr id="22" name="Rectangle 21"/>
-          <p:cNvSpPr/>
-          <p:nvPr/>
-        </p:nvSpPr>
-        <p:spPr>
-          <a:xfrm>
-            <a:off x="6309360" y="2176272"/>
-            <a:ext cx="1892808" cy="402336"/>
-          </a:xfrm>
-          <a:prstGeom prst="rect">
-            <a:avLst/>
-          </a:prstGeom>
-          <a:solidFill>
-            <a:srgbClr val="2D3748"/>
-          </a:solidFill>
-          <a:ln w="9525">
-            <a:solidFill>
-              <a:srgbClr val="3D4A5C"/>
-            </a:solidFill>
-          </a:ln>
-        </p:spPr>
-        <p:style>
-          <a:lnRef idx="1">
-            <a:schemeClr val="accent1"/>
-          </a:lnRef>
-          <a:fillRef idx="3">
-            <a:schemeClr val="accent1"/>
-          </a:fillRef>
-          <a:effectRef idx="2">
-            <a:schemeClr val="accent1"/>
-          </a:effectRef>
-          <a:fontRef idx="minor">
-            <a:schemeClr val="lt1"/>
-          </a:fontRef>
-        </p:style>
-        <p:txBody>
-          <a:bodyPr rtlCol="0" anchor="ctr"/>
-          <a:lstStyle/>
-          <a:p>
-            <a:pPr algn="ctr"/>
-          </a:p>
-        </p:txBody>
-      </p:sp>
-      <p:sp>
-        <p:nvSpPr>
-          <p:cNvPr id="23" name="TextBox 22"/>
-          <p:cNvSpPr txBox="1"/>
-          <p:nvPr/>
-        </p:nvSpPr>
-        <p:spPr>
-          <a:xfrm>
-            <a:off x="6373368" y="2231136"/>
-            <a:ext cx="1755648" cy="329184"/>
-          </a:xfrm>
-          <a:prstGeom prst="rect">
-            <a:avLst/>
-          </a:prstGeom>
-          <a:noFill/>
-        </p:spPr>
-        <p:txBody>
-          <a:bodyPr wrap="square">
-            <a:spAutoFit/>
-          </a:bodyPr>
-          <a:lstStyle/>
-          <a:p>
-            <a:pPr algn="l"/>
-            <a:r>
-              <a:rPr sz="1100" b="0" i="0">
-                <a:solidFill>
-                  <a:srgbClr val="22C55E"/>
-                </a:solidFill>
-              </a:rPr>
-              <a:t>minimal</a:t>
-            </a:r>
-          </a:p>
-        </p:txBody>
-      </p:sp>
-      <p:sp>
-        <p:nvSpPr>
-          <p:cNvPr id="24" name="Rectangle 23"/>
-          <p:cNvSpPr/>
-          <p:nvPr/>
-        </p:nvSpPr>
-        <p:spPr>
-          <a:xfrm>
-            <a:off x="548640" y="2596896"/>
-            <a:ext cx="1892808" cy="402336"/>
-          </a:xfrm>
-          <a:prstGeom prst="rect">
-            <a:avLst/>
-          </a:prstGeom>
-          <a:solidFill>
-            <a:srgbClr val="1A202C"/>
-          </a:solidFill>
-          <a:ln w="9525">
-            <a:solidFill>
-              <a:srgbClr val="3D4A5C"/>
-            </a:solidFill>
-          </a:ln>
-        </p:spPr>
-        <p:style>
-          <a:lnRef idx="1">
-            <a:schemeClr val="accent1"/>
-          </a:lnRef>
-          <a:fillRef idx="3">
-            <a:schemeClr val="accent1"/>
-          </a:fillRef>
-          <a:effectRef idx="2">
-            <a:schemeClr val="accent1"/>
-          </a:effectRef>
-          <a:fontRef idx="minor">
-            <a:schemeClr val="lt1"/>
-          </a:fontRef>
-        </p:style>
-        <p:txBody>
-          <a:bodyPr rtlCol="0" anchor="ctr"/>
-          <a:lstStyle/>
-          <a:p>
-            <a:pPr algn="ctr"/>
-          </a:p>
-        </p:txBody>
-      </p:sp>
-      <p:sp>
-        <p:nvSpPr>
-          <p:cNvPr id="25" name="TextBox 24"/>
-          <p:cNvSpPr txBox="1"/>
-          <p:nvPr/>
-        </p:nvSpPr>
-        <p:spPr>
-          <a:xfrm>
-            <a:off x="612648" y="2651760"/>
-            <a:ext cx="1755648" cy="329184"/>
-          </a:xfrm>
-          <a:prstGeom prst="rect">
-            <a:avLst/>
-          </a:prstGeom>
-          <a:noFill/>
-        </p:spPr>
-        <p:txBody>
-          <a:bodyPr wrap="square">
-            <a:spAutoFit/>
-          </a:bodyPr>
-          <a:lstStyle/>
-          <a:p>
-            <a:pPr algn="l"/>
-            <a:r>
-              <a:rPr sz="1100" b="1" i="0">
-                <a:solidFill>
-                  <a:srgbClr val="FFFFFF"/>
-                </a:solidFill>
-              </a:rPr>
-              <a:t>Endangered Spp.</a:t>
-            </a:r>
-          </a:p>
-        </p:txBody>
-      </p:sp>
-      <p:sp>
-        <p:nvSpPr>
-          <p:cNvPr id="26" name="Rectangle 25"/>
-          <p:cNvSpPr/>
-          <p:nvPr/>
-        </p:nvSpPr>
-        <p:spPr>
-          <a:xfrm>
-            <a:off x="2468880" y="2596896"/>
-            <a:ext cx="1892808" cy="402336"/>
-          </a:xfrm>
-          <a:prstGeom prst="rect">
-            <a:avLst/>
-          </a:prstGeom>
-          <a:solidFill>
-            <a:srgbClr val="2D3748"/>
-          </a:solidFill>
-          <a:ln w="9525">
-            <a:solidFill>
-              <a:srgbClr val="3D4A5C"/>
-            </a:solidFill>
-          </a:ln>
-        </p:spPr>
-        <p:style>
-          <a:lnRef idx="1">
-            <a:schemeClr val="accent1"/>
-          </a:lnRef>
-          <a:fillRef idx="3">
-            <a:schemeClr val="accent1"/>
-          </a:fillRef>
-          <a:effectRef idx="2">
-            <a:schemeClr val="accent1"/>
-          </a:effectRef>
-          <a:fontRef idx="minor">
-            <a:schemeClr val="lt1"/>
-          </a:fontRef>
-        </p:style>
-        <p:txBody>
-          <a:bodyPr rtlCol="0" anchor="ctr"/>
-          <a:lstStyle/>
-          <a:p>
-            <a:pPr algn="ctr"/>
-          </a:p>
-        </p:txBody>
-      </p:sp>
-      <p:sp>
-        <p:nvSpPr>
-          <p:cNvPr id="27" name="TextBox 26"/>
-          <p:cNvSpPr txBox="1"/>
-          <p:nvPr/>
-        </p:nvSpPr>
-        <p:spPr>
-          <a:xfrm>
-            <a:off x="2532888" y="2651760"/>
-            <a:ext cx="1755648" cy="329184"/>
-          </a:xfrm>
-          <a:prstGeom prst="rect">
-            <a:avLst/>
-          </a:prstGeom>
-          <a:noFill/>
-        </p:spPr>
-        <p:txBody>
-          <a:bodyPr wrap="square">
-            <a:spAutoFit/>
-          </a:bodyPr>
-          <a:lstStyle/>
-          <a:p>
-            <a:pPr algn="l"/>
-            <a:r>
-              <a:rPr sz="1100" b="0" i="0">
-                <a:solidFill>
-                  <a:srgbClr val="06B6D3"/>
-                </a:solidFill>
-              </a:rPr>
-              <a:t>none</a:t>
-            </a:r>
-          </a:p>
-        </p:txBody>
-      </p:sp>
-      <p:sp>
-        <p:nvSpPr>
-          <p:cNvPr id="28" name="Rectangle 27"/>
-          <p:cNvSpPr/>
-          <p:nvPr/>
-        </p:nvSpPr>
-        <p:spPr>
-          <a:xfrm>
-            <a:off x="4389120" y="2596896"/>
-            <a:ext cx="1892808" cy="402336"/>
-          </a:xfrm>
-          <a:prstGeom prst="rect">
-            <a:avLst/>
-          </a:prstGeom>
-          <a:solidFill>
-            <a:srgbClr val="2D3748"/>
-          </a:solidFill>
-          <a:ln w="9525">
-            <a:solidFill>
-              <a:srgbClr val="3D4A5C"/>
-            </a:solidFill>
-          </a:ln>
-        </p:spPr>
-        <p:style>
-          <a:lnRef idx="1">
-            <a:schemeClr val="accent1"/>
-          </a:lnRef>
-          <a:fillRef idx="3">
-            <a:schemeClr val="accent1"/>
-          </a:fillRef>
-          <a:effectRef idx="2">
-            <a:schemeClr val="accent1"/>
-          </a:effectRef>
-          <a:fontRef idx="minor">
-            <a:schemeClr val="lt1"/>
-          </a:fontRef>
-        </p:style>
-        <p:txBody>
-          <a:bodyPr rtlCol="0" anchor="ctr"/>
-          <a:lstStyle/>
-          <a:p>
-            <a:pPr algn="ctr"/>
-          </a:p>
-        </p:txBody>
-      </p:sp>
-      <p:sp>
-        <p:nvSpPr>
-          <p:cNvPr id="29" name="TextBox 28"/>
-          <p:cNvSpPr txBox="1"/>
-          <p:nvPr/>
-        </p:nvSpPr>
-        <p:spPr>
-          <a:xfrm>
-            <a:off x="4453128" y="2651760"/>
-            <a:ext cx="1755648" cy="329184"/>
-          </a:xfrm>
-          <a:prstGeom prst="rect">
-            <a:avLst/>
-          </a:prstGeom>
-          <a:noFill/>
-        </p:spPr>
-        <p:txBody>
-          <a:bodyPr wrap="square">
-            <a:spAutoFit/>
-          </a:bodyPr>
-          <a:lstStyle/>
-          <a:p>
-            <a:pPr algn="l"/>
-            <a:r>
-              <a:rPr sz="1100" b="0" i="0">
-                <a:solidFill>
-                  <a:srgbClr val="EF4444"/>
-                </a:solidFill>
-              </a:rPr>
-              <a:t>significant</a:t>
-            </a:r>
-          </a:p>
-        </p:txBody>
-      </p:sp>
-      <p:sp>
-        <p:nvSpPr>
-          <p:cNvPr id="30" name="Rectangle 29"/>
-          <p:cNvSpPr/>
-          <p:nvPr/>
-        </p:nvSpPr>
-        <p:spPr>
-          <a:xfrm>
-            <a:off x="6309360" y="2596896"/>
-            <a:ext cx="1892808" cy="402336"/>
-          </a:xfrm>
-          <a:prstGeom prst="rect">
-            <a:avLst/>
-          </a:prstGeom>
-          <a:solidFill>
-            <a:srgbClr val="2D3748"/>
-          </a:solidFill>
-          <a:ln w="9525">
-            <a:solidFill>
-              <a:srgbClr val="3D4A5C"/>
-            </a:solidFill>
-          </a:ln>
-        </p:spPr>
-        <p:style>
-          <a:lnRef idx="1">
-            <a:schemeClr val="accent1"/>
-          </a:lnRef>
-          <a:fillRef idx="3">
-            <a:schemeClr val="accent1"/>
-          </a:fillRef>
-          <a:effectRef idx="2">
-            <a:schemeClr val="accent1"/>
-          </a:effectRef>
-          <a:fontRef idx="minor">
-            <a:schemeClr val="lt1"/>
-          </a:fontRef>
-        </p:style>
-        <p:txBody>
-          <a:bodyPr rtlCol="0" anchor="ctr"/>
-          <a:lstStyle/>
-          <a:p>
-            <a:pPr algn="ctr"/>
-          </a:p>
-        </p:txBody>
-      </p:sp>
-      <p:sp>
-        <p:nvSpPr>
-          <p:cNvPr id="31" name="TextBox 30"/>
-          <p:cNvSpPr txBox="1"/>
-          <p:nvPr/>
-        </p:nvSpPr>
-        <p:spPr>
-          <a:xfrm>
-            <a:off x="6373368" y="2651760"/>
-            <a:ext cx="1755648" cy="329184"/>
-          </a:xfrm>
-          <a:prstGeom prst="rect">
-            <a:avLst/>
-          </a:prstGeom>
-          <a:noFill/>
-        </p:spPr>
-        <p:txBody>
-          <a:bodyPr wrap="square">
-            <a:spAutoFit/>
-          </a:bodyPr>
-          <a:lstStyle/>
-          <a:p>
-            <a:pPr algn="l"/>
-            <a:r>
-              <a:rPr sz="1100" b="0" i="0">
-                <a:solidFill>
-                  <a:srgbClr val="06B6D3"/>
-                </a:solidFill>
-              </a:rPr>
-              <a:t>none</a:t>
-            </a:r>
-          </a:p>
-        </p:txBody>
-      </p:sp>
-      <p:sp>
-        <p:nvSpPr>
-          <p:cNvPr id="32" name="Rectangle 31"/>
-          <p:cNvSpPr/>
-          <p:nvPr/>
-        </p:nvSpPr>
-        <p:spPr>
-          <a:xfrm>
-            <a:off x="548640" y="3017520"/>
-            <a:ext cx="1892808" cy="402336"/>
-          </a:xfrm>
-          <a:prstGeom prst="rect">
-            <a:avLst/>
-          </a:prstGeom>
-          <a:solidFill>
-            <a:srgbClr val="1A202C"/>
-          </a:solidFill>
-          <a:ln w="9525">
-            <a:solidFill>
-              <a:srgbClr val="3D4A5C"/>
-            </a:solidFill>
-          </a:ln>
-        </p:spPr>
-        <p:style>
-          <a:lnRef idx="1">
-            <a:schemeClr val="accent1"/>
-          </a:lnRef>
-          <a:fillRef idx="3">
-            <a:schemeClr val="accent1"/>
-          </a:fillRef>
-          <a:effectRef idx="2">
-            <a:schemeClr val="accent1"/>
-          </a:effectRef>
-          <a:fontRef idx="minor">
-            <a:schemeClr val="lt1"/>
-          </a:fontRef>
-        </p:style>
-        <p:txBody>
-          <a:bodyPr rtlCol="0" anchor="ctr"/>
-          <a:lstStyle/>
-          <a:p>
-            <a:pPr algn="ctr"/>
-          </a:p>
-        </p:txBody>
-      </p:sp>
-      <p:sp>
-        <p:nvSpPr>
-          <p:cNvPr id="33" name="TextBox 32"/>
-          <p:cNvSpPr txBox="1"/>
-          <p:nvPr/>
-        </p:nvSpPr>
-        <p:spPr>
-          <a:xfrm>
-            <a:off x="612648" y="3072384"/>
-            <a:ext cx="1755648" cy="329184"/>
-          </a:xfrm>
-          <a:prstGeom prst="rect">
-            <a:avLst/>
-          </a:prstGeom>
-          <a:noFill/>
-        </p:spPr>
-        <p:txBody>
-          <a:bodyPr wrap="square">
-            <a:spAutoFit/>
-          </a:bodyPr>
-          <a:lstStyle/>
-          <a:p>
-            <a:pPr algn="l"/>
-            <a:r>
-              <a:rPr sz="1100" b="1" i="0">
-                <a:solidFill>
-                  <a:srgbClr val="FFFFFF"/>
-                </a:solidFill>
-              </a:rPr>
-              <a:t>Floodplain</a:t>
-            </a:r>
-          </a:p>
-        </p:txBody>
-      </p:sp>
-      <p:sp>
-        <p:nvSpPr>
-          <p:cNvPr id="34" name="Rectangle 33"/>
-          <p:cNvSpPr/>
-          <p:nvPr/>
-        </p:nvSpPr>
-        <p:spPr>
-          <a:xfrm>
-            <a:off x="2468880" y="3017520"/>
-            <a:ext cx="1892808" cy="402336"/>
-          </a:xfrm>
-          <a:prstGeom prst="rect">
-            <a:avLst/>
-          </a:prstGeom>
-          <a:solidFill>
-            <a:srgbClr val="2D3748"/>
-          </a:solidFill>
-          <a:ln w="9525">
-            <a:solidFill>
-              <a:srgbClr val="3D4A5C"/>
-            </a:solidFill>
-          </a:ln>
-        </p:spPr>
-        <p:style>
-          <a:lnRef idx="1">
-            <a:schemeClr val="accent1"/>
-          </a:lnRef>
-          <a:fillRef idx="3">
-            <a:schemeClr val="accent1"/>
-          </a:fillRef>
-          <a:effectRef idx="2">
-            <a:schemeClr val="accent1"/>
-          </a:effectRef>
-          <a:fontRef idx="minor">
-            <a:schemeClr val="lt1"/>
-          </a:fontRef>
-        </p:style>
-        <p:txBody>
-          <a:bodyPr rtlCol="0" anchor="ctr"/>
-          <a:lstStyle/>
-          <a:p>
-            <a:pPr algn="ctr"/>
-          </a:p>
-        </p:txBody>
-      </p:sp>
-      <p:sp>
-        <p:nvSpPr>
-          <p:cNvPr id="35" name="TextBox 34"/>
-          <p:cNvSpPr txBox="1"/>
-          <p:nvPr/>
-        </p:nvSpPr>
-        <p:spPr>
-          <a:xfrm>
-            <a:off x="2532888" y="3072384"/>
-            <a:ext cx="1755648" cy="329184"/>
-          </a:xfrm>
-          <a:prstGeom prst="rect">
-            <a:avLst/>
-          </a:prstGeom>
-          <a:noFill/>
-        </p:spPr>
-        <p:txBody>
-          <a:bodyPr wrap="square">
-            <a:spAutoFit/>
-          </a:bodyPr>
-          <a:lstStyle/>
-          <a:p>
-            <a:pPr algn="l"/>
-            <a:r>
-              <a:rPr sz="1100" b="0" i="0">
-                <a:solidFill>
-                  <a:srgbClr val="EAB308"/>
-                </a:solidFill>
-              </a:rPr>
-              <a:t>moderate</a:t>
-            </a:r>
-          </a:p>
-        </p:txBody>
-      </p:sp>
-      <p:sp>
-        <p:nvSpPr>
-          <p:cNvPr id="36" name="Rectangle 35"/>
-          <p:cNvSpPr/>
-          <p:nvPr/>
-        </p:nvSpPr>
-        <p:spPr>
-          <a:xfrm>
-            <a:off x="4389120" y="3017520"/>
-            <a:ext cx="1892808" cy="402336"/>
-          </a:xfrm>
-          <a:prstGeom prst="rect">
-            <a:avLst/>
-          </a:prstGeom>
-          <a:solidFill>
-            <a:srgbClr val="2D3748"/>
-          </a:solidFill>
-          <a:ln w="9525">
-            <a:solidFill>
-              <a:srgbClr val="3D4A5C"/>
-            </a:solidFill>
-          </a:ln>
-        </p:spPr>
-        <p:style>
-          <a:lnRef idx="1">
-            <a:schemeClr val="accent1"/>
-          </a:lnRef>
-          <a:fillRef idx="3">
-            <a:schemeClr val="accent1"/>
-          </a:fillRef>
-          <a:effectRef idx="2">
-            <a:schemeClr val="accent1"/>
-          </a:effectRef>
-          <a:fontRef idx="minor">
-            <a:schemeClr val="lt1"/>
-          </a:fontRef>
-        </p:style>
-        <p:txBody>
-          <a:bodyPr rtlCol="0" anchor="ctr"/>
-          <a:lstStyle/>
-          <a:p>
-            <a:pPr algn="ctr"/>
-          </a:p>
-        </p:txBody>
-      </p:sp>
-      <p:sp>
-        <p:nvSpPr>
-          <p:cNvPr id="37" name="TextBox 36"/>
-          <p:cNvSpPr txBox="1"/>
-          <p:nvPr/>
-        </p:nvSpPr>
-        <p:spPr>
-          <a:xfrm>
-            <a:off x="4453128" y="3072384"/>
-            <a:ext cx="1755648" cy="329184"/>
-          </a:xfrm>
-          <a:prstGeom prst="rect">
-            <a:avLst/>
-          </a:prstGeom>
-          <a:noFill/>
-        </p:spPr>
-        <p:txBody>
-          <a:bodyPr wrap="square">
-            <a:spAutoFit/>
-          </a:bodyPr>
-          <a:lstStyle/>
-          <a:p>
-            <a:pPr algn="l"/>
-            <a:r>
-              <a:rPr sz="1100" b="0" i="0">
-                <a:solidFill>
-                  <a:srgbClr val="EAB308"/>
-                </a:solidFill>
-              </a:rPr>
-              <a:t>moderate</a:t>
-            </a:r>
-          </a:p>
-        </p:txBody>
-      </p:sp>
-      <p:sp>
-        <p:nvSpPr>
-          <p:cNvPr id="38" name="Rectangle 37"/>
-          <p:cNvSpPr/>
-          <p:nvPr/>
-        </p:nvSpPr>
-        <p:spPr>
-          <a:xfrm>
-            <a:off x="6309360" y="3017520"/>
-            <a:ext cx="1892808" cy="402336"/>
-          </a:xfrm>
-          <a:prstGeom prst="rect">
-            <a:avLst/>
-          </a:prstGeom>
-          <a:solidFill>
-            <a:srgbClr val="2D3748"/>
-          </a:solidFill>
-          <a:ln w="9525">
-            <a:solidFill>
-              <a:srgbClr val="3D4A5C"/>
-            </a:solidFill>
-          </a:ln>
-        </p:spPr>
-        <p:style>
-          <a:lnRef idx="1">
-            <a:schemeClr val="accent1"/>
-          </a:lnRef>
-          <a:fillRef idx="3">
-            <a:schemeClr val="accent1"/>
-          </a:fillRef>
-          <a:effectRef idx="2">
-            <a:schemeClr val="accent1"/>
-          </a:effectRef>
-          <a:fontRef idx="minor">
-            <a:schemeClr val="lt1"/>
-          </a:fontRef>
-        </p:style>
-        <p:txBody>
-          <a:bodyPr rtlCol="0" anchor="ctr"/>
-          <a:lstStyle/>
-          <a:p>
-            <a:pPr algn="ctr"/>
-          </a:p>
-        </p:txBody>
-      </p:sp>
-      <p:sp>
-        <p:nvSpPr>
-          <p:cNvPr id="39" name="TextBox 38"/>
-          <p:cNvSpPr txBox="1"/>
-          <p:nvPr/>
-        </p:nvSpPr>
-        <p:spPr>
-          <a:xfrm>
-            <a:off x="6373368" y="3072384"/>
-            <a:ext cx="1755648" cy="329184"/>
-          </a:xfrm>
-          <a:prstGeom prst="rect">
-            <a:avLst/>
-          </a:prstGeom>
-          <a:noFill/>
-        </p:spPr>
-        <p:txBody>
-          <a:bodyPr wrap="square">
-            <a:spAutoFit/>
-          </a:bodyPr>
-          <a:lstStyle/>
-          <a:p>
-            <a:pPr algn="l"/>
-            <a:r>
-              <a:rPr sz="1100" b="0" i="0">
-                <a:solidFill>
-                  <a:srgbClr val="06B6D3"/>
-                </a:solidFill>
-              </a:rPr>
-              <a:t>none</a:t>
-            </a:r>
-          </a:p>
-        </p:txBody>
-      </p:sp>
-      <p:sp>
-        <p:nvSpPr>
-          <p:cNvPr id="40" name="Rectangle 39"/>
-          <p:cNvSpPr/>
-          <p:nvPr/>
-        </p:nvSpPr>
-        <p:spPr>
-          <a:xfrm>
-            <a:off x="548640" y="3438144"/>
-            <a:ext cx="1892808" cy="402336"/>
-          </a:xfrm>
-          <a:prstGeom prst="rect">
-            <a:avLst/>
-          </a:prstGeom>
-          <a:solidFill>
-            <a:srgbClr val="1A202C"/>
-          </a:solidFill>
-          <a:ln w="9525">
-            <a:solidFill>
-              <a:srgbClr val="3D4A5C"/>
-            </a:solidFill>
-          </a:ln>
-        </p:spPr>
-        <p:style>
-          <a:lnRef idx="1">
-            <a:schemeClr val="accent1"/>
-          </a:lnRef>
-          <a:fillRef idx="3">
-            <a:schemeClr val="accent1"/>
-          </a:fillRef>
-          <a:effectRef idx="2">
-            <a:schemeClr val="accent1"/>
-          </a:effectRef>
-          <a:fontRef idx="minor">
-            <a:schemeClr val="lt1"/>
-          </a:fontRef>
-        </p:style>
-        <p:txBody>
-          <a:bodyPr rtlCol="0" anchor="ctr"/>
-          <a:lstStyle/>
-          <a:p>
-            <a:pPr algn="ctr"/>
-          </a:p>
-        </p:txBody>
-      </p:sp>
-      <p:sp>
-        <p:nvSpPr>
-          <p:cNvPr id="41" name="TextBox 40"/>
-          <p:cNvSpPr txBox="1"/>
-          <p:nvPr/>
-        </p:nvSpPr>
-        <p:spPr>
-          <a:xfrm>
-            <a:off x="612648" y="3493008"/>
-            <a:ext cx="1755648" cy="329184"/>
-          </a:xfrm>
-          <a:prstGeom prst="rect">
-            <a:avLst/>
-          </a:prstGeom>
-          <a:noFill/>
-        </p:spPr>
-        <p:txBody>
-          <a:bodyPr wrap="square">
-            <a:spAutoFit/>
-          </a:bodyPr>
-          <a:lstStyle/>
-          <a:p>
-            <a:pPr algn="l"/>
-            <a:r>
-              <a:rPr sz="1100" b="1" i="0">
-                <a:solidFill>
-                  <a:srgbClr val="FFFFFF"/>
-                </a:solidFill>
-              </a:rPr>
-              <a:t>Air Quality</a:t>
-            </a:r>
-          </a:p>
-        </p:txBody>
-      </p:sp>
-      <p:sp>
-        <p:nvSpPr>
-          <p:cNvPr id="42" name="Rectangle 41"/>
-          <p:cNvSpPr/>
-          <p:nvPr/>
-        </p:nvSpPr>
-        <p:spPr>
-          <a:xfrm>
-            <a:off x="2468880" y="3438144"/>
-            <a:ext cx="1892808" cy="402336"/>
-          </a:xfrm>
-          <a:prstGeom prst="rect">
-            <a:avLst/>
-          </a:prstGeom>
-          <a:solidFill>
-            <a:srgbClr val="2D3748"/>
-          </a:solidFill>
-          <a:ln w="9525">
-            <a:solidFill>
-              <a:srgbClr val="3D4A5C"/>
-            </a:solidFill>
-          </a:ln>
-        </p:spPr>
-        <p:style>
-          <a:lnRef idx="1">
-            <a:schemeClr val="accent1"/>
-          </a:lnRef>
-          <a:fillRef idx="3">
-            <a:schemeClr val="accent1"/>
-          </a:fillRef>
-          <a:effectRef idx="2">
-            <a:schemeClr val="accent1"/>
-          </a:effectRef>
-          <a:fontRef idx="minor">
-            <a:schemeClr val="lt1"/>
-          </a:fontRef>
-        </p:style>
-        <p:txBody>
-          <a:bodyPr rtlCol="0" anchor="ctr"/>
-          <a:lstStyle/>
-          <a:p>
-            <a:pPr algn="ctr"/>
-          </a:p>
-        </p:txBody>
-      </p:sp>
-      <p:sp>
-        <p:nvSpPr>
-          <p:cNvPr id="43" name="TextBox 42"/>
-          <p:cNvSpPr txBox="1"/>
-          <p:nvPr/>
-        </p:nvSpPr>
-        <p:spPr>
-          <a:xfrm>
-            <a:off x="2532888" y="3493008"/>
-            <a:ext cx="1755648" cy="329184"/>
-          </a:xfrm>
-          <a:prstGeom prst="rect">
-            <a:avLst/>
-          </a:prstGeom>
-          <a:noFill/>
-        </p:spPr>
-        <p:txBody>
-          <a:bodyPr wrap="square">
-            <a:spAutoFit/>
-          </a:bodyPr>
-          <a:lstStyle/>
-          <a:p>
-            <a:pPr algn="l"/>
-            <a:r>
-              <a:rPr sz="1100" b="0" i="0">
-                <a:solidFill>
-                  <a:srgbClr val="22C55E"/>
-                </a:solidFill>
-              </a:rPr>
-              <a:t>minimal</a:t>
-            </a:r>
-          </a:p>
-        </p:txBody>
-      </p:sp>
-      <p:sp>
-        <p:nvSpPr>
-          <p:cNvPr id="44" name="Rectangle 43"/>
-          <p:cNvSpPr/>
-          <p:nvPr/>
-        </p:nvSpPr>
-        <p:spPr>
-          <a:xfrm>
-            <a:off x="4389120" y="3438144"/>
-            <a:ext cx="1892808" cy="402336"/>
-          </a:xfrm>
-          <a:prstGeom prst="rect">
-            <a:avLst/>
-          </a:prstGeom>
-          <a:solidFill>
-            <a:srgbClr val="2D3748"/>
-          </a:solidFill>
-          <a:ln w="9525">
-            <a:solidFill>
-              <a:srgbClr val="3D4A5C"/>
-            </a:solidFill>
-          </a:ln>
-        </p:spPr>
-        <p:style>
-          <a:lnRef idx="1">
-            <a:schemeClr val="accent1"/>
-          </a:lnRef>
-          <a:fillRef idx="3">
-            <a:schemeClr val="accent1"/>
-          </a:fillRef>
-          <a:effectRef idx="2">
-            <a:schemeClr val="accent1"/>
-          </a:effectRef>
-          <a:fontRef idx="minor">
-            <a:schemeClr val="lt1"/>
-          </a:fontRef>
-        </p:style>
-        <p:txBody>
-          <a:bodyPr rtlCol="0" anchor="ctr"/>
-          <a:lstStyle/>
-          <a:p>
-            <a:pPr algn="ctr"/>
-          </a:p>
-        </p:txBody>
-      </p:sp>
-      <p:sp>
-        <p:nvSpPr>
-          <p:cNvPr id="45" name="TextBox 44"/>
-          <p:cNvSpPr txBox="1"/>
-          <p:nvPr/>
-        </p:nvSpPr>
-        <p:spPr>
-          <a:xfrm>
-            <a:off x="4453128" y="3493008"/>
-            <a:ext cx="1755648" cy="329184"/>
-          </a:xfrm>
-          <a:prstGeom prst="rect">
-            <a:avLst/>
-          </a:prstGeom>
-          <a:noFill/>
-        </p:spPr>
-        <p:txBody>
-          <a:bodyPr wrap="square">
-            <a:spAutoFit/>
-          </a:bodyPr>
-          <a:lstStyle/>
-          <a:p>
-            <a:pPr algn="l"/>
-            <a:r>
-              <a:rPr sz="1100" b="0" i="0">
-                <a:solidFill>
-                  <a:srgbClr val="EAB308"/>
-                </a:solidFill>
-              </a:rPr>
-              <a:t>moderate</a:t>
-            </a:r>
-          </a:p>
-        </p:txBody>
-      </p:sp>
-      <p:sp>
-        <p:nvSpPr>
-          <p:cNvPr id="46" name="Rectangle 45"/>
-          <p:cNvSpPr/>
-          <p:nvPr/>
-        </p:nvSpPr>
-        <p:spPr>
-          <a:xfrm>
-            <a:off x="6309360" y="3438144"/>
-            <a:ext cx="1892808" cy="402336"/>
-          </a:xfrm>
-          <a:prstGeom prst="rect">
-            <a:avLst/>
-          </a:prstGeom>
-          <a:solidFill>
-            <a:srgbClr val="2D3748"/>
-          </a:solidFill>
-          <a:ln w="9525">
-            <a:solidFill>
-              <a:srgbClr val="3D4A5C"/>
-            </a:solidFill>
-          </a:ln>
-        </p:spPr>
-        <p:style>
-          <a:lnRef idx="1">
-            <a:schemeClr val="accent1"/>
-          </a:lnRef>
-          <a:fillRef idx="3">
-            <a:schemeClr val="accent1"/>
-          </a:fillRef>
-          <a:effectRef idx="2">
-            <a:schemeClr val="accent1"/>
-          </a:effectRef>
-          <a:fontRef idx="minor">
-            <a:schemeClr val="lt1"/>
-          </a:fontRef>
-        </p:style>
-        <p:txBody>
-          <a:bodyPr rtlCol="0" anchor="ctr"/>
-          <a:lstStyle/>
-          <a:p>
-            <a:pPr algn="ctr"/>
-          </a:p>
-        </p:txBody>
-      </p:sp>
-      <p:sp>
-        <p:nvSpPr>
-          <p:cNvPr id="47" name="TextBox 46"/>
-          <p:cNvSpPr txBox="1"/>
-          <p:nvPr/>
-        </p:nvSpPr>
-        <p:spPr>
-          <a:xfrm>
-            <a:off x="6373368" y="3493008"/>
-            <a:ext cx="1755648" cy="329184"/>
-          </a:xfrm>
-          <a:prstGeom prst="rect">
-            <a:avLst/>
-          </a:prstGeom>
-          <a:noFill/>
-        </p:spPr>
-        <p:txBody>
-          <a:bodyPr wrap="square">
-            <a:spAutoFit/>
-          </a:bodyPr>
-          <a:lstStyle/>
-          <a:p>
-            <a:pPr algn="l"/>
-            <a:r>
-              <a:rPr sz="1100" b="0" i="0">
-                <a:solidFill>
-                  <a:srgbClr val="22C55E"/>
-                </a:solidFill>
-              </a:rPr>
-              <a:t>minimal</a:t>
-            </a:r>
-          </a:p>
-        </p:txBody>
-      </p:sp>
-      <p:sp>
-        <p:nvSpPr>
-          <p:cNvPr id="48" name="Rectangle 47"/>
-          <p:cNvSpPr/>
-          <p:nvPr/>
-        </p:nvSpPr>
-        <p:spPr>
-          <a:xfrm>
-            <a:off x="548640" y="3858768"/>
-            <a:ext cx="1892808" cy="402336"/>
-          </a:xfrm>
-          <a:prstGeom prst="rect">
-            <a:avLst/>
-          </a:prstGeom>
-          <a:solidFill>
-            <a:srgbClr val="1A202C"/>
-          </a:solidFill>
-          <a:ln w="9525">
-            <a:solidFill>
-              <a:srgbClr val="3D4A5C"/>
-            </a:solidFill>
-          </a:ln>
-        </p:spPr>
-        <p:style>
-          <a:lnRef idx="1">
-            <a:schemeClr val="accent1"/>
-          </a:lnRef>
-          <a:fillRef idx="3">
-            <a:schemeClr val="accent1"/>
-          </a:fillRef>
-          <a:effectRef idx="2">
-            <a:schemeClr val="accent1"/>
-          </a:effectRef>
-          <a:fontRef idx="minor">
-            <a:schemeClr val="lt1"/>
-          </a:fontRef>
-        </p:style>
-        <p:txBody>
-          <a:bodyPr rtlCol="0" anchor="ctr"/>
-          <a:lstStyle/>
-          <a:p>
-            <a:pPr algn="ctr"/>
-          </a:p>
-        </p:txBody>
-      </p:sp>
-      <p:sp>
-        <p:nvSpPr>
-          <p:cNvPr id="49" name="TextBox 48"/>
-          <p:cNvSpPr txBox="1"/>
-          <p:nvPr/>
-        </p:nvSpPr>
-        <p:spPr>
-          <a:xfrm>
-            <a:off x="612648" y="3913632"/>
-            <a:ext cx="1755648" cy="329184"/>
-          </a:xfrm>
-          <a:prstGeom prst="rect">
-            <a:avLst/>
-          </a:prstGeom>
-          <a:noFill/>
-        </p:spPr>
-        <p:txBody>
-          <a:bodyPr wrap="square">
-            <a:spAutoFit/>
-          </a:bodyPr>
-          <a:lstStyle/>
-          <a:p>
-            <a:pPr algn="l"/>
-            <a:r>
-              <a:rPr sz="1100" b="1" i="0">
-                <a:solidFill>
-                  <a:srgbClr val="FFFFFF"/>
-                </a:solidFill>
-              </a:rPr>
-              <a:t>Env. Justice</a:t>
-            </a:r>
-          </a:p>
-        </p:txBody>
-      </p:sp>
-      <p:sp>
-        <p:nvSpPr>
-          <p:cNvPr id="50" name="Rectangle 49"/>
-          <p:cNvSpPr/>
-          <p:nvPr/>
-        </p:nvSpPr>
-        <p:spPr>
-          <a:xfrm>
-            <a:off x="2468880" y="3858768"/>
-            <a:ext cx="1892808" cy="402336"/>
-          </a:xfrm>
-          <a:prstGeom prst="rect">
-            <a:avLst/>
-          </a:prstGeom>
-          <a:solidFill>
-            <a:srgbClr val="2D3748"/>
-          </a:solidFill>
-          <a:ln w="9525">
-            <a:solidFill>
-              <a:srgbClr val="3D4A5C"/>
-            </a:solidFill>
-          </a:ln>
-        </p:spPr>
-        <p:style>
-          <a:lnRef idx="1">
-            <a:schemeClr val="accent1"/>
-          </a:lnRef>
-          <a:fillRef idx="3">
-            <a:schemeClr val="accent1"/>
-          </a:fillRef>
-          <a:effectRef idx="2">
-            <a:schemeClr val="accent1"/>
-          </a:effectRef>
-          <a:fontRef idx="minor">
-            <a:schemeClr val="lt1"/>
-          </a:fontRef>
-        </p:style>
-        <p:txBody>
-          <a:bodyPr rtlCol="0" anchor="ctr"/>
-          <a:lstStyle/>
-          <a:p>
-            <a:pPr algn="ctr"/>
-          </a:p>
-        </p:txBody>
-      </p:sp>
-      <p:sp>
-        <p:nvSpPr>
-          <p:cNvPr id="51" name="TextBox 50"/>
-          <p:cNvSpPr txBox="1"/>
-          <p:nvPr/>
-        </p:nvSpPr>
-        <p:spPr>
-          <a:xfrm>
-            <a:off x="2532888" y="3913632"/>
-            <a:ext cx="1755648" cy="329184"/>
-          </a:xfrm>
-          <a:prstGeom prst="rect">
-            <a:avLst/>
-          </a:prstGeom>
-          <a:noFill/>
-        </p:spPr>
-        <p:txBody>
-          <a:bodyPr wrap="square">
-            <a:spAutoFit/>
-          </a:bodyPr>
-          <a:lstStyle/>
-          <a:p>
-            <a:pPr algn="l"/>
-            <a:r>
-              <a:rPr sz="1100" b="0" i="0">
-                <a:solidFill>
-                  <a:srgbClr val="06B6D3"/>
-                </a:solidFill>
-              </a:rPr>
-              <a:t>none</a:t>
-            </a:r>
-          </a:p>
-        </p:txBody>
-      </p:sp>
-      <p:sp>
-        <p:nvSpPr>
-          <p:cNvPr id="52" name="Rectangle 51"/>
-          <p:cNvSpPr/>
-          <p:nvPr/>
-        </p:nvSpPr>
-        <p:spPr>
-          <a:xfrm>
-            <a:off x="4389120" y="3858768"/>
-            <a:ext cx="1892808" cy="402336"/>
-          </a:xfrm>
-          <a:prstGeom prst="rect">
-            <a:avLst/>
-          </a:prstGeom>
-          <a:solidFill>
-            <a:srgbClr val="2D3748"/>
-          </a:solidFill>
-          <a:ln w="9525">
-            <a:solidFill>
-              <a:srgbClr val="3D4A5C"/>
-            </a:solidFill>
-          </a:ln>
-        </p:spPr>
-        <p:style>
-          <a:lnRef idx="1">
-            <a:schemeClr val="accent1"/>
-          </a:lnRef>
-          <a:fillRef idx="3">
-            <a:schemeClr val="accent1"/>
-          </a:fillRef>
-          <a:effectRef idx="2">
-            <a:schemeClr val="accent1"/>
-          </a:effectRef>
-          <a:fontRef idx="minor">
-            <a:schemeClr val="lt1"/>
-          </a:fontRef>
-        </p:style>
-        <p:txBody>
-          <a:bodyPr rtlCol="0" anchor="ctr"/>
-          <a:lstStyle/>
-          <a:p>
-            <a:pPr algn="ctr"/>
-          </a:p>
-        </p:txBody>
-      </p:sp>
-      <p:sp>
-        <p:nvSpPr>
-          <p:cNvPr id="53" name="TextBox 52"/>
-          <p:cNvSpPr txBox="1"/>
-          <p:nvPr/>
-        </p:nvSpPr>
-        <p:spPr>
-          <a:xfrm>
-            <a:off x="4453128" y="3913632"/>
-            <a:ext cx="1755648" cy="329184"/>
-          </a:xfrm>
-          <a:prstGeom prst="rect">
-            <a:avLst/>
-          </a:prstGeom>
-          <a:noFill/>
-        </p:spPr>
-        <p:txBody>
-          <a:bodyPr wrap="square">
-            <a:spAutoFit/>
-          </a:bodyPr>
-          <a:lstStyle/>
-          <a:p>
-            <a:pPr algn="l"/>
-            <a:r>
-              <a:rPr sz="1100" b="0" i="0">
-                <a:solidFill>
-                  <a:srgbClr val="EAB308"/>
-                </a:solidFill>
-              </a:rPr>
-              <a:t>moderate</a:t>
-            </a:r>
-          </a:p>
-        </p:txBody>
-      </p:sp>
-      <p:sp>
-        <p:nvSpPr>
-          <p:cNvPr id="54" name="Rectangle 53"/>
-          <p:cNvSpPr/>
-          <p:nvPr/>
-        </p:nvSpPr>
-        <p:spPr>
-          <a:xfrm>
-            <a:off x="6309360" y="3858768"/>
-            <a:ext cx="1892808" cy="402336"/>
-          </a:xfrm>
-          <a:prstGeom prst="rect">
-            <a:avLst/>
-          </a:prstGeom>
-          <a:solidFill>
-            <a:srgbClr val="2D3748"/>
-          </a:solidFill>
-          <a:ln w="9525">
-            <a:solidFill>
-              <a:srgbClr val="3D4A5C"/>
-            </a:solidFill>
-          </a:ln>
-        </p:spPr>
-        <p:style>
-          <a:lnRef idx="1">
-            <a:schemeClr val="accent1"/>
-          </a:lnRef>
-          <a:fillRef idx="3">
-            <a:schemeClr val="accent1"/>
-          </a:fillRef>
-          <a:effectRef idx="2">
-            <a:schemeClr val="accent1"/>
-          </a:effectRef>
-          <a:fontRef idx="minor">
-            <a:schemeClr val="lt1"/>
-          </a:fontRef>
-        </p:style>
-        <p:txBody>
-          <a:bodyPr rtlCol="0" anchor="ctr"/>
-          <a:lstStyle/>
-          <a:p>
-            <a:pPr algn="ctr"/>
-          </a:p>
-        </p:txBody>
-      </p:sp>
-      <p:sp>
-        <p:nvSpPr>
-          <p:cNvPr id="55" name="TextBox 54"/>
-          <p:cNvSpPr txBox="1"/>
-          <p:nvPr/>
-        </p:nvSpPr>
-        <p:spPr>
-          <a:xfrm>
-            <a:off x="6373368" y="3913632"/>
-            <a:ext cx="1755648" cy="329184"/>
-          </a:xfrm>
-          <a:prstGeom prst="rect">
-            <a:avLst/>
-          </a:prstGeom>
-          <a:noFill/>
-        </p:spPr>
-        <p:txBody>
-          <a:bodyPr wrap="square">
-            <a:spAutoFit/>
-          </a:bodyPr>
-          <a:lstStyle/>
-          <a:p>
-            <a:pPr algn="l"/>
-            <a:r>
-              <a:rPr sz="1100" b="0" i="0">
-                <a:solidFill>
-                  <a:srgbClr val="22C55E"/>
-                </a:solidFill>
-              </a:rPr>
-              <a:t>minimal</a:t>
-            </a:r>
-          </a:p>
-        </p:txBody>
-      </p:sp>
-      <p:sp>
-        <p:nvSpPr>
-          <p:cNvPr id="56" name="Rectangle 55"/>
-          <p:cNvSpPr/>
-          <p:nvPr/>
-        </p:nvSpPr>
-        <p:spPr>
-          <a:xfrm>
-            <a:off x="548640" y="4279392"/>
-            <a:ext cx="1892808" cy="402336"/>
-          </a:xfrm>
-          <a:prstGeom prst="rect">
-            <a:avLst/>
-          </a:prstGeom>
-          <a:solidFill>
-            <a:srgbClr val="1A202C"/>
-          </a:solidFill>
-          <a:ln w="9525">
-            <a:solidFill>
-              <a:srgbClr val="3D4A5C"/>
-            </a:solidFill>
-          </a:ln>
-        </p:spPr>
-        <p:style>
-          <a:lnRef idx="1">
-            <a:schemeClr val="accent1"/>
-          </a:lnRef>
-          <a:fillRef idx="3">
-            <a:schemeClr val="accent1"/>
-          </a:fillRef>
-          <a:effectRef idx="2">
-            <a:schemeClr val="accent1"/>
-          </a:effectRef>
-          <a:fontRef idx="minor">
-            <a:schemeClr val="lt1"/>
-          </a:fontRef>
-        </p:style>
-        <p:txBody>
-          <a:bodyPr rtlCol="0" anchor="ctr"/>
-          <a:lstStyle/>
-          <a:p>
-            <a:pPr algn="ctr"/>
-          </a:p>
-        </p:txBody>
-      </p:sp>
-      <p:sp>
-        <p:nvSpPr>
-          <p:cNvPr id="57" name="TextBox 56"/>
-          <p:cNvSpPr txBox="1"/>
-          <p:nvPr/>
-        </p:nvSpPr>
-        <p:spPr>
-          <a:xfrm>
-            <a:off x="612648" y="4334256"/>
-            <a:ext cx="1755648" cy="329184"/>
-          </a:xfrm>
-          <a:prstGeom prst="rect">
-            <a:avLst/>
-          </a:prstGeom>
-          <a:noFill/>
-        </p:spPr>
-        <p:txBody>
-          <a:bodyPr wrap="square">
-            <a:spAutoFit/>
-          </a:bodyPr>
-          <a:lstStyle/>
-          <a:p>
-            <a:pPr algn="l"/>
-            <a:r>
-              <a:rPr sz="1100" b="1" i="0">
-                <a:solidFill>
-                  <a:srgbClr val="FFFFFF"/>
-                </a:solidFill>
-              </a:rPr>
-              <a:t>Prime Farmland</a:t>
-            </a:r>
-          </a:p>
-        </p:txBody>
-      </p:sp>
-      <p:sp>
-        <p:nvSpPr>
-          <p:cNvPr id="58" name="Rectangle 57"/>
-          <p:cNvSpPr/>
-          <p:nvPr/>
-        </p:nvSpPr>
-        <p:spPr>
-          <a:xfrm>
-            <a:off x="2468880" y="4279392"/>
-            <a:ext cx="1892808" cy="402336"/>
-          </a:xfrm>
-          <a:prstGeom prst="rect">
-            <a:avLst/>
-          </a:prstGeom>
-          <a:solidFill>
-            <a:srgbClr val="2D3748"/>
-          </a:solidFill>
-          <a:ln w="9525">
-            <a:solidFill>
-              <a:srgbClr val="3D4A5C"/>
-            </a:solidFill>
-          </a:ln>
-        </p:spPr>
-        <p:style>
-          <a:lnRef idx="1">
-            <a:schemeClr val="accent1"/>
-          </a:lnRef>
-          <a:fillRef idx="3">
-            <a:schemeClr val="accent1"/>
-          </a:fillRef>
-          <a:effectRef idx="2">
-            <a:schemeClr val="accent1"/>
-          </a:effectRef>
-          <a:fontRef idx="minor">
-            <a:schemeClr val="lt1"/>
-          </a:fontRef>
-        </p:style>
-        <p:txBody>
-          <a:bodyPr rtlCol="0" anchor="ctr"/>
-          <a:lstStyle/>
-          <a:p>
-            <a:pPr algn="ctr"/>
-          </a:p>
-        </p:txBody>
-      </p:sp>
-      <p:sp>
-        <p:nvSpPr>
-          <p:cNvPr id="59" name="TextBox 58"/>
-          <p:cNvSpPr txBox="1"/>
-          <p:nvPr/>
-        </p:nvSpPr>
-        <p:spPr>
-          <a:xfrm>
-            <a:off x="2532888" y="4334256"/>
-            <a:ext cx="1755648" cy="329184"/>
-          </a:xfrm>
-          <a:prstGeom prst="rect">
-            <a:avLst/>
-          </a:prstGeom>
-          <a:noFill/>
-        </p:spPr>
-        <p:txBody>
-          <a:bodyPr wrap="square">
-            <a:spAutoFit/>
-          </a:bodyPr>
-          <a:lstStyle/>
-          <a:p>
-            <a:pPr algn="l"/>
-            <a:r>
-              <a:rPr sz="1100" b="0" i="0">
-                <a:solidFill>
-                  <a:srgbClr val="EF4444"/>
-                </a:solidFill>
-              </a:rPr>
-              <a:t>significant</a:t>
-            </a:r>
-          </a:p>
-        </p:txBody>
-      </p:sp>
-      <p:sp>
-        <p:nvSpPr>
-          <p:cNvPr id="60" name="Rectangle 59"/>
-          <p:cNvSpPr/>
-          <p:nvPr/>
-        </p:nvSpPr>
-        <p:spPr>
-          <a:xfrm>
-            <a:off x="4389120" y="4279392"/>
-            <a:ext cx="1892808" cy="402336"/>
-          </a:xfrm>
-          <a:prstGeom prst="rect">
-            <a:avLst/>
-          </a:prstGeom>
-          <a:solidFill>
-            <a:srgbClr val="2D3748"/>
-          </a:solidFill>
-          <a:ln w="9525">
-            <a:solidFill>
-              <a:srgbClr val="3D4A5C"/>
-            </a:solidFill>
-          </a:ln>
-        </p:spPr>
-        <p:style>
-          <a:lnRef idx="1">
-            <a:schemeClr val="accent1"/>
-          </a:lnRef>
-          <a:fillRef idx="3">
-            <a:schemeClr val="accent1"/>
-          </a:fillRef>
-          <a:effectRef idx="2">
-            <a:schemeClr val="accent1"/>
-          </a:effectRef>
-          <a:fontRef idx="minor">
-            <a:schemeClr val="lt1"/>
-          </a:fontRef>
-        </p:style>
-        <p:txBody>
-          <a:bodyPr rtlCol="0" anchor="ctr"/>
-          <a:lstStyle/>
-          <a:p>
-            <a:pPr algn="ctr"/>
-          </a:p>
-        </p:txBody>
-      </p:sp>
-      <p:sp>
-        <p:nvSpPr>
-          <p:cNvPr id="61" name="TextBox 60"/>
-          <p:cNvSpPr txBox="1"/>
-          <p:nvPr/>
-        </p:nvSpPr>
-        <p:spPr>
-          <a:xfrm>
-            <a:off x="4453128" y="4334256"/>
-            <a:ext cx="1755648" cy="329184"/>
-          </a:xfrm>
-          <a:prstGeom prst="rect">
-            <a:avLst/>
-          </a:prstGeom>
-          <a:noFill/>
-        </p:spPr>
-        <p:txBody>
-          <a:bodyPr wrap="square">
-            <a:spAutoFit/>
-          </a:bodyPr>
-          <a:lstStyle/>
-          <a:p>
-            <a:pPr algn="l"/>
-            <a:r>
-              <a:rPr sz="1100" b="0" i="0">
-                <a:solidFill>
-                  <a:srgbClr val="EAB308"/>
-                </a:solidFill>
-              </a:rPr>
-              <a:t>moderate</a:t>
-            </a:r>
-          </a:p>
-        </p:txBody>
-      </p:sp>
-      <p:sp>
-        <p:nvSpPr>
-          <p:cNvPr id="62" name="Rectangle 61"/>
-          <p:cNvSpPr/>
-          <p:nvPr/>
-        </p:nvSpPr>
-        <p:spPr>
-          <a:xfrm>
-            <a:off x="6309360" y="4279392"/>
-            <a:ext cx="1892808" cy="402336"/>
-          </a:xfrm>
-          <a:prstGeom prst="rect">
-            <a:avLst/>
-          </a:prstGeom>
-          <a:solidFill>
-            <a:srgbClr val="2D3748"/>
-          </a:solidFill>
-          <a:ln w="9525">
-            <a:solidFill>
-              <a:srgbClr val="3D4A5C"/>
-            </a:solidFill>
-          </a:ln>
-        </p:spPr>
-        <p:style>
-          <a:lnRef idx="1">
-            <a:schemeClr val="accent1"/>
-          </a:lnRef>
-          <a:fillRef idx="3">
-            <a:schemeClr val="accent1"/>
-          </a:fillRef>
-          <a:effectRef idx="2">
-            <a:schemeClr val="accent1"/>
-          </a:effectRef>
-          <a:fontRef idx="minor">
-            <a:schemeClr val="lt1"/>
-          </a:fontRef>
-        </p:style>
-        <p:txBody>
-          <a:bodyPr rtlCol="0" anchor="ctr"/>
-          <a:lstStyle/>
-          <a:p>
-            <a:pPr algn="ctr"/>
-          </a:p>
-        </p:txBody>
-      </p:sp>
-      <p:sp>
-        <p:nvSpPr>
-          <p:cNvPr id="63" name="TextBox 62"/>
-          <p:cNvSpPr txBox="1"/>
-          <p:nvPr/>
-        </p:nvSpPr>
-        <p:spPr>
-          <a:xfrm>
-            <a:off x="6373368" y="4334256"/>
-            <a:ext cx="1755648" cy="329184"/>
-          </a:xfrm>
-          <a:prstGeom prst="rect">
-            <a:avLst/>
-          </a:prstGeom>
-          <a:noFill/>
-        </p:spPr>
-        <p:txBody>
-          <a:bodyPr wrap="square">
-            <a:spAutoFit/>
-          </a:bodyPr>
-          <a:lstStyle/>
-          <a:p>
-            <a:pPr algn="l"/>
-            <a:r>
-              <a:rPr sz="1100" b="0" i="0">
-                <a:solidFill>
-                  <a:srgbClr val="06B6D3"/>
-                </a:solidFill>
-              </a:rPr>
-              <a:t>none</a:t>
-            </a:r>
-          </a:p>
-        </p:txBody>
-      </p:sp>
-      <p:sp>
-        <p:nvSpPr>
-          <p:cNvPr id="64" name="TextBox 63"/>
-          <p:cNvSpPr txBox="1"/>
-          <p:nvPr/>
-        </p:nvSpPr>
-        <p:spPr>
-          <a:xfrm>
-            <a:off x="548640" y="4773168"/>
-            <a:ext cx="1280160" cy="274320"/>
-          </a:xfrm>
-          <a:prstGeom prst="rect">
-            <a:avLst/>
-          </a:prstGeom>
-          <a:noFill/>
-        </p:spPr>
-        <p:txBody>
-          <a:bodyPr wrap="square">
-            <a:spAutoFit/>
-          </a:bodyPr>
-          <a:lstStyle/>
-          <a:p>
-            <a:pPr algn="l"/>
-            <a:r>
-              <a:rPr sz="1100" b="1" i="0">
-                <a:solidFill>
-                  <a:srgbClr val="FFFFFF"/>
-                </a:solidFill>
-              </a:rPr>
-              <a:t>Significance:</a:t>
-            </a:r>
-          </a:p>
-        </p:txBody>
-      </p:sp>
-      <p:sp>
-        <p:nvSpPr>
-          <p:cNvPr id="65" name="Rectangle 64"/>
-          <p:cNvSpPr/>
-          <p:nvPr/>
-        </p:nvSpPr>
-        <p:spPr>
-          <a:xfrm>
-            <a:off x="1920240" y="4818888"/>
-            <a:ext cx="146304" cy="146304"/>
-          </a:xfrm>
-          <a:prstGeom prst="rect">
-            <a:avLst/>
-          </a:prstGeom>
-          <a:solidFill>
-            <a:srgbClr val="EF4444"/>
-          </a:solidFill>
-        </p:spPr>
-        <p:style>
-          <a:lnRef idx="1">
-            <a:schemeClr val="accent1"/>
-          </a:lnRef>
-          <a:fillRef idx="3">
-            <a:schemeClr val="accent1"/>
-          </a:fillRef>
-          <a:effectRef idx="2">
-            <a:schemeClr val="accent1"/>
-          </a:effectRef>
-          <a:fontRef idx="minor">
-            <a:schemeClr val="lt1"/>
-          </a:fontRef>
-        </p:style>
-        <p:txBody>
-          <a:bodyPr rtlCol="0" anchor="ctr"/>
-          <a:lstStyle/>
-          <a:p>
-            <a:pPr algn="ctr"/>
-          </a:p>
-        </p:txBody>
-      </p:sp>
-      <p:sp>
-        <p:nvSpPr>
-          <p:cNvPr id="66" name="TextBox 65"/>
-          <p:cNvSpPr txBox="1"/>
-          <p:nvPr/>
-        </p:nvSpPr>
-        <p:spPr>
-          <a:xfrm>
-            <a:off x="2121408" y="4773168"/>
-            <a:ext cx="1188720" cy="274320"/>
-          </a:xfrm>
-          <a:prstGeom prst="rect">
-            <a:avLst/>
-          </a:prstGeom>
-          <a:noFill/>
-        </p:spPr>
-        <p:txBody>
-          <a:bodyPr wrap="square">
-            <a:spAutoFit/>
-          </a:bodyPr>
-          <a:lstStyle/>
-          <a:p>
-            <a:pPr algn="l"/>
-            <a:r>
-              <a:rPr sz="1100" b="0" i="0">
-                <a:solidFill>
-                  <a:srgbClr val="EF4444"/>
-                </a:solidFill>
-              </a:rPr>
-              <a:t>significant</a:t>
-            </a:r>
-          </a:p>
-        </p:txBody>
-      </p:sp>
-      <p:sp>
-        <p:nvSpPr>
-          <p:cNvPr id="67" name="Rectangle 66"/>
-          <p:cNvSpPr/>
-          <p:nvPr/>
-        </p:nvSpPr>
-        <p:spPr>
-          <a:xfrm>
-            <a:off x="3337560" y="4818888"/>
-            <a:ext cx="146304" cy="146304"/>
-          </a:xfrm>
-          <a:prstGeom prst="rect">
-            <a:avLst/>
-          </a:prstGeom>
-          <a:solidFill>
-            <a:srgbClr val="EAB308"/>
-          </a:solidFill>
-        </p:spPr>
-        <p:style>
-          <a:lnRef idx="1">
-            <a:schemeClr val="accent1"/>
-          </a:lnRef>
-          <a:fillRef idx="3">
-            <a:schemeClr val="accent1"/>
-          </a:fillRef>
-          <a:effectRef idx="2">
-            <a:schemeClr val="accent1"/>
-          </a:effectRef>
-          <a:fontRef idx="minor">
-            <a:schemeClr val="lt1"/>
-          </a:fontRef>
-        </p:style>
-        <p:txBody>
-          <a:bodyPr rtlCol="0" anchor="ctr"/>
-          <a:lstStyle/>
-          <a:p>
-            <a:pPr algn="ctr"/>
-          </a:p>
-        </p:txBody>
-      </p:sp>
-      <p:sp>
-        <p:nvSpPr>
-          <p:cNvPr id="68" name="TextBox 67"/>
-          <p:cNvSpPr txBox="1"/>
-          <p:nvPr/>
-        </p:nvSpPr>
-        <p:spPr>
-          <a:xfrm>
-            <a:off x="3538728" y="4773168"/>
-            <a:ext cx="1188720" cy="274320"/>
-          </a:xfrm>
-          <a:prstGeom prst="rect">
-            <a:avLst/>
-          </a:prstGeom>
-          <a:noFill/>
-        </p:spPr>
-        <p:txBody>
-          <a:bodyPr wrap="square">
-            <a:spAutoFit/>
-          </a:bodyPr>
-          <a:lstStyle/>
-          <a:p>
-            <a:pPr algn="l"/>
-            <a:r>
-              <a:rPr sz="1100" b="0" i="0">
-                <a:solidFill>
-                  <a:srgbClr val="EAB308"/>
-                </a:solidFill>
-              </a:rPr>
-              <a:t>moderate</a:t>
-            </a:r>
-          </a:p>
-        </p:txBody>
-      </p:sp>
-      <p:sp>
-        <p:nvSpPr>
-          <p:cNvPr id="69" name="Rectangle 68"/>
-          <p:cNvSpPr/>
-          <p:nvPr/>
-        </p:nvSpPr>
-        <p:spPr>
-          <a:xfrm>
-            <a:off x="4754880" y="4818888"/>
-            <a:ext cx="146304" cy="146304"/>
-          </a:xfrm>
-          <a:prstGeom prst="rect">
-            <a:avLst/>
-          </a:prstGeom>
-          <a:solidFill>
-            <a:srgbClr val="22C55E"/>
-          </a:solidFill>
-        </p:spPr>
-        <p:style>
-          <a:lnRef idx="1">
-            <a:schemeClr val="accent1"/>
-          </a:lnRef>
-          <a:fillRef idx="3">
-            <a:schemeClr val="accent1"/>
-          </a:fillRef>
-          <a:effectRef idx="2">
-            <a:schemeClr val="accent1"/>
-          </a:effectRef>
-          <a:fontRef idx="minor">
-            <a:schemeClr val="lt1"/>
-          </a:fontRef>
-        </p:style>
-        <p:txBody>
-          <a:bodyPr rtlCol="0" anchor="ctr"/>
-          <a:lstStyle/>
-          <a:p>
-            <a:pPr algn="ctr"/>
-          </a:p>
-        </p:txBody>
-      </p:sp>
-      <p:sp>
-        <p:nvSpPr>
-          <p:cNvPr id="70" name="TextBox 69"/>
-          <p:cNvSpPr txBox="1"/>
-          <p:nvPr/>
-        </p:nvSpPr>
-        <p:spPr>
-          <a:xfrm>
-            <a:off x="4956048" y="4773168"/>
-            <a:ext cx="1188720" cy="274320"/>
-          </a:xfrm>
-          <a:prstGeom prst="rect">
-            <a:avLst/>
-          </a:prstGeom>
-          <a:noFill/>
-        </p:spPr>
-        <p:txBody>
-          <a:bodyPr wrap="square">
-            <a:spAutoFit/>
-          </a:bodyPr>
-          <a:lstStyle/>
-          <a:p>
-            <a:pPr algn="l"/>
-            <a:r>
-              <a:rPr sz="1100" b="0" i="0">
-                <a:solidFill>
-                  <a:srgbClr val="22C55E"/>
-                </a:solidFill>
-              </a:rPr>
-              <a:t>minimal</a:t>
-            </a:r>
-          </a:p>
-        </p:txBody>
-      </p:sp>
-      <p:sp>
-        <p:nvSpPr>
-          <p:cNvPr id="71" name="Rectangle 70"/>
-          <p:cNvSpPr/>
-          <p:nvPr/>
-        </p:nvSpPr>
-        <p:spPr>
-          <a:xfrm>
-            <a:off x="6172200" y="4818888"/>
-            <a:ext cx="146304" cy="146304"/>
-          </a:xfrm>
-          <a:prstGeom prst="rect">
-            <a:avLst/>
-          </a:prstGeom>
-          <a:solidFill>
-            <a:srgbClr val="06B6D3"/>
-          </a:solidFill>
-        </p:spPr>
-        <p:style>
-          <a:lnRef idx="1">
-            <a:schemeClr val="accent1"/>
-          </a:lnRef>
-          <a:fillRef idx="3">
-            <a:schemeClr val="accent1"/>
-          </a:fillRef>
-          <a:effectRef idx="2">
-            <a:schemeClr val="accent1"/>
-          </a:effectRef>
-          <a:fontRef idx="minor">
-            <a:schemeClr val="lt1"/>
-          </a:fontRef>
-        </p:style>
-        <p:txBody>
-          <a:bodyPr rtlCol="0" anchor="ctr"/>
-          <a:lstStyle/>
-          <a:p>
-            <a:pPr algn="ctr"/>
-          </a:p>
-        </p:txBody>
-      </p:sp>
-      <p:sp>
-        <p:nvSpPr>
-          <p:cNvPr id="72" name="TextBox 71"/>
-          <p:cNvSpPr txBox="1"/>
-          <p:nvPr/>
-        </p:nvSpPr>
-        <p:spPr>
-          <a:xfrm>
-            <a:off x="6373368" y="4773168"/>
-            <a:ext cx="1188720" cy="274320"/>
-          </a:xfrm>
-          <a:prstGeom prst="rect">
-            <a:avLst/>
-          </a:prstGeom>
-          <a:noFill/>
-        </p:spPr>
-        <p:txBody>
-          <a:bodyPr wrap="square">
-            <a:spAutoFit/>
-          </a:bodyPr>
-          <a:lstStyle/>
-          <a:p>
-            <a:pPr algn="l"/>
-            <a:r>
-              <a:rPr sz="1100" b="0" i="0">
-                <a:solidFill>
-                  <a:srgbClr val="06B6D3"/>
-                </a:solidFill>
-              </a:rPr>
-              <a:t>none</a:t>
-            </a:r>
-          </a:p>
-        </p:txBody>
-      </p:sp>
-      <p:sp>
-        <p:nvSpPr>
-          <p:cNvPr id="73" name="TextBox 72"/>
-          <p:cNvSpPr txBox="1"/>
-          <p:nvPr/>
-        </p:nvSpPr>
-        <p:spPr>
-          <a:xfrm>
-            <a:off x="8321040" y="1755648"/>
-            <a:ext cx="3566160" cy="274320"/>
-          </a:xfrm>
-          <a:prstGeom prst="rect">
-            <a:avLst/>
-          </a:prstGeom>
-          <a:noFill/>
-        </p:spPr>
-        <p:txBody>
-          <a:bodyPr wrap="square">
-            <a:spAutoFit/>
-          </a:bodyPr>
-          <a:lstStyle/>
-          <a:p>
-            <a:pPr algn="l"/>
-            <a:r>
-              <a:rPr sz="1100" b="1" i="0">
-                <a:solidFill>
-                  <a:srgbClr val="F97316"/>
-                </a:solidFill>
-              </a:rPr>
-              <a:t>PER-CELL FIELDS</a:t>
-            </a:r>
-          </a:p>
-        </p:txBody>
-      </p:sp>
-      <p:sp>
-        <p:nvSpPr>
-          <p:cNvPr id="74" name="Rectangle 73"/>
-          <p:cNvSpPr/>
-          <p:nvPr/>
-        </p:nvSpPr>
-        <p:spPr>
-          <a:xfrm>
-            <a:off x="8321040" y="2103120"/>
-            <a:ext cx="3566160" cy="566928"/>
-          </a:xfrm>
-          <a:prstGeom prst="rect">
-            <a:avLst/>
-          </a:prstGeom>
-          <a:solidFill>
-            <a:srgbClr val="2D3748"/>
-          </a:solidFill>
-          <a:ln w="10160">
-            <a:solidFill>
-              <a:srgbClr val="F97316"/>
-            </a:solidFill>
-          </a:ln>
-        </p:spPr>
-        <p:style>
-          <a:lnRef idx="1">
-            <a:schemeClr val="accent1"/>
-          </a:lnRef>
-          <a:fillRef idx="3">
-            <a:schemeClr val="accent1"/>
-          </a:fillRef>
-          <a:effectRef idx="2">
-            <a:schemeClr val="accent1"/>
-          </a:effectRef>
-          <a:fontRef idx="minor">
-            <a:schemeClr val="lt1"/>
-          </a:fontRef>
-        </p:style>
-        <p:txBody>
-          <a:bodyPr rtlCol="0" anchor="ctr"/>
-          <a:lstStyle/>
-          <a:p>
-            <a:pPr algn="ctr"/>
-          </a:p>
-        </p:txBody>
-      </p:sp>
-      <p:sp>
-        <p:nvSpPr>
-          <p:cNvPr id="75" name="TextBox 74"/>
-          <p:cNvSpPr txBox="1"/>
-          <p:nvPr/>
-        </p:nvSpPr>
-        <p:spPr>
-          <a:xfrm>
-            <a:off x="8412480" y="2139696"/>
-            <a:ext cx="3383280" cy="256032"/>
-          </a:xfrm>
-          <a:prstGeom prst="rect">
-            <a:avLst/>
-          </a:prstGeom>
-          <a:noFill/>
-        </p:spPr>
-        <p:txBody>
-          <a:bodyPr wrap="square">
-            <a:spAutoFit/>
-          </a:bodyPr>
-          <a:lstStyle/>
-          <a:p>
-            <a:pPr algn="l"/>
-            <a:r>
-              <a:rPr sz="1100" b="1" i="0">
-                <a:solidFill>
-                  <a:srgbClr val="F97316"/>
-                </a:solidFill>
-              </a:rPr>
-              <a:t>significance</a:t>
-            </a:r>
-          </a:p>
-        </p:txBody>
-      </p:sp>
-      <p:sp>
-        <p:nvSpPr>
-          <p:cNvPr id="76" name="TextBox 75"/>
-          <p:cNvSpPr txBox="1"/>
-          <p:nvPr/>
-        </p:nvSpPr>
-        <p:spPr>
-          <a:xfrm>
-            <a:off x="8412480" y="2395728"/>
-            <a:ext cx="3383280" cy="219456"/>
-          </a:xfrm>
-          <a:prstGeom prst="rect">
-            <a:avLst/>
-          </a:prstGeom>
-          <a:noFill/>
-        </p:spPr>
-        <p:txBody>
-          <a:bodyPr wrap="square">
-            <a:spAutoFit/>
-          </a:bodyPr>
-          <a:lstStyle/>
-          <a:p>
-            <a:pPr algn="l"/>
-            <a:r>
-              <a:rPr sz="1000" b="0" i="0">
-                <a:solidFill>
-                  <a:srgbClr val="E5E7EB"/>
-                </a:solidFill>
-              </a:rPr>
-              <a:t>significant | moderate | minimal | none</a:t>
-            </a:r>
-          </a:p>
-        </p:txBody>
-      </p:sp>
-      <p:sp>
-        <p:nvSpPr>
-          <p:cNvPr id="77" name="Rectangle 76"/>
-          <p:cNvSpPr/>
-          <p:nvPr/>
-        </p:nvSpPr>
-        <p:spPr>
-          <a:xfrm>
-            <a:off x="8321040" y="2724912"/>
-            <a:ext cx="3566160" cy="566928"/>
-          </a:xfrm>
-          <a:prstGeom prst="rect">
-            <a:avLst/>
-          </a:prstGeom>
-          <a:solidFill>
-            <a:srgbClr val="2D3748"/>
-          </a:solidFill>
-          <a:ln w="10160">
-            <a:solidFill>
-              <a:srgbClr val="EAB308"/>
-            </a:solidFill>
-          </a:ln>
-        </p:spPr>
-        <p:style>
-          <a:lnRef idx="1">
-            <a:schemeClr val="accent1"/>
-          </a:lnRef>
-          <a:fillRef idx="3">
-            <a:schemeClr val="accent1"/>
-          </a:fillRef>
-          <a:effectRef idx="2">
-            <a:schemeClr val="accent1"/>
-          </a:effectRef>
-          <a:fontRef idx="minor">
-            <a:schemeClr val="lt1"/>
-          </a:fontRef>
-        </p:style>
-        <p:txBody>
-          <a:bodyPr rtlCol="0" anchor="ctr"/>
-          <a:lstStyle/>
-          <a:p>
-            <a:pPr algn="ctr"/>
-          </a:p>
-        </p:txBody>
-      </p:sp>
-      <p:sp>
-        <p:nvSpPr>
-          <p:cNvPr id="78" name="TextBox 77"/>
-          <p:cNvSpPr txBox="1"/>
-          <p:nvPr/>
-        </p:nvSpPr>
-        <p:spPr>
-          <a:xfrm>
-            <a:off x="8412480" y="2761488"/>
-            <a:ext cx="3383280" cy="256032"/>
-          </a:xfrm>
-          <a:prstGeom prst="rect">
-            <a:avLst/>
-          </a:prstGeom>
-          <a:noFill/>
-        </p:spPr>
-        <p:txBody>
-          <a:bodyPr wrap="square">
-            <a:spAutoFit/>
-          </a:bodyPr>
-          <a:lstStyle/>
-          <a:p>
-            <a:pPr algn="l"/>
-            <a:r>
-              <a:rPr sz="1100" b="1" i="0">
-                <a:solidFill>
-                  <a:srgbClr val="EAB308"/>
-                </a:solidFill>
-              </a:rPr>
-              <a:t>confidence</a:t>
-            </a:r>
-          </a:p>
-        </p:txBody>
-      </p:sp>
-      <p:sp>
-        <p:nvSpPr>
-          <p:cNvPr id="79" name="TextBox 78"/>
-          <p:cNvSpPr txBox="1"/>
-          <p:nvPr/>
-        </p:nvSpPr>
-        <p:spPr>
-          <a:xfrm>
-            <a:off x="8412480" y="3017520"/>
-            <a:ext cx="3383280" cy="219456"/>
-          </a:xfrm>
-          <a:prstGeom prst="rect">
-            <a:avLst/>
-          </a:prstGeom>
-          <a:noFill/>
-        </p:spPr>
-        <p:txBody>
-          <a:bodyPr wrap="square">
-            <a:spAutoFit/>
-          </a:bodyPr>
-          <a:lstStyle/>
-          <a:p>
-            <a:pPr algn="l"/>
-            <a:r>
-              <a:rPr sz="1000" b="0" i="0">
-                <a:solidFill>
-                  <a:srgbClr val="E5E7EB"/>
-                </a:solidFill>
-              </a:rPr>
-              <a:t>0.0 – 1.0  (see confidence tiers)</a:t>
-            </a:r>
-          </a:p>
-        </p:txBody>
-      </p:sp>
-      <p:sp>
-        <p:nvSpPr>
-          <p:cNvPr id="80" name="Rectangle 79"/>
-          <p:cNvSpPr/>
-          <p:nvPr/>
-        </p:nvSpPr>
-        <p:spPr>
-          <a:xfrm>
-            <a:off x="8321040" y="3346704"/>
-            <a:ext cx="3566160" cy="566928"/>
-          </a:xfrm>
-          <a:prstGeom prst="rect">
-            <a:avLst/>
-          </a:prstGeom>
-          <a:solidFill>
-            <a:srgbClr val="2D3748"/>
-          </a:solidFill>
-          <a:ln w="10160">
-            <a:solidFill>
-              <a:srgbClr val="E5E7EB"/>
-            </a:solidFill>
-          </a:ln>
-        </p:spPr>
-        <p:style>
-          <a:lnRef idx="1">
-            <a:schemeClr val="accent1"/>
-          </a:lnRef>
-          <a:fillRef idx="3">
-            <a:schemeClr val="accent1"/>
-          </a:fillRef>
-          <a:effectRef idx="2">
-            <a:schemeClr val="accent1"/>
-          </a:effectRef>
-          <a:fontRef idx="minor">
-            <a:schemeClr val="lt1"/>
-          </a:fontRef>
-        </p:style>
-        <p:txBody>
-          <a:bodyPr rtlCol="0" anchor="ctr"/>
-          <a:lstStyle/>
-          <a:p>
-            <a:pPr algn="ctr"/>
-          </a:p>
-        </p:txBody>
-      </p:sp>
-      <p:sp>
-        <p:nvSpPr>
-          <p:cNvPr id="81" name="TextBox 80"/>
-          <p:cNvSpPr txBox="1"/>
-          <p:nvPr/>
-        </p:nvSpPr>
-        <p:spPr>
-          <a:xfrm>
-            <a:off x="8412480" y="3383280"/>
-            <a:ext cx="3383280" cy="256032"/>
-          </a:xfrm>
-          <a:prstGeom prst="rect">
-            <a:avLst/>
-          </a:prstGeom>
-          <a:noFill/>
-        </p:spPr>
-        <p:txBody>
-          <a:bodyPr wrap="square">
-            <a:spAutoFit/>
-          </a:bodyPr>
-          <a:lstStyle/>
-          <a:p>
-            <a:pPr algn="l"/>
-            <a:r>
-              <a:rPr sz="1100" b="1" i="0">
-                <a:solidFill>
-                  <a:srgbClr val="E5E7EB"/>
-                </a:solidFill>
-              </a:rPr>
-              <a:t>reasoning</a:t>
-            </a:r>
-          </a:p>
-        </p:txBody>
-      </p:sp>
-      <p:sp>
-        <p:nvSpPr>
-          <p:cNvPr id="82" name="TextBox 81"/>
-          <p:cNvSpPr txBox="1"/>
-          <p:nvPr/>
-        </p:nvSpPr>
-        <p:spPr>
-          <a:xfrm>
-            <a:off x="8412480" y="3639312"/>
-            <a:ext cx="3383280" cy="219456"/>
-          </a:xfrm>
-          <a:prstGeom prst="rect">
-            <a:avLst/>
-          </a:prstGeom>
-          <a:noFill/>
-        </p:spPr>
-        <p:txBody>
-          <a:bodyPr wrap="square">
-            <a:spAutoFit/>
-          </a:bodyPr>
-          <a:lstStyle/>
-          <a:p>
-            <a:pPr algn="l"/>
-            <a:r>
-              <a:rPr sz="1000" b="0" i="0">
-                <a:solidFill>
-                  <a:srgbClr val="E5E7EB"/>
-                </a:solidFill>
-              </a:rPr>
-              <a:t>1–2 sentence explanation</a:t>
-            </a:r>
-          </a:p>
-        </p:txBody>
-      </p:sp>
-      <p:sp>
-        <p:nvSpPr>
-          <p:cNvPr id="83" name="Rectangle 82"/>
-          <p:cNvSpPr/>
-          <p:nvPr/>
-        </p:nvSpPr>
-        <p:spPr>
-          <a:xfrm>
-            <a:off x="8321040" y="3968496"/>
-            <a:ext cx="3566160" cy="566928"/>
-          </a:xfrm>
-          <a:prstGeom prst="rect">
-            <a:avLst/>
-          </a:prstGeom>
-          <a:solidFill>
-            <a:srgbClr val="2D3748"/>
-          </a:solidFill>
-          <a:ln w="10160">
-            <a:solidFill>
-              <a:srgbClr val="22C55E"/>
-            </a:solidFill>
-          </a:ln>
-        </p:spPr>
-        <p:style>
-          <a:lnRef idx="1">
-            <a:schemeClr val="accent1"/>
-          </a:lnRef>
-          <a:fillRef idx="3">
-            <a:schemeClr val="accent1"/>
-          </a:fillRef>
-          <a:effectRef idx="2">
-            <a:schemeClr val="accent1"/>
-          </a:effectRef>
-          <a:fontRef idx="minor">
-            <a:schemeClr val="lt1"/>
-          </a:fontRef>
-        </p:style>
-        <p:txBody>
-          <a:bodyPr rtlCol="0" anchor="ctr"/>
-          <a:lstStyle/>
-          <a:p>
-            <a:pPr algn="ctr"/>
-          </a:p>
-        </p:txBody>
-      </p:sp>
-      <p:sp>
-        <p:nvSpPr>
-          <p:cNvPr id="84" name="TextBox 83"/>
-          <p:cNvSpPr txBox="1"/>
-          <p:nvPr/>
-        </p:nvSpPr>
-        <p:spPr>
-          <a:xfrm>
-            <a:off x="8412480" y="4005072"/>
-            <a:ext cx="3383280" cy="256032"/>
-          </a:xfrm>
-          <a:prstGeom prst="rect">
-            <a:avLst/>
-          </a:prstGeom>
-          <a:noFill/>
-        </p:spPr>
-        <p:txBody>
-          <a:bodyPr wrap="square">
-            <a:spAutoFit/>
-          </a:bodyPr>
-          <a:lstStyle/>
-          <a:p>
-            <a:pPr algn="l"/>
-            <a:r>
-              <a:rPr sz="1100" b="1" i="0">
-                <a:solidFill>
-                  <a:srgbClr val="22C55E"/>
-                </a:solidFill>
-              </a:rPr>
-              <a:t>mitigation</a:t>
-            </a:r>
-          </a:p>
-        </p:txBody>
-      </p:sp>
-      <p:sp>
-        <p:nvSpPr>
-          <p:cNvPr id="85" name="TextBox 84"/>
-          <p:cNvSpPr txBox="1"/>
-          <p:nvPr/>
-        </p:nvSpPr>
-        <p:spPr>
-          <a:xfrm>
-            <a:off x="8412480" y="4261104"/>
-            <a:ext cx="3383280" cy="219456"/>
-          </a:xfrm>
-          <a:prstGeom prst="rect">
-            <a:avLst/>
-          </a:prstGeom>
-          <a:noFill/>
-        </p:spPr>
-        <p:txBody>
-          <a:bodyPr wrap="square">
-            <a:spAutoFit/>
-          </a:bodyPr>
-          <a:lstStyle/>
-          <a:p>
-            <a:pPr algn="l"/>
-            <a:r>
-              <a:rPr sz="1000" b="0" i="0">
-                <a:solidFill>
-                  <a:srgbClr val="E5E7EB"/>
-                </a:solidFill>
-              </a:rPr>
-              <a:t>avoidance | minimization | compensatory</a:t>
-            </a:r>
-          </a:p>
-        </p:txBody>
-      </p:sp>
-      <p:sp>
-        <p:nvSpPr>
-          <p:cNvPr id="86" name="Rectangle 85"/>
-          <p:cNvSpPr/>
-          <p:nvPr/>
-        </p:nvSpPr>
-        <p:spPr>
-          <a:xfrm>
-            <a:off x="8321040" y="4590288"/>
-            <a:ext cx="3566160" cy="566928"/>
-          </a:xfrm>
-          <a:prstGeom prst="rect">
-            <a:avLst/>
-          </a:prstGeom>
-          <a:solidFill>
-            <a:srgbClr val="2D3748"/>
-          </a:solidFill>
-          <a:ln w="10160">
-            <a:solidFill>
-              <a:srgbClr val="EF4444"/>
-            </a:solidFill>
-          </a:ln>
-        </p:spPr>
-        <p:style>
-          <a:lnRef idx="1">
-            <a:schemeClr val="accent1"/>
-          </a:lnRef>
-          <a:fillRef idx="3">
-            <a:schemeClr val="accent1"/>
-          </a:fillRef>
-          <a:effectRef idx="2">
-            <a:schemeClr val="accent1"/>
-          </a:effectRef>
-          <a:fontRef idx="minor">
-            <a:schemeClr val="lt1"/>
-          </a:fontRef>
-        </p:style>
-        <p:txBody>
-          <a:bodyPr rtlCol="0" anchor="ctr"/>
-          <a:lstStyle/>
-          <a:p>
-            <a:pPr algn="ctr"/>
-          </a:p>
-        </p:txBody>
-      </p:sp>
-      <p:sp>
-        <p:nvSpPr>
-          <p:cNvPr id="87" name="TextBox 86"/>
-          <p:cNvSpPr txBox="1"/>
-          <p:nvPr/>
-        </p:nvSpPr>
-        <p:spPr>
-          <a:xfrm>
-            <a:off x="8412480" y="4626864"/>
-            <a:ext cx="3383280" cy="256032"/>
-          </a:xfrm>
-          <a:prstGeom prst="rect">
-            <a:avLst/>
-          </a:prstGeom>
-          <a:noFill/>
-        </p:spPr>
-        <p:txBody>
-          <a:bodyPr wrap="square">
-            <a:spAutoFit/>
-          </a:bodyPr>
-          <a:lstStyle/>
-          <a:p>
-            <a:pPr algn="l"/>
-            <a:r>
-              <a:rPr sz="1100" b="1" i="0">
-                <a:solidFill>
-                  <a:srgbClr val="EF4444"/>
-                </a:solidFill>
-              </a:rPr>
-              <a:t>needs_review</a:t>
-            </a:r>
-          </a:p>
-        </p:txBody>
-      </p:sp>
-      <p:sp>
-        <p:nvSpPr>
-          <p:cNvPr id="88" name="TextBox 87"/>
-          <p:cNvSpPr txBox="1"/>
-          <p:nvPr/>
-        </p:nvSpPr>
-        <p:spPr>
-          <a:xfrm>
-            <a:off x="8412480" y="4882896"/>
-            <a:ext cx="3383280" cy="219456"/>
-          </a:xfrm>
-          <a:prstGeom prst="rect">
-            <a:avLst/>
-          </a:prstGeom>
-          <a:noFill/>
-        </p:spPr>
-        <p:txBody>
-          <a:bodyPr wrap="square">
-            <a:spAutoFit/>
-          </a:bodyPr>
-          <a:lstStyle/>
-          <a:p>
-            <a:pPr algn="l"/>
-            <a:r>
-              <a:rPr sz="1000" b="0" i="0">
-                <a:solidFill>
-                  <a:srgbClr val="E5E7EB"/>
-                </a:solidFill>
-              </a:rPr>
-              <a:t>True when confidence &lt; 0.60</a:t>
-            </a:r>
-          </a:p>
-        </p:txBody>
-      </p:sp>
-      <p:sp>
-        <p:nvSpPr>
-          <p:cNvPr id="89" name="Rectangle 88"/>
-          <p:cNvSpPr/>
-          <p:nvPr/>
-        </p:nvSpPr>
-        <p:spPr>
-          <a:xfrm>
-            <a:off x="8321040" y="5212080"/>
-            <a:ext cx="3566160" cy="566928"/>
-          </a:xfrm>
-          <a:prstGeom prst="rect">
-            <a:avLst/>
-          </a:prstGeom>
-          <a:solidFill>
-            <a:srgbClr val="2D3748"/>
-          </a:solidFill>
-          <a:ln w="10160">
-            <a:solidFill>
-              <a:srgbClr val="06B6D3"/>
-            </a:solidFill>
-          </a:ln>
-        </p:spPr>
-        <p:style>
-          <a:lnRef idx="1">
-            <a:schemeClr val="accent1"/>
-          </a:lnRef>
-          <a:fillRef idx="3">
-            <a:schemeClr val="accent1"/>
-          </a:fillRef>
-          <a:effectRef idx="2">
-            <a:schemeClr val="accent1"/>
-          </a:effectRef>
-          <a:fontRef idx="minor">
-            <a:schemeClr val="lt1"/>
-          </a:fontRef>
-        </p:style>
-        <p:txBody>
-          <a:bodyPr rtlCol="0" anchor="ctr"/>
-          <a:lstStyle/>
-          <a:p>
-            <a:pPr algn="ctr"/>
-          </a:p>
-        </p:txBody>
-      </p:sp>
-      <p:sp>
-        <p:nvSpPr>
-          <p:cNvPr id="90" name="TextBox 89"/>
-          <p:cNvSpPr txBox="1"/>
-          <p:nvPr/>
-        </p:nvSpPr>
-        <p:spPr>
-          <a:xfrm>
-            <a:off x="8412480" y="5248656"/>
-            <a:ext cx="3383280" cy="256032"/>
-          </a:xfrm>
-          <a:prstGeom prst="rect">
-            <a:avLst/>
-          </a:prstGeom>
-          <a:noFill/>
-        </p:spPr>
-        <p:txBody>
-          <a:bodyPr wrap="square">
-            <a:spAutoFit/>
-          </a:bodyPr>
-          <a:lstStyle/>
-          <a:p>
-            <a:pPr algn="l"/>
-            <a:r>
-              <a:rPr sz="1100" b="1" i="0">
-                <a:solidFill>
-                  <a:srgbClr val="06B6D3"/>
-                </a:solidFill>
-              </a:rPr>
-              <a:t>framework</a:t>
-            </a:r>
-          </a:p>
-        </p:txBody>
-      </p:sp>
-      <p:sp>
-        <p:nvSpPr>
-          <p:cNvPr id="91" name="TextBox 90"/>
-          <p:cNvSpPr txBox="1"/>
-          <p:nvPr/>
-        </p:nvSpPr>
-        <p:spPr>
-          <a:xfrm>
-            <a:off x="8412480" y="5504688"/>
-            <a:ext cx="3383280" cy="219456"/>
-          </a:xfrm>
-          <a:prstGeom prst="rect">
-            <a:avLst/>
-          </a:prstGeom>
-          <a:noFill/>
-        </p:spPr>
-        <p:txBody>
-          <a:bodyPr wrap="square">
-            <a:spAutoFit/>
-          </a:bodyPr>
-          <a:lstStyle/>
-          <a:p>
-            <a:pPr algn="l"/>
-            <a:r>
-              <a:rPr sz="1000" b="0" i="0">
-                <a:solidFill>
-                  <a:srgbClr val="E5E7EB"/>
-                </a:solidFill>
-              </a:rPr>
-              <a:t>Governing regulation citation</a:t>
-            </a:r>
-          </a:p>
-        </p:txBody>
-      </p:sp>
-      <p:sp>
-        <p:nvSpPr>
-          <p:cNvPr id="92" name="TextBox 91"/>
-          <p:cNvSpPr txBox="1"/>
-          <p:nvPr/>
-        </p:nvSpPr>
-        <p:spPr>
-          <a:xfrm>
-            <a:off x="548640" y="6473952"/>
-            <a:ext cx="11064240" cy="292608"/>
-          </a:xfrm>
-          <a:prstGeom prst="rect">
-            <a:avLst/>
-          </a:prstGeom>
-          <a:noFill/>
-        </p:spPr>
-        <p:txBody>
-          <a:bodyPr wrap="square">
-            <a:spAutoFit/>
-          </a:bodyPr>
-          <a:lstStyle/>
-          <a:p>
-            <a:pPr algn="l"/>
-            <a:r>
-              <a:rPr sz="1100" b="0" i="1">
-                <a:solidFill>
-                  <a:srgbClr val="F97316"/>
-                </a:solidFill>
-              </a:rPr>
-              <a:t>Steps:  build_context (compile upstream data) → evaluate_determinations (LLM) → validate_matrix (flag low-confidence)</a:t>
             </a:r>
           </a:p>
         </p:txBody>

--- a/EIA_Agent_System_Presentation.pptx
+++ b/EIA_Agent_System_Presentation.pptx
@@ -27,6 +27,8 @@
     <p:sldId id="269" r:id="rId22"/>
     <p:sldId id="270" r:id="rId23"/>
     <p:sldId id="271" r:id="rId24"/>
+    <p:sldId id="272" r:id="rId25"/>
+    <p:sldId id="273" r:id="rId26"/>
   </p:sldIdLst>
   <p:sldSz cx="12188952" cy="6858000" type="screen16x9"/>
   <p:notesSz cx="6858000" cy="9144000"/>
@@ -6000,12 +6002,12 @@
           <a:p>
             <a:pPr algn="l"/>
             <a:r>
-              <a:rPr sz="2800" b="1" i="0">
+              <a:rPr sz="2400" b="1" i="0">
                 <a:solidFill>
                   <a:srgbClr val="F97316"/>
                 </a:solidFill>
               </a:rPr>
-              <a:t>Results — Agent Outputs</a:t>
+              <a:t>Prompts  (1/2)  —  15 total across 5 LLM callers</a:t>
             </a:r>
           </a:p>
         </p:txBody>
@@ -6052,26 +6054,55 @@
       </p:sp>
       <p:sp>
         <p:nvSpPr>
-          <p:cNvPr id="6" name="Rectangle 5"/>
+          <p:cNvPr id="6" name="TextBox 5"/>
+          <p:cNvSpPr txBox="1"/>
+          <p:nvPr/>
+        </p:nvSpPr>
+        <p:spPr>
+          <a:xfrm>
+            <a:off x="548640" y="1005840"/>
+            <a:ext cx="11064240" cy="438912"/>
+          </a:xfrm>
+          <a:prstGeom prst="rect">
+            <a:avLst/>
+          </a:prstGeom>
+          <a:noFill/>
+        </p:spPr>
+        <p:txBody>
+          <a:bodyPr wrap="square">
+            <a:spAutoFit/>
+          </a:bodyPr>
+          <a:lstStyle/>
+          <a:p>
+            <a:pPr algn="l"/>
+            <a:r>
+              <a:rPr sz="1300" b="0" i="0">
+                <a:solidFill>
+                  <a:srgbClr val="D1D5DB"/>
+                </a:solidFill>
+              </a:rPr>
+              <a:t>Every agent uses a system prompt (role + rules) paired with a user prompt (runtime data). All non-report prompts enforce JSON-only output.</a:t>
+            </a:r>
+          </a:p>
+        </p:txBody>
+      </p:sp>
+      <p:sp>
+        <p:nvSpPr>
+          <p:cNvPr id="7" name="Rectangle 6"/>
           <p:cNvSpPr/>
           <p:nvPr/>
         </p:nvSpPr>
         <p:spPr>
           <a:xfrm>
-            <a:off x="457200" y="1078992"/>
-            <a:ext cx="2103120" cy="2926080"/>
+            <a:off x="548640" y="1536192"/>
+            <a:ext cx="11064240" cy="310896"/>
           </a:xfrm>
           <a:prstGeom prst="rect">
             <a:avLst/>
           </a:prstGeom>
           <a:solidFill>
-            <a:srgbClr val="2D3748"/>
+            <a:srgbClr val="1A202C"/>
           </a:solidFill>
-          <a:ln w="19050">
-            <a:solidFill>
-              <a:srgbClr val="3B82F6"/>
-            </a:solidFill>
-          </a:ln>
         </p:spPr>
         <p:style>
           <a:lnRef idx="1">
@@ -6097,21 +6128,162 @@
       </p:sp>
       <p:sp>
         <p:nvSpPr>
-          <p:cNvPr id="7" name="Rectangle 6"/>
+          <p:cNvPr id="8" name="TextBox 7"/>
+          <p:cNvSpPr txBox="1"/>
+          <p:nvPr/>
+        </p:nvSpPr>
+        <p:spPr>
+          <a:xfrm>
+            <a:off x="658368" y="1572768"/>
+            <a:ext cx="3383280" cy="237744"/>
+          </a:xfrm>
+          <a:prstGeom prst="rect">
+            <a:avLst/>
+          </a:prstGeom>
+          <a:noFill/>
+        </p:spPr>
+        <p:txBody>
+          <a:bodyPr wrap="square">
+            <a:spAutoFit/>
+          </a:bodyPr>
+          <a:lstStyle/>
+          <a:p>
+            <a:pPr algn="l"/>
+            <a:r>
+              <a:rPr sz="1000" b="1" i="0">
+                <a:solidFill>
+                  <a:srgbClr val="F97316"/>
+                </a:solidFill>
+              </a:rPr>
+              <a:t>CALLER</a:t>
+            </a:r>
+          </a:p>
+        </p:txBody>
+      </p:sp>
+      <p:sp>
+        <p:nvSpPr>
+          <p:cNvPr id="9" name="TextBox 8"/>
+          <p:cNvSpPr txBox="1"/>
+          <p:nvPr/>
+        </p:nvSpPr>
+        <p:spPr>
+          <a:xfrm>
+            <a:off x="2148840" y="1572768"/>
+            <a:ext cx="3383280" cy="237744"/>
+          </a:xfrm>
+          <a:prstGeom prst="rect">
+            <a:avLst/>
+          </a:prstGeom>
+          <a:noFill/>
+        </p:spPr>
+        <p:txBody>
+          <a:bodyPr wrap="square">
+            <a:spAutoFit/>
+          </a:bodyPr>
+          <a:lstStyle/>
+          <a:p>
+            <a:pPr algn="l"/>
+            <a:r>
+              <a:rPr sz="1000" b="1" i="0">
+                <a:solidFill>
+                  <a:srgbClr val="F97316"/>
+                </a:solidFill>
+              </a:rPr>
+              <a:t>SYSTEM PROMPT</a:t>
+            </a:r>
+          </a:p>
+        </p:txBody>
+      </p:sp>
+      <p:sp>
+        <p:nvSpPr>
+          <p:cNvPr id="10" name="TextBox 9"/>
+          <p:cNvSpPr txBox="1"/>
+          <p:nvPr/>
+        </p:nvSpPr>
+        <p:spPr>
+          <a:xfrm>
+            <a:off x="5623560" y="1572768"/>
+            <a:ext cx="3383280" cy="237744"/>
+          </a:xfrm>
+          <a:prstGeom prst="rect">
+            <a:avLst/>
+          </a:prstGeom>
+          <a:noFill/>
+        </p:spPr>
+        <p:txBody>
+          <a:bodyPr wrap="square">
+            <a:spAutoFit/>
+          </a:bodyPr>
+          <a:lstStyle/>
+          <a:p>
+            <a:pPr algn="l"/>
+            <a:r>
+              <a:rPr sz="1000" b="1" i="0">
+                <a:solidFill>
+                  <a:srgbClr val="F97316"/>
+                </a:solidFill>
+              </a:rPr>
+              <a:t>USER PROMPT</a:t>
+            </a:r>
+          </a:p>
+        </p:txBody>
+      </p:sp>
+      <p:sp>
+        <p:nvSpPr>
+          <p:cNvPr id="11" name="TextBox 10"/>
+          <p:cNvSpPr txBox="1"/>
+          <p:nvPr/>
+        </p:nvSpPr>
+        <p:spPr>
+          <a:xfrm>
+            <a:off x="9098280" y="1572768"/>
+            <a:ext cx="3383280" cy="237744"/>
+          </a:xfrm>
+          <a:prstGeom prst="rect">
+            <a:avLst/>
+          </a:prstGeom>
+          <a:noFill/>
+        </p:spPr>
+        <p:txBody>
+          <a:bodyPr wrap="square">
+            <a:spAutoFit/>
+          </a:bodyPr>
+          <a:lstStyle/>
+          <a:p>
+            <a:pPr algn="l"/>
+            <a:r>
+              <a:rPr sz="1000" b="1" i="0">
+                <a:solidFill>
+                  <a:srgbClr val="F97316"/>
+                </a:solidFill>
+              </a:rPr>
+              <a:t>FILE</a:t>
+            </a:r>
+          </a:p>
+        </p:txBody>
+      </p:sp>
+      <p:sp>
+        <p:nvSpPr>
+          <p:cNvPr id="12" name="Rectangle 11"/>
           <p:cNvSpPr/>
           <p:nvPr/>
         </p:nvSpPr>
         <p:spPr>
           <a:xfrm>
-            <a:off x="457200" y="1078992"/>
-            <a:ext cx="2103120" cy="365760"/>
+            <a:off x="548640" y="1901952"/>
+            <a:ext cx="11064240" cy="969264"/>
           </a:xfrm>
           <a:prstGeom prst="rect">
             <a:avLst/>
           </a:prstGeom>
           <a:solidFill>
-            <a:srgbClr val="3B82F6"/>
+            <a:srgbClr val="2D3748"/>
           </a:solidFill>
+          <a:ln w="6350">
+            <a:solidFill>
+              <a:srgbClr val="3D4A5C"/>
+            </a:solidFill>
+          </a:ln>
         </p:spPr>
         <p:style>
           <a:lnRef idx="1">
@@ -6137,95 +6309,24 @@
       </p:sp>
       <p:sp>
         <p:nvSpPr>
-          <p:cNvPr id="8" name="TextBox 7"/>
-          <p:cNvSpPr txBox="1"/>
-          <p:nvPr/>
-        </p:nvSpPr>
-        <p:spPr>
-          <a:xfrm>
-            <a:off x="530352" y="1499616"/>
-            <a:ext cx="1956816" cy="548640"/>
-          </a:xfrm>
-          <a:prstGeom prst="rect">
-            <a:avLst/>
-          </a:prstGeom>
-          <a:noFill/>
-        </p:spPr>
-        <p:txBody>
-          <a:bodyPr wrap="square">
-            <a:spAutoFit/>
-          </a:bodyPr>
-          <a:lstStyle/>
-          <a:p>
-            <a:pPr algn="l"/>
-            <a:r>
-              <a:rPr sz="1100" b="1" i="0">
-                <a:solidFill>
-                  <a:srgbClr val="3B82F6"/>
-                </a:solidFill>
-              </a:rPr>
-              <a:t>Project
-Parser</a:t>
-            </a:r>
-          </a:p>
-        </p:txBody>
-      </p:sp>
-      <p:sp>
-        <p:nvSpPr>
-          <p:cNvPr id="9" name="TextBox 8"/>
-          <p:cNvSpPr txBox="1"/>
-          <p:nvPr/>
-        </p:nvSpPr>
-        <p:spPr>
-          <a:xfrm>
-            <a:off x="566928" y="2103120"/>
-            <a:ext cx="1883664" cy="1810512"/>
-          </a:xfrm>
-          <a:prstGeom prst="rect">
-            <a:avLst/>
-          </a:prstGeom>
-          <a:noFill/>
-        </p:spPr>
-        <p:txBody>
-          <a:bodyPr wrap="square">
-            <a:spAutoFit/>
-          </a:bodyPr>
-          <a:lstStyle/>
-          <a:p>
-            <a:pPr algn="l"/>
-            <a:r>
-              <a:rPr sz="1000" b="0" i="0">
-                <a:solidFill>
-                  <a:srgbClr val="D1D5DB"/>
-                </a:solidFill>
-              </a:rPr>
-              <a:t>project_type: "highway"
-actions: ["grading","paving"]
-federal_nexus: true</a:t>
-            </a:r>
-          </a:p>
-        </p:txBody>
-      </p:sp>
-      <p:sp>
-        <p:nvSpPr>
-          <p:cNvPr id="10" name="Rectangle 9"/>
+          <p:cNvPr id="13" name="Rectangle 12"/>
           <p:cNvSpPr/>
           <p:nvPr/>
         </p:nvSpPr>
         <p:spPr>
           <a:xfrm>
-            <a:off x="2761488" y="1078992"/>
-            <a:ext cx="2103120" cy="2926080"/>
+            <a:off x="566928" y="1975104"/>
+            <a:ext cx="1463040" cy="822960"/>
           </a:xfrm>
           <a:prstGeom prst="rect">
             <a:avLst/>
           </a:prstGeom>
           <a:solidFill>
-            <a:srgbClr val="2D3748"/>
+            <a:srgbClr val="1A202C"/>
           </a:solidFill>
-          <a:ln w="19050">
+          <a:ln w="15240">
             <a:solidFill>
-              <a:srgbClr val="06B6D3"/>
+              <a:srgbClr val="3B82F6"/>
             </a:solidFill>
           </a:ln>
         </p:spPr>
@@ -6253,21 +6354,163 @@
       </p:sp>
       <p:sp>
         <p:nvSpPr>
-          <p:cNvPr id="11" name="Rectangle 10"/>
+          <p:cNvPr id="14" name="TextBox 13"/>
+          <p:cNvSpPr txBox="1"/>
+          <p:nvPr/>
+        </p:nvSpPr>
+        <p:spPr>
+          <a:xfrm>
+            <a:off x="658368" y="2066544"/>
+            <a:ext cx="1298448" cy="658368"/>
+          </a:xfrm>
+          <a:prstGeom prst="rect">
+            <a:avLst/>
+          </a:prstGeom>
+          <a:noFill/>
+        </p:spPr>
+        <p:txBody>
+          <a:bodyPr wrap="square">
+            <a:spAutoFit/>
+          </a:bodyPr>
+          <a:lstStyle/>
+          <a:p>
+            <a:pPr algn="l"/>
+            <a:r>
+              <a:rPr sz="1100" b="1" i="0">
+                <a:solidFill>
+                  <a:srgbClr val="3B82F6"/>
+                </a:solidFill>
+              </a:rPr>
+              <a:t>Project Parser</a:t>
+            </a:r>
+          </a:p>
+        </p:txBody>
+      </p:sp>
+      <p:sp>
+        <p:nvSpPr>
+          <p:cNvPr id="15" name="TextBox 14"/>
+          <p:cNvSpPr txBox="1"/>
+          <p:nvPr/>
+        </p:nvSpPr>
+        <p:spPr>
+          <a:xfrm>
+            <a:off x="2148840" y="1993392"/>
+            <a:ext cx="3401568" cy="841248"/>
+          </a:xfrm>
+          <a:prstGeom prst="rect">
+            <a:avLst/>
+          </a:prstGeom>
+          <a:noFill/>
+        </p:spPr>
+        <p:txBody>
+          <a:bodyPr wrap="square">
+            <a:spAutoFit/>
+          </a:bodyPr>
+          <a:lstStyle/>
+          <a:p>
+            <a:pPr algn="l"/>
+            <a:r>
+              <a:rPr sz="1100" b="0" i="0">
+                <a:solidFill>
+                  <a:srgbClr val="FFFFFF"/>
+                </a:solidFill>
+              </a:rPr>
+              <a:t>Extract structured metadata from NL input; respond JSON only</a:t>
+            </a:r>
+          </a:p>
+        </p:txBody>
+      </p:sp>
+      <p:sp>
+        <p:nvSpPr>
+          <p:cNvPr id="16" name="TextBox 15"/>
+          <p:cNvSpPr txBox="1"/>
+          <p:nvPr/>
+        </p:nvSpPr>
+        <p:spPr>
+          <a:xfrm>
+            <a:off x="5623560" y="1993392"/>
+            <a:ext cx="3401568" cy="841248"/>
+          </a:xfrm>
+          <a:prstGeom prst="rect">
+            <a:avLst/>
+          </a:prstGeom>
+          <a:noFill/>
+        </p:spPr>
+        <p:txBody>
+          <a:bodyPr wrap="square">
+            <a:spAutoFit/>
+          </a:bodyPr>
+          <a:lstStyle/>
+          <a:p>
+            <a:pPr algn="l"/>
+            <a:r>
+              <a:rPr sz="1100" b="0" i="0">
+                <a:solidFill>
+                  <a:srgbClr val="D1D5DB"/>
+                </a:solidFill>
+              </a:rPr>
+              <a:t>Format name + coords + description → 5 JSON fields
+(project_type, scale, location, actions, federal_nexus)</a:t>
+            </a:r>
+          </a:p>
+        </p:txBody>
+      </p:sp>
+      <p:sp>
+        <p:nvSpPr>
+          <p:cNvPr id="17" name="TextBox 16"/>
+          <p:cNvSpPr txBox="1"/>
+          <p:nvPr/>
+        </p:nvSpPr>
+        <p:spPr>
+          <a:xfrm>
+            <a:off x="9098280" y="2157984"/>
+            <a:ext cx="2423160" cy="457200"/>
+          </a:xfrm>
+          <a:prstGeom prst="rect">
+            <a:avLst/>
+          </a:prstGeom>
+          <a:noFill/>
+        </p:spPr>
+        <p:txBody>
+          <a:bodyPr wrap="square">
+            <a:spAutoFit/>
+          </a:bodyPr>
+          <a:lstStyle/>
+          <a:p>
+            <a:pPr algn="l"/>
+            <a:r>
+              <a:rPr sz="900" b="0" i="1">
+                <a:solidFill>
+                  <a:srgbClr val="F97316"/>
+                </a:solidFill>
+              </a:rPr>
+              <a:t>agents/project_parser.py</a:t>
+            </a:r>
+          </a:p>
+        </p:txBody>
+      </p:sp>
+      <p:sp>
+        <p:nvSpPr>
+          <p:cNvPr id="18" name="Rectangle 17"/>
           <p:cNvSpPr/>
           <p:nvPr/>
         </p:nvSpPr>
         <p:spPr>
           <a:xfrm>
-            <a:off x="2761488" y="1078992"/>
-            <a:ext cx="2103120" cy="365760"/>
+            <a:off x="548640" y="2926080"/>
+            <a:ext cx="11064240" cy="969264"/>
           </a:xfrm>
           <a:prstGeom prst="rect">
             <a:avLst/>
           </a:prstGeom>
           <a:solidFill>
-            <a:srgbClr val="06B6D3"/>
+            <a:srgbClr val="1F2833"/>
           </a:solidFill>
+          <a:ln w="6350">
+            <a:solidFill>
+              <a:srgbClr val="3D4A5C"/>
+            </a:solidFill>
+          </a:ln>
         </p:spPr>
         <p:style>
           <a:lnRef idx="1">
@@ -6293,94 +6536,22 @@
       </p:sp>
       <p:sp>
         <p:nvSpPr>
-          <p:cNvPr id="12" name="TextBox 11"/>
-          <p:cNvSpPr txBox="1"/>
-          <p:nvPr/>
-        </p:nvSpPr>
-        <p:spPr>
-          <a:xfrm>
-            <a:off x="2834640" y="1499616"/>
-            <a:ext cx="1956816" cy="548640"/>
-          </a:xfrm>
-          <a:prstGeom prst="rect">
-            <a:avLst/>
-          </a:prstGeom>
-          <a:noFill/>
-        </p:spPr>
-        <p:txBody>
-          <a:bodyPr wrap="square">
-            <a:spAutoFit/>
-          </a:bodyPr>
-          <a:lstStyle/>
-          <a:p>
-            <a:pPr algn="l"/>
-            <a:r>
-              <a:rPr sz="1100" b="1" i="0">
-                <a:solidFill>
-                  <a:srgbClr val="06B6D3"/>
-                </a:solidFill>
-              </a:rPr>
-              <a:t>Environ.
-Data</a:t>
-            </a:r>
-          </a:p>
-        </p:txBody>
-      </p:sp>
-      <p:sp>
-        <p:nvSpPr>
-          <p:cNvPr id="13" name="TextBox 12"/>
-          <p:cNvSpPr txBox="1"/>
-          <p:nvPr/>
-        </p:nvSpPr>
-        <p:spPr>
-          <a:xfrm>
-            <a:off x="2871216" y="2103120"/>
-            <a:ext cx="1883664" cy="1810512"/>
-          </a:xfrm>
-          <a:prstGeom prst="rect">
-            <a:avLst/>
-          </a:prstGeom>
-          <a:noFill/>
-        </p:spPr>
-        <p:txBody>
-          <a:bodyPr wrap="square">
-            <a:spAutoFit/>
-          </a:bodyPr>
-          <a:lstStyle/>
-          <a:p>
-            <a:pPr algn="l"/>
-            <a:r>
-              <a:rPr sz="1000" b="0" i="0">
-                <a:solidFill>
-                  <a:srgbClr val="D1D5DB"/>
-                </a:solidFill>
-              </a:rPr>
-              <a:t>Species: Indiana bat
-Wetlands: 4.2 ac PEM1C
-FEMA: Zone AE
-Farmland: Prime</a:t>
-            </a:r>
-          </a:p>
-        </p:txBody>
-      </p:sp>
-      <p:sp>
-        <p:nvSpPr>
-          <p:cNvPr id="14" name="Rectangle 13"/>
+          <p:cNvPr id="19" name="Rectangle 18"/>
           <p:cNvSpPr/>
           <p:nvPr/>
         </p:nvSpPr>
         <p:spPr>
           <a:xfrm>
-            <a:off x="5065776" y="1078992"/>
-            <a:ext cx="2103120" cy="2926080"/>
+            <a:off x="566928" y="2999232"/>
+            <a:ext cx="1463040" cy="822960"/>
           </a:xfrm>
           <a:prstGeom prst="rect">
             <a:avLst/>
           </a:prstGeom>
           <a:solidFill>
-            <a:srgbClr val="2D3748"/>
+            <a:srgbClr val="1A202C"/>
           </a:solidFill>
-          <a:ln w="19050">
+          <a:ln w="15240">
             <a:solidFill>
               <a:srgbClr val="22C55E"/>
             </a:solidFill>
@@ -6410,21 +6581,164 @@
       </p:sp>
       <p:sp>
         <p:nvSpPr>
-          <p:cNvPr id="15" name="Rectangle 14"/>
+          <p:cNvPr id="20" name="TextBox 19"/>
+          <p:cNvSpPr txBox="1"/>
+          <p:nvPr/>
+        </p:nvSpPr>
+        <p:spPr>
+          <a:xfrm>
+            <a:off x="658368" y="3090672"/>
+            <a:ext cx="1298448" cy="658368"/>
+          </a:xfrm>
+          <a:prstGeom prst="rect">
+            <a:avLst/>
+          </a:prstGeom>
+          <a:noFill/>
+        </p:spPr>
+        <p:txBody>
+          <a:bodyPr wrap="square">
+            <a:spAutoFit/>
+          </a:bodyPr>
+          <a:lstStyle/>
+          <a:p>
+            <a:pPr algn="l"/>
+            <a:r>
+              <a:rPr sz="1100" b="1" i="0">
+                <a:solidFill>
+                  <a:srgbClr val="22C55E"/>
+                </a:solidFill>
+              </a:rPr>
+              <a:t>Regulatory Screening</a:t>
+            </a:r>
+          </a:p>
+        </p:txBody>
+      </p:sp>
+      <p:sp>
+        <p:nvSpPr>
+          <p:cNvPr id="21" name="TextBox 20"/>
+          <p:cNvSpPr txBox="1"/>
+          <p:nvPr/>
+        </p:nvSpPr>
+        <p:spPr>
+          <a:xfrm>
+            <a:off x="2148840" y="3017520"/>
+            <a:ext cx="3401568" cy="841248"/>
+          </a:xfrm>
+          <a:prstGeom prst="rect">
+            <a:avLst/>
+          </a:prstGeom>
+          <a:noFill/>
+        </p:spPr>
+        <p:txBody>
+          <a:bodyPr wrap="square">
+            <a:spAutoFit/>
+          </a:bodyPr>
+          <a:lstStyle/>
+          <a:p>
+            <a:pPr algn="l"/>
+            <a:r>
+              <a:rPr sz="1100" b="0" i="0">
+                <a:solidFill>
+                  <a:srgbClr val="FFFFFF"/>
+                </a:solidFill>
+              </a:rPr>
+              <a:t>NEPA compliance assistant; identify permits &amp; approvals;
+no invented citations; JSON array only</a:t>
+            </a:r>
+          </a:p>
+        </p:txBody>
+      </p:sp>
+      <p:sp>
+        <p:nvSpPr>
+          <p:cNvPr id="22" name="TextBox 21"/>
+          <p:cNvSpPr txBox="1"/>
+          <p:nvPr/>
+        </p:nvSpPr>
+        <p:spPr>
+          <a:xfrm>
+            <a:off x="5623560" y="3017520"/>
+            <a:ext cx="3401568" cy="841248"/>
+          </a:xfrm>
+          <a:prstGeom prst="rect">
+            <a:avLst/>
+          </a:prstGeom>
+          <a:noFill/>
+        </p:spPr>
+        <p:txBody>
+          <a:bodyPr wrap="square">
+            <a:spAutoFit/>
+          </a:bodyPr>
+          <a:lstStyle/>
+          <a:p>
+            <a:pPr algn="l"/>
+            <a:r>
+              <a:rPr sz="1100" b="0" i="0">
+                <a:solidFill>
+                  <a:srgbClr val="D1D5DB"/>
+                </a:solidFill>
+              </a:rPr>
+              <a:t>RAG: top-8 retrieved CFR chunks + project context
+→ list of triggered regulations with citations</a:t>
+            </a:r>
+          </a:p>
+        </p:txBody>
+      </p:sp>
+      <p:sp>
+        <p:nvSpPr>
+          <p:cNvPr id="23" name="TextBox 22"/>
+          <p:cNvSpPr txBox="1"/>
+          <p:nvPr/>
+        </p:nvSpPr>
+        <p:spPr>
+          <a:xfrm>
+            <a:off x="9098280" y="3182112"/>
+            <a:ext cx="2423160" cy="457200"/>
+          </a:xfrm>
+          <a:prstGeom prst="rect">
+            <a:avLst/>
+          </a:prstGeom>
+          <a:noFill/>
+        </p:spPr>
+        <p:txBody>
+          <a:bodyPr wrap="square">
+            <a:spAutoFit/>
+          </a:bodyPr>
+          <a:lstStyle/>
+          <a:p>
+            <a:pPr algn="l"/>
+            <a:r>
+              <a:rPr sz="900" b="0" i="1">
+                <a:solidFill>
+                  <a:srgbClr val="F97316"/>
+                </a:solidFill>
+              </a:rPr>
+              <a:t>agents/regulatory_screening.py</a:t>
+            </a:r>
+          </a:p>
+        </p:txBody>
+      </p:sp>
+      <p:sp>
+        <p:nvSpPr>
+          <p:cNvPr id="24" name="Rectangle 23"/>
           <p:cNvSpPr/>
           <p:nvPr/>
         </p:nvSpPr>
         <p:spPr>
           <a:xfrm>
-            <a:off x="5065776" y="1078992"/>
-            <a:ext cx="2103120" cy="365760"/>
+            <a:off x="548640" y="3950208"/>
+            <a:ext cx="11064240" cy="969264"/>
           </a:xfrm>
           <a:prstGeom prst="rect">
             <a:avLst/>
           </a:prstGeom>
           <a:solidFill>
-            <a:srgbClr val="22C55E"/>
+            <a:srgbClr val="2D3748"/>
           </a:solidFill>
+          <a:ln w="6350">
+            <a:solidFill>
+              <a:srgbClr val="3D4A5C"/>
+            </a:solidFill>
+          </a:ln>
         </p:spPr>
         <p:style>
           <a:lnRef idx="1">
@@ -6450,93 +6764,22 @@
       </p:sp>
       <p:sp>
         <p:nvSpPr>
-          <p:cNvPr id="16" name="TextBox 15"/>
-          <p:cNvSpPr txBox="1"/>
-          <p:nvPr/>
-        </p:nvSpPr>
-        <p:spPr>
-          <a:xfrm>
-            <a:off x="5138928" y="1499616"/>
-            <a:ext cx="1956816" cy="548640"/>
-          </a:xfrm>
-          <a:prstGeom prst="rect">
-            <a:avLst/>
-          </a:prstGeom>
-          <a:noFill/>
-        </p:spPr>
-        <p:txBody>
-          <a:bodyPr wrap="square">
-            <a:spAutoFit/>
-          </a:bodyPr>
-          <a:lstStyle/>
-          <a:p>
-            <a:pPr algn="l"/>
-            <a:r>
-              <a:rPr sz="1100" b="1" i="0">
-                <a:solidFill>
-                  <a:srgbClr val="22C55E"/>
-                </a:solidFill>
-              </a:rPr>
-              <a:t>Regulatory
-Screening</a:t>
-            </a:r>
-          </a:p>
-        </p:txBody>
-      </p:sp>
-      <p:sp>
-        <p:nvSpPr>
-          <p:cNvPr id="17" name="TextBox 16"/>
-          <p:cNvSpPr txBox="1"/>
-          <p:nvPr/>
-        </p:nvSpPr>
-        <p:spPr>
-          <a:xfrm>
-            <a:off x="5175504" y="2103120"/>
-            <a:ext cx="1883664" cy="1810512"/>
-          </a:xfrm>
-          <a:prstGeom prst="rect">
-            <a:avLst/>
-          </a:prstGeom>
-          <a:noFill/>
-        </p:spPr>
-        <p:txBody>
-          <a:bodyPr wrap="square">
-            <a:spAutoFit/>
-          </a:bodyPr>
-          <a:lstStyle/>
-          <a:p>
-            <a:pPr algn="l"/>
-            <a:r>
-              <a:rPr sz="1000" b="0" i="0">
-                <a:solidFill>
-                  <a:srgbClr val="D1D5DB"/>
-                </a:solidFill>
-              </a:rPr>
-              <a:t>CWA §404 — Wetlands
-ESA §7 — Species
-EO 11990 — Floodplain</a:t>
-            </a:r>
-          </a:p>
-        </p:txBody>
-      </p:sp>
-      <p:sp>
-        <p:nvSpPr>
-          <p:cNvPr id="18" name="Rectangle 17"/>
+          <p:cNvPr id="25" name="Rectangle 24"/>
           <p:cNvSpPr/>
           <p:nvPr/>
         </p:nvSpPr>
         <p:spPr>
           <a:xfrm>
-            <a:off x="7370064" y="1078992"/>
-            <a:ext cx="2103120" cy="2926080"/>
+            <a:off x="566928" y="4023360"/>
+            <a:ext cx="1463040" cy="822960"/>
           </a:xfrm>
           <a:prstGeom prst="rect">
             <a:avLst/>
           </a:prstGeom>
           <a:solidFill>
-            <a:srgbClr val="2D3748"/>
+            <a:srgbClr val="1A202C"/>
           </a:solidFill>
-          <a:ln w="19050">
+          <a:ln w="15240">
             <a:solidFill>
               <a:srgbClr val="F97316"/>
             </a:solidFill>
@@ -6566,21 +6809,164 @@
       </p:sp>
       <p:sp>
         <p:nvSpPr>
-          <p:cNvPr id="19" name="Rectangle 18"/>
+          <p:cNvPr id="26" name="TextBox 25"/>
+          <p:cNvSpPr txBox="1"/>
+          <p:nvPr/>
+        </p:nvSpPr>
+        <p:spPr>
+          <a:xfrm>
+            <a:off x="658368" y="4114800"/>
+            <a:ext cx="1298448" cy="658368"/>
+          </a:xfrm>
+          <a:prstGeom prst="rect">
+            <a:avLst/>
+          </a:prstGeom>
+          <a:noFill/>
+        </p:spPr>
+        <p:txBody>
+          <a:bodyPr wrap="square">
+            <a:spAutoFit/>
+          </a:bodyPr>
+          <a:lstStyle/>
+          <a:p>
+            <a:pPr algn="l"/>
+            <a:r>
+              <a:rPr sz="1100" b="1" i="0">
+                <a:solidFill>
+                  <a:srgbClr val="F97316"/>
+                </a:solidFill>
+              </a:rPr>
+              <a:t>Impact Analysis</a:t>
+            </a:r>
+          </a:p>
+        </p:txBody>
+      </p:sp>
+      <p:sp>
+        <p:nvSpPr>
+          <p:cNvPr id="27" name="TextBox 26"/>
+          <p:cNvSpPr txBox="1"/>
+          <p:nvPr/>
+        </p:nvSpPr>
+        <p:spPr>
+          <a:xfrm>
+            <a:off x="2148840" y="4041648"/>
+            <a:ext cx="3401568" cy="841248"/>
+          </a:xfrm>
+          <a:prstGeom prst="rect">
+            <a:avLst/>
+          </a:prstGeom>
+          <a:noFill/>
+        </p:spPr>
+        <p:txBody>
+          <a:bodyPr wrap="square">
+            <a:spAutoFit/>
+          </a:bodyPr>
+          <a:lstStyle/>
+          <a:p>
+            <a:pPr algn="l"/>
+            <a:r>
+              <a:rPr sz="1100" b="0" i="0">
+                <a:solidFill>
+                  <a:srgbClr val="FFFFFF"/>
+                </a:solidFill>
+              </a:rPr>
+              <a:t>Assess every action × category × regulation;
+confidence tiers tied to data quality (see slide 9)</a:t>
+            </a:r>
+          </a:p>
+        </p:txBody>
+      </p:sp>
+      <p:sp>
+        <p:nvSpPr>
+          <p:cNvPr id="28" name="TextBox 27"/>
+          <p:cNvSpPr txBox="1"/>
+          <p:nvPr/>
+        </p:nvSpPr>
+        <p:spPr>
+          <a:xfrm>
+            <a:off x="5623560" y="4041648"/>
+            <a:ext cx="3401568" cy="841248"/>
+          </a:xfrm>
+          <a:prstGeom prst="rect">
+            <a:avLst/>
+          </a:prstGeom>
+          <a:noFill/>
+        </p:spPr>
+        <p:txBody>
+          <a:bodyPr wrap="square">
+            <a:spAutoFit/>
+          </a:bodyPr>
+          <a:lstStyle/>
+          <a:p>
+            <a:pPr algn="l"/>
+            <a:r>
+              <a:rPr sz="1100" b="0" i="0">
+                <a:solidFill>
+                  <a:srgbClr val="D1D5DB"/>
+                </a:solidFill>
+              </a:rPr>
+              <a:t>Compile env API data + regulations + actions
+→ cells JSON with significance + confidence + mitigation</a:t>
+            </a:r>
+          </a:p>
+        </p:txBody>
+      </p:sp>
+      <p:sp>
+        <p:nvSpPr>
+          <p:cNvPr id="29" name="TextBox 28"/>
+          <p:cNvSpPr txBox="1"/>
+          <p:nvPr/>
+        </p:nvSpPr>
+        <p:spPr>
+          <a:xfrm>
+            <a:off x="9098280" y="4206240"/>
+            <a:ext cx="2423160" cy="457200"/>
+          </a:xfrm>
+          <a:prstGeom prst="rect">
+            <a:avLst/>
+          </a:prstGeom>
+          <a:noFill/>
+        </p:spPr>
+        <p:txBody>
+          <a:bodyPr wrap="square">
+            <a:spAutoFit/>
+          </a:bodyPr>
+          <a:lstStyle/>
+          <a:p>
+            <a:pPr algn="l"/>
+            <a:r>
+              <a:rPr sz="900" b="0" i="1">
+                <a:solidFill>
+                  <a:srgbClr val="F97316"/>
+                </a:solidFill>
+              </a:rPr>
+              <a:t>agents/impact_analysis.py</a:t>
+            </a:r>
+          </a:p>
+        </p:txBody>
+      </p:sp>
+      <p:sp>
+        <p:nvSpPr>
+          <p:cNvPr id="30" name="Rectangle 29"/>
           <p:cNvSpPr/>
           <p:nvPr/>
         </p:nvSpPr>
         <p:spPr>
           <a:xfrm>
-            <a:off x="7370064" y="1078992"/>
-            <a:ext cx="2103120" cy="365760"/>
+            <a:off x="548640" y="4974336"/>
+            <a:ext cx="11064240" cy="969264"/>
           </a:xfrm>
           <a:prstGeom prst="rect">
             <a:avLst/>
           </a:prstGeom>
           <a:solidFill>
-            <a:srgbClr val="F97316"/>
+            <a:srgbClr val="1F2833"/>
           </a:solidFill>
+          <a:ln w="6350">
+            <a:solidFill>
+              <a:srgbClr val="3D4A5C"/>
+            </a:solidFill>
+          </a:ln>
         </p:spPr>
         <p:style>
           <a:lnRef idx="1">
@@ -6606,96 +6992,24 @@
       </p:sp>
       <p:sp>
         <p:nvSpPr>
-          <p:cNvPr id="20" name="TextBox 19"/>
-          <p:cNvSpPr txBox="1"/>
-          <p:nvPr/>
-        </p:nvSpPr>
-        <p:spPr>
-          <a:xfrm>
-            <a:off x="7443216" y="1499616"/>
-            <a:ext cx="1956816" cy="548640"/>
-          </a:xfrm>
-          <a:prstGeom prst="rect">
-            <a:avLst/>
-          </a:prstGeom>
-          <a:noFill/>
-        </p:spPr>
-        <p:txBody>
-          <a:bodyPr wrap="square">
-            <a:spAutoFit/>
-          </a:bodyPr>
-          <a:lstStyle/>
-          <a:p>
-            <a:pPr algn="l"/>
-            <a:r>
-              <a:rPr sz="1100" b="1" i="0">
-                <a:solidFill>
-                  <a:srgbClr val="F97316"/>
-                </a:solidFill>
-              </a:rPr>
-              <a:t>Impact
-Matrix</a:t>
-            </a:r>
-          </a:p>
-        </p:txBody>
-      </p:sp>
-      <p:sp>
-        <p:nvSpPr>
-          <p:cNvPr id="21" name="TextBox 20"/>
-          <p:cNvSpPr txBox="1"/>
-          <p:nvPr/>
-        </p:nvSpPr>
-        <p:spPr>
-          <a:xfrm>
-            <a:off x="7479792" y="2103120"/>
-            <a:ext cx="1883664" cy="1810512"/>
-          </a:xfrm>
-          <a:prstGeom prst="rect">
-            <a:avLst/>
-          </a:prstGeom>
-          <a:noFill/>
-        </p:spPr>
-        <p:txBody>
-          <a:bodyPr wrap="square">
-            <a:spAutoFit/>
-          </a:bodyPr>
-          <a:lstStyle/>
-          <a:p>
-            <a:pPr algn="l"/>
-            <a:r>
-              <a:rPr sz="1000" b="0" i="0">
-                <a:solidFill>
-                  <a:srgbClr val="D1D5DB"/>
-                </a:solidFill>
-              </a:rPr>
-              <a:t>wetlands × grading:
-  sig: significant
-  conf: 0.82
-  review: false</a:t>
-            </a:r>
-          </a:p>
-        </p:txBody>
-      </p:sp>
-      <p:sp>
-        <p:nvSpPr>
-          <p:cNvPr id="22" name="Rectangle 21"/>
+          <p:cNvPr id="31" name="Rectangle 30"/>
           <p:cNvSpPr/>
           <p:nvPr/>
         </p:nvSpPr>
         <p:spPr>
           <a:xfrm>
-            <a:off x="9674352" y="1078992"/>
-            <a:ext cx="2103120" cy="2926080"/>
+            <a:off x="566928" y="5047488"/>
+            <a:ext cx="1463040" cy="822960"/>
           </a:xfrm>
           <a:prstGeom prst="rect">
             <a:avLst/>
           </a:prstGeom>
           <a:solidFill>
-            <a:srgbClr val="2D3748"/>
+            <a:srgbClr val="1A202C"/>
           </a:solidFill>
-          <a:ln w="19050">
+          <a:ln w="15240">
             <a:solidFill>
-              <a:srgbClr val="EAB308"/>
+              <a:srgbClr val="A78BFA"/>
             </a:solidFill>
           </a:ln>
         </p:spPr>
@@ -6723,54 +7037,14 @@
       </p:sp>
       <p:sp>
         <p:nvSpPr>
-          <p:cNvPr id="23" name="Rectangle 22"/>
-          <p:cNvSpPr/>
-          <p:nvPr/>
-        </p:nvSpPr>
-        <p:spPr>
-          <a:xfrm>
-            <a:off x="9674352" y="1078992"/>
-            <a:ext cx="2103120" cy="365760"/>
-          </a:xfrm>
-          <a:prstGeom prst="rect">
-            <a:avLst/>
-          </a:prstGeom>
-          <a:solidFill>
-            <a:srgbClr val="EAB308"/>
-          </a:solidFill>
-        </p:spPr>
-        <p:style>
-          <a:lnRef idx="1">
-            <a:schemeClr val="accent1"/>
-          </a:lnRef>
-          <a:fillRef idx="3">
-            <a:schemeClr val="accent1"/>
-          </a:fillRef>
-          <a:effectRef idx="2">
-            <a:schemeClr val="accent1"/>
-          </a:effectRef>
-          <a:fontRef idx="minor">
-            <a:schemeClr val="lt1"/>
-          </a:fontRef>
-        </p:style>
-        <p:txBody>
-          <a:bodyPr rtlCol="0" anchor="ctr"/>
-          <a:lstStyle/>
-          <a:p>
-            <a:pPr algn="ctr"/>
-          </a:p>
-        </p:txBody>
-      </p:sp>
-      <p:sp>
-        <p:nvSpPr>
-          <p:cNvPr id="24" name="TextBox 23"/>
-          <p:cNvSpPr txBox="1"/>
-          <p:nvPr/>
-        </p:nvSpPr>
-        <p:spPr>
-          <a:xfrm>
-            <a:off x="9747504" y="1499616"/>
-            <a:ext cx="1956816" cy="548640"/>
+          <p:cNvPr id="32" name="TextBox 31"/>
+          <p:cNvSpPr txBox="1"/>
+          <p:nvPr/>
+        </p:nvSpPr>
+        <p:spPr>
+          <a:xfrm>
+            <a:off x="658368" y="5138928"/>
+            <a:ext cx="1298448" cy="658368"/>
           </a:xfrm>
           <a:prstGeom prst="rect">
             <a:avLst/>
@@ -6787,25 +7061,25 @@
             <a:r>
               <a:rPr sz="1100" b="1" i="0">
                 <a:solidFill>
-                  <a:srgbClr val="EAB308"/>
-                </a:solidFill>
-              </a:rPr>
-              <a:t>Report
-Synthesis</a:t>
-            </a:r>
-          </a:p>
-        </p:txBody>
-      </p:sp>
-      <p:sp>
-        <p:nvSpPr>
-          <p:cNvPr id="25" name="TextBox 24"/>
-          <p:cNvSpPr txBox="1"/>
-          <p:nvPr/>
-        </p:nvSpPr>
-        <p:spPr>
-          <a:xfrm>
-            <a:off x="9784080" y="2103120"/>
-            <a:ext cx="1883664" cy="1810512"/>
+                  <a:srgbClr val="A78BFA"/>
+                </a:solidFill>
+              </a:rPr>
+              <a:t>GT Extractor
+(Evaluation)</a:t>
+            </a:r>
+          </a:p>
+        </p:txBody>
+      </p:sp>
+      <p:sp>
+        <p:nvSpPr>
+          <p:cNvPr id="33" name="TextBox 32"/>
+          <p:cNvSpPr txBox="1"/>
+          <p:nvPr/>
+        </p:nvSpPr>
+        <p:spPr>
+          <a:xfrm>
+            <a:off x="2148840" y="5065776"/>
+            <a:ext cx="3401568" cy="841248"/>
           </a:xfrm>
           <a:prstGeom prst="rect">
             <a:avLst/>
@@ -6820,93 +7094,82 @@
           <a:p>
             <a:pPr algn="l"/>
             <a:r>
-              <a:rPr sz="1000" b="0" i="0">
+              <a:rPr sz="1100" b="0" i="0">
+                <a:solidFill>
+                  <a:srgbClr val="FFFFFF"/>
+                </a:solidFill>
+              </a:rPr>
+              <a:t>Expert EIS analyst; extract ALL resource categories
+and significance levels; JSON array only</a:t>
+            </a:r>
+          </a:p>
+        </p:txBody>
+      </p:sp>
+      <p:sp>
+        <p:nvSpPr>
+          <p:cNvPr id="34" name="TextBox 33"/>
+          <p:cNvSpPr txBox="1"/>
+          <p:nvPr/>
+        </p:nvSpPr>
+        <p:spPr>
+          <a:xfrm>
+            <a:off x="5623560" y="5065776"/>
+            <a:ext cx="3401568" cy="841248"/>
+          </a:xfrm>
+          <a:prstGeom prst="rect">
+            <a:avLst/>
+          </a:prstGeom>
+          <a:noFill/>
+        </p:spPr>
+        <p:txBody>
+          <a:bodyPr wrap="square">
+            <a:spAutoFit/>
+          </a:bodyPr>
+          <a:lstStyle/>
+          <a:p>
+            <a:pPr algn="l"/>
+            <a:r>
+              <a:rPr sz="1100" b="0" i="0">
                 <a:solidFill>
                   <a:srgbClr val="D1D5DB"/>
                 </a:solidFill>
               </a:rPr>
-              <a:t>"4.2 ac of PEM1C wetland
-intersects the 100-yr
-floodplain (Zone AE)…"</a:t>
-            </a:r>
-          </a:p>
-        </p:txBody>
-      </p:sp>
-      <p:sp>
-        <p:nvSpPr>
-          <p:cNvPr id="26" name="Rectangle 25"/>
-          <p:cNvSpPr/>
-          <p:nvPr/>
-        </p:nvSpPr>
-        <p:spPr>
-          <a:xfrm>
-            <a:off x="548640" y="4160520"/>
-            <a:ext cx="11064240" cy="2487168"/>
-          </a:xfrm>
-          <a:prstGeom prst="rect">
-            <a:avLst/>
-          </a:prstGeom>
-          <a:solidFill>
-            <a:srgbClr val="2D3748"/>
-          </a:solidFill>
-          <a:ln w="19050">
-            <a:solidFill>
-              <a:srgbClr val="F97316"/>
-            </a:solidFill>
-          </a:ln>
-        </p:spPr>
-        <p:style>
-          <a:lnRef idx="1">
-            <a:schemeClr val="accent1"/>
-          </a:lnRef>
-          <a:fillRef idx="3">
-            <a:schemeClr val="accent1"/>
-          </a:fillRef>
-          <a:effectRef idx="2">
-            <a:schemeClr val="accent1"/>
-          </a:effectRef>
-          <a:fontRef idx="minor">
-            <a:schemeClr val="lt1"/>
-          </a:fontRef>
-        </p:style>
-        <p:txBody>
-          <a:bodyPr rtlCol="0" anchor="ctr"/>
-          <a:lstStyle/>
-          <a:p>
-            <a:pPr algn="ctr"/>
-          </a:p>
-        </p:txBody>
-      </p:sp>
-      <p:sp>
-        <p:nvSpPr>
-          <p:cNvPr id="27" name="TextBox 26"/>
-          <p:cNvSpPr txBox="1"/>
-          <p:nvPr/>
-        </p:nvSpPr>
-        <p:spPr>
-          <a:xfrm>
-            <a:off x="685800" y="5099304"/>
-            <a:ext cx="10789920" cy="457200"/>
-          </a:xfrm>
-          <a:prstGeom prst="rect">
-            <a:avLst/>
-          </a:prstGeom>
-          <a:noFill/>
-        </p:spPr>
-        <p:txBody>
-          <a:bodyPr wrap="square">
-            <a:spAutoFit/>
-          </a:bodyPr>
-          <a:lstStyle/>
-          <a:p>
-            <a:pPr algn="ctr"/>
-            <a:r>
-              <a:rPr sz="1200" b="0" i="1">
+              <a:t>Up to 40 sampled EIS chunks (tables prioritized)
+→ ground truth: category + significance + evidence</a:t>
+            </a:r>
+          </a:p>
+        </p:txBody>
+      </p:sp>
+      <p:sp>
+        <p:nvSpPr>
+          <p:cNvPr id="35" name="TextBox 34"/>
+          <p:cNvSpPr txBox="1"/>
+          <p:nvPr/>
+        </p:nvSpPr>
+        <p:spPr>
+          <a:xfrm>
+            <a:off x="9098280" y="5230368"/>
+            <a:ext cx="2423160" cy="457200"/>
+          </a:xfrm>
+          <a:prstGeom prst="rect">
+            <a:avLst/>
+          </a:prstGeom>
+          <a:noFill/>
+        </p:spPr>
+        <p:txBody>
+          <a:bodyPr wrap="square">
+            <a:spAutoFit/>
+          </a:bodyPr>
+          <a:lstStyle/>
+          <a:p>
+            <a:pPr algn="l"/>
+            <a:r>
+              <a:rPr sz="900" b="0" i="1">
                 <a:solidFill>
                   <a:srgbClr val="F97316"/>
                 </a:solidFill>
               </a:rPr>
-              <a:t>[ IMPORT RUN panel — all 5 agents expanded ]</a:t>
+              <a:t>rag_eval/extractor.py</a:t>
             </a:r>
           </a:p>
         </p:txBody>
@@ -7018,12 +7281,12 @@
           <a:p>
             <a:pPr algn="l"/>
             <a:r>
-              <a:rPr sz="2800" b="1" i="0">
+              <a:rPr sz="2400" b="1" i="0">
                 <a:solidFill>
                   <a:srgbClr val="F97316"/>
                 </a:solidFill>
               </a:rPr>
-              <a:t>Results — Evaluation Scores  (mock data)</a:t>
+              <a:t>Prompts  (2/2)  —  Agent 5: Report Synthesis  (7 prompts)</a:t>
             </a:r>
           </a:p>
         </p:txBody>
@@ -7076,8 +7339,8 @@
         </p:nvSpPr>
         <p:spPr>
           <a:xfrm>
-            <a:off x="548640" y="1143000"/>
-            <a:ext cx="2103120" cy="320040"/>
+            <a:off x="548640" y="1005840"/>
+            <a:ext cx="11064240" cy="384048"/>
           </a:xfrm>
           <a:prstGeom prst="rect">
             <a:avLst/>
@@ -7094,10 +7357,10 @@
             <a:r>
               <a:rPr sz="1300" b="0" i="0">
                 <a:solidFill>
-                  <a:srgbClr val="FFFFFF"/>
-                </a:solidFill>
-              </a:rPr>
-              <a:t>Overall</a:t>
+                  <a:srgbClr val="D1D5DB"/>
+                </a:solidFill>
+              </a:rPr>
+              <a:t>One system prompt sets the NEPA technical-writer role.  Six separate LLM calls generate individual EA sections.</a:t>
             </a:r>
           </a:p>
         </p:txBody>
@@ -7110,8 +7373,8 @@
         </p:nvSpPr>
         <p:spPr>
           <a:xfrm>
-            <a:off x="2743200" y="1161288"/>
-            <a:ext cx="4389120" cy="274320"/>
+            <a:off x="548640" y="1481328"/>
+            <a:ext cx="11064240" cy="566928"/>
           </a:xfrm>
           <a:prstGeom prst="rect">
             <a:avLst/>
@@ -7119,6 +7382,11 @@
           <a:solidFill>
             <a:srgbClr val="1A202C"/>
           </a:solidFill>
+          <a:ln w="15240">
+            <a:solidFill>
+              <a:srgbClr val="EAB308"/>
+            </a:solidFill>
+          </a:ln>
         </p:spPr>
         <p:style>
           <a:lnRef idx="1">
@@ -7144,21 +7412,128 @@
       </p:sp>
       <p:sp>
         <p:nvSpPr>
-          <p:cNvPr id="8" name="Rectangle 7"/>
+          <p:cNvPr id="8" name="TextBox 7"/>
+          <p:cNvSpPr txBox="1"/>
+          <p:nvPr/>
+        </p:nvSpPr>
+        <p:spPr>
+          <a:xfrm>
+            <a:off x="685800" y="1517904"/>
+            <a:ext cx="4572000" cy="256032"/>
+          </a:xfrm>
+          <a:prstGeom prst="rect">
+            <a:avLst/>
+          </a:prstGeom>
+          <a:noFill/>
+        </p:spPr>
+        <p:txBody>
+          <a:bodyPr wrap="square">
+            <a:spAutoFit/>
+          </a:bodyPr>
+          <a:lstStyle/>
+          <a:p>
+            <a:pPr algn="l"/>
+            <a:r>
+              <a:rPr sz="1100" b="1" i="0">
+                <a:solidFill>
+                  <a:srgbClr val="EAB308"/>
+                </a:solidFill>
+              </a:rPr>
+              <a:t>SYSTEM  (shared across all 6 section calls)</a:t>
+            </a:r>
+          </a:p>
+        </p:txBody>
+      </p:sp>
+      <p:sp>
+        <p:nvSpPr>
+          <p:cNvPr id="9" name="TextBox 8"/>
+          <p:cNvSpPr txBox="1"/>
+          <p:nvPr/>
+        </p:nvSpPr>
+        <p:spPr>
+          <a:xfrm>
+            <a:off x="685800" y="1737360"/>
+            <a:ext cx="8686800" cy="256032"/>
+          </a:xfrm>
+          <a:prstGeom prst="rect">
+            <a:avLst/>
+          </a:prstGeom>
+          <a:noFill/>
+        </p:spPr>
+        <p:txBody>
+          <a:bodyPr wrap="square">
+            <a:spAutoFit/>
+          </a:bodyPr>
+          <a:lstStyle/>
+          <a:p>
+            <a:pPr algn="l"/>
+            <a:r>
+              <a:rPr sz="1200" b="0" i="0">
+                <a:solidFill>
+                  <a:srgbClr val="D1D5DB"/>
+                </a:solidFill>
+              </a:rPr>
+              <a:t>NEPA technical writer · professional passive-voice prose · no invented data · return section content only (no title/number) · 3–5 sentence paragraphs</a:t>
+            </a:r>
+          </a:p>
+        </p:txBody>
+      </p:sp>
+      <p:sp>
+        <p:nvSpPr>
+          <p:cNvPr id="10" name="TextBox 9"/>
+          <p:cNvSpPr txBox="1"/>
+          <p:nvPr/>
+        </p:nvSpPr>
+        <p:spPr>
+          <a:xfrm>
+            <a:off x="9875520" y="1591056"/>
+            <a:ext cx="1691640" cy="256032"/>
+          </a:xfrm>
+          <a:prstGeom prst="rect">
+            <a:avLst/>
+          </a:prstGeom>
+          <a:noFill/>
+        </p:spPr>
+        <p:txBody>
+          <a:bodyPr wrap="square">
+            <a:spAutoFit/>
+          </a:bodyPr>
+          <a:lstStyle/>
+          <a:p>
+            <a:pPr algn="l"/>
+            <a:r>
+              <a:rPr sz="900" b="0" i="1">
+                <a:solidFill>
+                  <a:srgbClr val="F97316"/>
+                </a:solidFill>
+              </a:rPr>
+              <a:t>agents/report_synthesis.py</a:t>
+            </a:r>
+          </a:p>
+        </p:txBody>
+      </p:sp>
+      <p:sp>
+        <p:nvSpPr>
+          <p:cNvPr id="11" name="Rectangle 10"/>
           <p:cNvSpPr/>
           <p:nvPr/>
         </p:nvSpPr>
         <p:spPr>
           <a:xfrm>
-            <a:off x="2743200" y="1161288"/>
-            <a:ext cx="3423513" cy="274320"/>
+            <a:off x="548640" y="2176272"/>
+            <a:ext cx="5394960" cy="1188720"/>
           </a:xfrm>
           <a:prstGeom prst="rect">
             <a:avLst/>
           </a:prstGeom>
           <a:solidFill>
-            <a:srgbClr val="F97316"/>
+            <a:srgbClr val="2D3748"/>
           </a:solidFill>
+          <a:ln w="10160">
+            <a:solidFill>
+              <a:srgbClr val="EAB308"/>
+            </a:solidFill>
+          </a:ln>
         </p:spPr>
         <p:style>
           <a:lnRef idx="1">
@@ -7184,14 +7559,14 @@
       </p:sp>
       <p:sp>
         <p:nvSpPr>
-          <p:cNvPr id="9" name="TextBox 8"/>
-          <p:cNvSpPr txBox="1"/>
-          <p:nvPr/>
-        </p:nvSpPr>
-        <p:spPr>
-          <a:xfrm>
-            <a:off x="7269480" y="1124712"/>
-            <a:ext cx="731520" cy="320040"/>
+          <p:cNvPr id="12" name="TextBox 11"/>
+          <p:cNvSpPr txBox="1"/>
+          <p:nvPr/>
+        </p:nvSpPr>
+        <p:spPr>
+          <a:xfrm>
+            <a:off x="685800" y="2249424"/>
+            <a:ext cx="5120640" cy="274320"/>
           </a:xfrm>
           <a:prstGeom prst="rect">
             <a:avLst/>
@@ -7206,67 +7581,107 @@
           <a:p>
             <a:pPr algn="l"/>
             <a:r>
-              <a:rPr sz="1300" b="1" i="0">
+              <a:rPr sz="1200" b="1" i="0">
+                <a:solidFill>
+                  <a:srgbClr val="EAB308"/>
+                </a:solidFill>
+              </a:rPr>
+              <a:t>§1  Purpose &amp; Need</a:t>
+            </a:r>
+          </a:p>
+        </p:txBody>
+      </p:sp>
+      <p:sp>
+        <p:nvSpPr>
+          <p:cNvPr id="13" name="TextBox 12"/>
+          <p:cNvSpPr txBox="1"/>
+          <p:nvPr/>
+        </p:nvSpPr>
+        <p:spPr>
+          <a:xfrm>
+            <a:off x="685800" y="2560320"/>
+            <a:ext cx="5120640" cy="658368"/>
+          </a:xfrm>
+          <a:prstGeom prst="rect">
+            <a:avLst/>
+          </a:prstGeom>
+          <a:noFill/>
+        </p:spPr>
+        <p:txBody>
+          <a:bodyPr wrap="square">
+            <a:spAutoFit/>
+          </a:bodyPr>
+          <a:lstStyle/>
+          <a:p>
+            <a:pPr algn="l"/>
+            <a:r>
+              <a:rPr sz="1200" b="0" i="0">
+                <a:solidFill>
+                  <a:srgbClr val="D1D5DB"/>
+                </a:solidFill>
+              </a:rPr>
+              <a:t>1–2 paragraphs: why this project,
+what need it addresses, where</a:t>
+            </a:r>
+          </a:p>
+        </p:txBody>
+      </p:sp>
+      <p:sp>
+        <p:nvSpPr>
+          <p:cNvPr id="14" name="TextBox 13"/>
+          <p:cNvSpPr txBox="1"/>
+          <p:nvPr/>
+        </p:nvSpPr>
+        <p:spPr>
+          <a:xfrm>
+            <a:off x="3520440" y="3127248"/>
+            <a:ext cx="2331720" cy="201168"/>
+          </a:xfrm>
+          <a:prstGeom prst="rect">
+            <a:avLst/>
+          </a:prstGeom>
+          <a:noFill/>
+        </p:spPr>
+        <p:txBody>
+          <a:bodyPr wrap="square">
+            <a:spAutoFit/>
+          </a:bodyPr>
+          <a:lstStyle/>
+          <a:p>
+            <a:pPr algn="r"/>
+            <a:r>
+              <a:rPr sz="800" b="0" i="1">
                 <a:solidFill>
                   <a:srgbClr val="F97316"/>
                 </a:solidFill>
               </a:rPr>
-              <a:t>78%</a:t>
-            </a:r>
-          </a:p>
-        </p:txBody>
-      </p:sp>
-      <p:sp>
-        <p:nvSpPr>
-          <p:cNvPr id="10" name="TextBox 9"/>
-          <p:cNvSpPr txBox="1"/>
-          <p:nvPr/>
-        </p:nvSpPr>
-        <p:spPr>
-          <a:xfrm>
-            <a:off x="548640" y="1709928"/>
-            <a:ext cx="2103120" cy="320040"/>
-          </a:xfrm>
-          <a:prstGeom prst="rect">
-            <a:avLst/>
-          </a:prstGeom>
-          <a:noFill/>
-        </p:spPr>
-        <p:txBody>
-          <a:bodyPr wrap="square">
-            <a:spAutoFit/>
-          </a:bodyPr>
-          <a:lstStyle/>
-          <a:p>
-            <a:pPr algn="l"/>
-            <a:r>
-              <a:rPr sz="1300" b="0" i="0">
-                <a:solidFill>
-                  <a:srgbClr val="FFFFFF"/>
-                </a:solidFill>
-              </a:rPr>
-              <a:t>Category F1</a:t>
-            </a:r>
-          </a:p>
-        </p:txBody>
-      </p:sp>
-      <p:sp>
-        <p:nvSpPr>
-          <p:cNvPr id="11" name="Rectangle 10"/>
+              <a:t>agents/templates/nepa_ea.py</a:t>
+            </a:r>
+          </a:p>
+        </p:txBody>
+      </p:sp>
+      <p:sp>
+        <p:nvSpPr>
+          <p:cNvPr id="15" name="Rectangle 14"/>
           <p:cNvSpPr/>
           <p:nvPr/>
         </p:nvSpPr>
         <p:spPr>
           <a:xfrm>
-            <a:off x="2743200" y="1728216"/>
-            <a:ext cx="4389120" cy="274320"/>
+            <a:off x="6217920" y="2176272"/>
+            <a:ext cx="5394960" cy="1188720"/>
           </a:xfrm>
           <a:prstGeom prst="rect">
             <a:avLst/>
           </a:prstGeom>
           <a:solidFill>
-            <a:srgbClr val="1A202C"/>
+            <a:srgbClr val="2D3748"/>
           </a:solidFill>
+          <a:ln w="10160">
+            <a:solidFill>
+              <a:srgbClr val="EAB308"/>
+            </a:solidFill>
+          </a:ln>
         </p:spPr>
         <p:style>
           <a:lnRef idx="1">
@@ -7292,21 +7707,129 @@
       </p:sp>
       <p:sp>
         <p:nvSpPr>
-          <p:cNvPr id="12" name="Rectangle 11"/>
+          <p:cNvPr id="16" name="TextBox 15"/>
+          <p:cNvSpPr txBox="1"/>
+          <p:nvPr/>
+        </p:nvSpPr>
+        <p:spPr>
+          <a:xfrm>
+            <a:off x="6355080" y="2249424"/>
+            <a:ext cx="5120640" cy="274320"/>
+          </a:xfrm>
+          <a:prstGeom prst="rect">
+            <a:avLst/>
+          </a:prstGeom>
+          <a:noFill/>
+        </p:spPr>
+        <p:txBody>
+          <a:bodyPr wrap="square">
+            <a:spAutoFit/>
+          </a:bodyPr>
+          <a:lstStyle/>
+          <a:p>
+            <a:pPr algn="l"/>
+            <a:r>
+              <a:rPr sz="1200" b="1" i="0">
+                <a:solidFill>
+                  <a:srgbClr val="EAB308"/>
+                </a:solidFill>
+              </a:rPr>
+              <a:t>§2  Proposed Action</a:t>
+            </a:r>
+          </a:p>
+        </p:txBody>
+      </p:sp>
+      <p:sp>
+        <p:nvSpPr>
+          <p:cNvPr id="17" name="TextBox 16"/>
+          <p:cNvSpPr txBox="1"/>
+          <p:nvPr/>
+        </p:nvSpPr>
+        <p:spPr>
+          <a:xfrm>
+            <a:off x="6355080" y="2560320"/>
+            <a:ext cx="5120640" cy="658368"/>
+          </a:xfrm>
+          <a:prstGeom prst="rect">
+            <a:avLst/>
+          </a:prstGeom>
+          <a:noFill/>
+        </p:spPr>
+        <p:txBody>
+          <a:bodyPr wrap="square">
+            <a:spAutoFit/>
+          </a:bodyPr>
+          <a:lstStyle/>
+          <a:p>
+            <a:pPr algn="l"/>
+            <a:r>
+              <a:rPr sz="1200" b="0" i="0">
+                <a:solidFill>
+                  <a:srgbClr val="D1D5DB"/>
+                </a:solidFill>
+              </a:rPr>
+              <a:t>2–3 paragraphs: describe project
+and each discrete action</a:t>
+            </a:r>
+          </a:p>
+        </p:txBody>
+      </p:sp>
+      <p:sp>
+        <p:nvSpPr>
+          <p:cNvPr id="18" name="TextBox 17"/>
+          <p:cNvSpPr txBox="1"/>
+          <p:nvPr/>
+        </p:nvSpPr>
+        <p:spPr>
+          <a:xfrm>
+            <a:off x="9189720" y="3127248"/>
+            <a:ext cx="2331720" cy="201168"/>
+          </a:xfrm>
+          <a:prstGeom prst="rect">
+            <a:avLst/>
+          </a:prstGeom>
+          <a:noFill/>
+        </p:spPr>
+        <p:txBody>
+          <a:bodyPr wrap="square">
+            <a:spAutoFit/>
+          </a:bodyPr>
+          <a:lstStyle/>
+          <a:p>
+            <a:pPr algn="r"/>
+            <a:r>
+              <a:rPr sz="800" b="0" i="1">
+                <a:solidFill>
+                  <a:srgbClr val="F97316"/>
+                </a:solidFill>
+              </a:rPr>
+              <a:t>agents/templates/nepa_ea.py</a:t>
+            </a:r>
+          </a:p>
+        </p:txBody>
+      </p:sp>
+      <p:sp>
+        <p:nvSpPr>
+          <p:cNvPr id="19" name="Rectangle 18"/>
           <p:cNvSpPr/>
           <p:nvPr/>
         </p:nvSpPr>
         <p:spPr>
           <a:xfrm>
-            <a:off x="2743200" y="1728216"/>
-            <a:ext cx="3291840" cy="274320"/>
+            <a:off x="548640" y="3493008"/>
+            <a:ext cx="5394960" cy="1188720"/>
           </a:xfrm>
           <a:prstGeom prst="rect">
             <a:avLst/>
           </a:prstGeom>
           <a:solidFill>
-            <a:srgbClr val="3B82F6"/>
+            <a:srgbClr val="2D3748"/>
           </a:solidFill>
+          <a:ln w="10160">
+            <a:solidFill>
+              <a:srgbClr val="EAB308"/>
+            </a:solidFill>
+          </a:ln>
         </p:spPr>
         <p:style>
           <a:lnRef idx="1">
@@ -7332,14 +7855,14 @@
       </p:sp>
       <p:sp>
         <p:nvSpPr>
-          <p:cNvPr id="13" name="TextBox 12"/>
-          <p:cNvSpPr txBox="1"/>
-          <p:nvPr/>
-        </p:nvSpPr>
-        <p:spPr>
-          <a:xfrm>
-            <a:off x="7269480" y="1691640"/>
-            <a:ext cx="731520" cy="320040"/>
+          <p:cNvPr id="20" name="TextBox 19"/>
+          <p:cNvSpPr txBox="1"/>
+          <p:nvPr/>
+        </p:nvSpPr>
+        <p:spPr>
+          <a:xfrm>
+            <a:off x="685800" y="3566160"/>
+            <a:ext cx="5120640" cy="274320"/>
           </a:xfrm>
           <a:prstGeom prst="rect">
             <a:avLst/>
@@ -7354,26 +7877,26 @@
           <a:p>
             <a:pPr algn="l"/>
             <a:r>
-              <a:rPr sz="1300" b="1" i="0">
-                <a:solidFill>
-                  <a:srgbClr val="3B82F6"/>
-                </a:solidFill>
-              </a:rPr>
-              <a:t>0.75</a:t>
-            </a:r>
-          </a:p>
-        </p:txBody>
-      </p:sp>
-      <p:sp>
-        <p:nvSpPr>
-          <p:cNvPr id="14" name="TextBox 13"/>
-          <p:cNvSpPr txBox="1"/>
-          <p:nvPr/>
-        </p:nvSpPr>
-        <p:spPr>
-          <a:xfrm>
-            <a:off x="548640" y="2276856"/>
-            <a:ext cx="2103120" cy="320040"/>
+              <a:rPr sz="1200" b="1" i="0">
+                <a:solidFill>
+                  <a:srgbClr val="EAB308"/>
+                </a:solidFill>
+              </a:rPr>
+              <a:t>§3  No-Action Alternative</a:t>
+            </a:r>
+          </a:p>
+        </p:txBody>
+      </p:sp>
+      <p:sp>
+        <p:nvSpPr>
+          <p:cNvPr id="21" name="TextBox 20"/>
+          <p:cNvSpPr txBox="1"/>
+          <p:nvPr/>
+        </p:nvSpPr>
+        <p:spPr>
+          <a:xfrm>
+            <a:off x="685800" y="3877056"/>
+            <a:ext cx="5120640" cy="658368"/>
           </a:xfrm>
           <a:prstGeom prst="rect">
             <a:avLst/>
@@ -7388,33 +7911,73 @@
           <a:p>
             <a:pPr algn="l"/>
             <a:r>
-              <a:rPr sz="1300" b="0" i="0">
-                <a:solidFill>
-                  <a:srgbClr val="FFFFFF"/>
-                </a:solidFill>
-              </a:rPr>
-              <a:t>Precision</a:t>
-            </a:r>
-          </a:p>
-        </p:txBody>
-      </p:sp>
-      <p:sp>
-        <p:nvSpPr>
-          <p:cNvPr id="15" name="Rectangle 14"/>
+              <a:rPr sz="1200" b="0" i="0">
+                <a:solidFill>
+                  <a:srgbClr val="D1D5DB"/>
+                </a:solidFill>
+              </a:rPr>
+              <a:t>1 paragraph: what happens if
+project does not proceed</a:t>
+            </a:r>
+          </a:p>
+        </p:txBody>
+      </p:sp>
+      <p:sp>
+        <p:nvSpPr>
+          <p:cNvPr id="22" name="TextBox 21"/>
+          <p:cNvSpPr txBox="1"/>
+          <p:nvPr/>
+        </p:nvSpPr>
+        <p:spPr>
+          <a:xfrm>
+            <a:off x="3520440" y="4443984"/>
+            <a:ext cx="2331720" cy="201168"/>
+          </a:xfrm>
+          <a:prstGeom prst="rect">
+            <a:avLst/>
+          </a:prstGeom>
+          <a:noFill/>
+        </p:spPr>
+        <p:txBody>
+          <a:bodyPr wrap="square">
+            <a:spAutoFit/>
+          </a:bodyPr>
+          <a:lstStyle/>
+          <a:p>
+            <a:pPr algn="r"/>
+            <a:r>
+              <a:rPr sz="800" b="0" i="1">
+                <a:solidFill>
+                  <a:srgbClr val="F97316"/>
+                </a:solidFill>
+              </a:rPr>
+              <a:t>agents/templates/nepa_ea.py</a:t>
+            </a:r>
+          </a:p>
+        </p:txBody>
+      </p:sp>
+      <p:sp>
+        <p:nvSpPr>
+          <p:cNvPr id="23" name="Rectangle 22"/>
           <p:cNvSpPr/>
           <p:nvPr/>
         </p:nvSpPr>
         <p:spPr>
           <a:xfrm>
-            <a:off x="2743200" y="2295144"/>
-            <a:ext cx="4389120" cy="274320"/>
+            <a:off x="6217920" y="3493008"/>
+            <a:ext cx="5394960" cy="1188720"/>
           </a:xfrm>
           <a:prstGeom prst="rect">
             <a:avLst/>
           </a:prstGeom>
           <a:solidFill>
-            <a:srgbClr val="1A202C"/>
+            <a:srgbClr val="2D3748"/>
           </a:solidFill>
+          <a:ln w="10160">
+            <a:solidFill>
+              <a:srgbClr val="EAB308"/>
+            </a:solidFill>
+          </a:ln>
         </p:spPr>
         <p:style>
           <a:lnRef idx="1">
@@ -7440,21 +8003,129 @@
       </p:sp>
       <p:sp>
         <p:nvSpPr>
-          <p:cNvPr id="16" name="Rectangle 15"/>
+          <p:cNvPr id="24" name="TextBox 23"/>
+          <p:cNvSpPr txBox="1"/>
+          <p:nvPr/>
+        </p:nvSpPr>
+        <p:spPr>
+          <a:xfrm>
+            <a:off x="6355080" y="3566160"/>
+            <a:ext cx="5120640" cy="274320"/>
+          </a:xfrm>
+          <a:prstGeom prst="rect">
+            <a:avLst/>
+          </a:prstGeom>
+          <a:noFill/>
+        </p:spPr>
+        <p:txBody>
+          <a:bodyPr wrap="square">
+            <a:spAutoFit/>
+          </a:bodyPr>
+          <a:lstStyle/>
+          <a:p>
+            <a:pPr algn="l"/>
+            <a:r>
+              <a:rPr sz="1200" b="1" i="0">
+                <a:solidFill>
+                  <a:srgbClr val="EAB308"/>
+                </a:solidFill>
+              </a:rPr>
+              <a:t>§4  Affected Environment</a:t>
+            </a:r>
+          </a:p>
+        </p:txBody>
+      </p:sp>
+      <p:sp>
+        <p:nvSpPr>
+          <p:cNvPr id="25" name="TextBox 24"/>
+          <p:cNvSpPr txBox="1"/>
+          <p:nvPr/>
+        </p:nvSpPr>
+        <p:spPr>
+          <a:xfrm>
+            <a:off x="6355080" y="3877056"/>
+            <a:ext cx="5120640" cy="658368"/>
+          </a:xfrm>
+          <a:prstGeom prst="rect">
+            <a:avLst/>
+          </a:prstGeom>
+          <a:noFill/>
+        </p:spPr>
+        <p:txBody>
+          <a:bodyPr wrap="square">
+            <a:spAutoFit/>
+          </a:bodyPr>
+          <a:lstStyle/>
+          <a:p>
+            <a:pPr algn="l"/>
+            <a:r>
+              <a:rPr sz="1200" b="0" i="0">
+                <a:solidFill>
+                  <a:srgbClr val="D1D5DB"/>
+                </a:solidFill>
+              </a:rPr>
+              <a:t>Convert raw API data into readable
+narrative of existing conditions</a:t>
+            </a:r>
+          </a:p>
+        </p:txBody>
+      </p:sp>
+      <p:sp>
+        <p:nvSpPr>
+          <p:cNvPr id="26" name="TextBox 25"/>
+          <p:cNvSpPr txBox="1"/>
+          <p:nvPr/>
+        </p:nvSpPr>
+        <p:spPr>
+          <a:xfrm>
+            <a:off x="9189720" y="4443984"/>
+            <a:ext cx="2331720" cy="201168"/>
+          </a:xfrm>
+          <a:prstGeom prst="rect">
+            <a:avLst/>
+          </a:prstGeom>
+          <a:noFill/>
+        </p:spPr>
+        <p:txBody>
+          <a:bodyPr wrap="square">
+            <a:spAutoFit/>
+          </a:bodyPr>
+          <a:lstStyle/>
+          <a:p>
+            <a:pPr algn="r"/>
+            <a:r>
+              <a:rPr sz="800" b="0" i="1">
+                <a:solidFill>
+                  <a:srgbClr val="F97316"/>
+                </a:solidFill>
+              </a:rPr>
+              <a:t>agents/templates/nepa_ea.py</a:t>
+            </a:r>
+          </a:p>
+        </p:txBody>
+      </p:sp>
+      <p:sp>
+        <p:nvSpPr>
+          <p:cNvPr id="27" name="Rectangle 26"/>
           <p:cNvSpPr/>
           <p:nvPr/>
         </p:nvSpPr>
         <p:spPr>
           <a:xfrm>
-            <a:off x="2743200" y="2295144"/>
-            <a:ext cx="3642969" cy="274320"/>
+            <a:off x="548640" y="4809744"/>
+            <a:ext cx="5394960" cy="1188720"/>
           </a:xfrm>
           <a:prstGeom prst="rect">
             <a:avLst/>
           </a:prstGeom>
           <a:solidFill>
-            <a:srgbClr val="06B6D3"/>
+            <a:srgbClr val="2D3748"/>
           </a:solidFill>
+          <a:ln w="10160">
+            <a:solidFill>
+              <a:srgbClr val="EAB308"/>
+            </a:solidFill>
+          </a:ln>
         </p:spPr>
         <p:style>
           <a:lnRef idx="1">
@@ -7480,14 +8151,14 @@
       </p:sp>
       <p:sp>
         <p:nvSpPr>
-          <p:cNvPr id="17" name="TextBox 16"/>
-          <p:cNvSpPr txBox="1"/>
-          <p:nvPr/>
-        </p:nvSpPr>
-        <p:spPr>
-          <a:xfrm>
-            <a:off x="7269480" y="2258568"/>
-            <a:ext cx="731520" cy="320040"/>
+          <p:cNvPr id="28" name="TextBox 27"/>
+          <p:cNvSpPr txBox="1"/>
+          <p:nvPr/>
+        </p:nvSpPr>
+        <p:spPr>
+          <a:xfrm>
+            <a:off x="685800" y="4882896"/>
+            <a:ext cx="5120640" cy="274320"/>
           </a:xfrm>
           <a:prstGeom prst="rect">
             <a:avLst/>
@@ -7502,26 +8173,26 @@
           <a:p>
             <a:pPr algn="l"/>
             <a:r>
-              <a:rPr sz="1300" b="1" i="0">
-                <a:solidFill>
-                  <a:srgbClr val="06B6D3"/>
-                </a:solidFill>
-              </a:rPr>
-              <a:t>0.83</a:t>
-            </a:r>
-          </a:p>
-        </p:txBody>
-      </p:sp>
-      <p:sp>
-        <p:nvSpPr>
-          <p:cNvPr id="18" name="TextBox 17"/>
-          <p:cNvSpPr txBox="1"/>
-          <p:nvPr/>
-        </p:nvSpPr>
-        <p:spPr>
-          <a:xfrm>
-            <a:off x="548640" y="2843784"/>
-            <a:ext cx="2103120" cy="320040"/>
+              <a:rPr sz="1200" b="1" i="0">
+                <a:solidFill>
+                  <a:srgbClr val="EAB308"/>
+                </a:solidFill>
+              </a:rPr>
+              <a:t>§5  Environmental Consequences</a:t>
+            </a:r>
+          </a:p>
+        </p:txBody>
+      </p:sp>
+      <p:sp>
+        <p:nvSpPr>
+          <p:cNvPr id="29" name="TextBox 28"/>
+          <p:cNvSpPr txBox="1"/>
+          <p:nvPr/>
+        </p:nvSpPr>
+        <p:spPr>
+          <a:xfrm>
+            <a:off x="685800" y="5193792"/>
+            <a:ext cx="5120640" cy="658368"/>
           </a:xfrm>
           <a:prstGeom prst="rect">
             <a:avLst/>
@@ -7536,33 +8207,73 @@
           <a:p>
             <a:pPr algn="l"/>
             <a:r>
-              <a:rPr sz="1300" b="0" i="0">
-                <a:solidFill>
-                  <a:srgbClr val="FFFFFF"/>
-                </a:solidFill>
-              </a:rPr>
-              <a:t>Recall</a:t>
-            </a:r>
-          </a:p>
-        </p:txBody>
-      </p:sp>
-      <p:sp>
-        <p:nvSpPr>
-          <p:cNvPr id="19" name="Rectangle 18"/>
+              <a:rPr sz="1200" b="0" i="0">
+                <a:solidFill>
+                  <a:srgbClr val="D1D5DB"/>
+                </a:solidFill>
+              </a:rPr>
+              <a:t>Impact per category: actions causing it,
+significance level, regulatory basis</a:t>
+            </a:r>
+          </a:p>
+        </p:txBody>
+      </p:sp>
+      <p:sp>
+        <p:nvSpPr>
+          <p:cNvPr id="30" name="TextBox 29"/>
+          <p:cNvSpPr txBox="1"/>
+          <p:nvPr/>
+        </p:nvSpPr>
+        <p:spPr>
+          <a:xfrm>
+            <a:off x="3520440" y="5760720"/>
+            <a:ext cx="2331720" cy="201168"/>
+          </a:xfrm>
+          <a:prstGeom prst="rect">
+            <a:avLst/>
+          </a:prstGeom>
+          <a:noFill/>
+        </p:spPr>
+        <p:txBody>
+          <a:bodyPr wrap="square">
+            <a:spAutoFit/>
+          </a:bodyPr>
+          <a:lstStyle/>
+          <a:p>
+            <a:pPr algn="r"/>
+            <a:r>
+              <a:rPr sz="800" b="0" i="1">
+                <a:solidFill>
+                  <a:srgbClr val="F97316"/>
+                </a:solidFill>
+              </a:rPr>
+              <a:t>agents/templates/nepa_ea.py</a:t>
+            </a:r>
+          </a:p>
+        </p:txBody>
+      </p:sp>
+      <p:sp>
+        <p:nvSpPr>
+          <p:cNvPr id="31" name="Rectangle 30"/>
           <p:cNvSpPr/>
           <p:nvPr/>
         </p:nvSpPr>
         <p:spPr>
           <a:xfrm>
-            <a:off x="2743200" y="2862072"/>
-            <a:ext cx="4389120" cy="274320"/>
+            <a:off x="6217920" y="4809744"/>
+            <a:ext cx="5394960" cy="1188720"/>
           </a:xfrm>
           <a:prstGeom prst="rect">
             <a:avLst/>
           </a:prstGeom>
           <a:solidFill>
-            <a:srgbClr val="1A202C"/>
+            <a:srgbClr val="2D3748"/>
           </a:solidFill>
+          <a:ln w="10160">
+            <a:solidFill>
+              <a:srgbClr val="EAB308"/>
+            </a:solidFill>
+          </a:ln>
         </p:spPr>
         <p:style>
           <a:lnRef idx="1">
@@ -7588,54 +8299,14 @@
       </p:sp>
       <p:sp>
         <p:nvSpPr>
-          <p:cNvPr id="20" name="Rectangle 19"/>
-          <p:cNvSpPr/>
-          <p:nvPr/>
-        </p:nvSpPr>
-        <p:spPr>
-          <a:xfrm>
-            <a:off x="2743200" y="2862072"/>
-            <a:ext cx="2940710" cy="274320"/>
-          </a:xfrm>
-          <a:prstGeom prst="rect">
-            <a:avLst/>
-          </a:prstGeom>
-          <a:solidFill>
-            <a:srgbClr val="22C55E"/>
-          </a:solidFill>
-        </p:spPr>
-        <p:style>
-          <a:lnRef idx="1">
-            <a:schemeClr val="accent1"/>
-          </a:lnRef>
-          <a:fillRef idx="3">
-            <a:schemeClr val="accent1"/>
-          </a:fillRef>
-          <a:effectRef idx="2">
-            <a:schemeClr val="accent1"/>
-          </a:effectRef>
-          <a:fontRef idx="minor">
-            <a:schemeClr val="lt1"/>
-          </a:fontRef>
-        </p:style>
-        <p:txBody>
-          <a:bodyPr rtlCol="0" anchor="ctr"/>
-          <a:lstStyle/>
-          <a:p>
-            <a:pPr algn="ctr"/>
-          </a:p>
-        </p:txBody>
-      </p:sp>
-      <p:sp>
-        <p:nvSpPr>
-          <p:cNvPr id="21" name="TextBox 20"/>
-          <p:cNvSpPr txBox="1"/>
-          <p:nvPr/>
-        </p:nvSpPr>
-        <p:spPr>
-          <a:xfrm>
-            <a:off x="7269480" y="2825496"/>
-            <a:ext cx="731520" cy="320040"/>
+          <p:cNvPr id="32" name="TextBox 31"/>
+          <p:cNvSpPr txBox="1"/>
+          <p:nvPr/>
+        </p:nvSpPr>
+        <p:spPr>
+          <a:xfrm>
+            <a:off x="6355080" y="4882896"/>
+            <a:ext cx="5120640" cy="274320"/>
           </a:xfrm>
           <a:prstGeom prst="rect">
             <a:avLst/>
@@ -7650,26 +8321,26 @@
           <a:p>
             <a:pPr algn="l"/>
             <a:r>
-              <a:rPr sz="1300" b="1" i="0">
-                <a:solidFill>
-                  <a:srgbClr val="22C55E"/>
-                </a:solidFill>
-              </a:rPr>
-              <a:t>0.67</a:t>
-            </a:r>
-          </a:p>
-        </p:txBody>
-      </p:sp>
-      <p:sp>
-        <p:nvSpPr>
-          <p:cNvPr id="22" name="TextBox 21"/>
-          <p:cNvSpPr txBox="1"/>
-          <p:nvPr/>
-        </p:nvSpPr>
-        <p:spPr>
-          <a:xfrm>
-            <a:off x="548640" y="3410712"/>
-            <a:ext cx="2103120" cy="320040"/>
+              <a:rPr sz="1200" b="1" i="0">
+                <a:solidFill>
+                  <a:srgbClr val="EAB308"/>
+                </a:solidFill>
+              </a:rPr>
+              <a:t>§6  Mitigation Measures</a:t>
+            </a:r>
+          </a:p>
+        </p:txBody>
+      </p:sp>
+      <p:sp>
+        <p:nvSpPr>
+          <p:cNvPr id="33" name="TextBox 32"/>
+          <p:cNvSpPr txBox="1"/>
+          <p:nvPr/>
+        </p:nvSpPr>
+        <p:spPr>
+          <a:xfrm>
+            <a:off x="6355080" y="5193792"/>
+            <a:ext cx="5120640" cy="658368"/>
           </a:xfrm>
           <a:prstGeom prst="rect">
             <a:avLst/>
@@ -7684,1443 +8355,47 @@
           <a:p>
             <a:pPr algn="l"/>
             <a:r>
-              <a:rPr sz="1300" b="0" i="0">
-                <a:solidFill>
-                  <a:srgbClr val="FFFFFF"/>
-                </a:solidFill>
-              </a:rPr>
-              <a:t>Significance Accuracy</a:t>
-            </a:r>
-          </a:p>
-        </p:txBody>
-      </p:sp>
-      <p:sp>
-        <p:nvSpPr>
-          <p:cNvPr id="23" name="Rectangle 22"/>
-          <p:cNvSpPr/>
-          <p:nvPr/>
-        </p:nvSpPr>
-        <p:spPr>
-          <a:xfrm>
-            <a:off x="2743200" y="3429000"/>
-            <a:ext cx="4389120" cy="274320"/>
-          </a:xfrm>
-          <a:prstGeom prst="rect">
-            <a:avLst/>
-          </a:prstGeom>
-          <a:solidFill>
-            <a:srgbClr val="1A202C"/>
-          </a:solidFill>
-        </p:spPr>
-        <p:style>
-          <a:lnRef idx="1">
-            <a:schemeClr val="accent1"/>
-          </a:lnRef>
-          <a:fillRef idx="3">
-            <a:schemeClr val="accent1"/>
-          </a:fillRef>
-          <a:effectRef idx="2">
-            <a:schemeClr val="accent1"/>
-          </a:effectRef>
-          <a:fontRef idx="minor">
-            <a:schemeClr val="lt1"/>
-          </a:fontRef>
-        </p:style>
-        <p:txBody>
-          <a:bodyPr rtlCol="0" anchor="ctr"/>
-          <a:lstStyle/>
-          <a:p>
-            <a:pPr algn="ctr"/>
-          </a:p>
-        </p:txBody>
-      </p:sp>
-      <p:sp>
-        <p:nvSpPr>
-          <p:cNvPr id="24" name="Rectangle 23"/>
-          <p:cNvSpPr/>
-          <p:nvPr/>
-        </p:nvSpPr>
-        <p:spPr>
-          <a:xfrm>
-            <a:off x="2743200" y="3429000"/>
-            <a:ext cx="3555187" cy="274320"/>
-          </a:xfrm>
-          <a:prstGeom prst="rect">
-            <a:avLst/>
-          </a:prstGeom>
-          <a:solidFill>
-            <a:srgbClr val="EAB308"/>
-          </a:solidFill>
-        </p:spPr>
-        <p:style>
-          <a:lnRef idx="1">
-            <a:schemeClr val="accent1"/>
-          </a:lnRef>
-          <a:fillRef idx="3">
-            <a:schemeClr val="accent1"/>
-          </a:fillRef>
-          <a:effectRef idx="2">
-            <a:schemeClr val="accent1"/>
-          </a:effectRef>
-          <a:fontRef idx="minor">
-            <a:schemeClr val="lt1"/>
-          </a:fontRef>
-        </p:style>
-        <p:txBody>
-          <a:bodyPr rtlCol="0" anchor="ctr"/>
-          <a:lstStyle/>
-          <a:p>
-            <a:pPr algn="ctr"/>
-          </a:p>
-        </p:txBody>
-      </p:sp>
-      <p:sp>
-        <p:nvSpPr>
-          <p:cNvPr id="25" name="TextBox 24"/>
-          <p:cNvSpPr txBox="1"/>
-          <p:nvPr/>
-        </p:nvSpPr>
-        <p:spPr>
-          <a:xfrm>
-            <a:off x="7269480" y="3392424"/>
-            <a:ext cx="731520" cy="320040"/>
-          </a:xfrm>
-          <a:prstGeom prst="rect">
-            <a:avLst/>
-          </a:prstGeom>
-          <a:noFill/>
-        </p:spPr>
-        <p:txBody>
-          <a:bodyPr wrap="square">
-            <a:spAutoFit/>
-          </a:bodyPr>
-          <a:lstStyle/>
-          <a:p>
-            <a:pPr algn="l"/>
-            <a:r>
-              <a:rPr sz="1300" b="1" i="0">
-                <a:solidFill>
-                  <a:srgbClr val="EAB308"/>
-                </a:solidFill>
-              </a:rPr>
-              <a:t>0.81</a:t>
-            </a:r>
-          </a:p>
-        </p:txBody>
-      </p:sp>
-      <p:sp>
-        <p:nvSpPr>
-          <p:cNvPr id="26" name="TextBox 25"/>
-          <p:cNvSpPr txBox="1"/>
-          <p:nvPr/>
-        </p:nvSpPr>
-        <p:spPr>
-          <a:xfrm>
-            <a:off x="548640" y="3977640"/>
-            <a:ext cx="2103120" cy="320040"/>
-          </a:xfrm>
-          <a:prstGeom prst="rect">
-            <a:avLst/>
-          </a:prstGeom>
-          <a:noFill/>
-        </p:spPr>
-        <p:txBody>
-          <a:bodyPr wrap="square">
-            <a:spAutoFit/>
-          </a:bodyPr>
-          <a:lstStyle/>
-          <a:p>
-            <a:pPr algn="l"/>
-            <a:r>
-              <a:rPr sz="1300" b="0" i="0">
-                <a:solidFill>
-                  <a:srgbClr val="FFFFFF"/>
-                </a:solidFill>
-              </a:rPr>
-              <a:t>Semantic Coverage</a:t>
-            </a:r>
-          </a:p>
-        </p:txBody>
-      </p:sp>
-      <p:sp>
-        <p:nvSpPr>
-          <p:cNvPr id="27" name="Rectangle 26"/>
-          <p:cNvSpPr/>
-          <p:nvPr/>
-        </p:nvSpPr>
-        <p:spPr>
-          <a:xfrm>
-            <a:off x="2743200" y="3995928"/>
-            <a:ext cx="4389120" cy="274320"/>
-          </a:xfrm>
-          <a:prstGeom prst="rect">
-            <a:avLst/>
-          </a:prstGeom>
-          <a:solidFill>
-            <a:srgbClr val="1A202C"/>
-          </a:solidFill>
-        </p:spPr>
-        <p:style>
-          <a:lnRef idx="1">
-            <a:schemeClr val="accent1"/>
-          </a:lnRef>
-          <a:fillRef idx="3">
-            <a:schemeClr val="accent1"/>
-          </a:fillRef>
-          <a:effectRef idx="2">
-            <a:schemeClr val="accent1"/>
-          </a:effectRef>
-          <a:fontRef idx="minor">
-            <a:schemeClr val="lt1"/>
-          </a:fontRef>
-        </p:style>
-        <p:txBody>
-          <a:bodyPr rtlCol="0" anchor="ctr"/>
-          <a:lstStyle/>
-          <a:p>
-            <a:pPr algn="ctr"/>
-          </a:p>
-        </p:txBody>
-      </p:sp>
-      <p:sp>
-        <p:nvSpPr>
-          <p:cNvPr id="28" name="Rectangle 27"/>
-          <p:cNvSpPr/>
-          <p:nvPr/>
-        </p:nvSpPr>
-        <p:spPr>
-          <a:xfrm>
-            <a:off x="2743200" y="3995928"/>
-            <a:ext cx="3160166" cy="274320"/>
-          </a:xfrm>
-          <a:prstGeom prst="rect">
-            <a:avLst/>
-          </a:prstGeom>
-          <a:solidFill>
-            <a:srgbClr val="A78BFA"/>
-          </a:solidFill>
-        </p:spPr>
-        <p:style>
-          <a:lnRef idx="1">
-            <a:schemeClr val="accent1"/>
-          </a:lnRef>
-          <a:fillRef idx="3">
-            <a:schemeClr val="accent1"/>
-          </a:fillRef>
-          <a:effectRef idx="2">
-            <a:schemeClr val="accent1"/>
-          </a:effectRef>
-          <a:fontRef idx="minor">
-            <a:schemeClr val="lt1"/>
-          </a:fontRef>
-        </p:style>
-        <p:txBody>
-          <a:bodyPr rtlCol="0" anchor="ctr"/>
-          <a:lstStyle/>
-          <a:p>
-            <a:pPr algn="ctr"/>
-          </a:p>
-        </p:txBody>
-      </p:sp>
-      <p:sp>
-        <p:nvSpPr>
-          <p:cNvPr id="29" name="TextBox 28"/>
-          <p:cNvSpPr txBox="1"/>
-          <p:nvPr/>
-        </p:nvSpPr>
-        <p:spPr>
-          <a:xfrm>
-            <a:off x="7269480" y="3959352"/>
-            <a:ext cx="731520" cy="320040"/>
-          </a:xfrm>
-          <a:prstGeom prst="rect">
-            <a:avLst/>
-          </a:prstGeom>
-          <a:noFill/>
-        </p:spPr>
-        <p:txBody>
-          <a:bodyPr wrap="square">
-            <a:spAutoFit/>
-          </a:bodyPr>
-          <a:lstStyle/>
-          <a:p>
-            <a:pPr algn="l"/>
-            <a:r>
-              <a:rPr sz="1300" b="1" i="0">
-                <a:solidFill>
-                  <a:srgbClr val="A78BFA"/>
-                </a:solidFill>
-              </a:rPr>
-              <a:t>0.72</a:t>
-            </a:r>
-          </a:p>
-        </p:txBody>
-      </p:sp>
-      <p:sp>
-        <p:nvSpPr>
-          <p:cNvPr id="30" name="TextBox 29"/>
-          <p:cNvSpPr txBox="1"/>
-          <p:nvPr/>
-        </p:nvSpPr>
-        <p:spPr>
-          <a:xfrm>
-            <a:off x="548640" y="4956048"/>
-            <a:ext cx="7132320" cy="292608"/>
-          </a:xfrm>
-          <a:prstGeom prst="rect">
-            <a:avLst/>
-          </a:prstGeom>
-          <a:noFill/>
-        </p:spPr>
-        <p:txBody>
-          <a:bodyPr wrap="square">
-            <a:spAutoFit/>
-          </a:bodyPr>
-          <a:lstStyle/>
-          <a:p>
-            <a:pPr algn="l"/>
-            <a:r>
-              <a:rPr sz="1200" b="1" i="0">
+              <a:rPr sz="1200" b="0" i="0">
+                <a:solidFill>
+                  <a:srgbClr val="D1D5DB"/>
+                </a:solidFill>
+              </a:rPr>
+              <a:t>Describe mitigations grouped by type:
+avoidance / minimization / compensatory</a:t>
+            </a:r>
+          </a:p>
+        </p:txBody>
+      </p:sp>
+      <p:sp>
+        <p:nvSpPr>
+          <p:cNvPr id="34" name="TextBox 33"/>
+          <p:cNvSpPr txBox="1"/>
+          <p:nvPr/>
+        </p:nvSpPr>
+        <p:spPr>
+          <a:xfrm>
+            <a:off x="9189720" y="5760720"/>
+            <a:ext cx="2331720" cy="201168"/>
+          </a:xfrm>
+          <a:prstGeom prst="rect">
+            <a:avLst/>
+          </a:prstGeom>
+          <a:noFill/>
+        </p:spPr>
+        <p:txBody>
+          <a:bodyPr wrap="square">
+            <a:spAutoFit/>
+          </a:bodyPr>
+          <a:lstStyle/>
+          <a:p>
+            <a:pPr algn="r"/>
+            <a:r>
+              <a:rPr sz="800" b="0" i="1">
                 <a:solidFill>
                   <a:srgbClr val="F97316"/>
                 </a:solidFill>
               </a:rPr>
-              <a:t>PER-CATEGORY BREAKDOWN</a:t>
-            </a:r>
-          </a:p>
-        </p:txBody>
-      </p:sp>
-      <p:sp>
-        <p:nvSpPr>
-          <p:cNvPr id="31" name="Rectangle 30"/>
-          <p:cNvSpPr/>
-          <p:nvPr/>
-        </p:nvSpPr>
-        <p:spPr>
-          <a:xfrm>
-            <a:off x="548640" y="5303520"/>
-            <a:ext cx="6355080" cy="256032"/>
-          </a:xfrm>
-          <a:prstGeom prst="rect">
-            <a:avLst/>
-          </a:prstGeom>
-          <a:solidFill>
-            <a:srgbClr val="1A202C"/>
-          </a:solidFill>
-        </p:spPr>
-        <p:style>
-          <a:lnRef idx="1">
-            <a:schemeClr val="accent1"/>
-          </a:lnRef>
-          <a:fillRef idx="3">
-            <a:schemeClr val="accent1"/>
-          </a:fillRef>
-          <a:effectRef idx="2">
-            <a:schemeClr val="accent1"/>
-          </a:effectRef>
-          <a:fontRef idx="minor">
-            <a:schemeClr val="lt1"/>
-          </a:fontRef>
-        </p:style>
-        <p:txBody>
-          <a:bodyPr rtlCol="0" anchor="ctr"/>
-          <a:lstStyle/>
-          <a:p>
-            <a:pPr algn="ctr"/>
-          </a:p>
-        </p:txBody>
-      </p:sp>
-      <p:sp>
-        <p:nvSpPr>
-          <p:cNvPr id="32" name="TextBox 31"/>
-          <p:cNvSpPr txBox="1"/>
-          <p:nvPr/>
-        </p:nvSpPr>
-        <p:spPr>
-          <a:xfrm>
-            <a:off x="603504" y="5340096"/>
-            <a:ext cx="2286000" cy="201168"/>
-          </a:xfrm>
-          <a:prstGeom prst="rect">
-            <a:avLst/>
-          </a:prstGeom>
-          <a:noFill/>
-        </p:spPr>
-        <p:txBody>
-          <a:bodyPr wrap="square">
-            <a:spAutoFit/>
-          </a:bodyPr>
-          <a:lstStyle/>
-          <a:p>
-            <a:pPr algn="l"/>
-            <a:r>
-              <a:rPr sz="1000" b="1" i="0">
-                <a:solidFill>
-                  <a:srgbClr val="F97316"/>
-                </a:solidFill>
-              </a:rPr>
-              <a:t>Category</a:t>
-            </a:r>
-          </a:p>
-        </p:txBody>
-      </p:sp>
-      <p:sp>
-        <p:nvSpPr>
-          <p:cNvPr id="33" name="TextBox 32"/>
-          <p:cNvSpPr txBox="1"/>
-          <p:nvPr/>
-        </p:nvSpPr>
-        <p:spPr>
-          <a:xfrm>
-            <a:off x="2935224" y="5340096"/>
-            <a:ext cx="777240" cy="201168"/>
-          </a:xfrm>
-          <a:prstGeom prst="rect">
-            <a:avLst/>
-          </a:prstGeom>
-          <a:noFill/>
-        </p:spPr>
-        <p:txBody>
-          <a:bodyPr wrap="square">
-            <a:spAutoFit/>
-          </a:bodyPr>
-          <a:lstStyle/>
-          <a:p>
-            <a:pPr algn="l"/>
-            <a:r>
-              <a:rPr sz="1000" b="1" i="0">
-                <a:solidFill>
-                  <a:srgbClr val="F97316"/>
-                </a:solidFill>
-              </a:rPr>
-              <a:t>Label</a:t>
-            </a:r>
-          </a:p>
-        </p:txBody>
-      </p:sp>
-      <p:sp>
-        <p:nvSpPr>
-          <p:cNvPr id="34" name="TextBox 33"/>
-          <p:cNvSpPr txBox="1"/>
-          <p:nvPr/>
-        </p:nvSpPr>
-        <p:spPr>
-          <a:xfrm>
-            <a:off x="3758184" y="5340096"/>
-            <a:ext cx="1234440" cy="201168"/>
-          </a:xfrm>
-          <a:prstGeom prst="rect">
-            <a:avLst/>
-          </a:prstGeom>
-          <a:noFill/>
-        </p:spPr>
-        <p:txBody>
-          <a:bodyPr wrap="square">
-            <a:spAutoFit/>
-          </a:bodyPr>
-          <a:lstStyle/>
-          <a:p>
-            <a:pPr algn="l"/>
-            <a:r>
-              <a:rPr sz="1000" b="1" i="0">
-                <a:solidFill>
-                  <a:srgbClr val="F97316"/>
-                </a:solidFill>
-              </a:rPr>
-              <a:t>Agent</a:t>
-            </a:r>
-          </a:p>
-        </p:txBody>
-      </p:sp>
-      <p:sp>
-        <p:nvSpPr>
-          <p:cNvPr id="35" name="TextBox 34"/>
-          <p:cNvSpPr txBox="1"/>
-          <p:nvPr/>
-        </p:nvSpPr>
-        <p:spPr>
-          <a:xfrm>
-            <a:off x="5038344" y="5340096"/>
-            <a:ext cx="1280160" cy="201168"/>
-          </a:xfrm>
-          <a:prstGeom prst="rect">
-            <a:avLst/>
-          </a:prstGeom>
-          <a:noFill/>
-        </p:spPr>
-        <p:txBody>
-          <a:bodyPr wrap="square">
-            <a:spAutoFit/>
-          </a:bodyPr>
-          <a:lstStyle/>
-          <a:p>
-            <a:pPr algn="l"/>
-            <a:r>
-              <a:rPr sz="1000" b="1" i="0">
-                <a:solidFill>
-                  <a:srgbClr val="F97316"/>
-                </a:solidFill>
-              </a:rPr>
-              <a:t>Ground Truth</a:t>
-            </a:r>
-          </a:p>
-        </p:txBody>
-      </p:sp>
-      <p:sp>
-        <p:nvSpPr>
-          <p:cNvPr id="36" name="Rectangle 35"/>
-          <p:cNvSpPr/>
-          <p:nvPr/>
-        </p:nvSpPr>
-        <p:spPr>
-          <a:xfrm>
-            <a:off x="548640" y="5559552"/>
-            <a:ext cx="6355080" cy="173736"/>
-          </a:xfrm>
-          <a:prstGeom prst="rect">
-            <a:avLst/>
-          </a:prstGeom>
-          <a:solidFill>
-            <a:srgbClr val="2D3748"/>
-          </a:solidFill>
-        </p:spPr>
-        <p:style>
-          <a:lnRef idx="1">
-            <a:schemeClr val="accent1"/>
-          </a:lnRef>
-          <a:fillRef idx="3">
-            <a:schemeClr val="accent1"/>
-          </a:fillRef>
-          <a:effectRef idx="2">
-            <a:schemeClr val="accent1"/>
-          </a:effectRef>
-          <a:fontRef idx="minor">
-            <a:schemeClr val="lt1"/>
-          </a:fontRef>
-        </p:style>
-        <p:txBody>
-          <a:bodyPr rtlCol="0" anchor="ctr"/>
-          <a:lstStyle/>
-          <a:p>
-            <a:pPr algn="ctr"/>
-          </a:p>
-        </p:txBody>
-      </p:sp>
-      <p:sp>
-        <p:nvSpPr>
-          <p:cNvPr id="37" name="TextBox 36"/>
-          <p:cNvSpPr txBox="1"/>
-          <p:nvPr/>
-        </p:nvSpPr>
-        <p:spPr>
-          <a:xfrm>
-            <a:off x="603504" y="5577840"/>
-            <a:ext cx="2286000" cy="146304"/>
-          </a:xfrm>
-          <a:prstGeom prst="rect">
-            <a:avLst/>
-          </a:prstGeom>
-          <a:noFill/>
-        </p:spPr>
-        <p:txBody>
-          <a:bodyPr wrap="square">
-            <a:spAutoFit/>
-          </a:bodyPr>
-          <a:lstStyle/>
-          <a:p>
-            <a:pPr algn="l"/>
-            <a:r>
-              <a:rPr sz="900" b="0" i="0">
-                <a:solidFill>
-                  <a:srgbClr val="FFFFFF"/>
-                </a:solidFill>
-              </a:rPr>
-              <a:t>wetlands</a:t>
-            </a:r>
-          </a:p>
-        </p:txBody>
-      </p:sp>
-      <p:sp>
-        <p:nvSpPr>
-          <p:cNvPr id="38" name="TextBox 37"/>
-          <p:cNvSpPr txBox="1"/>
-          <p:nvPr/>
-        </p:nvSpPr>
-        <p:spPr>
-          <a:xfrm>
-            <a:off x="2935224" y="5577840"/>
-            <a:ext cx="777240" cy="146304"/>
-          </a:xfrm>
-          <a:prstGeom prst="rect">
-            <a:avLst/>
-          </a:prstGeom>
-          <a:noFill/>
-        </p:spPr>
-        <p:txBody>
-          <a:bodyPr wrap="square">
-            <a:spAutoFit/>
-          </a:bodyPr>
-          <a:lstStyle/>
-          <a:p>
-            <a:pPr algn="l"/>
-            <a:r>
-              <a:rPr sz="900" b="1" i="0">
-                <a:solidFill>
-                  <a:srgbClr val="22C55E"/>
-                </a:solidFill>
-              </a:rPr>
-              <a:t>TP</a:t>
-            </a:r>
-          </a:p>
-        </p:txBody>
-      </p:sp>
-      <p:sp>
-        <p:nvSpPr>
-          <p:cNvPr id="39" name="TextBox 38"/>
-          <p:cNvSpPr txBox="1"/>
-          <p:nvPr/>
-        </p:nvSpPr>
-        <p:spPr>
-          <a:xfrm>
-            <a:off x="3758184" y="5577840"/>
-            <a:ext cx="1234440" cy="146304"/>
-          </a:xfrm>
-          <a:prstGeom prst="rect">
-            <a:avLst/>
-          </a:prstGeom>
-          <a:noFill/>
-        </p:spPr>
-        <p:txBody>
-          <a:bodyPr wrap="square">
-            <a:spAutoFit/>
-          </a:bodyPr>
-          <a:lstStyle/>
-          <a:p>
-            <a:pPr algn="l"/>
-            <a:r>
-              <a:rPr sz="900" b="0" i="0">
-                <a:solidFill>
-                  <a:srgbClr val="D1D5DB"/>
-                </a:solidFill>
-              </a:rPr>
-              <a:t>significant</a:t>
-            </a:r>
-          </a:p>
-        </p:txBody>
-      </p:sp>
-      <p:sp>
-        <p:nvSpPr>
-          <p:cNvPr id="40" name="TextBox 39"/>
-          <p:cNvSpPr txBox="1"/>
-          <p:nvPr/>
-        </p:nvSpPr>
-        <p:spPr>
-          <a:xfrm>
-            <a:off x="5038344" y="5577840"/>
-            <a:ext cx="1280160" cy="146304"/>
-          </a:xfrm>
-          <a:prstGeom prst="rect">
-            <a:avLst/>
-          </a:prstGeom>
-          <a:noFill/>
-        </p:spPr>
-        <p:txBody>
-          <a:bodyPr wrap="square">
-            <a:spAutoFit/>
-          </a:bodyPr>
-          <a:lstStyle/>
-          <a:p>
-            <a:pPr algn="l"/>
-            <a:r>
-              <a:rPr sz="900" b="0" i="0">
-                <a:solidFill>
-                  <a:srgbClr val="D1D5DB"/>
-                </a:solidFill>
-              </a:rPr>
-              <a:t>significant</a:t>
-            </a:r>
-          </a:p>
-        </p:txBody>
-      </p:sp>
-      <p:sp>
-        <p:nvSpPr>
-          <p:cNvPr id="41" name="Rectangle 40"/>
-          <p:cNvSpPr/>
-          <p:nvPr/>
-        </p:nvSpPr>
-        <p:spPr>
-          <a:xfrm>
-            <a:off x="548640" y="5742432"/>
-            <a:ext cx="6355080" cy="173736"/>
-          </a:xfrm>
-          <a:prstGeom prst="rect">
-            <a:avLst/>
-          </a:prstGeom>
-          <a:solidFill>
-            <a:srgbClr val="1F2833"/>
-          </a:solidFill>
-        </p:spPr>
-        <p:style>
-          <a:lnRef idx="1">
-            <a:schemeClr val="accent1"/>
-          </a:lnRef>
-          <a:fillRef idx="3">
-            <a:schemeClr val="accent1"/>
-          </a:fillRef>
-          <a:effectRef idx="2">
-            <a:schemeClr val="accent1"/>
-          </a:effectRef>
-          <a:fontRef idx="minor">
-            <a:schemeClr val="lt1"/>
-          </a:fontRef>
-        </p:style>
-        <p:txBody>
-          <a:bodyPr rtlCol="0" anchor="ctr"/>
-          <a:lstStyle/>
-          <a:p>
-            <a:pPr algn="ctr"/>
-          </a:p>
-        </p:txBody>
-      </p:sp>
-      <p:sp>
-        <p:nvSpPr>
-          <p:cNvPr id="42" name="TextBox 41"/>
-          <p:cNvSpPr txBox="1"/>
-          <p:nvPr/>
-        </p:nvSpPr>
-        <p:spPr>
-          <a:xfrm>
-            <a:off x="603504" y="5760720"/>
-            <a:ext cx="2286000" cy="146304"/>
-          </a:xfrm>
-          <a:prstGeom prst="rect">
-            <a:avLst/>
-          </a:prstGeom>
-          <a:noFill/>
-        </p:spPr>
-        <p:txBody>
-          <a:bodyPr wrap="square">
-            <a:spAutoFit/>
-          </a:bodyPr>
-          <a:lstStyle/>
-          <a:p>
-            <a:pPr algn="l"/>
-            <a:r>
-              <a:rPr sz="900" b="0" i="0">
-                <a:solidFill>
-                  <a:srgbClr val="FFFFFF"/>
-                </a:solidFill>
-              </a:rPr>
-              <a:t>floodplain</a:t>
-            </a:r>
-          </a:p>
-        </p:txBody>
-      </p:sp>
-      <p:sp>
-        <p:nvSpPr>
-          <p:cNvPr id="43" name="TextBox 42"/>
-          <p:cNvSpPr txBox="1"/>
-          <p:nvPr/>
-        </p:nvSpPr>
-        <p:spPr>
-          <a:xfrm>
-            <a:off x="2935224" y="5760720"/>
-            <a:ext cx="777240" cy="146304"/>
-          </a:xfrm>
-          <a:prstGeom prst="rect">
-            <a:avLst/>
-          </a:prstGeom>
-          <a:noFill/>
-        </p:spPr>
-        <p:txBody>
-          <a:bodyPr wrap="square">
-            <a:spAutoFit/>
-          </a:bodyPr>
-          <a:lstStyle/>
-          <a:p>
-            <a:pPr algn="l"/>
-            <a:r>
-              <a:rPr sz="900" b="1" i="0">
-                <a:solidFill>
-                  <a:srgbClr val="22C55E"/>
-                </a:solidFill>
-              </a:rPr>
-              <a:t>TP</a:t>
-            </a:r>
-          </a:p>
-        </p:txBody>
-      </p:sp>
-      <p:sp>
-        <p:nvSpPr>
-          <p:cNvPr id="44" name="TextBox 43"/>
-          <p:cNvSpPr txBox="1"/>
-          <p:nvPr/>
-        </p:nvSpPr>
-        <p:spPr>
-          <a:xfrm>
-            <a:off x="3758184" y="5760720"/>
-            <a:ext cx="1234440" cy="146304"/>
-          </a:xfrm>
-          <a:prstGeom prst="rect">
-            <a:avLst/>
-          </a:prstGeom>
-          <a:noFill/>
-        </p:spPr>
-        <p:txBody>
-          <a:bodyPr wrap="square">
-            <a:spAutoFit/>
-          </a:bodyPr>
-          <a:lstStyle/>
-          <a:p>
-            <a:pPr algn="l"/>
-            <a:r>
-              <a:rPr sz="900" b="0" i="0">
-                <a:solidFill>
-                  <a:srgbClr val="D1D5DB"/>
-                </a:solidFill>
-              </a:rPr>
-              <a:t>moderate</a:t>
-            </a:r>
-          </a:p>
-        </p:txBody>
-      </p:sp>
-      <p:sp>
-        <p:nvSpPr>
-          <p:cNvPr id="45" name="TextBox 44"/>
-          <p:cNvSpPr txBox="1"/>
-          <p:nvPr/>
-        </p:nvSpPr>
-        <p:spPr>
-          <a:xfrm>
-            <a:off x="5038344" y="5760720"/>
-            <a:ext cx="1280160" cy="146304"/>
-          </a:xfrm>
-          <a:prstGeom prst="rect">
-            <a:avLst/>
-          </a:prstGeom>
-          <a:noFill/>
-        </p:spPr>
-        <p:txBody>
-          <a:bodyPr wrap="square">
-            <a:spAutoFit/>
-          </a:bodyPr>
-          <a:lstStyle/>
-          <a:p>
-            <a:pPr algn="l"/>
-            <a:r>
-              <a:rPr sz="900" b="0" i="0">
-                <a:solidFill>
-                  <a:srgbClr val="D1D5DB"/>
-                </a:solidFill>
-              </a:rPr>
-              <a:t>moderate</a:t>
-            </a:r>
-          </a:p>
-        </p:txBody>
-      </p:sp>
-      <p:sp>
-        <p:nvSpPr>
-          <p:cNvPr id="46" name="Rectangle 45"/>
-          <p:cNvSpPr/>
-          <p:nvPr/>
-        </p:nvSpPr>
-        <p:spPr>
-          <a:xfrm>
-            <a:off x="548640" y="5925312"/>
-            <a:ext cx="6355080" cy="173736"/>
-          </a:xfrm>
-          <a:prstGeom prst="rect">
-            <a:avLst/>
-          </a:prstGeom>
-          <a:solidFill>
-            <a:srgbClr val="2D3748"/>
-          </a:solidFill>
-        </p:spPr>
-        <p:style>
-          <a:lnRef idx="1">
-            <a:schemeClr val="accent1"/>
-          </a:lnRef>
-          <a:fillRef idx="3">
-            <a:schemeClr val="accent1"/>
-          </a:fillRef>
-          <a:effectRef idx="2">
-            <a:schemeClr val="accent1"/>
-          </a:effectRef>
-          <a:fontRef idx="minor">
-            <a:schemeClr val="lt1"/>
-          </a:fontRef>
-        </p:style>
-        <p:txBody>
-          <a:bodyPr rtlCol="0" anchor="ctr"/>
-          <a:lstStyle/>
-          <a:p>
-            <a:pPr algn="ctr"/>
-          </a:p>
-        </p:txBody>
-      </p:sp>
-      <p:sp>
-        <p:nvSpPr>
-          <p:cNvPr id="47" name="TextBox 46"/>
-          <p:cNvSpPr txBox="1"/>
-          <p:nvPr/>
-        </p:nvSpPr>
-        <p:spPr>
-          <a:xfrm>
-            <a:off x="603504" y="5943600"/>
-            <a:ext cx="2286000" cy="146304"/>
-          </a:xfrm>
-          <a:prstGeom prst="rect">
-            <a:avLst/>
-          </a:prstGeom>
-          <a:noFill/>
-        </p:spPr>
-        <p:txBody>
-          <a:bodyPr wrap="square">
-            <a:spAutoFit/>
-          </a:bodyPr>
-          <a:lstStyle/>
-          <a:p>
-            <a:pPr algn="l"/>
-            <a:r>
-              <a:rPr sz="900" b="0" i="0">
-                <a:solidFill>
-                  <a:srgbClr val="FFFFFF"/>
-                </a:solidFill>
-              </a:rPr>
-              <a:t>endangered_species</a:t>
-            </a:r>
-          </a:p>
-        </p:txBody>
-      </p:sp>
-      <p:sp>
-        <p:nvSpPr>
-          <p:cNvPr id="48" name="TextBox 47"/>
-          <p:cNvSpPr txBox="1"/>
-          <p:nvPr/>
-        </p:nvSpPr>
-        <p:spPr>
-          <a:xfrm>
-            <a:off x="2935224" y="5943600"/>
-            <a:ext cx="777240" cy="146304"/>
-          </a:xfrm>
-          <a:prstGeom prst="rect">
-            <a:avLst/>
-          </a:prstGeom>
-          <a:noFill/>
-        </p:spPr>
-        <p:txBody>
-          <a:bodyPr wrap="square">
-            <a:spAutoFit/>
-          </a:bodyPr>
-          <a:lstStyle/>
-          <a:p>
-            <a:pPr algn="l"/>
-            <a:r>
-              <a:rPr sz="900" b="1" i="0">
-                <a:solidFill>
-                  <a:srgbClr val="EF4444"/>
-                </a:solidFill>
-              </a:rPr>
-              <a:t>FP</a:t>
-            </a:r>
-          </a:p>
-        </p:txBody>
-      </p:sp>
-      <p:sp>
-        <p:nvSpPr>
-          <p:cNvPr id="49" name="TextBox 48"/>
-          <p:cNvSpPr txBox="1"/>
-          <p:nvPr/>
-        </p:nvSpPr>
-        <p:spPr>
-          <a:xfrm>
-            <a:off x="3758184" y="5943600"/>
-            <a:ext cx="1234440" cy="146304"/>
-          </a:xfrm>
-          <a:prstGeom prst="rect">
-            <a:avLst/>
-          </a:prstGeom>
-          <a:noFill/>
-        </p:spPr>
-        <p:txBody>
-          <a:bodyPr wrap="square">
-            <a:spAutoFit/>
-          </a:bodyPr>
-          <a:lstStyle/>
-          <a:p>
-            <a:pPr algn="l"/>
-            <a:r>
-              <a:rPr sz="900" b="0" i="0">
-                <a:solidFill>
-                  <a:srgbClr val="D1D5DB"/>
-                </a:solidFill>
-              </a:rPr>
-              <a:t>significant</a:t>
-            </a:r>
-          </a:p>
-        </p:txBody>
-      </p:sp>
-      <p:sp>
-        <p:nvSpPr>
-          <p:cNvPr id="50" name="TextBox 49"/>
-          <p:cNvSpPr txBox="1"/>
-          <p:nvPr/>
-        </p:nvSpPr>
-        <p:spPr>
-          <a:xfrm>
-            <a:off x="5038344" y="5943600"/>
-            <a:ext cx="1280160" cy="146304"/>
-          </a:xfrm>
-          <a:prstGeom prst="rect">
-            <a:avLst/>
-          </a:prstGeom>
-          <a:noFill/>
-        </p:spPr>
-        <p:txBody>
-          <a:bodyPr wrap="square">
-            <a:spAutoFit/>
-          </a:bodyPr>
-          <a:lstStyle/>
-          <a:p>
-            <a:pPr algn="l"/>
-            <a:r>
-              <a:rPr sz="900" b="0" i="0">
-                <a:solidFill>
-                  <a:srgbClr val="D1D5DB"/>
-                </a:solidFill>
-              </a:rPr>
-              <a:t>none</a:t>
-            </a:r>
-          </a:p>
-        </p:txBody>
-      </p:sp>
-      <p:sp>
-        <p:nvSpPr>
-          <p:cNvPr id="51" name="Rectangle 50"/>
-          <p:cNvSpPr/>
-          <p:nvPr/>
-        </p:nvSpPr>
-        <p:spPr>
-          <a:xfrm>
-            <a:off x="548640" y="6108192"/>
-            <a:ext cx="6355080" cy="173736"/>
-          </a:xfrm>
-          <a:prstGeom prst="rect">
-            <a:avLst/>
-          </a:prstGeom>
-          <a:solidFill>
-            <a:srgbClr val="1F2833"/>
-          </a:solidFill>
-        </p:spPr>
-        <p:style>
-          <a:lnRef idx="1">
-            <a:schemeClr val="accent1"/>
-          </a:lnRef>
-          <a:fillRef idx="3">
-            <a:schemeClr val="accent1"/>
-          </a:fillRef>
-          <a:effectRef idx="2">
-            <a:schemeClr val="accent1"/>
-          </a:effectRef>
-          <a:fontRef idx="minor">
-            <a:schemeClr val="lt1"/>
-          </a:fontRef>
-        </p:style>
-        <p:txBody>
-          <a:bodyPr rtlCol="0" anchor="ctr"/>
-          <a:lstStyle/>
-          <a:p>
-            <a:pPr algn="ctr"/>
-          </a:p>
-        </p:txBody>
-      </p:sp>
-      <p:sp>
-        <p:nvSpPr>
-          <p:cNvPr id="52" name="TextBox 51"/>
-          <p:cNvSpPr txBox="1"/>
-          <p:nvPr/>
-        </p:nvSpPr>
-        <p:spPr>
-          <a:xfrm>
-            <a:off x="603504" y="6126480"/>
-            <a:ext cx="2286000" cy="146304"/>
-          </a:xfrm>
-          <a:prstGeom prst="rect">
-            <a:avLst/>
-          </a:prstGeom>
-          <a:noFill/>
-        </p:spPr>
-        <p:txBody>
-          <a:bodyPr wrap="square">
-            <a:spAutoFit/>
-          </a:bodyPr>
-          <a:lstStyle/>
-          <a:p>
-            <a:pPr algn="l"/>
-            <a:r>
-              <a:rPr sz="900" b="0" i="0">
-                <a:solidFill>
-                  <a:srgbClr val="FFFFFF"/>
-                </a:solidFill>
-              </a:rPr>
-              <a:t>prime_farmland</a:t>
-            </a:r>
-          </a:p>
-        </p:txBody>
-      </p:sp>
-      <p:sp>
-        <p:nvSpPr>
-          <p:cNvPr id="53" name="TextBox 52"/>
-          <p:cNvSpPr txBox="1"/>
-          <p:nvPr/>
-        </p:nvSpPr>
-        <p:spPr>
-          <a:xfrm>
-            <a:off x="2935224" y="6126480"/>
-            <a:ext cx="777240" cy="146304"/>
-          </a:xfrm>
-          <a:prstGeom prst="rect">
-            <a:avLst/>
-          </a:prstGeom>
-          <a:noFill/>
-        </p:spPr>
-        <p:txBody>
-          <a:bodyPr wrap="square">
-            <a:spAutoFit/>
-          </a:bodyPr>
-          <a:lstStyle/>
-          <a:p>
-            <a:pPr algn="l"/>
-            <a:r>
-              <a:rPr sz="900" b="1" i="0">
-                <a:solidFill>
-                  <a:srgbClr val="EAB308"/>
-                </a:solidFill>
-              </a:rPr>
-              <a:t>FN</a:t>
-            </a:r>
-          </a:p>
-        </p:txBody>
-      </p:sp>
-      <p:sp>
-        <p:nvSpPr>
-          <p:cNvPr id="54" name="TextBox 53"/>
-          <p:cNvSpPr txBox="1"/>
-          <p:nvPr/>
-        </p:nvSpPr>
-        <p:spPr>
-          <a:xfrm>
-            <a:off x="3758184" y="6126480"/>
-            <a:ext cx="1234440" cy="146304"/>
-          </a:xfrm>
-          <a:prstGeom prst="rect">
-            <a:avLst/>
-          </a:prstGeom>
-          <a:noFill/>
-        </p:spPr>
-        <p:txBody>
-          <a:bodyPr wrap="square">
-            <a:spAutoFit/>
-          </a:bodyPr>
-          <a:lstStyle/>
-          <a:p>
-            <a:pPr algn="l"/>
-            <a:r>
-              <a:rPr sz="900" b="0" i="0">
-                <a:solidFill>
-                  <a:srgbClr val="D1D5DB"/>
-                </a:solidFill>
-              </a:rPr>
-              <a:t>none</a:t>
-            </a:r>
-          </a:p>
-        </p:txBody>
-      </p:sp>
-      <p:sp>
-        <p:nvSpPr>
-          <p:cNvPr id="55" name="TextBox 54"/>
-          <p:cNvSpPr txBox="1"/>
-          <p:nvPr/>
-        </p:nvSpPr>
-        <p:spPr>
-          <a:xfrm>
-            <a:off x="5038344" y="6126480"/>
-            <a:ext cx="1280160" cy="146304"/>
-          </a:xfrm>
-          <a:prstGeom prst="rect">
-            <a:avLst/>
-          </a:prstGeom>
-          <a:noFill/>
-        </p:spPr>
-        <p:txBody>
-          <a:bodyPr wrap="square">
-            <a:spAutoFit/>
-          </a:bodyPr>
-          <a:lstStyle/>
-          <a:p>
-            <a:pPr algn="l"/>
-            <a:r>
-              <a:rPr sz="900" b="0" i="0">
-                <a:solidFill>
-                  <a:srgbClr val="D1D5DB"/>
-                </a:solidFill>
-              </a:rPr>
-              <a:t>moderate</a:t>
-            </a:r>
-          </a:p>
-        </p:txBody>
-      </p:sp>
-      <p:sp>
-        <p:nvSpPr>
-          <p:cNvPr id="56" name="Rectangle 55"/>
-          <p:cNvSpPr/>
-          <p:nvPr/>
-        </p:nvSpPr>
-        <p:spPr>
-          <a:xfrm>
-            <a:off x="548640" y="6291072"/>
-            <a:ext cx="6355080" cy="173736"/>
-          </a:xfrm>
-          <a:prstGeom prst="rect">
-            <a:avLst/>
-          </a:prstGeom>
-          <a:solidFill>
-            <a:srgbClr val="2D3748"/>
-          </a:solidFill>
-        </p:spPr>
-        <p:style>
-          <a:lnRef idx="1">
-            <a:schemeClr val="accent1"/>
-          </a:lnRef>
-          <a:fillRef idx="3">
-            <a:schemeClr val="accent1"/>
-          </a:fillRef>
-          <a:effectRef idx="2">
-            <a:schemeClr val="accent1"/>
-          </a:effectRef>
-          <a:fontRef idx="minor">
-            <a:schemeClr val="lt1"/>
-          </a:fontRef>
-        </p:style>
-        <p:txBody>
-          <a:bodyPr rtlCol="0" anchor="ctr"/>
-          <a:lstStyle/>
-          <a:p>
-            <a:pPr algn="ctr"/>
-          </a:p>
-        </p:txBody>
-      </p:sp>
-      <p:sp>
-        <p:nvSpPr>
-          <p:cNvPr id="57" name="TextBox 56"/>
-          <p:cNvSpPr txBox="1"/>
-          <p:nvPr/>
-        </p:nvSpPr>
-        <p:spPr>
-          <a:xfrm>
-            <a:off x="603504" y="6309360"/>
-            <a:ext cx="2286000" cy="146304"/>
-          </a:xfrm>
-          <a:prstGeom prst="rect">
-            <a:avLst/>
-          </a:prstGeom>
-          <a:noFill/>
-        </p:spPr>
-        <p:txBody>
-          <a:bodyPr wrap="square">
-            <a:spAutoFit/>
-          </a:bodyPr>
-          <a:lstStyle/>
-          <a:p>
-            <a:pPr algn="l"/>
-            <a:r>
-              <a:rPr sz="900" b="0" i="0">
-                <a:solidFill>
-                  <a:srgbClr val="FFFFFF"/>
-                </a:solidFill>
-              </a:rPr>
-              <a:t>environmental_justice</a:t>
-            </a:r>
-          </a:p>
-        </p:txBody>
-      </p:sp>
-      <p:sp>
-        <p:nvSpPr>
-          <p:cNvPr id="58" name="TextBox 57"/>
-          <p:cNvSpPr txBox="1"/>
-          <p:nvPr/>
-        </p:nvSpPr>
-        <p:spPr>
-          <a:xfrm>
-            <a:off x="2935224" y="6309360"/>
-            <a:ext cx="777240" cy="146304"/>
-          </a:xfrm>
-          <a:prstGeom prst="rect">
-            <a:avLst/>
-          </a:prstGeom>
-          <a:noFill/>
-        </p:spPr>
-        <p:txBody>
-          <a:bodyPr wrap="square">
-            <a:spAutoFit/>
-          </a:bodyPr>
-          <a:lstStyle/>
-          <a:p>
-            <a:pPr algn="l"/>
-            <a:r>
-              <a:rPr sz="900" b="1" i="0">
-                <a:solidFill>
-                  <a:srgbClr val="22C55E"/>
-                </a:solidFill>
-              </a:rPr>
-              <a:t>TP</a:t>
-            </a:r>
-          </a:p>
-        </p:txBody>
-      </p:sp>
-      <p:sp>
-        <p:nvSpPr>
-          <p:cNvPr id="59" name="TextBox 58"/>
-          <p:cNvSpPr txBox="1"/>
-          <p:nvPr/>
-        </p:nvSpPr>
-        <p:spPr>
-          <a:xfrm>
-            <a:off x="3758184" y="6309360"/>
-            <a:ext cx="1234440" cy="146304"/>
-          </a:xfrm>
-          <a:prstGeom prst="rect">
-            <a:avLst/>
-          </a:prstGeom>
-          <a:noFill/>
-        </p:spPr>
-        <p:txBody>
-          <a:bodyPr wrap="square">
-            <a:spAutoFit/>
-          </a:bodyPr>
-          <a:lstStyle/>
-          <a:p>
-            <a:pPr algn="l"/>
-            <a:r>
-              <a:rPr sz="900" b="0" i="0">
-                <a:solidFill>
-                  <a:srgbClr val="D1D5DB"/>
-                </a:solidFill>
-              </a:rPr>
-              <a:t>moderate</a:t>
-            </a:r>
-          </a:p>
-        </p:txBody>
-      </p:sp>
-      <p:sp>
-        <p:nvSpPr>
-          <p:cNvPr id="60" name="TextBox 59"/>
-          <p:cNvSpPr txBox="1"/>
-          <p:nvPr/>
-        </p:nvSpPr>
-        <p:spPr>
-          <a:xfrm>
-            <a:off x="5038344" y="6309360"/>
-            <a:ext cx="1280160" cy="146304"/>
-          </a:xfrm>
-          <a:prstGeom prst="rect">
-            <a:avLst/>
-          </a:prstGeom>
-          <a:noFill/>
-        </p:spPr>
-        <p:txBody>
-          <a:bodyPr wrap="square">
-            <a:spAutoFit/>
-          </a:bodyPr>
-          <a:lstStyle/>
-          <a:p>
-            <a:pPr algn="l"/>
-            <a:r>
-              <a:rPr sz="900" b="0" i="0">
-                <a:solidFill>
-                  <a:srgbClr val="D1D5DB"/>
-                </a:solidFill>
-              </a:rPr>
-              <a:t>moderate</a:t>
-            </a:r>
-          </a:p>
-        </p:txBody>
-      </p:sp>
-      <p:sp>
-        <p:nvSpPr>
-          <p:cNvPr id="61" name="Rectangle 60"/>
-          <p:cNvSpPr/>
-          <p:nvPr/>
-        </p:nvSpPr>
-        <p:spPr>
-          <a:xfrm>
-            <a:off x="7406640" y="1051560"/>
-            <a:ext cx="4572000" cy="5577840"/>
-          </a:xfrm>
-          <a:prstGeom prst="rect">
-            <a:avLst/>
-          </a:prstGeom>
-          <a:solidFill>
-            <a:srgbClr val="2D3748"/>
-          </a:solidFill>
-          <a:ln w="19050">
-            <a:solidFill>
-              <a:srgbClr val="F97316"/>
-            </a:solidFill>
-          </a:ln>
-        </p:spPr>
-        <p:style>
-          <a:lnRef idx="1">
-            <a:schemeClr val="accent1"/>
-          </a:lnRef>
-          <a:fillRef idx="3">
-            <a:schemeClr val="accent1"/>
-          </a:fillRef>
-          <a:effectRef idx="2">
-            <a:schemeClr val="accent1"/>
-          </a:effectRef>
-          <a:fontRef idx="minor">
-            <a:schemeClr val="lt1"/>
-          </a:fontRef>
-        </p:style>
-        <p:txBody>
-          <a:bodyPr rtlCol="0" anchor="ctr"/>
-          <a:lstStyle/>
-          <a:p>
-            <a:pPr algn="ctr"/>
-          </a:p>
-        </p:txBody>
-      </p:sp>
-      <p:sp>
-        <p:nvSpPr>
-          <p:cNvPr id="62" name="TextBox 61"/>
-          <p:cNvSpPr txBox="1"/>
-          <p:nvPr/>
-        </p:nvSpPr>
-        <p:spPr>
-          <a:xfrm>
-            <a:off x="7543800" y="3535680"/>
-            <a:ext cx="4297680" cy="457200"/>
-          </a:xfrm>
-          <a:prstGeom prst="rect">
-            <a:avLst/>
-          </a:prstGeom>
-          <a:noFill/>
-        </p:spPr>
-        <p:txBody>
-          <a:bodyPr wrap="square">
-            <a:spAutoFit/>
-          </a:bodyPr>
-          <a:lstStyle/>
-          <a:p>
-            <a:pPr algn="ctr"/>
-            <a:r>
-              <a:rPr sz="1200" b="0" i="1">
-                <a:solidFill>
-                  <a:srgbClr val="F97316"/>
-                </a:solidFill>
-              </a:rPr>
-              <a:t>[ Evaluation panel screenshot — score bars + methodology modal ]</a:t>
+              <a:t>agents/templates/nepa_ea.py</a:t>
             </a:r>
           </a:p>
         </p:txBody>
@@ -9232,12 +8507,12 @@
           <a:p>
             <a:pPr algn="l"/>
             <a:r>
-              <a:rPr sz="2600" b="1" i="0">
+              <a:rPr sz="2800" b="1" i="0">
                 <a:solidFill>
                   <a:srgbClr val="F97316"/>
                 </a:solidFill>
               </a:rPr>
-              <a:t>Results — How Scores Are Calculated</a:t>
+              <a:t>Results — Agent Outputs</a:t>
             </a:r>
           </a:p>
         </p:txBody>
@@ -9290,8 +8565,8 @@
         </p:nvSpPr>
         <p:spPr>
           <a:xfrm>
-            <a:off x="548640" y="1005840"/>
-            <a:ext cx="3566160" cy="5029200"/>
+            <a:off x="457200" y="1078992"/>
+            <a:ext cx="2103120" cy="2926080"/>
           </a:xfrm>
           <a:prstGeom prst="rect">
             <a:avLst/>
@@ -9299,7 +8574,7 @@
           <a:solidFill>
             <a:srgbClr val="2D3748"/>
           </a:solidFill>
-          <a:ln w="25400">
+          <a:ln w="19050">
             <a:solidFill>
               <a:srgbClr val="3B82F6"/>
             </a:solidFill>
@@ -9335,8 +8610,8 @@
         </p:nvSpPr>
         <p:spPr>
           <a:xfrm>
-            <a:off x="548640" y="1005840"/>
-            <a:ext cx="3566160" cy="502920"/>
+            <a:off x="457200" y="1078992"/>
+            <a:ext cx="2103120" cy="365760"/>
           </a:xfrm>
           <a:prstGeom prst="rect">
             <a:avLst/>
@@ -9375,8 +8650,8 @@
         </p:nvSpPr>
         <p:spPr>
           <a:xfrm>
-            <a:off x="640080" y="1042416"/>
-            <a:ext cx="3108960" cy="274320"/>
+            <a:off x="530352" y="1499616"/>
+            <a:ext cx="1956816" cy="548640"/>
           </a:xfrm>
           <a:prstGeom prst="rect">
             <a:avLst/>
@@ -9391,12 +8666,13 @@
           <a:p>
             <a:pPr algn="l"/>
             <a:r>
-              <a:rPr sz="1200" b="1" i="0">
-                <a:solidFill>
-                  <a:srgbClr val="FFFFFF"/>
-                </a:solidFill>
-              </a:rPr>
-              <a:t>CATEGORY F1</a:t>
+              <a:rPr sz="1100" b="1" i="0">
+                <a:solidFill>
+                  <a:srgbClr val="3B82F6"/>
+                </a:solidFill>
+              </a:rPr>
+              <a:t>Project
+Parser</a:t>
             </a:r>
           </a:p>
         </p:txBody>
@@ -9409,230 +8685,44 @@
         </p:nvSpPr>
         <p:spPr>
           <a:xfrm>
-            <a:off x="3474720" y="1170432"/>
-            <a:ext cx="548640" cy="256032"/>
-          </a:xfrm>
-          <a:prstGeom prst="rect">
-            <a:avLst/>
-          </a:prstGeom>
-          <a:noFill/>
-        </p:spPr>
-        <p:txBody>
-          <a:bodyPr wrap="square">
-            <a:spAutoFit/>
-          </a:bodyPr>
-          <a:lstStyle/>
-          <a:p>
-            <a:pPr algn="r"/>
-            <a:r>
-              <a:rPr sz="1200" b="1" i="0">
-                <a:solidFill>
-                  <a:srgbClr val="FFFFFF"/>
-                </a:solidFill>
-              </a:rPr>
-              <a:t>× 0.40</a:t>
-            </a:r>
-          </a:p>
-        </p:txBody>
-      </p:sp>
-      <p:sp>
-        <p:nvSpPr>
-          <p:cNvPr id="10" name="TextBox 9"/>
-          <p:cNvSpPr txBox="1"/>
-          <p:nvPr/>
-        </p:nvSpPr>
-        <p:spPr>
-          <a:xfrm>
-            <a:off x="658368" y="1572768"/>
-            <a:ext cx="3346704" cy="4251960"/>
-          </a:xfrm>
-          <a:prstGeom prst="rect">
-            <a:avLst/>
-          </a:prstGeom>
-          <a:noFill/>
-        </p:spPr>
-        <p:txBody>
-          <a:bodyPr wrap="square">
-            <a:spAutoFit/>
-          </a:bodyPr>
-          <a:lstStyle/>
-          <a:p>
-            <a:pPr>
-              <a:spcBef>
-                <a:spcPts val="300"/>
-              </a:spcBef>
-            </a:pPr>
-            <a:r>
-              <a:rPr sz="1200" b="0">
+            <a:off x="566928" y="2103120"/>
+            <a:ext cx="1883664" cy="1810512"/>
+          </a:xfrm>
+          <a:prstGeom prst="rect">
+            <a:avLst/>
+          </a:prstGeom>
+          <a:noFill/>
+        </p:spPr>
+        <p:txBody>
+          <a:bodyPr wrap="square">
+            <a:spAutoFit/>
+          </a:bodyPr>
+          <a:lstStyle/>
+          <a:p>
+            <a:pPr algn="l"/>
+            <a:r>
+              <a:rPr sz="1000" b="0" i="0">
                 <a:solidFill>
                   <a:srgbClr val="D1D5DB"/>
                 </a:solidFill>
               </a:rPr>
-              <a:t>8 fixed categories evaluated:</a:t>
-            </a:r>
-          </a:p>
-          <a:p>
-            <a:pPr>
-              <a:spcBef>
-                <a:spcPts val="300"/>
-              </a:spcBef>
-            </a:pPr>
-            <a:r>
-              <a:rPr sz="1200" b="0">
-                <a:solidFill>
-                  <a:srgbClr val="D1D5DB"/>
-                </a:solidFill>
-              </a:rPr>
-              <a:t>wetlands · air_quality · noise · traffic</a:t>
-            </a:r>
-          </a:p>
-          <a:p>
-            <a:pPr>
-              <a:spcBef>
-                <a:spcPts val="300"/>
-              </a:spcBef>
-            </a:pPr>
-            <a:r>
-              <a:rPr sz="1200" b="0">
-                <a:solidFill>
-                  <a:srgbClr val="D1D5DB"/>
-                </a:solidFill>
-              </a:rPr>
-              <a:t>env. justice · species · floodplain · farmland</a:t>
-            </a:r>
-          </a:p>
-          <a:p>
-            <a:pPr>
-              <a:spcBef>
-                <a:spcPts val="300"/>
-              </a:spcBef>
-            </a:pPr>
-            <a:r>
-              <a:rPr sz="1200" b="0">
-                <a:solidFill>
-                  <a:srgbClr val="FFFFFF"/>
-                </a:solidFill>
-              </a:rPr>
-              <a:t/>
-            </a:r>
-          </a:p>
-          <a:p>
-            <a:pPr>
-              <a:spcBef>
-                <a:spcPts val="300"/>
-              </a:spcBef>
-            </a:pPr>
-            <a:r>
-              <a:rPr sz="1200" b="0">
-                <a:solidFill>
-                  <a:srgbClr val="D1D5DB"/>
-                </a:solidFill>
-              </a:rPr>
-              <a:t>TP  agent flagged  AND  EIS confirms</a:t>
-            </a:r>
-          </a:p>
-          <a:p>
-            <a:pPr>
-              <a:spcBef>
-                <a:spcPts val="300"/>
-              </a:spcBef>
-            </a:pPr>
-            <a:r>
-              <a:rPr sz="1200" b="0">
-                <a:solidFill>
-                  <a:srgbClr val="D1D5DB"/>
-                </a:solidFill>
-              </a:rPr>
-              <a:t>FP  agent flagged  BUT  EIS says none</a:t>
-            </a:r>
-          </a:p>
-          <a:p>
-            <a:pPr>
-              <a:spcBef>
-                <a:spcPts val="300"/>
-              </a:spcBef>
-            </a:pPr>
-            <a:r>
-              <a:rPr sz="1200" b="0">
-                <a:solidFill>
-                  <a:srgbClr val="D1D5DB"/>
-                </a:solidFill>
-              </a:rPr>
-              <a:t>FN  EIS confirms   BUT  agent missed</a:t>
-            </a:r>
-          </a:p>
-          <a:p>
-            <a:pPr>
-              <a:spcBef>
-                <a:spcPts val="300"/>
-              </a:spcBef>
-            </a:pPr>
-            <a:r>
-              <a:rPr sz="1200" b="0">
-                <a:solidFill>
-                  <a:srgbClr val="FFFFFF"/>
-                </a:solidFill>
-              </a:rPr>
-              <a:t/>
-            </a:r>
-          </a:p>
-          <a:p>
-            <a:pPr>
-              <a:spcBef>
-                <a:spcPts val="300"/>
-              </a:spcBef>
-            </a:pPr>
-            <a:r>
-              <a:rPr sz="1200" b="1">
-                <a:solidFill>
-                  <a:srgbClr val="D1D5DB"/>
-                </a:solidFill>
-              </a:rPr>
-              <a:t>Precision = TP / (TP+FP)</a:t>
-            </a:r>
-          </a:p>
-          <a:p>
-            <a:pPr>
-              <a:spcBef>
-                <a:spcPts val="300"/>
-              </a:spcBef>
-            </a:pPr>
-            <a:r>
-              <a:rPr sz="1200" b="1">
-                <a:solidFill>
-                  <a:srgbClr val="D1D5DB"/>
-                </a:solidFill>
-              </a:rPr>
-              <a:t>Recall    = TP / (TP+FN)</a:t>
-            </a:r>
-          </a:p>
-          <a:p>
-            <a:pPr>
-              <a:spcBef>
-                <a:spcPts val="300"/>
-              </a:spcBef>
-            </a:pPr>
-            <a:r>
-              <a:rPr sz="1200" b="1">
-                <a:solidFill>
-                  <a:srgbClr val="D1D5DB"/>
-                </a:solidFill>
-              </a:rPr>
-              <a:t>F1 = 2·P·R / (P+R)</a:t>
-            </a:r>
-          </a:p>
-        </p:txBody>
-      </p:sp>
-      <p:sp>
-        <p:nvSpPr>
-          <p:cNvPr id="11" name="Rectangle 10"/>
+              <a:t>project_type: "highway"
+actions: ["grading","paving"]
+federal_nexus: true</a:t>
+            </a:r>
+          </a:p>
+        </p:txBody>
+      </p:sp>
+      <p:sp>
+        <p:nvSpPr>
+          <p:cNvPr id="10" name="Rectangle 9"/>
           <p:cNvSpPr/>
           <p:nvPr/>
         </p:nvSpPr>
         <p:spPr>
           <a:xfrm>
-            <a:off x="4315968" y="1005840"/>
-            <a:ext cx="3566160" cy="5029200"/>
+            <a:off x="2761488" y="1078992"/>
+            <a:ext cx="2103120" cy="2926080"/>
           </a:xfrm>
           <a:prstGeom prst="rect">
             <a:avLst/>
@@ -9640,9 +8730,9 @@
           <a:solidFill>
             <a:srgbClr val="2D3748"/>
           </a:solidFill>
-          <a:ln w="25400">
+          <a:ln w="19050">
             <a:solidFill>
-              <a:srgbClr val="22C55E"/>
+              <a:srgbClr val="06B6D3"/>
             </a:solidFill>
           </a:ln>
         </p:spPr>
@@ -9670,20 +8760,20 @@
       </p:sp>
       <p:sp>
         <p:nvSpPr>
-          <p:cNvPr id="12" name="Rectangle 11"/>
+          <p:cNvPr id="11" name="Rectangle 10"/>
           <p:cNvSpPr/>
           <p:nvPr/>
         </p:nvSpPr>
         <p:spPr>
           <a:xfrm>
-            <a:off x="4315968" y="1005840"/>
-            <a:ext cx="3566160" cy="502920"/>
+            <a:off x="2761488" y="1078992"/>
+            <a:ext cx="2103120" cy="365760"/>
           </a:xfrm>
           <a:prstGeom prst="rect">
             <a:avLst/>
           </a:prstGeom>
           <a:solidFill>
-            <a:srgbClr val="22C55E"/>
+            <a:srgbClr val="06B6D3"/>
           </a:solidFill>
         </p:spPr>
         <p:style>
@@ -9710,14 +8800,49 @@
       </p:sp>
       <p:sp>
         <p:nvSpPr>
+          <p:cNvPr id="12" name="TextBox 11"/>
+          <p:cNvSpPr txBox="1"/>
+          <p:nvPr/>
+        </p:nvSpPr>
+        <p:spPr>
+          <a:xfrm>
+            <a:off x="2834640" y="1499616"/>
+            <a:ext cx="1956816" cy="548640"/>
+          </a:xfrm>
+          <a:prstGeom prst="rect">
+            <a:avLst/>
+          </a:prstGeom>
+          <a:noFill/>
+        </p:spPr>
+        <p:txBody>
+          <a:bodyPr wrap="square">
+            <a:spAutoFit/>
+          </a:bodyPr>
+          <a:lstStyle/>
+          <a:p>
+            <a:pPr algn="l"/>
+            <a:r>
+              <a:rPr sz="1100" b="1" i="0">
+                <a:solidFill>
+                  <a:srgbClr val="06B6D3"/>
+                </a:solidFill>
+              </a:rPr>
+              <a:t>Environ.
+Data</a:t>
+            </a:r>
+          </a:p>
+        </p:txBody>
+      </p:sp>
+      <p:sp>
+        <p:nvSpPr>
           <p:cNvPr id="13" name="TextBox 12"/>
           <p:cNvSpPr txBox="1"/>
           <p:nvPr/>
         </p:nvSpPr>
         <p:spPr>
           <a:xfrm>
-            <a:off x="4407408" y="1042416"/>
-            <a:ext cx="3108960" cy="274320"/>
+            <a:off x="2871216" y="2103120"/>
+            <a:ext cx="1883664" cy="1810512"/>
           </a:xfrm>
           <a:prstGeom prst="rect">
             <a:avLst/>
@@ -9732,263 +8857,29 @@
           <a:p>
             <a:pPr algn="l"/>
             <a:r>
-              <a:rPr sz="1200" b="1" i="0">
-                <a:solidFill>
-                  <a:srgbClr val="FFFFFF"/>
-                </a:solidFill>
-              </a:rPr>
-              <a:t>SIGNIFICANCE ACCURACY</a:t>
-            </a:r>
-          </a:p>
-        </p:txBody>
-      </p:sp>
-      <p:sp>
-        <p:nvSpPr>
-          <p:cNvPr id="14" name="TextBox 13"/>
-          <p:cNvSpPr txBox="1"/>
-          <p:nvPr/>
-        </p:nvSpPr>
-        <p:spPr>
-          <a:xfrm>
-            <a:off x="7242048" y="1170432"/>
-            <a:ext cx="548640" cy="256032"/>
-          </a:xfrm>
-          <a:prstGeom prst="rect">
-            <a:avLst/>
-          </a:prstGeom>
-          <a:noFill/>
-        </p:spPr>
-        <p:txBody>
-          <a:bodyPr wrap="square">
-            <a:spAutoFit/>
-          </a:bodyPr>
-          <a:lstStyle/>
-          <a:p>
-            <a:pPr algn="r"/>
-            <a:r>
-              <a:rPr sz="1200" b="1" i="0">
-                <a:solidFill>
-                  <a:srgbClr val="FFFFFF"/>
-                </a:solidFill>
-              </a:rPr>
-              <a:t>× 0.40</a:t>
-            </a:r>
-          </a:p>
-        </p:txBody>
-      </p:sp>
-      <p:sp>
-        <p:nvSpPr>
-          <p:cNvPr id="15" name="TextBox 14"/>
-          <p:cNvSpPr txBox="1"/>
-          <p:nvPr/>
-        </p:nvSpPr>
-        <p:spPr>
-          <a:xfrm>
-            <a:off x="4425696" y="1572768"/>
-            <a:ext cx="3346704" cy="4251960"/>
-          </a:xfrm>
-          <a:prstGeom prst="rect">
-            <a:avLst/>
-          </a:prstGeom>
-          <a:noFill/>
-        </p:spPr>
-        <p:txBody>
-          <a:bodyPr wrap="square">
-            <a:spAutoFit/>
-          </a:bodyPr>
-          <a:lstStyle/>
-          <a:p>
-            <a:pPr>
-              <a:spcBef>
-                <a:spcPts val="300"/>
-              </a:spcBef>
-            </a:pPr>
-            <a:r>
-              <a:rPr sz="1200" b="0">
+              <a:rPr sz="1000" b="0" i="0">
                 <a:solidFill>
                   <a:srgbClr val="D1D5DB"/>
                 </a:solidFill>
               </a:rPr>
-              <a:t>Ordinal significance scale:</a:t>
-            </a:r>
-          </a:p>
-          <a:p>
-            <a:pPr>
-              <a:spcBef>
-                <a:spcPts val="300"/>
-              </a:spcBef>
-            </a:pPr>
-            <a:r>
-              <a:rPr sz="1200" b="0">
-                <a:solidFill>
-                  <a:srgbClr val="D1D5DB"/>
-                </a:solidFill>
-              </a:rPr>
-              <a:t>  significant = 3</a:t>
-            </a:r>
-          </a:p>
-          <a:p>
-            <a:pPr>
-              <a:spcBef>
-                <a:spcPts val="300"/>
-              </a:spcBef>
-            </a:pPr>
-            <a:r>
-              <a:rPr sz="1200" b="0">
-                <a:solidFill>
-                  <a:srgbClr val="D1D5DB"/>
-                </a:solidFill>
-              </a:rPr>
-              <a:t>  moderate    = 2</a:t>
-            </a:r>
-          </a:p>
-          <a:p>
-            <a:pPr>
-              <a:spcBef>
-                <a:spcPts val="300"/>
-              </a:spcBef>
-            </a:pPr>
-            <a:r>
-              <a:rPr sz="1200" b="0">
-                <a:solidFill>
-                  <a:srgbClr val="D1D5DB"/>
-                </a:solidFill>
-              </a:rPr>
-              <a:t>  minimal     = 1</a:t>
-            </a:r>
-          </a:p>
-          <a:p>
-            <a:pPr>
-              <a:spcBef>
-                <a:spcPts val="300"/>
-              </a:spcBef>
-            </a:pPr>
-            <a:r>
-              <a:rPr sz="1200" b="0">
-                <a:solidFill>
-                  <a:srgbClr val="D1D5DB"/>
-                </a:solidFill>
-              </a:rPr>
-              <a:t>  none        = 0</a:t>
-            </a:r>
-          </a:p>
-          <a:p>
-            <a:pPr>
-              <a:spcBef>
-                <a:spcPts val="300"/>
-              </a:spcBef>
-            </a:pPr>
-            <a:r>
-              <a:rPr sz="1200" b="0">
-                <a:solidFill>
-                  <a:srgbClr val="FFFFFF"/>
-                </a:solidFill>
-              </a:rPr>
-              <a:t/>
-            </a:r>
-          </a:p>
-          <a:p>
-            <a:pPr>
-              <a:spcBef>
-                <a:spcPts val="300"/>
-              </a:spcBef>
-            </a:pPr>
-            <a:r>
-              <a:rPr sz="1200" b="0">
-                <a:solidFill>
-                  <a:srgbClr val="D1D5DB"/>
-                </a:solidFill>
-              </a:rPr>
-              <a:t>For each matched category:</a:t>
-            </a:r>
-          </a:p>
-          <a:p>
-            <a:pPr>
-              <a:spcBef>
-                <a:spcPts val="300"/>
-              </a:spcBef>
-            </a:pPr>
-            <a:r>
-              <a:rPr sz="1200" b="0">
-                <a:solidFill>
-                  <a:srgbClr val="D1D5DB"/>
-                </a:solidFill>
-              </a:rPr>
-              <a:t>  |diff| = 0  →  1.0  (exact match)</a:t>
-            </a:r>
-          </a:p>
-          <a:p>
-            <a:pPr>
-              <a:spcBef>
-                <a:spcPts val="300"/>
-              </a:spcBef>
-            </a:pPr>
-            <a:r>
-              <a:rPr sz="1200" b="0">
-                <a:solidFill>
-                  <a:srgbClr val="D1D5DB"/>
-                </a:solidFill>
-              </a:rPr>
-              <a:t>  |diff| = 1  →  0.5  (off by one)</a:t>
-            </a:r>
-          </a:p>
-          <a:p>
-            <a:pPr>
-              <a:spcBef>
-                <a:spcPts val="300"/>
-              </a:spcBef>
-            </a:pPr>
-            <a:r>
-              <a:rPr sz="1200" b="0">
-                <a:solidFill>
-                  <a:srgbClr val="D1D5DB"/>
-                </a:solidFill>
-              </a:rPr>
-              <a:t>  |diff| ≥ 2  →  0.0</a:t>
-            </a:r>
-          </a:p>
-          <a:p>
-            <a:pPr>
-              <a:spcBef>
-                <a:spcPts val="300"/>
-              </a:spcBef>
-            </a:pPr>
-            <a:r>
-              <a:rPr sz="1200" b="0">
-                <a:solidFill>
-                  <a:srgbClr val="FFFFFF"/>
-                </a:solidFill>
-              </a:rPr>
-              <a:t/>
-            </a:r>
-          </a:p>
-          <a:p>
-            <a:pPr>
-              <a:spcBef>
-                <a:spcPts val="300"/>
-              </a:spcBef>
-            </a:pPr>
-            <a:r>
-              <a:rPr sz="1200" b="0">
-                <a:solidFill>
-                  <a:srgbClr val="D1D5DB"/>
-                </a:solidFill>
-              </a:rPr>
-              <a:t>Score = mean across all pairs</a:t>
-            </a:r>
-          </a:p>
-        </p:txBody>
-      </p:sp>
-      <p:sp>
-        <p:nvSpPr>
-          <p:cNvPr id="16" name="Rectangle 15"/>
+              <a:t>Species: Indiana bat
+Wetlands: 4.2 ac PEM1C
+FEMA: Zone AE
+Farmland: Prime</a:t>
+            </a:r>
+          </a:p>
+        </p:txBody>
+      </p:sp>
+      <p:sp>
+        <p:nvSpPr>
+          <p:cNvPr id="14" name="Rectangle 13"/>
           <p:cNvSpPr/>
           <p:nvPr/>
         </p:nvSpPr>
         <p:spPr>
           <a:xfrm>
-            <a:off x="8083296" y="1005840"/>
-            <a:ext cx="3566160" cy="5029200"/>
+            <a:off x="5065776" y="1078992"/>
+            <a:ext cx="2103120" cy="2926080"/>
           </a:xfrm>
           <a:prstGeom prst="rect">
             <a:avLst/>
@@ -9996,9 +8887,9 @@
           <a:solidFill>
             <a:srgbClr val="2D3748"/>
           </a:solidFill>
-          <a:ln w="25400">
+          <a:ln w="19050">
             <a:solidFill>
-              <a:srgbClr val="EAB308"/>
+              <a:srgbClr val="22C55E"/>
             </a:solidFill>
           </a:ln>
         </p:spPr>
@@ -10026,20 +8917,20 @@
       </p:sp>
       <p:sp>
         <p:nvSpPr>
-          <p:cNvPr id="17" name="Rectangle 16"/>
+          <p:cNvPr id="15" name="Rectangle 14"/>
           <p:cNvSpPr/>
           <p:nvPr/>
         </p:nvSpPr>
         <p:spPr>
           <a:xfrm>
-            <a:off x="8083296" y="1005840"/>
-            <a:ext cx="3566160" cy="502920"/>
+            <a:off x="5065776" y="1078992"/>
+            <a:ext cx="2103120" cy="365760"/>
           </a:xfrm>
           <a:prstGeom prst="rect">
             <a:avLst/>
           </a:prstGeom>
           <a:solidFill>
-            <a:srgbClr val="EAB308"/>
+            <a:srgbClr val="22C55E"/>
           </a:solidFill>
         </p:spPr>
         <p:style>
@@ -10066,14 +8957,14 @@
       </p:sp>
       <p:sp>
         <p:nvSpPr>
-          <p:cNvPr id="18" name="TextBox 17"/>
-          <p:cNvSpPr txBox="1"/>
-          <p:nvPr/>
-        </p:nvSpPr>
-        <p:spPr>
-          <a:xfrm>
-            <a:off x="8174736" y="1042416"/>
-            <a:ext cx="3108960" cy="274320"/>
+          <p:cNvPr id="16" name="TextBox 15"/>
+          <p:cNvSpPr txBox="1"/>
+          <p:nvPr/>
+        </p:nvSpPr>
+        <p:spPr>
+          <a:xfrm>
+            <a:off x="5138928" y="1499616"/>
+            <a:ext cx="1956816" cy="548640"/>
           </a:xfrm>
           <a:prstGeom prst="rect">
             <a:avLst/>
@@ -10088,47 +8979,135 @@
           <a:p>
             <a:pPr algn="l"/>
             <a:r>
-              <a:rPr sz="1200" b="1" i="0">
-                <a:solidFill>
-                  <a:srgbClr val="FFFFFF"/>
-                </a:solidFill>
-              </a:rPr>
-              <a:t>SEMANTIC COVERAGE</a:t>
-            </a:r>
-          </a:p>
-        </p:txBody>
-      </p:sp>
-      <p:sp>
-        <p:nvSpPr>
-          <p:cNvPr id="19" name="TextBox 18"/>
-          <p:cNvSpPr txBox="1"/>
-          <p:nvPr/>
-        </p:nvSpPr>
-        <p:spPr>
-          <a:xfrm>
-            <a:off x="11009376" y="1170432"/>
-            <a:ext cx="548640" cy="256032"/>
-          </a:xfrm>
-          <a:prstGeom prst="rect">
-            <a:avLst/>
-          </a:prstGeom>
-          <a:noFill/>
-        </p:spPr>
-        <p:txBody>
-          <a:bodyPr wrap="square">
-            <a:spAutoFit/>
-          </a:bodyPr>
-          <a:lstStyle/>
-          <a:p>
-            <a:pPr algn="r"/>
-            <a:r>
-              <a:rPr sz="1200" b="1" i="0">
-                <a:solidFill>
-                  <a:srgbClr val="FFFFFF"/>
-                </a:solidFill>
-              </a:rPr>
-              <a:t>× 0.20</a:t>
-            </a:r>
+              <a:rPr sz="1100" b="1" i="0">
+                <a:solidFill>
+                  <a:srgbClr val="22C55E"/>
+                </a:solidFill>
+              </a:rPr>
+              <a:t>Regulatory
+Screening</a:t>
+            </a:r>
+          </a:p>
+        </p:txBody>
+      </p:sp>
+      <p:sp>
+        <p:nvSpPr>
+          <p:cNvPr id="17" name="TextBox 16"/>
+          <p:cNvSpPr txBox="1"/>
+          <p:nvPr/>
+        </p:nvSpPr>
+        <p:spPr>
+          <a:xfrm>
+            <a:off x="5175504" y="2103120"/>
+            <a:ext cx="1883664" cy="1810512"/>
+          </a:xfrm>
+          <a:prstGeom prst="rect">
+            <a:avLst/>
+          </a:prstGeom>
+          <a:noFill/>
+        </p:spPr>
+        <p:txBody>
+          <a:bodyPr wrap="square">
+            <a:spAutoFit/>
+          </a:bodyPr>
+          <a:lstStyle/>
+          <a:p>
+            <a:pPr algn="l"/>
+            <a:r>
+              <a:rPr sz="1000" b="0" i="0">
+                <a:solidFill>
+                  <a:srgbClr val="D1D5DB"/>
+                </a:solidFill>
+              </a:rPr>
+              <a:t>CWA §404 — Wetlands
+ESA §7 — Species
+EO 11990 — Floodplain</a:t>
+            </a:r>
+          </a:p>
+        </p:txBody>
+      </p:sp>
+      <p:sp>
+        <p:nvSpPr>
+          <p:cNvPr id="18" name="Rectangle 17"/>
+          <p:cNvSpPr/>
+          <p:nvPr/>
+        </p:nvSpPr>
+        <p:spPr>
+          <a:xfrm>
+            <a:off x="7370064" y="1078992"/>
+            <a:ext cx="2103120" cy="2926080"/>
+          </a:xfrm>
+          <a:prstGeom prst="rect">
+            <a:avLst/>
+          </a:prstGeom>
+          <a:solidFill>
+            <a:srgbClr val="2D3748"/>
+          </a:solidFill>
+          <a:ln w="19050">
+            <a:solidFill>
+              <a:srgbClr val="F97316"/>
+            </a:solidFill>
+          </a:ln>
+        </p:spPr>
+        <p:style>
+          <a:lnRef idx="1">
+            <a:schemeClr val="accent1"/>
+          </a:lnRef>
+          <a:fillRef idx="3">
+            <a:schemeClr val="accent1"/>
+          </a:fillRef>
+          <a:effectRef idx="2">
+            <a:schemeClr val="accent1"/>
+          </a:effectRef>
+          <a:fontRef idx="minor">
+            <a:schemeClr val="lt1"/>
+          </a:fontRef>
+        </p:style>
+        <p:txBody>
+          <a:bodyPr rtlCol="0" anchor="ctr"/>
+          <a:lstStyle/>
+          <a:p>
+            <a:pPr algn="ctr"/>
+          </a:p>
+        </p:txBody>
+      </p:sp>
+      <p:sp>
+        <p:nvSpPr>
+          <p:cNvPr id="19" name="Rectangle 18"/>
+          <p:cNvSpPr/>
+          <p:nvPr/>
+        </p:nvSpPr>
+        <p:spPr>
+          <a:xfrm>
+            <a:off x="7370064" y="1078992"/>
+            <a:ext cx="2103120" cy="365760"/>
+          </a:xfrm>
+          <a:prstGeom prst="rect">
+            <a:avLst/>
+          </a:prstGeom>
+          <a:solidFill>
+            <a:srgbClr val="F97316"/>
+          </a:solidFill>
+        </p:spPr>
+        <p:style>
+          <a:lnRef idx="1">
+            <a:schemeClr val="accent1"/>
+          </a:lnRef>
+          <a:fillRef idx="3">
+            <a:schemeClr val="accent1"/>
+          </a:fillRef>
+          <a:effectRef idx="2">
+            <a:schemeClr val="accent1"/>
+          </a:effectRef>
+          <a:fontRef idx="minor">
+            <a:schemeClr val="lt1"/>
+          </a:fontRef>
+        </p:style>
+        <p:txBody>
+          <a:bodyPr rtlCol="0" anchor="ctr"/>
+          <a:lstStyle/>
+          <a:p>
+            <a:pPr algn="ctr"/>
           </a:p>
         </p:txBody>
       </p:sp>
@@ -10140,216 +9119,301 @@
         </p:nvSpPr>
         <p:spPr>
           <a:xfrm>
-            <a:off x="8193024" y="1572768"/>
-            <a:ext cx="3346704" cy="4251960"/>
-          </a:xfrm>
-          <a:prstGeom prst="rect">
-            <a:avLst/>
-          </a:prstGeom>
-          <a:noFill/>
-        </p:spPr>
-        <p:txBody>
-          <a:bodyPr wrap="square">
-            <a:spAutoFit/>
-          </a:bodyPr>
-          <a:lstStyle/>
-          <a:p>
-            <a:pPr>
-              <a:spcBef>
-                <a:spcPts val="300"/>
-              </a:spcBef>
-            </a:pPr>
-            <a:r>
-              <a:rPr sz="1200" b="0">
+            <a:off x="7443216" y="1499616"/>
+            <a:ext cx="1956816" cy="548640"/>
+          </a:xfrm>
+          <a:prstGeom prst="rect">
+            <a:avLst/>
+          </a:prstGeom>
+          <a:noFill/>
+        </p:spPr>
+        <p:txBody>
+          <a:bodyPr wrap="square">
+            <a:spAutoFit/>
+          </a:bodyPr>
+          <a:lstStyle/>
+          <a:p>
+            <a:pPr algn="l"/>
+            <a:r>
+              <a:rPr sz="1100" b="1" i="0">
+                <a:solidFill>
+                  <a:srgbClr val="F97316"/>
+                </a:solidFill>
+              </a:rPr>
+              <a:t>Impact
+Matrix</a:t>
+            </a:r>
+          </a:p>
+        </p:txBody>
+      </p:sp>
+      <p:sp>
+        <p:nvSpPr>
+          <p:cNvPr id="21" name="TextBox 20"/>
+          <p:cNvSpPr txBox="1"/>
+          <p:nvPr/>
+        </p:nvSpPr>
+        <p:spPr>
+          <a:xfrm>
+            <a:off x="7479792" y="2103120"/>
+            <a:ext cx="1883664" cy="1810512"/>
+          </a:xfrm>
+          <a:prstGeom prst="rect">
+            <a:avLst/>
+          </a:prstGeom>
+          <a:noFill/>
+        </p:spPr>
+        <p:txBody>
+          <a:bodyPr wrap="square">
+            <a:spAutoFit/>
+          </a:bodyPr>
+          <a:lstStyle/>
+          <a:p>
+            <a:pPr algn="l"/>
+            <a:r>
+              <a:rPr sz="1000" b="0" i="0">
                 <a:solidFill>
                   <a:srgbClr val="D1D5DB"/>
                 </a:solidFill>
               </a:rPr>
-              <a:t>Measures: does the agent's reasoning</a:t>
-            </a:r>
-          </a:p>
-          <a:p>
-            <a:pPr>
-              <a:spcBef>
-                <a:spcPts val="300"/>
-              </a:spcBef>
-            </a:pPr>
-            <a:r>
-              <a:rPr sz="1200" b="0">
+              <a:t>wetlands × grading:
+  sig: significant
+  conf: 0.82
+  review: false</a:t>
+            </a:r>
+          </a:p>
+        </p:txBody>
+      </p:sp>
+      <p:sp>
+        <p:nvSpPr>
+          <p:cNvPr id="22" name="Rectangle 21"/>
+          <p:cNvSpPr/>
+          <p:nvPr/>
+        </p:nvSpPr>
+        <p:spPr>
+          <a:xfrm>
+            <a:off x="9674352" y="1078992"/>
+            <a:ext cx="2103120" cy="2926080"/>
+          </a:xfrm>
+          <a:prstGeom prst="rect">
+            <a:avLst/>
+          </a:prstGeom>
+          <a:solidFill>
+            <a:srgbClr val="2D3748"/>
+          </a:solidFill>
+          <a:ln w="19050">
+            <a:solidFill>
+              <a:srgbClr val="EAB308"/>
+            </a:solidFill>
+          </a:ln>
+        </p:spPr>
+        <p:style>
+          <a:lnRef idx="1">
+            <a:schemeClr val="accent1"/>
+          </a:lnRef>
+          <a:fillRef idx="3">
+            <a:schemeClr val="accent1"/>
+          </a:fillRef>
+          <a:effectRef idx="2">
+            <a:schemeClr val="accent1"/>
+          </a:effectRef>
+          <a:fontRef idx="minor">
+            <a:schemeClr val="lt1"/>
+          </a:fontRef>
+        </p:style>
+        <p:txBody>
+          <a:bodyPr rtlCol="0" anchor="ctr"/>
+          <a:lstStyle/>
+          <a:p>
+            <a:pPr algn="ctr"/>
+          </a:p>
+        </p:txBody>
+      </p:sp>
+      <p:sp>
+        <p:nvSpPr>
+          <p:cNvPr id="23" name="Rectangle 22"/>
+          <p:cNvSpPr/>
+          <p:nvPr/>
+        </p:nvSpPr>
+        <p:spPr>
+          <a:xfrm>
+            <a:off x="9674352" y="1078992"/>
+            <a:ext cx="2103120" cy="365760"/>
+          </a:xfrm>
+          <a:prstGeom prst="rect">
+            <a:avLst/>
+          </a:prstGeom>
+          <a:solidFill>
+            <a:srgbClr val="EAB308"/>
+          </a:solidFill>
+        </p:spPr>
+        <p:style>
+          <a:lnRef idx="1">
+            <a:schemeClr val="accent1"/>
+          </a:lnRef>
+          <a:fillRef idx="3">
+            <a:schemeClr val="accent1"/>
+          </a:fillRef>
+          <a:effectRef idx="2">
+            <a:schemeClr val="accent1"/>
+          </a:effectRef>
+          <a:fontRef idx="minor">
+            <a:schemeClr val="lt1"/>
+          </a:fontRef>
+        </p:style>
+        <p:txBody>
+          <a:bodyPr rtlCol="0" anchor="ctr"/>
+          <a:lstStyle/>
+          <a:p>
+            <a:pPr algn="ctr"/>
+          </a:p>
+        </p:txBody>
+      </p:sp>
+      <p:sp>
+        <p:nvSpPr>
+          <p:cNvPr id="24" name="TextBox 23"/>
+          <p:cNvSpPr txBox="1"/>
+          <p:nvPr/>
+        </p:nvSpPr>
+        <p:spPr>
+          <a:xfrm>
+            <a:off x="9747504" y="1499616"/>
+            <a:ext cx="1956816" cy="548640"/>
+          </a:xfrm>
+          <a:prstGeom prst="rect">
+            <a:avLst/>
+          </a:prstGeom>
+          <a:noFill/>
+        </p:spPr>
+        <p:txBody>
+          <a:bodyPr wrap="square">
+            <a:spAutoFit/>
+          </a:bodyPr>
+          <a:lstStyle/>
+          <a:p>
+            <a:pPr algn="l"/>
+            <a:r>
+              <a:rPr sz="1100" b="1" i="0">
+                <a:solidFill>
+                  <a:srgbClr val="EAB308"/>
+                </a:solidFill>
+              </a:rPr>
+              <a:t>Report
+Synthesis</a:t>
+            </a:r>
+          </a:p>
+        </p:txBody>
+      </p:sp>
+      <p:sp>
+        <p:nvSpPr>
+          <p:cNvPr id="25" name="TextBox 24"/>
+          <p:cNvSpPr txBox="1"/>
+          <p:nvPr/>
+        </p:nvSpPr>
+        <p:spPr>
+          <a:xfrm>
+            <a:off x="9784080" y="2103120"/>
+            <a:ext cx="1883664" cy="1810512"/>
+          </a:xfrm>
+          <a:prstGeom prst="rect">
+            <a:avLst/>
+          </a:prstGeom>
+          <a:noFill/>
+        </p:spPr>
+        <p:txBody>
+          <a:bodyPr wrap="square">
+            <a:spAutoFit/>
+          </a:bodyPr>
+          <a:lstStyle/>
+          <a:p>
+            <a:pPr algn="l"/>
+            <a:r>
+              <a:rPr sz="1000" b="0" i="0">
                 <a:solidFill>
                   <a:srgbClr val="D1D5DB"/>
                 </a:solidFill>
               </a:rPr>
-              <a:t>align with the actual EIS text?</a:t>
-            </a:r>
-          </a:p>
-          <a:p>
-            <a:pPr>
-              <a:spcBef>
-                <a:spcPts val="300"/>
-              </a:spcBef>
-            </a:pPr>
-            <a:r>
-              <a:rPr sz="1200" b="0">
-                <a:solidFill>
-                  <a:srgbClr val="FFFFFF"/>
-                </a:solidFill>
-              </a:rPr>
-              <a:t/>
-            </a:r>
-          </a:p>
-          <a:p>
-            <a:pPr>
-              <a:spcBef>
-                <a:spcPts val="300"/>
-              </a:spcBef>
-            </a:pPr>
-            <a:r>
-              <a:rPr sz="1200" b="0">
-                <a:solidFill>
-                  <a:srgbClr val="D1D5DB"/>
-                </a:solidFill>
-              </a:rPr>
-              <a:t>Up to 10 reasoning snippets embedded</a:t>
-            </a:r>
-          </a:p>
-          <a:p>
-            <a:pPr>
-              <a:spcBef>
-                <a:spcPts val="300"/>
-              </a:spcBef>
-            </a:pPr>
-            <a:r>
-              <a:rPr sz="1200" b="0">
-                <a:solidFill>
-                  <a:srgbClr val="D1D5DB"/>
-                </a:solidFill>
-              </a:rPr>
-              <a:t>→ cosine similarity vs. EIS chunks</a:t>
-            </a:r>
-          </a:p>
-          <a:p>
-            <a:pPr>
-              <a:spcBef>
-                <a:spcPts val="300"/>
-              </a:spcBef>
-            </a:pPr>
-            <a:r>
-              <a:rPr sz="1200" b="0">
-                <a:solidFill>
-                  <a:srgbClr val="FFFFFF"/>
-                </a:solidFill>
-              </a:rPr>
-              <a:t/>
-            </a:r>
-          </a:p>
-          <a:p>
-            <a:pPr>
-              <a:spcBef>
-                <a:spcPts val="300"/>
-              </a:spcBef>
-            </a:pPr>
-            <a:r>
-              <a:rPr sz="1200" b="1">
-                <a:solidFill>
-                  <a:srgbClr val="D1D5DB"/>
-                </a:solidFill>
-              </a:rPr>
-              <a:t>score = mean(max cosine similarity)</a:t>
-            </a:r>
-          </a:p>
-          <a:p>
-            <a:pPr>
-              <a:spcBef>
-                <a:spcPts val="300"/>
-              </a:spcBef>
-            </a:pPr>
-            <a:r>
-              <a:rPr sz="1200" b="0">
-                <a:solidFill>
-                  <a:srgbClr val="D1D5DB"/>
-                </a:solidFill>
-              </a:rPr>
-              <a:t>        over all reasoning snippets</a:t>
-            </a:r>
-          </a:p>
-          <a:p>
-            <a:pPr>
-              <a:spcBef>
-                <a:spcPts val="300"/>
-              </a:spcBef>
-            </a:pPr>
-            <a:r>
-              <a:rPr sz="1200" b="0">
-                <a:solidFill>
-                  <a:srgbClr val="FFFFFF"/>
-                </a:solidFill>
-              </a:rPr>
-              <a:t/>
-            </a:r>
-          </a:p>
-          <a:p>
-            <a:pPr>
-              <a:spcBef>
-                <a:spcPts val="300"/>
-              </a:spcBef>
-            </a:pPr>
-            <a:r>
-              <a:rPr sz="1200" b="0">
-                <a:solidFill>
-                  <a:srgbClr val="D1D5DB"/>
-                </a:solidFill>
-              </a:rPr>
-              <a:t>No LLM — pure vector math</a:t>
-            </a:r>
-          </a:p>
-          <a:p>
-            <a:pPr>
-              <a:spcBef>
-                <a:spcPts val="300"/>
-              </a:spcBef>
-            </a:pPr>
-            <a:r>
-              <a:rPr sz="1200" b="0">
-                <a:solidFill>
-                  <a:srgbClr val="D1D5DB"/>
-                </a:solidFill>
-              </a:rPr>
-              <a:t>on pre-stored embeddings</a:t>
-            </a:r>
-          </a:p>
-        </p:txBody>
-      </p:sp>
-      <p:sp>
-        <p:nvSpPr>
-          <p:cNvPr id="21" name="TextBox 20"/>
-          <p:cNvSpPr txBox="1"/>
-          <p:nvPr/>
-        </p:nvSpPr>
-        <p:spPr>
-          <a:xfrm>
-            <a:off x="548640" y="6172200"/>
-            <a:ext cx="11064240" cy="411480"/>
-          </a:xfrm>
-          <a:prstGeom prst="rect">
-            <a:avLst/>
-          </a:prstGeom>
-          <a:noFill/>
-        </p:spPr>
-        <p:txBody>
-          <a:bodyPr wrap="square">
-            <a:spAutoFit/>
-          </a:bodyPr>
+              <a:t>"4.2 ac of PEM1C wetland
+intersects the 100-yr
+floodplain (Zone AE)…"</a:t>
+            </a:r>
+          </a:p>
+        </p:txBody>
+      </p:sp>
+      <p:sp>
+        <p:nvSpPr>
+          <p:cNvPr id="26" name="Rectangle 25"/>
+          <p:cNvSpPr/>
+          <p:nvPr/>
+        </p:nvSpPr>
+        <p:spPr>
+          <a:xfrm>
+            <a:off x="548640" y="4160520"/>
+            <a:ext cx="11064240" cy="2487168"/>
+          </a:xfrm>
+          <a:prstGeom prst="rect">
+            <a:avLst/>
+          </a:prstGeom>
+          <a:solidFill>
+            <a:srgbClr val="2D3748"/>
+          </a:solidFill>
+          <a:ln w="19050">
+            <a:solidFill>
+              <a:srgbClr val="F97316"/>
+            </a:solidFill>
+          </a:ln>
+        </p:spPr>
+        <p:style>
+          <a:lnRef idx="1">
+            <a:schemeClr val="accent1"/>
+          </a:lnRef>
+          <a:fillRef idx="3">
+            <a:schemeClr val="accent1"/>
+          </a:fillRef>
+          <a:effectRef idx="2">
+            <a:schemeClr val="accent1"/>
+          </a:effectRef>
+          <a:fontRef idx="minor">
+            <a:schemeClr val="lt1"/>
+          </a:fontRef>
+        </p:style>
+        <p:txBody>
+          <a:bodyPr rtlCol="0" anchor="ctr"/>
           <a:lstStyle/>
           <a:p>
             <a:pPr algn="ctr"/>
-            <a:r>
-              <a:rPr sz="1300" b="1" i="0">
+          </a:p>
+        </p:txBody>
+      </p:sp>
+      <p:sp>
+        <p:nvSpPr>
+          <p:cNvPr id="27" name="TextBox 26"/>
+          <p:cNvSpPr txBox="1"/>
+          <p:nvPr/>
+        </p:nvSpPr>
+        <p:spPr>
+          <a:xfrm>
+            <a:off x="685800" y="5099304"/>
+            <a:ext cx="10789920" cy="457200"/>
+          </a:xfrm>
+          <a:prstGeom prst="rect">
+            <a:avLst/>
+          </a:prstGeom>
+          <a:noFill/>
+        </p:spPr>
+        <p:txBody>
+          <a:bodyPr wrap="square">
+            <a:spAutoFit/>
+          </a:bodyPr>
+          <a:lstStyle/>
+          <a:p>
+            <a:pPr algn="ctr"/>
+            <a:r>
+              <a:rPr sz="1200" b="0" i="1">
                 <a:solidFill>
                   <a:srgbClr val="F97316"/>
                 </a:solidFill>
               </a:rPr>
-              <a:t>OVERALL  =  (F1 × 0.40)  +  (Significance Accuracy × 0.40)  +  (Semantic Coverage × 0.20)</a:t>
+              <a:t>[ IMPORT RUN panel — all 5 agents expanded ]</a:t>
             </a:r>
           </a:p>
         </p:txBody>
@@ -10466,7 +9530,7 @@
                   <a:srgbClr val="F97316"/>
                 </a:solidFill>
               </a:rPr>
-              <a:t>Discussion</a:t>
+              <a:t>Results — Evaluation Scores  (mock data)</a:t>
             </a:r>
           </a:p>
         </p:txBody>
@@ -10513,20 +9577,54 @@
       </p:sp>
       <p:sp>
         <p:nvSpPr>
-          <p:cNvPr id="6" name="Rectangle 5"/>
+          <p:cNvPr id="6" name="TextBox 5"/>
+          <p:cNvSpPr txBox="1"/>
+          <p:nvPr/>
+        </p:nvSpPr>
+        <p:spPr>
+          <a:xfrm>
+            <a:off x="548640" y="1143000"/>
+            <a:ext cx="2103120" cy="320040"/>
+          </a:xfrm>
+          <a:prstGeom prst="rect">
+            <a:avLst/>
+          </a:prstGeom>
+          <a:noFill/>
+        </p:spPr>
+        <p:txBody>
+          <a:bodyPr wrap="square">
+            <a:spAutoFit/>
+          </a:bodyPr>
+          <a:lstStyle/>
+          <a:p>
+            <a:pPr algn="l"/>
+            <a:r>
+              <a:rPr sz="1300" b="0" i="0">
+                <a:solidFill>
+                  <a:srgbClr val="FFFFFF"/>
+                </a:solidFill>
+              </a:rPr>
+              <a:t>Overall</a:t>
+            </a:r>
+          </a:p>
+        </p:txBody>
+      </p:sp>
+      <p:sp>
+        <p:nvSpPr>
+          <p:cNvPr id="7" name="Rectangle 6"/>
           <p:cNvSpPr/>
           <p:nvPr/>
         </p:nvSpPr>
         <p:spPr>
           <a:xfrm>
-            <a:off x="548640" y="1005840"/>
-            <a:ext cx="5303520" cy="329184"/>
+            <a:off x="2743200" y="1161288"/>
+            <a:ext cx="4389120" cy="274320"/>
           </a:xfrm>
           <a:prstGeom prst="rect">
             <a:avLst/>
           </a:prstGeom>
           <a:solidFill>
-            <a:srgbClr val="2D3748"/>
+            <a:srgbClr val="1A202C"/>
           </a:solidFill>
         </p:spPr>
         <p:style>
@@ -10553,182 +9651,20 @@
       </p:sp>
       <p:sp>
         <p:nvSpPr>
-          <p:cNvPr id="7" name="TextBox 6"/>
-          <p:cNvSpPr txBox="1"/>
-          <p:nvPr/>
-        </p:nvSpPr>
-        <p:spPr>
-          <a:xfrm>
-            <a:off x="658368" y="1051560"/>
-            <a:ext cx="5084064" cy="256032"/>
-          </a:xfrm>
-          <a:prstGeom prst="rect">
-            <a:avLst/>
-          </a:prstGeom>
-          <a:noFill/>
-        </p:spPr>
-        <p:txBody>
-          <a:bodyPr wrap="square">
-            <a:spAutoFit/>
-          </a:bodyPr>
-          <a:lstStyle/>
-          <a:p>
-            <a:pPr algn="l"/>
-            <a:r>
-              <a:rPr sz="1200" b="1" i="0">
-                <a:solidFill>
-                  <a:srgbClr val="EF4444"/>
-                </a:solidFill>
-              </a:rPr>
-              <a:t>CURRENT SHORTCOMINGS</a:t>
-            </a:r>
-          </a:p>
-        </p:txBody>
-      </p:sp>
-      <p:sp>
-        <p:nvSpPr>
-          <p:cNvPr id="8" name="TextBox 7"/>
-          <p:cNvSpPr txBox="1"/>
-          <p:nvPr/>
-        </p:nvSpPr>
-        <p:spPr>
-          <a:xfrm>
-            <a:off x="548640" y="1389888"/>
-            <a:ext cx="5303520" cy="4937760"/>
-          </a:xfrm>
-          <a:prstGeom prst="rect">
-            <a:avLst/>
-          </a:prstGeom>
-          <a:noFill/>
-        </p:spPr>
-        <p:txBody>
-          <a:bodyPr wrap="square">
-            <a:spAutoFit/>
-          </a:bodyPr>
-          <a:lstStyle/>
-          <a:p>
-            <a:pPr>
-              <a:spcBef>
-                <a:spcPts val="600"/>
-              </a:spcBef>
-            </a:pPr>
-            <a:r>
-              <a:rPr sz="1800" b="1">
-                <a:solidFill>
-                  <a:srgbClr val="FFFFFF"/>
-                </a:solidFill>
-              </a:rPr>
-              <a:t>▸ Ground truth is LLM-extracted, not annotated by humans</a:t>
-            </a:r>
-          </a:p>
-          <a:p>
-            <a:pPr>
-              <a:spcBef>
-                <a:spcPts val="200"/>
-              </a:spcBef>
-            </a:pPr>
-            <a:r>
-              <a:rPr sz="1400" b="0">
-                <a:solidFill>
-                  <a:srgbClr val="D1D5DB"/>
-                </a:solidFill>
-              </a:rPr>
-              <a:t>    · LLM misread of EIS → inflated scores</a:t>
-            </a:r>
-          </a:p>
-          <a:p>
-            <a:pPr>
-              <a:spcBef>
-                <a:spcPts val="600"/>
-              </a:spcBef>
-            </a:pPr>
-            <a:r>
-              <a:rPr sz="1800" b="1">
-                <a:solidFill>
-                  <a:srgbClr val="FFFFFF"/>
-                </a:solidFill>
-              </a:rPr>
-              <a:t>▸ Only 8 fixed categories scored (F1 scope)</a:t>
-            </a:r>
-          </a:p>
-          <a:p>
-            <a:pPr>
-              <a:spcBef>
-                <a:spcPts val="200"/>
-              </a:spcBef>
-            </a:pPr>
-            <a:r>
-              <a:rPr sz="1400" b="0">
-                <a:solidFill>
-                  <a:srgbClr val="D1D5DB"/>
-                </a:solidFill>
-              </a:rPr>
-              <a:t>    · Project-specific impacts invisible to metric</a:t>
-            </a:r>
-          </a:p>
-          <a:p>
-            <a:pPr>
-              <a:spcBef>
-                <a:spcPts val="600"/>
-              </a:spcBef>
-            </a:pPr>
-            <a:r>
-              <a:rPr sz="1800" b="1">
-                <a:solidFill>
-                  <a:srgbClr val="FFFFFF"/>
-                </a:solidFill>
-              </a:rPr>
-              <a:t>▸ Semantic similarity ≠ factual accuracy</a:t>
-            </a:r>
-          </a:p>
-          <a:p>
-            <a:pPr>
-              <a:spcBef>
-                <a:spcPts val="200"/>
-              </a:spcBef>
-            </a:pPr>
-            <a:r>
-              <a:rPr sz="1400" b="0">
-                <a:solidFill>
-                  <a:srgbClr val="D1D5DB"/>
-                </a:solidFill>
-              </a:rPr>
-              <a:t>    · Style match can score high without correct reasoning</a:t>
-            </a:r>
-          </a:p>
-          <a:p>
-            <a:pPr>
-              <a:spcBef>
-                <a:spcPts val="600"/>
-              </a:spcBef>
-            </a:pPr>
-            <a:r>
-              <a:rPr sz="1800" b="1">
-                <a:solidFill>
-                  <a:srgbClr val="FFFFFF"/>
-                </a:solidFill>
-              </a:rPr>
-              <a:t>▸ LLM non-determinism — same run, different score</a:t>
-            </a:r>
-          </a:p>
-        </p:txBody>
-      </p:sp>
-      <p:sp>
-        <p:nvSpPr>
-          <p:cNvPr id="9" name="Rectangle 8"/>
+          <p:cNvPr id="8" name="Rectangle 7"/>
           <p:cNvSpPr/>
           <p:nvPr/>
         </p:nvSpPr>
         <p:spPr>
           <a:xfrm>
-            <a:off x="6400800" y="1005840"/>
-            <a:ext cx="5394960" cy="329184"/>
+            <a:off x="2743200" y="1161288"/>
+            <a:ext cx="3423513" cy="274320"/>
           </a:xfrm>
           <a:prstGeom prst="rect">
             <a:avLst/>
           </a:prstGeom>
           <a:solidFill>
-            <a:srgbClr val="2D3748"/>
+            <a:srgbClr val="F97316"/>
           </a:solidFill>
         </p:spPr>
         <p:style>
@@ -10755,14 +9691,48 @@
       </p:sp>
       <p:sp>
         <p:nvSpPr>
+          <p:cNvPr id="9" name="TextBox 8"/>
+          <p:cNvSpPr txBox="1"/>
+          <p:nvPr/>
+        </p:nvSpPr>
+        <p:spPr>
+          <a:xfrm>
+            <a:off x="7269480" y="1124712"/>
+            <a:ext cx="731520" cy="320040"/>
+          </a:xfrm>
+          <a:prstGeom prst="rect">
+            <a:avLst/>
+          </a:prstGeom>
+          <a:noFill/>
+        </p:spPr>
+        <p:txBody>
+          <a:bodyPr wrap="square">
+            <a:spAutoFit/>
+          </a:bodyPr>
+          <a:lstStyle/>
+          <a:p>
+            <a:pPr algn="l"/>
+            <a:r>
+              <a:rPr sz="1300" b="1" i="0">
+                <a:solidFill>
+                  <a:srgbClr val="F97316"/>
+                </a:solidFill>
+              </a:rPr>
+              <a:t>78%</a:t>
+            </a:r>
+          </a:p>
+        </p:txBody>
+      </p:sp>
+      <p:sp>
+        <p:nvSpPr>
           <p:cNvPr id="10" name="TextBox 9"/>
           <p:cNvSpPr txBox="1"/>
           <p:nvPr/>
         </p:nvSpPr>
         <p:spPr>
           <a:xfrm>
-            <a:off x="6510528" y="1051560"/>
-            <a:ext cx="5175504" cy="256032"/>
+            <a:off x="548640" y="1709928"/>
+            <a:ext cx="2103120" cy="320040"/>
           </a:xfrm>
           <a:prstGeom prst="rect">
             <a:avLst/>
@@ -10777,140 +9747,1887 @@
           <a:p>
             <a:pPr algn="l"/>
             <a:r>
+              <a:rPr sz="1300" b="0" i="0">
+                <a:solidFill>
+                  <a:srgbClr val="FFFFFF"/>
+                </a:solidFill>
+              </a:rPr>
+              <a:t>Category F1</a:t>
+            </a:r>
+          </a:p>
+        </p:txBody>
+      </p:sp>
+      <p:sp>
+        <p:nvSpPr>
+          <p:cNvPr id="11" name="Rectangle 10"/>
+          <p:cNvSpPr/>
+          <p:nvPr/>
+        </p:nvSpPr>
+        <p:spPr>
+          <a:xfrm>
+            <a:off x="2743200" y="1728216"/>
+            <a:ext cx="4389120" cy="274320"/>
+          </a:xfrm>
+          <a:prstGeom prst="rect">
+            <a:avLst/>
+          </a:prstGeom>
+          <a:solidFill>
+            <a:srgbClr val="1A202C"/>
+          </a:solidFill>
+        </p:spPr>
+        <p:style>
+          <a:lnRef idx="1">
+            <a:schemeClr val="accent1"/>
+          </a:lnRef>
+          <a:fillRef idx="3">
+            <a:schemeClr val="accent1"/>
+          </a:fillRef>
+          <a:effectRef idx="2">
+            <a:schemeClr val="accent1"/>
+          </a:effectRef>
+          <a:fontRef idx="minor">
+            <a:schemeClr val="lt1"/>
+          </a:fontRef>
+        </p:style>
+        <p:txBody>
+          <a:bodyPr rtlCol="0" anchor="ctr"/>
+          <a:lstStyle/>
+          <a:p>
+            <a:pPr algn="ctr"/>
+          </a:p>
+        </p:txBody>
+      </p:sp>
+      <p:sp>
+        <p:nvSpPr>
+          <p:cNvPr id="12" name="Rectangle 11"/>
+          <p:cNvSpPr/>
+          <p:nvPr/>
+        </p:nvSpPr>
+        <p:spPr>
+          <a:xfrm>
+            <a:off x="2743200" y="1728216"/>
+            <a:ext cx="3291840" cy="274320"/>
+          </a:xfrm>
+          <a:prstGeom prst="rect">
+            <a:avLst/>
+          </a:prstGeom>
+          <a:solidFill>
+            <a:srgbClr val="3B82F6"/>
+          </a:solidFill>
+        </p:spPr>
+        <p:style>
+          <a:lnRef idx="1">
+            <a:schemeClr val="accent1"/>
+          </a:lnRef>
+          <a:fillRef idx="3">
+            <a:schemeClr val="accent1"/>
+          </a:fillRef>
+          <a:effectRef idx="2">
+            <a:schemeClr val="accent1"/>
+          </a:effectRef>
+          <a:fontRef idx="minor">
+            <a:schemeClr val="lt1"/>
+          </a:fontRef>
+        </p:style>
+        <p:txBody>
+          <a:bodyPr rtlCol="0" anchor="ctr"/>
+          <a:lstStyle/>
+          <a:p>
+            <a:pPr algn="ctr"/>
+          </a:p>
+        </p:txBody>
+      </p:sp>
+      <p:sp>
+        <p:nvSpPr>
+          <p:cNvPr id="13" name="TextBox 12"/>
+          <p:cNvSpPr txBox="1"/>
+          <p:nvPr/>
+        </p:nvSpPr>
+        <p:spPr>
+          <a:xfrm>
+            <a:off x="7269480" y="1691640"/>
+            <a:ext cx="731520" cy="320040"/>
+          </a:xfrm>
+          <a:prstGeom prst="rect">
+            <a:avLst/>
+          </a:prstGeom>
+          <a:noFill/>
+        </p:spPr>
+        <p:txBody>
+          <a:bodyPr wrap="square">
+            <a:spAutoFit/>
+          </a:bodyPr>
+          <a:lstStyle/>
+          <a:p>
+            <a:pPr algn="l"/>
+            <a:r>
+              <a:rPr sz="1300" b="1" i="0">
+                <a:solidFill>
+                  <a:srgbClr val="3B82F6"/>
+                </a:solidFill>
+              </a:rPr>
+              <a:t>0.75</a:t>
+            </a:r>
+          </a:p>
+        </p:txBody>
+      </p:sp>
+      <p:sp>
+        <p:nvSpPr>
+          <p:cNvPr id="14" name="TextBox 13"/>
+          <p:cNvSpPr txBox="1"/>
+          <p:nvPr/>
+        </p:nvSpPr>
+        <p:spPr>
+          <a:xfrm>
+            <a:off x="548640" y="2276856"/>
+            <a:ext cx="2103120" cy="320040"/>
+          </a:xfrm>
+          <a:prstGeom prst="rect">
+            <a:avLst/>
+          </a:prstGeom>
+          <a:noFill/>
+        </p:spPr>
+        <p:txBody>
+          <a:bodyPr wrap="square">
+            <a:spAutoFit/>
+          </a:bodyPr>
+          <a:lstStyle/>
+          <a:p>
+            <a:pPr algn="l"/>
+            <a:r>
+              <a:rPr sz="1300" b="0" i="0">
+                <a:solidFill>
+                  <a:srgbClr val="FFFFFF"/>
+                </a:solidFill>
+              </a:rPr>
+              <a:t>Precision</a:t>
+            </a:r>
+          </a:p>
+        </p:txBody>
+      </p:sp>
+      <p:sp>
+        <p:nvSpPr>
+          <p:cNvPr id="15" name="Rectangle 14"/>
+          <p:cNvSpPr/>
+          <p:nvPr/>
+        </p:nvSpPr>
+        <p:spPr>
+          <a:xfrm>
+            <a:off x="2743200" y="2295144"/>
+            <a:ext cx="4389120" cy="274320"/>
+          </a:xfrm>
+          <a:prstGeom prst="rect">
+            <a:avLst/>
+          </a:prstGeom>
+          <a:solidFill>
+            <a:srgbClr val="1A202C"/>
+          </a:solidFill>
+        </p:spPr>
+        <p:style>
+          <a:lnRef idx="1">
+            <a:schemeClr val="accent1"/>
+          </a:lnRef>
+          <a:fillRef idx="3">
+            <a:schemeClr val="accent1"/>
+          </a:fillRef>
+          <a:effectRef idx="2">
+            <a:schemeClr val="accent1"/>
+          </a:effectRef>
+          <a:fontRef idx="minor">
+            <a:schemeClr val="lt1"/>
+          </a:fontRef>
+        </p:style>
+        <p:txBody>
+          <a:bodyPr rtlCol="0" anchor="ctr"/>
+          <a:lstStyle/>
+          <a:p>
+            <a:pPr algn="ctr"/>
+          </a:p>
+        </p:txBody>
+      </p:sp>
+      <p:sp>
+        <p:nvSpPr>
+          <p:cNvPr id="16" name="Rectangle 15"/>
+          <p:cNvSpPr/>
+          <p:nvPr/>
+        </p:nvSpPr>
+        <p:spPr>
+          <a:xfrm>
+            <a:off x="2743200" y="2295144"/>
+            <a:ext cx="3642969" cy="274320"/>
+          </a:xfrm>
+          <a:prstGeom prst="rect">
+            <a:avLst/>
+          </a:prstGeom>
+          <a:solidFill>
+            <a:srgbClr val="06B6D3"/>
+          </a:solidFill>
+        </p:spPr>
+        <p:style>
+          <a:lnRef idx="1">
+            <a:schemeClr val="accent1"/>
+          </a:lnRef>
+          <a:fillRef idx="3">
+            <a:schemeClr val="accent1"/>
+          </a:fillRef>
+          <a:effectRef idx="2">
+            <a:schemeClr val="accent1"/>
+          </a:effectRef>
+          <a:fontRef idx="minor">
+            <a:schemeClr val="lt1"/>
+          </a:fontRef>
+        </p:style>
+        <p:txBody>
+          <a:bodyPr rtlCol="0" anchor="ctr"/>
+          <a:lstStyle/>
+          <a:p>
+            <a:pPr algn="ctr"/>
+          </a:p>
+        </p:txBody>
+      </p:sp>
+      <p:sp>
+        <p:nvSpPr>
+          <p:cNvPr id="17" name="TextBox 16"/>
+          <p:cNvSpPr txBox="1"/>
+          <p:nvPr/>
+        </p:nvSpPr>
+        <p:spPr>
+          <a:xfrm>
+            <a:off x="7269480" y="2258568"/>
+            <a:ext cx="731520" cy="320040"/>
+          </a:xfrm>
+          <a:prstGeom prst="rect">
+            <a:avLst/>
+          </a:prstGeom>
+          <a:noFill/>
+        </p:spPr>
+        <p:txBody>
+          <a:bodyPr wrap="square">
+            <a:spAutoFit/>
+          </a:bodyPr>
+          <a:lstStyle/>
+          <a:p>
+            <a:pPr algn="l"/>
+            <a:r>
+              <a:rPr sz="1300" b="1" i="0">
+                <a:solidFill>
+                  <a:srgbClr val="06B6D3"/>
+                </a:solidFill>
+              </a:rPr>
+              <a:t>0.83</a:t>
+            </a:r>
+          </a:p>
+        </p:txBody>
+      </p:sp>
+      <p:sp>
+        <p:nvSpPr>
+          <p:cNvPr id="18" name="TextBox 17"/>
+          <p:cNvSpPr txBox="1"/>
+          <p:nvPr/>
+        </p:nvSpPr>
+        <p:spPr>
+          <a:xfrm>
+            <a:off x="548640" y="2843784"/>
+            <a:ext cx="2103120" cy="320040"/>
+          </a:xfrm>
+          <a:prstGeom prst="rect">
+            <a:avLst/>
+          </a:prstGeom>
+          <a:noFill/>
+        </p:spPr>
+        <p:txBody>
+          <a:bodyPr wrap="square">
+            <a:spAutoFit/>
+          </a:bodyPr>
+          <a:lstStyle/>
+          <a:p>
+            <a:pPr algn="l"/>
+            <a:r>
+              <a:rPr sz="1300" b="0" i="0">
+                <a:solidFill>
+                  <a:srgbClr val="FFFFFF"/>
+                </a:solidFill>
+              </a:rPr>
+              <a:t>Recall</a:t>
+            </a:r>
+          </a:p>
+        </p:txBody>
+      </p:sp>
+      <p:sp>
+        <p:nvSpPr>
+          <p:cNvPr id="19" name="Rectangle 18"/>
+          <p:cNvSpPr/>
+          <p:nvPr/>
+        </p:nvSpPr>
+        <p:spPr>
+          <a:xfrm>
+            <a:off x="2743200" y="2862072"/>
+            <a:ext cx="4389120" cy="274320"/>
+          </a:xfrm>
+          <a:prstGeom prst="rect">
+            <a:avLst/>
+          </a:prstGeom>
+          <a:solidFill>
+            <a:srgbClr val="1A202C"/>
+          </a:solidFill>
+        </p:spPr>
+        <p:style>
+          <a:lnRef idx="1">
+            <a:schemeClr val="accent1"/>
+          </a:lnRef>
+          <a:fillRef idx="3">
+            <a:schemeClr val="accent1"/>
+          </a:fillRef>
+          <a:effectRef idx="2">
+            <a:schemeClr val="accent1"/>
+          </a:effectRef>
+          <a:fontRef idx="minor">
+            <a:schemeClr val="lt1"/>
+          </a:fontRef>
+        </p:style>
+        <p:txBody>
+          <a:bodyPr rtlCol="0" anchor="ctr"/>
+          <a:lstStyle/>
+          <a:p>
+            <a:pPr algn="ctr"/>
+          </a:p>
+        </p:txBody>
+      </p:sp>
+      <p:sp>
+        <p:nvSpPr>
+          <p:cNvPr id="20" name="Rectangle 19"/>
+          <p:cNvSpPr/>
+          <p:nvPr/>
+        </p:nvSpPr>
+        <p:spPr>
+          <a:xfrm>
+            <a:off x="2743200" y="2862072"/>
+            <a:ext cx="2940710" cy="274320"/>
+          </a:xfrm>
+          <a:prstGeom prst="rect">
+            <a:avLst/>
+          </a:prstGeom>
+          <a:solidFill>
+            <a:srgbClr val="22C55E"/>
+          </a:solidFill>
+        </p:spPr>
+        <p:style>
+          <a:lnRef idx="1">
+            <a:schemeClr val="accent1"/>
+          </a:lnRef>
+          <a:fillRef idx="3">
+            <a:schemeClr val="accent1"/>
+          </a:fillRef>
+          <a:effectRef idx="2">
+            <a:schemeClr val="accent1"/>
+          </a:effectRef>
+          <a:fontRef idx="minor">
+            <a:schemeClr val="lt1"/>
+          </a:fontRef>
+        </p:style>
+        <p:txBody>
+          <a:bodyPr rtlCol="0" anchor="ctr"/>
+          <a:lstStyle/>
+          <a:p>
+            <a:pPr algn="ctr"/>
+          </a:p>
+        </p:txBody>
+      </p:sp>
+      <p:sp>
+        <p:nvSpPr>
+          <p:cNvPr id="21" name="TextBox 20"/>
+          <p:cNvSpPr txBox="1"/>
+          <p:nvPr/>
+        </p:nvSpPr>
+        <p:spPr>
+          <a:xfrm>
+            <a:off x="7269480" y="2825496"/>
+            <a:ext cx="731520" cy="320040"/>
+          </a:xfrm>
+          <a:prstGeom prst="rect">
+            <a:avLst/>
+          </a:prstGeom>
+          <a:noFill/>
+        </p:spPr>
+        <p:txBody>
+          <a:bodyPr wrap="square">
+            <a:spAutoFit/>
+          </a:bodyPr>
+          <a:lstStyle/>
+          <a:p>
+            <a:pPr algn="l"/>
+            <a:r>
+              <a:rPr sz="1300" b="1" i="0">
+                <a:solidFill>
+                  <a:srgbClr val="22C55E"/>
+                </a:solidFill>
+              </a:rPr>
+              <a:t>0.67</a:t>
+            </a:r>
+          </a:p>
+        </p:txBody>
+      </p:sp>
+      <p:sp>
+        <p:nvSpPr>
+          <p:cNvPr id="22" name="TextBox 21"/>
+          <p:cNvSpPr txBox="1"/>
+          <p:nvPr/>
+        </p:nvSpPr>
+        <p:spPr>
+          <a:xfrm>
+            <a:off x="548640" y="3410712"/>
+            <a:ext cx="2103120" cy="320040"/>
+          </a:xfrm>
+          <a:prstGeom prst="rect">
+            <a:avLst/>
+          </a:prstGeom>
+          <a:noFill/>
+        </p:spPr>
+        <p:txBody>
+          <a:bodyPr wrap="square">
+            <a:spAutoFit/>
+          </a:bodyPr>
+          <a:lstStyle/>
+          <a:p>
+            <a:pPr algn="l"/>
+            <a:r>
+              <a:rPr sz="1300" b="0" i="0">
+                <a:solidFill>
+                  <a:srgbClr val="FFFFFF"/>
+                </a:solidFill>
+              </a:rPr>
+              <a:t>Significance Accuracy</a:t>
+            </a:r>
+          </a:p>
+        </p:txBody>
+      </p:sp>
+      <p:sp>
+        <p:nvSpPr>
+          <p:cNvPr id="23" name="Rectangle 22"/>
+          <p:cNvSpPr/>
+          <p:nvPr/>
+        </p:nvSpPr>
+        <p:spPr>
+          <a:xfrm>
+            <a:off x="2743200" y="3429000"/>
+            <a:ext cx="4389120" cy="274320"/>
+          </a:xfrm>
+          <a:prstGeom prst="rect">
+            <a:avLst/>
+          </a:prstGeom>
+          <a:solidFill>
+            <a:srgbClr val="1A202C"/>
+          </a:solidFill>
+        </p:spPr>
+        <p:style>
+          <a:lnRef idx="1">
+            <a:schemeClr val="accent1"/>
+          </a:lnRef>
+          <a:fillRef idx="3">
+            <a:schemeClr val="accent1"/>
+          </a:fillRef>
+          <a:effectRef idx="2">
+            <a:schemeClr val="accent1"/>
+          </a:effectRef>
+          <a:fontRef idx="minor">
+            <a:schemeClr val="lt1"/>
+          </a:fontRef>
+        </p:style>
+        <p:txBody>
+          <a:bodyPr rtlCol="0" anchor="ctr"/>
+          <a:lstStyle/>
+          <a:p>
+            <a:pPr algn="ctr"/>
+          </a:p>
+        </p:txBody>
+      </p:sp>
+      <p:sp>
+        <p:nvSpPr>
+          <p:cNvPr id="24" name="Rectangle 23"/>
+          <p:cNvSpPr/>
+          <p:nvPr/>
+        </p:nvSpPr>
+        <p:spPr>
+          <a:xfrm>
+            <a:off x="2743200" y="3429000"/>
+            <a:ext cx="3555187" cy="274320"/>
+          </a:xfrm>
+          <a:prstGeom prst="rect">
+            <a:avLst/>
+          </a:prstGeom>
+          <a:solidFill>
+            <a:srgbClr val="EAB308"/>
+          </a:solidFill>
+        </p:spPr>
+        <p:style>
+          <a:lnRef idx="1">
+            <a:schemeClr val="accent1"/>
+          </a:lnRef>
+          <a:fillRef idx="3">
+            <a:schemeClr val="accent1"/>
+          </a:fillRef>
+          <a:effectRef idx="2">
+            <a:schemeClr val="accent1"/>
+          </a:effectRef>
+          <a:fontRef idx="minor">
+            <a:schemeClr val="lt1"/>
+          </a:fontRef>
+        </p:style>
+        <p:txBody>
+          <a:bodyPr rtlCol="0" anchor="ctr"/>
+          <a:lstStyle/>
+          <a:p>
+            <a:pPr algn="ctr"/>
+          </a:p>
+        </p:txBody>
+      </p:sp>
+      <p:sp>
+        <p:nvSpPr>
+          <p:cNvPr id="25" name="TextBox 24"/>
+          <p:cNvSpPr txBox="1"/>
+          <p:nvPr/>
+        </p:nvSpPr>
+        <p:spPr>
+          <a:xfrm>
+            <a:off x="7269480" y="3392424"/>
+            <a:ext cx="731520" cy="320040"/>
+          </a:xfrm>
+          <a:prstGeom prst="rect">
+            <a:avLst/>
+          </a:prstGeom>
+          <a:noFill/>
+        </p:spPr>
+        <p:txBody>
+          <a:bodyPr wrap="square">
+            <a:spAutoFit/>
+          </a:bodyPr>
+          <a:lstStyle/>
+          <a:p>
+            <a:pPr algn="l"/>
+            <a:r>
+              <a:rPr sz="1300" b="1" i="0">
+                <a:solidFill>
+                  <a:srgbClr val="EAB308"/>
+                </a:solidFill>
+              </a:rPr>
+              <a:t>0.81</a:t>
+            </a:r>
+          </a:p>
+        </p:txBody>
+      </p:sp>
+      <p:sp>
+        <p:nvSpPr>
+          <p:cNvPr id="26" name="TextBox 25"/>
+          <p:cNvSpPr txBox="1"/>
+          <p:nvPr/>
+        </p:nvSpPr>
+        <p:spPr>
+          <a:xfrm>
+            <a:off x="548640" y="3977640"/>
+            <a:ext cx="2103120" cy="320040"/>
+          </a:xfrm>
+          <a:prstGeom prst="rect">
+            <a:avLst/>
+          </a:prstGeom>
+          <a:noFill/>
+        </p:spPr>
+        <p:txBody>
+          <a:bodyPr wrap="square">
+            <a:spAutoFit/>
+          </a:bodyPr>
+          <a:lstStyle/>
+          <a:p>
+            <a:pPr algn="l"/>
+            <a:r>
+              <a:rPr sz="1300" b="0" i="0">
+                <a:solidFill>
+                  <a:srgbClr val="FFFFFF"/>
+                </a:solidFill>
+              </a:rPr>
+              <a:t>Semantic Coverage</a:t>
+            </a:r>
+          </a:p>
+        </p:txBody>
+      </p:sp>
+      <p:sp>
+        <p:nvSpPr>
+          <p:cNvPr id="27" name="Rectangle 26"/>
+          <p:cNvSpPr/>
+          <p:nvPr/>
+        </p:nvSpPr>
+        <p:spPr>
+          <a:xfrm>
+            <a:off x="2743200" y="3995928"/>
+            <a:ext cx="4389120" cy="274320"/>
+          </a:xfrm>
+          <a:prstGeom prst="rect">
+            <a:avLst/>
+          </a:prstGeom>
+          <a:solidFill>
+            <a:srgbClr val="1A202C"/>
+          </a:solidFill>
+        </p:spPr>
+        <p:style>
+          <a:lnRef idx="1">
+            <a:schemeClr val="accent1"/>
+          </a:lnRef>
+          <a:fillRef idx="3">
+            <a:schemeClr val="accent1"/>
+          </a:fillRef>
+          <a:effectRef idx="2">
+            <a:schemeClr val="accent1"/>
+          </a:effectRef>
+          <a:fontRef idx="minor">
+            <a:schemeClr val="lt1"/>
+          </a:fontRef>
+        </p:style>
+        <p:txBody>
+          <a:bodyPr rtlCol="0" anchor="ctr"/>
+          <a:lstStyle/>
+          <a:p>
+            <a:pPr algn="ctr"/>
+          </a:p>
+        </p:txBody>
+      </p:sp>
+      <p:sp>
+        <p:nvSpPr>
+          <p:cNvPr id="28" name="Rectangle 27"/>
+          <p:cNvSpPr/>
+          <p:nvPr/>
+        </p:nvSpPr>
+        <p:spPr>
+          <a:xfrm>
+            <a:off x="2743200" y="3995928"/>
+            <a:ext cx="3160166" cy="274320"/>
+          </a:xfrm>
+          <a:prstGeom prst="rect">
+            <a:avLst/>
+          </a:prstGeom>
+          <a:solidFill>
+            <a:srgbClr val="A78BFA"/>
+          </a:solidFill>
+        </p:spPr>
+        <p:style>
+          <a:lnRef idx="1">
+            <a:schemeClr val="accent1"/>
+          </a:lnRef>
+          <a:fillRef idx="3">
+            <a:schemeClr val="accent1"/>
+          </a:fillRef>
+          <a:effectRef idx="2">
+            <a:schemeClr val="accent1"/>
+          </a:effectRef>
+          <a:fontRef idx="minor">
+            <a:schemeClr val="lt1"/>
+          </a:fontRef>
+        </p:style>
+        <p:txBody>
+          <a:bodyPr rtlCol="0" anchor="ctr"/>
+          <a:lstStyle/>
+          <a:p>
+            <a:pPr algn="ctr"/>
+          </a:p>
+        </p:txBody>
+      </p:sp>
+      <p:sp>
+        <p:nvSpPr>
+          <p:cNvPr id="29" name="TextBox 28"/>
+          <p:cNvSpPr txBox="1"/>
+          <p:nvPr/>
+        </p:nvSpPr>
+        <p:spPr>
+          <a:xfrm>
+            <a:off x="7269480" y="3959352"/>
+            <a:ext cx="731520" cy="320040"/>
+          </a:xfrm>
+          <a:prstGeom prst="rect">
+            <a:avLst/>
+          </a:prstGeom>
+          <a:noFill/>
+        </p:spPr>
+        <p:txBody>
+          <a:bodyPr wrap="square">
+            <a:spAutoFit/>
+          </a:bodyPr>
+          <a:lstStyle/>
+          <a:p>
+            <a:pPr algn="l"/>
+            <a:r>
+              <a:rPr sz="1300" b="1" i="0">
+                <a:solidFill>
+                  <a:srgbClr val="A78BFA"/>
+                </a:solidFill>
+              </a:rPr>
+              <a:t>0.72</a:t>
+            </a:r>
+          </a:p>
+        </p:txBody>
+      </p:sp>
+      <p:sp>
+        <p:nvSpPr>
+          <p:cNvPr id="30" name="TextBox 29"/>
+          <p:cNvSpPr txBox="1"/>
+          <p:nvPr/>
+        </p:nvSpPr>
+        <p:spPr>
+          <a:xfrm>
+            <a:off x="548640" y="4956048"/>
+            <a:ext cx="7132320" cy="292608"/>
+          </a:xfrm>
+          <a:prstGeom prst="rect">
+            <a:avLst/>
+          </a:prstGeom>
+          <a:noFill/>
+        </p:spPr>
+        <p:txBody>
+          <a:bodyPr wrap="square">
+            <a:spAutoFit/>
+          </a:bodyPr>
+          <a:lstStyle/>
+          <a:p>
+            <a:pPr algn="l"/>
+            <a:r>
               <a:rPr sz="1200" b="1" i="0">
                 <a:solidFill>
+                  <a:srgbClr val="F97316"/>
+                </a:solidFill>
+              </a:rPr>
+              <a:t>PER-CATEGORY BREAKDOWN</a:t>
+            </a:r>
+          </a:p>
+        </p:txBody>
+      </p:sp>
+      <p:sp>
+        <p:nvSpPr>
+          <p:cNvPr id="31" name="Rectangle 30"/>
+          <p:cNvSpPr/>
+          <p:nvPr/>
+        </p:nvSpPr>
+        <p:spPr>
+          <a:xfrm>
+            <a:off x="548640" y="5303520"/>
+            <a:ext cx="6355080" cy="256032"/>
+          </a:xfrm>
+          <a:prstGeom prst="rect">
+            <a:avLst/>
+          </a:prstGeom>
+          <a:solidFill>
+            <a:srgbClr val="1A202C"/>
+          </a:solidFill>
+        </p:spPr>
+        <p:style>
+          <a:lnRef idx="1">
+            <a:schemeClr val="accent1"/>
+          </a:lnRef>
+          <a:fillRef idx="3">
+            <a:schemeClr val="accent1"/>
+          </a:fillRef>
+          <a:effectRef idx="2">
+            <a:schemeClr val="accent1"/>
+          </a:effectRef>
+          <a:fontRef idx="minor">
+            <a:schemeClr val="lt1"/>
+          </a:fontRef>
+        </p:style>
+        <p:txBody>
+          <a:bodyPr rtlCol="0" anchor="ctr"/>
+          <a:lstStyle/>
+          <a:p>
+            <a:pPr algn="ctr"/>
+          </a:p>
+        </p:txBody>
+      </p:sp>
+      <p:sp>
+        <p:nvSpPr>
+          <p:cNvPr id="32" name="TextBox 31"/>
+          <p:cNvSpPr txBox="1"/>
+          <p:nvPr/>
+        </p:nvSpPr>
+        <p:spPr>
+          <a:xfrm>
+            <a:off x="603504" y="5340096"/>
+            <a:ext cx="2286000" cy="201168"/>
+          </a:xfrm>
+          <a:prstGeom prst="rect">
+            <a:avLst/>
+          </a:prstGeom>
+          <a:noFill/>
+        </p:spPr>
+        <p:txBody>
+          <a:bodyPr wrap="square">
+            <a:spAutoFit/>
+          </a:bodyPr>
+          <a:lstStyle/>
+          <a:p>
+            <a:pPr algn="l"/>
+            <a:r>
+              <a:rPr sz="1000" b="1" i="0">
+                <a:solidFill>
+                  <a:srgbClr val="F97316"/>
+                </a:solidFill>
+              </a:rPr>
+              <a:t>Category</a:t>
+            </a:r>
+          </a:p>
+        </p:txBody>
+      </p:sp>
+      <p:sp>
+        <p:nvSpPr>
+          <p:cNvPr id="33" name="TextBox 32"/>
+          <p:cNvSpPr txBox="1"/>
+          <p:nvPr/>
+        </p:nvSpPr>
+        <p:spPr>
+          <a:xfrm>
+            <a:off x="2935224" y="5340096"/>
+            <a:ext cx="777240" cy="201168"/>
+          </a:xfrm>
+          <a:prstGeom prst="rect">
+            <a:avLst/>
+          </a:prstGeom>
+          <a:noFill/>
+        </p:spPr>
+        <p:txBody>
+          <a:bodyPr wrap="square">
+            <a:spAutoFit/>
+          </a:bodyPr>
+          <a:lstStyle/>
+          <a:p>
+            <a:pPr algn="l"/>
+            <a:r>
+              <a:rPr sz="1000" b="1" i="0">
+                <a:solidFill>
+                  <a:srgbClr val="F97316"/>
+                </a:solidFill>
+              </a:rPr>
+              <a:t>Label</a:t>
+            </a:r>
+          </a:p>
+        </p:txBody>
+      </p:sp>
+      <p:sp>
+        <p:nvSpPr>
+          <p:cNvPr id="34" name="TextBox 33"/>
+          <p:cNvSpPr txBox="1"/>
+          <p:nvPr/>
+        </p:nvSpPr>
+        <p:spPr>
+          <a:xfrm>
+            <a:off x="3758184" y="5340096"/>
+            <a:ext cx="1234440" cy="201168"/>
+          </a:xfrm>
+          <a:prstGeom prst="rect">
+            <a:avLst/>
+          </a:prstGeom>
+          <a:noFill/>
+        </p:spPr>
+        <p:txBody>
+          <a:bodyPr wrap="square">
+            <a:spAutoFit/>
+          </a:bodyPr>
+          <a:lstStyle/>
+          <a:p>
+            <a:pPr algn="l"/>
+            <a:r>
+              <a:rPr sz="1000" b="1" i="0">
+                <a:solidFill>
+                  <a:srgbClr val="F97316"/>
+                </a:solidFill>
+              </a:rPr>
+              <a:t>Agent</a:t>
+            </a:r>
+          </a:p>
+        </p:txBody>
+      </p:sp>
+      <p:sp>
+        <p:nvSpPr>
+          <p:cNvPr id="35" name="TextBox 34"/>
+          <p:cNvSpPr txBox="1"/>
+          <p:nvPr/>
+        </p:nvSpPr>
+        <p:spPr>
+          <a:xfrm>
+            <a:off x="5038344" y="5340096"/>
+            <a:ext cx="1280160" cy="201168"/>
+          </a:xfrm>
+          <a:prstGeom prst="rect">
+            <a:avLst/>
+          </a:prstGeom>
+          <a:noFill/>
+        </p:spPr>
+        <p:txBody>
+          <a:bodyPr wrap="square">
+            <a:spAutoFit/>
+          </a:bodyPr>
+          <a:lstStyle/>
+          <a:p>
+            <a:pPr algn="l"/>
+            <a:r>
+              <a:rPr sz="1000" b="1" i="0">
+                <a:solidFill>
+                  <a:srgbClr val="F97316"/>
+                </a:solidFill>
+              </a:rPr>
+              <a:t>Ground Truth</a:t>
+            </a:r>
+          </a:p>
+        </p:txBody>
+      </p:sp>
+      <p:sp>
+        <p:nvSpPr>
+          <p:cNvPr id="36" name="Rectangle 35"/>
+          <p:cNvSpPr/>
+          <p:nvPr/>
+        </p:nvSpPr>
+        <p:spPr>
+          <a:xfrm>
+            <a:off x="548640" y="5559552"/>
+            <a:ext cx="6355080" cy="173736"/>
+          </a:xfrm>
+          <a:prstGeom prst="rect">
+            <a:avLst/>
+          </a:prstGeom>
+          <a:solidFill>
+            <a:srgbClr val="2D3748"/>
+          </a:solidFill>
+        </p:spPr>
+        <p:style>
+          <a:lnRef idx="1">
+            <a:schemeClr val="accent1"/>
+          </a:lnRef>
+          <a:fillRef idx="3">
+            <a:schemeClr val="accent1"/>
+          </a:fillRef>
+          <a:effectRef idx="2">
+            <a:schemeClr val="accent1"/>
+          </a:effectRef>
+          <a:fontRef idx="minor">
+            <a:schemeClr val="lt1"/>
+          </a:fontRef>
+        </p:style>
+        <p:txBody>
+          <a:bodyPr rtlCol="0" anchor="ctr"/>
+          <a:lstStyle/>
+          <a:p>
+            <a:pPr algn="ctr"/>
+          </a:p>
+        </p:txBody>
+      </p:sp>
+      <p:sp>
+        <p:nvSpPr>
+          <p:cNvPr id="37" name="TextBox 36"/>
+          <p:cNvSpPr txBox="1"/>
+          <p:nvPr/>
+        </p:nvSpPr>
+        <p:spPr>
+          <a:xfrm>
+            <a:off x="603504" y="5577840"/>
+            <a:ext cx="2286000" cy="146304"/>
+          </a:xfrm>
+          <a:prstGeom prst="rect">
+            <a:avLst/>
+          </a:prstGeom>
+          <a:noFill/>
+        </p:spPr>
+        <p:txBody>
+          <a:bodyPr wrap="square">
+            <a:spAutoFit/>
+          </a:bodyPr>
+          <a:lstStyle/>
+          <a:p>
+            <a:pPr algn="l"/>
+            <a:r>
+              <a:rPr sz="900" b="0" i="0">
+                <a:solidFill>
+                  <a:srgbClr val="FFFFFF"/>
+                </a:solidFill>
+              </a:rPr>
+              <a:t>wetlands</a:t>
+            </a:r>
+          </a:p>
+        </p:txBody>
+      </p:sp>
+      <p:sp>
+        <p:nvSpPr>
+          <p:cNvPr id="38" name="TextBox 37"/>
+          <p:cNvSpPr txBox="1"/>
+          <p:nvPr/>
+        </p:nvSpPr>
+        <p:spPr>
+          <a:xfrm>
+            <a:off x="2935224" y="5577840"/>
+            <a:ext cx="777240" cy="146304"/>
+          </a:xfrm>
+          <a:prstGeom prst="rect">
+            <a:avLst/>
+          </a:prstGeom>
+          <a:noFill/>
+        </p:spPr>
+        <p:txBody>
+          <a:bodyPr wrap="square">
+            <a:spAutoFit/>
+          </a:bodyPr>
+          <a:lstStyle/>
+          <a:p>
+            <a:pPr algn="l"/>
+            <a:r>
+              <a:rPr sz="900" b="1" i="0">
+                <a:solidFill>
                   <a:srgbClr val="22C55E"/>
                 </a:solidFill>
               </a:rPr>
-              <a:t>FUTURE IMPROVEMENTS</a:t>
-            </a:r>
-          </a:p>
-        </p:txBody>
-      </p:sp>
-      <p:sp>
-        <p:nvSpPr>
-          <p:cNvPr id="11" name="TextBox 10"/>
-          <p:cNvSpPr txBox="1"/>
-          <p:nvPr/>
-        </p:nvSpPr>
-        <p:spPr>
-          <a:xfrm>
-            <a:off x="6400800" y="1389888"/>
-            <a:ext cx="5394960" cy="4937760"/>
-          </a:xfrm>
-          <a:prstGeom prst="rect">
-            <a:avLst/>
-          </a:prstGeom>
-          <a:noFill/>
-        </p:spPr>
-        <p:txBody>
-          <a:bodyPr wrap="square">
-            <a:spAutoFit/>
-          </a:bodyPr>
-          <a:lstStyle/>
-          <a:p>
-            <a:pPr>
-              <a:spcBef>
-                <a:spcPts val="600"/>
-              </a:spcBef>
-            </a:pPr>
-            <a:r>
-              <a:rPr sz="1800" b="1">
+              <a:t>TP</a:t>
+            </a:r>
+          </a:p>
+        </p:txBody>
+      </p:sp>
+      <p:sp>
+        <p:nvSpPr>
+          <p:cNvPr id="39" name="TextBox 38"/>
+          <p:cNvSpPr txBox="1"/>
+          <p:nvPr/>
+        </p:nvSpPr>
+        <p:spPr>
+          <a:xfrm>
+            <a:off x="3758184" y="5577840"/>
+            <a:ext cx="1234440" cy="146304"/>
+          </a:xfrm>
+          <a:prstGeom prst="rect">
+            <a:avLst/>
+          </a:prstGeom>
+          <a:noFill/>
+        </p:spPr>
+        <p:txBody>
+          <a:bodyPr wrap="square">
+            <a:spAutoFit/>
+          </a:bodyPr>
+          <a:lstStyle/>
+          <a:p>
+            <a:pPr algn="l"/>
+            <a:r>
+              <a:rPr sz="900" b="0" i="0">
+                <a:solidFill>
+                  <a:srgbClr val="D1D5DB"/>
+                </a:solidFill>
+              </a:rPr>
+              <a:t>significant</a:t>
+            </a:r>
+          </a:p>
+        </p:txBody>
+      </p:sp>
+      <p:sp>
+        <p:nvSpPr>
+          <p:cNvPr id="40" name="TextBox 39"/>
+          <p:cNvSpPr txBox="1"/>
+          <p:nvPr/>
+        </p:nvSpPr>
+        <p:spPr>
+          <a:xfrm>
+            <a:off x="5038344" y="5577840"/>
+            <a:ext cx="1280160" cy="146304"/>
+          </a:xfrm>
+          <a:prstGeom prst="rect">
+            <a:avLst/>
+          </a:prstGeom>
+          <a:noFill/>
+        </p:spPr>
+        <p:txBody>
+          <a:bodyPr wrap="square">
+            <a:spAutoFit/>
+          </a:bodyPr>
+          <a:lstStyle/>
+          <a:p>
+            <a:pPr algn="l"/>
+            <a:r>
+              <a:rPr sz="900" b="0" i="0">
+                <a:solidFill>
+                  <a:srgbClr val="D1D5DB"/>
+                </a:solidFill>
+              </a:rPr>
+              <a:t>significant</a:t>
+            </a:r>
+          </a:p>
+        </p:txBody>
+      </p:sp>
+      <p:sp>
+        <p:nvSpPr>
+          <p:cNvPr id="41" name="Rectangle 40"/>
+          <p:cNvSpPr/>
+          <p:nvPr/>
+        </p:nvSpPr>
+        <p:spPr>
+          <a:xfrm>
+            <a:off x="548640" y="5742432"/>
+            <a:ext cx="6355080" cy="173736"/>
+          </a:xfrm>
+          <a:prstGeom prst="rect">
+            <a:avLst/>
+          </a:prstGeom>
+          <a:solidFill>
+            <a:srgbClr val="1F2833"/>
+          </a:solidFill>
+        </p:spPr>
+        <p:style>
+          <a:lnRef idx="1">
+            <a:schemeClr val="accent1"/>
+          </a:lnRef>
+          <a:fillRef idx="3">
+            <a:schemeClr val="accent1"/>
+          </a:fillRef>
+          <a:effectRef idx="2">
+            <a:schemeClr val="accent1"/>
+          </a:effectRef>
+          <a:fontRef idx="minor">
+            <a:schemeClr val="lt1"/>
+          </a:fontRef>
+        </p:style>
+        <p:txBody>
+          <a:bodyPr rtlCol="0" anchor="ctr"/>
+          <a:lstStyle/>
+          <a:p>
+            <a:pPr algn="ctr"/>
+          </a:p>
+        </p:txBody>
+      </p:sp>
+      <p:sp>
+        <p:nvSpPr>
+          <p:cNvPr id="42" name="TextBox 41"/>
+          <p:cNvSpPr txBox="1"/>
+          <p:nvPr/>
+        </p:nvSpPr>
+        <p:spPr>
+          <a:xfrm>
+            <a:off x="603504" y="5760720"/>
+            <a:ext cx="2286000" cy="146304"/>
+          </a:xfrm>
+          <a:prstGeom prst="rect">
+            <a:avLst/>
+          </a:prstGeom>
+          <a:noFill/>
+        </p:spPr>
+        <p:txBody>
+          <a:bodyPr wrap="square">
+            <a:spAutoFit/>
+          </a:bodyPr>
+          <a:lstStyle/>
+          <a:p>
+            <a:pPr algn="l"/>
+            <a:r>
+              <a:rPr sz="900" b="0" i="0">
                 <a:solidFill>
                   <a:srgbClr val="FFFFFF"/>
                 </a:solidFill>
               </a:rPr>
-              <a:t>▸ Human-annotated ground truth corpus</a:t>
-            </a:r>
-          </a:p>
-          <a:p>
-            <a:pPr>
-              <a:spcBef>
-                <a:spcPts val="200"/>
-              </a:spcBef>
-            </a:pPr>
-            <a:r>
-              <a:rPr sz="1400" b="0">
+              <a:t>floodplain</a:t>
+            </a:r>
+          </a:p>
+        </p:txBody>
+      </p:sp>
+      <p:sp>
+        <p:nvSpPr>
+          <p:cNvPr id="43" name="TextBox 42"/>
+          <p:cNvSpPr txBox="1"/>
+          <p:nvPr/>
+        </p:nvSpPr>
+        <p:spPr>
+          <a:xfrm>
+            <a:off x="2935224" y="5760720"/>
+            <a:ext cx="777240" cy="146304"/>
+          </a:xfrm>
+          <a:prstGeom prst="rect">
+            <a:avLst/>
+          </a:prstGeom>
+          <a:noFill/>
+        </p:spPr>
+        <p:txBody>
+          <a:bodyPr wrap="square">
+            <a:spAutoFit/>
+          </a:bodyPr>
+          <a:lstStyle/>
+          <a:p>
+            <a:pPr algn="l"/>
+            <a:r>
+              <a:rPr sz="900" b="1" i="0">
+                <a:solidFill>
+                  <a:srgbClr val="22C55E"/>
+                </a:solidFill>
+              </a:rPr>
+              <a:t>TP</a:t>
+            </a:r>
+          </a:p>
+        </p:txBody>
+      </p:sp>
+      <p:sp>
+        <p:nvSpPr>
+          <p:cNvPr id="44" name="TextBox 43"/>
+          <p:cNvSpPr txBox="1"/>
+          <p:nvPr/>
+        </p:nvSpPr>
+        <p:spPr>
+          <a:xfrm>
+            <a:off x="3758184" y="5760720"/>
+            <a:ext cx="1234440" cy="146304"/>
+          </a:xfrm>
+          <a:prstGeom prst="rect">
+            <a:avLst/>
+          </a:prstGeom>
+          <a:noFill/>
+        </p:spPr>
+        <p:txBody>
+          <a:bodyPr wrap="square">
+            <a:spAutoFit/>
+          </a:bodyPr>
+          <a:lstStyle/>
+          <a:p>
+            <a:pPr algn="l"/>
+            <a:r>
+              <a:rPr sz="900" b="0" i="0">
                 <a:solidFill>
                   <a:srgbClr val="D1D5DB"/>
                 </a:solidFill>
               </a:rPr>
-              <a:t>    · Domain experts review LLM extractions</a:t>
-            </a:r>
-          </a:p>
-          <a:p>
-            <a:pPr>
-              <a:spcBef>
-                <a:spcPts val="600"/>
-              </a:spcBef>
-            </a:pPr>
-            <a:r>
-              <a:rPr sz="1800" b="1">
+              <a:t>moderate</a:t>
+            </a:r>
+          </a:p>
+        </p:txBody>
+      </p:sp>
+      <p:sp>
+        <p:nvSpPr>
+          <p:cNvPr id="45" name="TextBox 44"/>
+          <p:cNvSpPr txBox="1"/>
+          <p:nvPr/>
+        </p:nvSpPr>
+        <p:spPr>
+          <a:xfrm>
+            <a:off x="5038344" y="5760720"/>
+            <a:ext cx="1280160" cy="146304"/>
+          </a:xfrm>
+          <a:prstGeom prst="rect">
+            <a:avLst/>
+          </a:prstGeom>
+          <a:noFill/>
+        </p:spPr>
+        <p:txBody>
+          <a:bodyPr wrap="square">
+            <a:spAutoFit/>
+          </a:bodyPr>
+          <a:lstStyle/>
+          <a:p>
+            <a:pPr algn="l"/>
+            <a:r>
+              <a:rPr sz="900" b="0" i="0">
+                <a:solidFill>
+                  <a:srgbClr val="D1D5DB"/>
+                </a:solidFill>
+              </a:rPr>
+              <a:t>moderate</a:t>
+            </a:r>
+          </a:p>
+        </p:txBody>
+      </p:sp>
+      <p:sp>
+        <p:nvSpPr>
+          <p:cNvPr id="46" name="Rectangle 45"/>
+          <p:cNvSpPr/>
+          <p:nvPr/>
+        </p:nvSpPr>
+        <p:spPr>
+          <a:xfrm>
+            <a:off x="548640" y="5925312"/>
+            <a:ext cx="6355080" cy="173736"/>
+          </a:xfrm>
+          <a:prstGeom prst="rect">
+            <a:avLst/>
+          </a:prstGeom>
+          <a:solidFill>
+            <a:srgbClr val="2D3748"/>
+          </a:solidFill>
+        </p:spPr>
+        <p:style>
+          <a:lnRef idx="1">
+            <a:schemeClr val="accent1"/>
+          </a:lnRef>
+          <a:fillRef idx="3">
+            <a:schemeClr val="accent1"/>
+          </a:fillRef>
+          <a:effectRef idx="2">
+            <a:schemeClr val="accent1"/>
+          </a:effectRef>
+          <a:fontRef idx="minor">
+            <a:schemeClr val="lt1"/>
+          </a:fontRef>
+        </p:style>
+        <p:txBody>
+          <a:bodyPr rtlCol="0" anchor="ctr"/>
+          <a:lstStyle/>
+          <a:p>
+            <a:pPr algn="ctr"/>
+          </a:p>
+        </p:txBody>
+      </p:sp>
+      <p:sp>
+        <p:nvSpPr>
+          <p:cNvPr id="47" name="TextBox 46"/>
+          <p:cNvSpPr txBox="1"/>
+          <p:nvPr/>
+        </p:nvSpPr>
+        <p:spPr>
+          <a:xfrm>
+            <a:off x="603504" y="5943600"/>
+            <a:ext cx="2286000" cy="146304"/>
+          </a:xfrm>
+          <a:prstGeom prst="rect">
+            <a:avLst/>
+          </a:prstGeom>
+          <a:noFill/>
+        </p:spPr>
+        <p:txBody>
+          <a:bodyPr wrap="square">
+            <a:spAutoFit/>
+          </a:bodyPr>
+          <a:lstStyle/>
+          <a:p>
+            <a:pPr algn="l"/>
+            <a:r>
+              <a:rPr sz="900" b="0" i="0">
                 <a:solidFill>
                   <a:srgbClr val="FFFFFF"/>
                 </a:solidFill>
               </a:rPr>
-              <a:t>▸ Dynamic category set per project type</a:t>
-            </a:r>
-          </a:p>
-          <a:p>
-            <a:pPr>
-              <a:spcBef>
-                <a:spcPts val="200"/>
-              </a:spcBef>
-            </a:pPr>
-            <a:r>
-              <a:rPr sz="1400" b="0">
+              <a:t>endangered_species</a:t>
+            </a:r>
+          </a:p>
+        </p:txBody>
+      </p:sp>
+      <p:sp>
+        <p:nvSpPr>
+          <p:cNvPr id="48" name="TextBox 47"/>
+          <p:cNvSpPr txBox="1"/>
+          <p:nvPr/>
+        </p:nvSpPr>
+        <p:spPr>
+          <a:xfrm>
+            <a:off x="2935224" y="5943600"/>
+            <a:ext cx="777240" cy="146304"/>
+          </a:xfrm>
+          <a:prstGeom prst="rect">
+            <a:avLst/>
+          </a:prstGeom>
+          <a:noFill/>
+        </p:spPr>
+        <p:txBody>
+          <a:bodyPr wrap="square">
+            <a:spAutoFit/>
+          </a:bodyPr>
+          <a:lstStyle/>
+          <a:p>
+            <a:pPr algn="l"/>
+            <a:r>
+              <a:rPr sz="900" b="1" i="0">
+                <a:solidFill>
+                  <a:srgbClr val="EF4444"/>
+                </a:solidFill>
+              </a:rPr>
+              <a:t>FP</a:t>
+            </a:r>
+          </a:p>
+        </p:txBody>
+      </p:sp>
+      <p:sp>
+        <p:nvSpPr>
+          <p:cNvPr id="49" name="TextBox 48"/>
+          <p:cNvSpPr txBox="1"/>
+          <p:nvPr/>
+        </p:nvSpPr>
+        <p:spPr>
+          <a:xfrm>
+            <a:off x="3758184" y="5943600"/>
+            <a:ext cx="1234440" cy="146304"/>
+          </a:xfrm>
+          <a:prstGeom prst="rect">
+            <a:avLst/>
+          </a:prstGeom>
+          <a:noFill/>
+        </p:spPr>
+        <p:txBody>
+          <a:bodyPr wrap="square">
+            <a:spAutoFit/>
+          </a:bodyPr>
+          <a:lstStyle/>
+          <a:p>
+            <a:pPr algn="l"/>
+            <a:r>
+              <a:rPr sz="900" b="0" i="0">
                 <a:solidFill>
                   <a:srgbClr val="D1D5DB"/>
                 </a:solidFill>
               </a:rPr>
-              <a:t>    · Replace 8 fixed with project-driven taxonomy</a:t>
-            </a:r>
-          </a:p>
-          <a:p>
-            <a:pPr>
-              <a:spcBef>
-                <a:spcPts val="600"/>
-              </a:spcBef>
-            </a:pPr>
-            <a:r>
-              <a:rPr sz="1800" b="1">
+              <a:t>significant</a:t>
+            </a:r>
+          </a:p>
+        </p:txBody>
+      </p:sp>
+      <p:sp>
+        <p:nvSpPr>
+          <p:cNvPr id="50" name="TextBox 49"/>
+          <p:cNvSpPr txBox="1"/>
+          <p:nvPr/>
+        </p:nvSpPr>
+        <p:spPr>
+          <a:xfrm>
+            <a:off x="5038344" y="5943600"/>
+            <a:ext cx="1280160" cy="146304"/>
+          </a:xfrm>
+          <a:prstGeom prst="rect">
+            <a:avLst/>
+          </a:prstGeom>
+          <a:noFill/>
+        </p:spPr>
+        <p:txBody>
+          <a:bodyPr wrap="square">
+            <a:spAutoFit/>
+          </a:bodyPr>
+          <a:lstStyle/>
+          <a:p>
+            <a:pPr algn="l"/>
+            <a:r>
+              <a:rPr sz="900" b="0" i="0">
+                <a:solidFill>
+                  <a:srgbClr val="D1D5DB"/>
+                </a:solidFill>
+              </a:rPr>
+              <a:t>none</a:t>
+            </a:r>
+          </a:p>
+        </p:txBody>
+      </p:sp>
+      <p:sp>
+        <p:nvSpPr>
+          <p:cNvPr id="51" name="Rectangle 50"/>
+          <p:cNvSpPr/>
+          <p:nvPr/>
+        </p:nvSpPr>
+        <p:spPr>
+          <a:xfrm>
+            <a:off x="548640" y="6108192"/>
+            <a:ext cx="6355080" cy="173736"/>
+          </a:xfrm>
+          <a:prstGeom prst="rect">
+            <a:avLst/>
+          </a:prstGeom>
+          <a:solidFill>
+            <a:srgbClr val="1F2833"/>
+          </a:solidFill>
+        </p:spPr>
+        <p:style>
+          <a:lnRef idx="1">
+            <a:schemeClr val="accent1"/>
+          </a:lnRef>
+          <a:fillRef idx="3">
+            <a:schemeClr val="accent1"/>
+          </a:fillRef>
+          <a:effectRef idx="2">
+            <a:schemeClr val="accent1"/>
+          </a:effectRef>
+          <a:fontRef idx="minor">
+            <a:schemeClr val="lt1"/>
+          </a:fontRef>
+        </p:style>
+        <p:txBody>
+          <a:bodyPr rtlCol="0" anchor="ctr"/>
+          <a:lstStyle/>
+          <a:p>
+            <a:pPr algn="ctr"/>
+          </a:p>
+        </p:txBody>
+      </p:sp>
+      <p:sp>
+        <p:nvSpPr>
+          <p:cNvPr id="52" name="TextBox 51"/>
+          <p:cNvSpPr txBox="1"/>
+          <p:nvPr/>
+        </p:nvSpPr>
+        <p:spPr>
+          <a:xfrm>
+            <a:off x="603504" y="6126480"/>
+            <a:ext cx="2286000" cy="146304"/>
+          </a:xfrm>
+          <a:prstGeom prst="rect">
+            <a:avLst/>
+          </a:prstGeom>
+          <a:noFill/>
+        </p:spPr>
+        <p:txBody>
+          <a:bodyPr wrap="square">
+            <a:spAutoFit/>
+          </a:bodyPr>
+          <a:lstStyle/>
+          <a:p>
+            <a:pPr algn="l"/>
+            <a:r>
+              <a:rPr sz="900" b="0" i="0">
                 <a:solidFill>
                   <a:srgbClr val="FFFFFF"/>
                 </a:solidFill>
               </a:rPr>
-              <a:t>▸ LLM-as-Judge for reasoning quality</a:t>
-            </a:r>
-          </a:p>
-          <a:p>
-            <a:pPr>
-              <a:spcBef>
-                <a:spcPts val="200"/>
-              </a:spcBef>
-            </a:pPr>
-            <a:r>
-              <a:rPr sz="1400" b="0">
+              <a:t>prime_farmland</a:t>
+            </a:r>
+          </a:p>
+        </p:txBody>
+      </p:sp>
+      <p:sp>
+        <p:nvSpPr>
+          <p:cNvPr id="53" name="TextBox 52"/>
+          <p:cNvSpPr txBox="1"/>
+          <p:nvPr/>
+        </p:nvSpPr>
+        <p:spPr>
+          <a:xfrm>
+            <a:off x="2935224" y="6126480"/>
+            <a:ext cx="777240" cy="146304"/>
+          </a:xfrm>
+          <a:prstGeom prst="rect">
+            <a:avLst/>
+          </a:prstGeom>
+          <a:noFill/>
+        </p:spPr>
+        <p:txBody>
+          <a:bodyPr wrap="square">
+            <a:spAutoFit/>
+          </a:bodyPr>
+          <a:lstStyle/>
+          <a:p>
+            <a:pPr algn="l"/>
+            <a:r>
+              <a:rPr sz="900" b="1" i="0">
+                <a:solidFill>
+                  <a:srgbClr val="EAB308"/>
+                </a:solidFill>
+              </a:rPr>
+              <a:t>FN</a:t>
+            </a:r>
+          </a:p>
+        </p:txBody>
+      </p:sp>
+      <p:sp>
+        <p:nvSpPr>
+          <p:cNvPr id="54" name="TextBox 53"/>
+          <p:cNvSpPr txBox="1"/>
+          <p:nvPr/>
+        </p:nvSpPr>
+        <p:spPr>
+          <a:xfrm>
+            <a:off x="3758184" y="6126480"/>
+            <a:ext cx="1234440" cy="146304"/>
+          </a:xfrm>
+          <a:prstGeom prst="rect">
+            <a:avLst/>
+          </a:prstGeom>
+          <a:noFill/>
+        </p:spPr>
+        <p:txBody>
+          <a:bodyPr wrap="square">
+            <a:spAutoFit/>
+          </a:bodyPr>
+          <a:lstStyle/>
+          <a:p>
+            <a:pPr algn="l"/>
+            <a:r>
+              <a:rPr sz="900" b="0" i="0">
                 <a:solidFill>
                   <a:srgbClr val="D1D5DB"/>
                 </a:solidFill>
               </a:rPr>
-              <a:t>    · Separate evaluator scores each reasoning chain</a:t>
-            </a:r>
-          </a:p>
-          <a:p>
-            <a:pPr>
-              <a:spcBef>
-                <a:spcPts val="600"/>
-              </a:spcBef>
-            </a:pPr>
-            <a:r>
-              <a:rPr sz="1800" b="1">
+              <a:t>none</a:t>
+            </a:r>
+          </a:p>
+        </p:txBody>
+      </p:sp>
+      <p:sp>
+        <p:nvSpPr>
+          <p:cNvPr id="55" name="TextBox 54"/>
+          <p:cNvSpPr txBox="1"/>
+          <p:nvPr/>
+        </p:nvSpPr>
+        <p:spPr>
+          <a:xfrm>
+            <a:off x="5038344" y="6126480"/>
+            <a:ext cx="1280160" cy="146304"/>
+          </a:xfrm>
+          <a:prstGeom prst="rect">
+            <a:avLst/>
+          </a:prstGeom>
+          <a:noFill/>
+        </p:spPr>
+        <p:txBody>
+          <a:bodyPr wrap="square">
+            <a:spAutoFit/>
+          </a:bodyPr>
+          <a:lstStyle/>
+          <a:p>
+            <a:pPr algn="l"/>
+            <a:r>
+              <a:rPr sz="900" b="0" i="0">
+                <a:solidFill>
+                  <a:srgbClr val="D1D5DB"/>
+                </a:solidFill>
+              </a:rPr>
+              <a:t>moderate</a:t>
+            </a:r>
+          </a:p>
+        </p:txBody>
+      </p:sp>
+      <p:sp>
+        <p:nvSpPr>
+          <p:cNvPr id="56" name="Rectangle 55"/>
+          <p:cNvSpPr/>
+          <p:nvPr/>
+        </p:nvSpPr>
+        <p:spPr>
+          <a:xfrm>
+            <a:off x="548640" y="6291072"/>
+            <a:ext cx="6355080" cy="173736"/>
+          </a:xfrm>
+          <a:prstGeom prst="rect">
+            <a:avLst/>
+          </a:prstGeom>
+          <a:solidFill>
+            <a:srgbClr val="2D3748"/>
+          </a:solidFill>
+        </p:spPr>
+        <p:style>
+          <a:lnRef idx="1">
+            <a:schemeClr val="accent1"/>
+          </a:lnRef>
+          <a:fillRef idx="3">
+            <a:schemeClr val="accent1"/>
+          </a:fillRef>
+          <a:effectRef idx="2">
+            <a:schemeClr val="accent1"/>
+          </a:effectRef>
+          <a:fontRef idx="minor">
+            <a:schemeClr val="lt1"/>
+          </a:fontRef>
+        </p:style>
+        <p:txBody>
+          <a:bodyPr rtlCol="0" anchor="ctr"/>
+          <a:lstStyle/>
+          <a:p>
+            <a:pPr algn="ctr"/>
+          </a:p>
+        </p:txBody>
+      </p:sp>
+      <p:sp>
+        <p:nvSpPr>
+          <p:cNvPr id="57" name="TextBox 56"/>
+          <p:cNvSpPr txBox="1"/>
+          <p:nvPr/>
+        </p:nvSpPr>
+        <p:spPr>
+          <a:xfrm>
+            <a:off x="603504" y="6309360"/>
+            <a:ext cx="2286000" cy="146304"/>
+          </a:xfrm>
+          <a:prstGeom prst="rect">
+            <a:avLst/>
+          </a:prstGeom>
+          <a:noFill/>
+        </p:spPr>
+        <p:txBody>
+          <a:bodyPr wrap="square">
+            <a:spAutoFit/>
+          </a:bodyPr>
+          <a:lstStyle/>
+          <a:p>
+            <a:pPr algn="l"/>
+            <a:r>
+              <a:rPr sz="900" b="0" i="0">
                 <a:solidFill>
                   <a:srgbClr val="FFFFFF"/>
                 </a:solidFill>
               </a:rPr>
-              <a:t>▸ Run-level repeatability tracking</a:t>
+              <a:t>environmental_justice</a:t>
+            </a:r>
+          </a:p>
+        </p:txBody>
+      </p:sp>
+      <p:sp>
+        <p:nvSpPr>
+          <p:cNvPr id="58" name="TextBox 57"/>
+          <p:cNvSpPr txBox="1"/>
+          <p:nvPr/>
+        </p:nvSpPr>
+        <p:spPr>
+          <a:xfrm>
+            <a:off x="2935224" y="6309360"/>
+            <a:ext cx="777240" cy="146304"/>
+          </a:xfrm>
+          <a:prstGeom prst="rect">
+            <a:avLst/>
+          </a:prstGeom>
+          <a:noFill/>
+        </p:spPr>
+        <p:txBody>
+          <a:bodyPr wrap="square">
+            <a:spAutoFit/>
+          </a:bodyPr>
+          <a:lstStyle/>
+          <a:p>
+            <a:pPr algn="l"/>
+            <a:r>
+              <a:rPr sz="900" b="1" i="0">
+                <a:solidFill>
+                  <a:srgbClr val="22C55E"/>
+                </a:solidFill>
+              </a:rPr>
+              <a:t>TP</a:t>
+            </a:r>
+          </a:p>
+        </p:txBody>
+      </p:sp>
+      <p:sp>
+        <p:nvSpPr>
+          <p:cNvPr id="59" name="TextBox 58"/>
+          <p:cNvSpPr txBox="1"/>
+          <p:nvPr/>
+        </p:nvSpPr>
+        <p:spPr>
+          <a:xfrm>
+            <a:off x="3758184" y="6309360"/>
+            <a:ext cx="1234440" cy="146304"/>
+          </a:xfrm>
+          <a:prstGeom prst="rect">
+            <a:avLst/>
+          </a:prstGeom>
+          <a:noFill/>
+        </p:spPr>
+        <p:txBody>
+          <a:bodyPr wrap="square">
+            <a:spAutoFit/>
+          </a:bodyPr>
+          <a:lstStyle/>
+          <a:p>
+            <a:pPr algn="l"/>
+            <a:r>
+              <a:rPr sz="900" b="0" i="0">
+                <a:solidFill>
+                  <a:srgbClr val="D1D5DB"/>
+                </a:solidFill>
+              </a:rPr>
+              <a:t>moderate</a:t>
+            </a:r>
+          </a:p>
+        </p:txBody>
+      </p:sp>
+      <p:sp>
+        <p:nvSpPr>
+          <p:cNvPr id="60" name="TextBox 59"/>
+          <p:cNvSpPr txBox="1"/>
+          <p:nvPr/>
+        </p:nvSpPr>
+        <p:spPr>
+          <a:xfrm>
+            <a:off x="5038344" y="6309360"/>
+            <a:ext cx="1280160" cy="146304"/>
+          </a:xfrm>
+          <a:prstGeom prst="rect">
+            <a:avLst/>
+          </a:prstGeom>
+          <a:noFill/>
+        </p:spPr>
+        <p:txBody>
+          <a:bodyPr wrap="square">
+            <a:spAutoFit/>
+          </a:bodyPr>
+          <a:lstStyle/>
+          <a:p>
+            <a:pPr algn="l"/>
+            <a:r>
+              <a:rPr sz="900" b="0" i="0">
+                <a:solidFill>
+                  <a:srgbClr val="D1D5DB"/>
+                </a:solidFill>
+              </a:rPr>
+              <a:t>moderate</a:t>
+            </a:r>
+          </a:p>
+        </p:txBody>
+      </p:sp>
+      <p:sp>
+        <p:nvSpPr>
+          <p:cNvPr id="61" name="Rectangle 60"/>
+          <p:cNvSpPr/>
+          <p:nvPr/>
+        </p:nvSpPr>
+        <p:spPr>
+          <a:xfrm>
+            <a:off x="7406640" y="1051560"/>
+            <a:ext cx="4572000" cy="5577840"/>
+          </a:xfrm>
+          <a:prstGeom prst="rect">
+            <a:avLst/>
+          </a:prstGeom>
+          <a:solidFill>
+            <a:srgbClr val="2D3748"/>
+          </a:solidFill>
+          <a:ln w="19050">
+            <a:solidFill>
+              <a:srgbClr val="F97316"/>
+            </a:solidFill>
+          </a:ln>
+        </p:spPr>
+        <p:style>
+          <a:lnRef idx="1">
+            <a:schemeClr val="accent1"/>
+          </a:lnRef>
+          <a:fillRef idx="3">
+            <a:schemeClr val="accent1"/>
+          </a:fillRef>
+          <a:effectRef idx="2">
+            <a:schemeClr val="accent1"/>
+          </a:effectRef>
+          <a:fontRef idx="minor">
+            <a:schemeClr val="lt1"/>
+          </a:fontRef>
+        </p:style>
+        <p:txBody>
+          <a:bodyPr rtlCol="0" anchor="ctr"/>
+          <a:lstStyle/>
+          <a:p>
+            <a:pPr algn="ctr"/>
+          </a:p>
+        </p:txBody>
+      </p:sp>
+      <p:sp>
+        <p:nvSpPr>
+          <p:cNvPr id="62" name="TextBox 61"/>
+          <p:cNvSpPr txBox="1"/>
+          <p:nvPr/>
+        </p:nvSpPr>
+        <p:spPr>
+          <a:xfrm>
+            <a:off x="7543800" y="3535680"/>
+            <a:ext cx="4297680" cy="457200"/>
+          </a:xfrm>
+          <a:prstGeom prst="rect">
+            <a:avLst/>
+          </a:prstGeom>
+          <a:noFill/>
+        </p:spPr>
+        <p:txBody>
+          <a:bodyPr wrap="square">
+            <a:spAutoFit/>
+          </a:bodyPr>
+          <a:lstStyle/>
+          <a:p>
+            <a:pPr algn="ctr"/>
+            <a:r>
+              <a:rPr sz="1200" b="0" i="1">
+                <a:solidFill>
+                  <a:srgbClr val="F97316"/>
+                </a:solidFill>
+              </a:rPr>
+              <a:t>[ Evaluation panel screenshot — score bars + methodology modal ]</a:t>
             </a:r>
           </a:p>
         </p:txBody>
@@ -10924,6 +11641,1796 @@
 </file>
 
 <file path=ppt/slides/slide16.xml><?xml version="1.0" encoding="utf-8"?>
+<p:sld xmlns:a="http://schemas.openxmlformats.org/drawingml/2006/main" xmlns:p="http://schemas.openxmlformats.org/presentationml/2006/main" xmlns:r="http://schemas.openxmlformats.org/officeDocument/2006/relationships">
+  <p:cSld>
+    <p:bg>
+      <p:bgPr>
+        <a:solidFill>
+          <a:srgbClr val="1F2833"/>
+        </a:solidFill>
+        <a:effectLst/>
+      </p:bgPr>
+    </p:bg>
+    <p:spTree>
+      <p:nvGrpSpPr>
+        <p:cNvPr id="1" name=""/>
+        <p:cNvGrpSpPr/>
+        <p:nvPr/>
+      </p:nvGrpSpPr>
+      <p:grpSpPr/>
+      <p:sp>
+        <p:nvSpPr>
+          <p:cNvPr id="2" name="Text Placeholder 1"/>
+          <p:cNvSpPr>
+            <a:spLocks noGrp="1"/>
+          </p:cNvSpPr>
+          <p:nvPr>
+            <p:ph type="body" idx="10" sz="quarter"/>
+          </p:nvPr>
+        </p:nvSpPr>
+        <p:spPr/>
+        <p:txBody>
+          <a:bodyPr/>
+          <a:lstStyle/>
+          <a:p/>
+        </p:txBody>
+      </p:sp>
+      <p:sp>
+        <p:nvSpPr>
+          <p:cNvPr id="3" name="Rectangle 2"/>
+          <p:cNvSpPr/>
+          <p:nvPr/>
+        </p:nvSpPr>
+        <p:spPr>
+          <a:xfrm>
+            <a:off x="0" y="0"/>
+            <a:ext cx="12188952" cy="73152"/>
+          </a:xfrm>
+          <a:prstGeom prst="rect">
+            <a:avLst/>
+          </a:prstGeom>
+          <a:solidFill>
+            <a:srgbClr val="F97316"/>
+          </a:solidFill>
+        </p:spPr>
+        <p:style>
+          <a:lnRef idx="1">
+            <a:schemeClr val="accent1"/>
+          </a:lnRef>
+          <a:fillRef idx="3">
+            <a:schemeClr val="accent1"/>
+          </a:fillRef>
+          <a:effectRef idx="2">
+            <a:schemeClr val="accent1"/>
+          </a:effectRef>
+          <a:fontRef idx="minor">
+            <a:schemeClr val="lt1"/>
+          </a:fontRef>
+        </p:style>
+        <p:txBody>
+          <a:bodyPr rtlCol="0" anchor="ctr"/>
+          <a:lstStyle/>
+          <a:p>
+            <a:pPr algn="ctr"/>
+          </a:p>
+        </p:txBody>
+      </p:sp>
+      <p:sp>
+        <p:nvSpPr>
+          <p:cNvPr id="4" name="TextBox 3"/>
+          <p:cNvSpPr txBox="1"/>
+          <p:nvPr/>
+        </p:nvSpPr>
+        <p:spPr>
+          <a:xfrm>
+            <a:off x="548640" y="146304"/>
+            <a:ext cx="11430000" cy="658368"/>
+          </a:xfrm>
+          <a:prstGeom prst="rect">
+            <a:avLst/>
+          </a:prstGeom>
+          <a:noFill/>
+        </p:spPr>
+        <p:txBody>
+          <a:bodyPr wrap="square">
+            <a:spAutoFit/>
+          </a:bodyPr>
+          <a:lstStyle/>
+          <a:p>
+            <a:pPr algn="l"/>
+            <a:r>
+              <a:rPr sz="2600" b="1" i="0">
+                <a:solidFill>
+                  <a:srgbClr val="F97316"/>
+                </a:solidFill>
+              </a:rPr>
+              <a:t>Results — How Scores Are Calculated</a:t>
+            </a:r>
+          </a:p>
+        </p:txBody>
+      </p:sp>
+      <p:sp>
+        <p:nvSpPr>
+          <p:cNvPr id="5" name="Rectangle 4"/>
+          <p:cNvSpPr/>
+          <p:nvPr/>
+        </p:nvSpPr>
+        <p:spPr>
+          <a:xfrm>
+            <a:off x="548640" y="914400"/>
+            <a:ext cx="11064240" cy="22860"/>
+          </a:xfrm>
+          <a:prstGeom prst="rect">
+            <a:avLst/>
+          </a:prstGeom>
+          <a:solidFill>
+            <a:srgbClr val="3D4A5C"/>
+          </a:solidFill>
+        </p:spPr>
+        <p:style>
+          <a:lnRef idx="1">
+            <a:schemeClr val="accent1"/>
+          </a:lnRef>
+          <a:fillRef idx="3">
+            <a:schemeClr val="accent1"/>
+          </a:fillRef>
+          <a:effectRef idx="2">
+            <a:schemeClr val="accent1"/>
+          </a:effectRef>
+          <a:fontRef idx="minor">
+            <a:schemeClr val="lt1"/>
+          </a:fontRef>
+        </p:style>
+        <p:txBody>
+          <a:bodyPr rtlCol="0" anchor="ctr"/>
+          <a:lstStyle/>
+          <a:p>
+            <a:pPr algn="ctr"/>
+          </a:p>
+        </p:txBody>
+      </p:sp>
+      <p:sp>
+        <p:nvSpPr>
+          <p:cNvPr id="6" name="Rectangle 5"/>
+          <p:cNvSpPr/>
+          <p:nvPr/>
+        </p:nvSpPr>
+        <p:spPr>
+          <a:xfrm>
+            <a:off x="548640" y="1005840"/>
+            <a:ext cx="3566160" cy="5029200"/>
+          </a:xfrm>
+          <a:prstGeom prst="rect">
+            <a:avLst/>
+          </a:prstGeom>
+          <a:solidFill>
+            <a:srgbClr val="2D3748"/>
+          </a:solidFill>
+          <a:ln w="25400">
+            <a:solidFill>
+              <a:srgbClr val="3B82F6"/>
+            </a:solidFill>
+          </a:ln>
+        </p:spPr>
+        <p:style>
+          <a:lnRef idx="1">
+            <a:schemeClr val="accent1"/>
+          </a:lnRef>
+          <a:fillRef idx="3">
+            <a:schemeClr val="accent1"/>
+          </a:fillRef>
+          <a:effectRef idx="2">
+            <a:schemeClr val="accent1"/>
+          </a:effectRef>
+          <a:fontRef idx="minor">
+            <a:schemeClr val="lt1"/>
+          </a:fontRef>
+        </p:style>
+        <p:txBody>
+          <a:bodyPr rtlCol="0" anchor="ctr"/>
+          <a:lstStyle/>
+          <a:p>
+            <a:pPr algn="ctr"/>
+          </a:p>
+        </p:txBody>
+      </p:sp>
+      <p:sp>
+        <p:nvSpPr>
+          <p:cNvPr id="7" name="Rectangle 6"/>
+          <p:cNvSpPr/>
+          <p:nvPr/>
+        </p:nvSpPr>
+        <p:spPr>
+          <a:xfrm>
+            <a:off x="548640" y="1005840"/>
+            <a:ext cx="3566160" cy="502920"/>
+          </a:xfrm>
+          <a:prstGeom prst="rect">
+            <a:avLst/>
+          </a:prstGeom>
+          <a:solidFill>
+            <a:srgbClr val="3B82F6"/>
+          </a:solidFill>
+        </p:spPr>
+        <p:style>
+          <a:lnRef idx="1">
+            <a:schemeClr val="accent1"/>
+          </a:lnRef>
+          <a:fillRef idx="3">
+            <a:schemeClr val="accent1"/>
+          </a:fillRef>
+          <a:effectRef idx="2">
+            <a:schemeClr val="accent1"/>
+          </a:effectRef>
+          <a:fontRef idx="minor">
+            <a:schemeClr val="lt1"/>
+          </a:fontRef>
+        </p:style>
+        <p:txBody>
+          <a:bodyPr rtlCol="0" anchor="ctr"/>
+          <a:lstStyle/>
+          <a:p>
+            <a:pPr algn="ctr"/>
+          </a:p>
+        </p:txBody>
+      </p:sp>
+      <p:sp>
+        <p:nvSpPr>
+          <p:cNvPr id="8" name="TextBox 7"/>
+          <p:cNvSpPr txBox="1"/>
+          <p:nvPr/>
+        </p:nvSpPr>
+        <p:spPr>
+          <a:xfrm>
+            <a:off x="640080" y="1042416"/>
+            <a:ext cx="3108960" cy="274320"/>
+          </a:xfrm>
+          <a:prstGeom prst="rect">
+            <a:avLst/>
+          </a:prstGeom>
+          <a:noFill/>
+        </p:spPr>
+        <p:txBody>
+          <a:bodyPr wrap="square">
+            <a:spAutoFit/>
+          </a:bodyPr>
+          <a:lstStyle/>
+          <a:p>
+            <a:pPr algn="l"/>
+            <a:r>
+              <a:rPr sz="1200" b="1" i="0">
+                <a:solidFill>
+                  <a:srgbClr val="FFFFFF"/>
+                </a:solidFill>
+              </a:rPr>
+              <a:t>CATEGORY F1</a:t>
+            </a:r>
+          </a:p>
+        </p:txBody>
+      </p:sp>
+      <p:sp>
+        <p:nvSpPr>
+          <p:cNvPr id="9" name="TextBox 8"/>
+          <p:cNvSpPr txBox="1"/>
+          <p:nvPr/>
+        </p:nvSpPr>
+        <p:spPr>
+          <a:xfrm>
+            <a:off x="3474720" y="1170432"/>
+            <a:ext cx="548640" cy="256032"/>
+          </a:xfrm>
+          <a:prstGeom prst="rect">
+            <a:avLst/>
+          </a:prstGeom>
+          <a:noFill/>
+        </p:spPr>
+        <p:txBody>
+          <a:bodyPr wrap="square">
+            <a:spAutoFit/>
+          </a:bodyPr>
+          <a:lstStyle/>
+          <a:p>
+            <a:pPr algn="r"/>
+            <a:r>
+              <a:rPr sz="1200" b="1" i="0">
+                <a:solidFill>
+                  <a:srgbClr val="FFFFFF"/>
+                </a:solidFill>
+              </a:rPr>
+              <a:t>× 0.40</a:t>
+            </a:r>
+          </a:p>
+        </p:txBody>
+      </p:sp>
+      <p:sp>
+        <p:nvSpPr>
+          <p:cNvPr id="10" name="TextBox 9"/>
+          <p:cNvSpPr txBox="1"/>
+          <p:nvPr/>
+        </p:nvSpPr>
+        <p:spPr>
+          <a:xfrm>
+            <a:off x="658368" y="1572768"/>
+            <a:ext cx="3346704" cy="4251960"/>
+          </a:xfrm>
+          <a:prstGeom prst="rect">
+            <a:avLst/>
+          </a:prstGeom>
+          <a:noFill/>
+        </p:spPr>
+        <p:txBody>
+          <a:bodyPr wrap="square">
+            <a:spAutoFit/>
+          </a:bodyPr>
+          <a:lstStyle/>
+          <a:p>
+            <a:pPr>
+              <a:spcBef>
+                <a:spcPts val="300"/>
+              </a:spcBef>
+            </a:pPr>
+            <a:r>
+              <a:rPr sz="1200" b="0">
+                <a:solidFill>
+                  <a:srgbClr val="D1D5DB"/>
+                </a:solidFill>
+              </a:rPr>
+              <a:t>8 fixed categories evaluated:</a:t>
+            </a:r>
+          </a:p>
+          <a:p>
+            <a:pPr>
+              <a:spcBef>
+                <a:spcPts val="300"/>
+              </a:spcBef>
+            </a:pPr>
+            <a:r>
+              <a:rPr sz="1200" b="0">
+                <a:solidFill>
+                  <a:srgbClr val="D1D5DB"/>
+                </a:solidFill>
+              </a:rPr>
+              <a:t>wetlands · air_quality · noise · traffic</a:t>
+            </a:r>
+          </a:p>
+          <a:p>
+            <a:pPr>
+              <a:spcBef>
+                <a:spcPts val="300"/>
+              </a:spcBef>
+            </a:pPr>
+            <a:r>
+              <a:rPr sz="1200" b="0">
+                <a:solidFill>
+                  <a:srgbClr val="D1D5DB"/>
+                </a:solidFill>
+              </a:rPr>
+              <a:t>env. justice · species · floodplain · farmland</a:t>
+            </a:r>
+          </a:p>
+          <a:p>
+            <a:pPr>
+              <a:spcBef>
+                <a:spcPts val="300"/>
+              </a:spcBef>
+            </a:pPr>
+            <a:r>
+              <a:rPr sz="1200" b="0">
+                <a:solidFill>
+                  <a:srgbClr val="FFFFFF"/>
+                </a:solidFill>
+              </a:rPr>
+              <a:t/>
+            </a:r>
+          </a:p>
+          <a:p>
+            <a:pPr>
+              <a:spcBef>
+                <a:spcPts val="300"/>
+              </a:spcBef>
+            </a:pPr>
+            <a:r>
+              <a:rPr sz="1200" b="0">
+                <a:solidFill>
+                  <a:srgbClr val="D1D5DB"/>
+                </a:solidFill>
+              </a:rPr>
+              <a:t>TP  agent flagged  AND  EIS confirms</a:t>
+            </a:r>
+          </a:p>
+          <a:p>
+            <a:pPr>
+              <a:spcBef>
+                <a:spcPts val="300"/>
+              </a:spcBef>
+            </a:pPr>
+            <a:r>
+              <a:rPr sz="1200" b="0">
+                <a:solidFill>
+                  <a:srgbClr val="D1D5DB"/>
+                </a:solidFill>
+              </a:rPr>
+              <a:t>FP  agent flagged  BUT  EIS says none</a:t>
+            </a:r>
+          </a:p>
+          <a:p>
+            <a:pPr>
+              <a:spcBef>
+                <a:spcPts val="300"/>
+              </a:spcBef>
+            </a:pPr>
+            <a:r>
+              <a:rPr sz="1200" b="0">
+                <a:solidFill>
+                  <a:srgbClr val="D1D5DB"/>
+                </a:solidFill>
+              </a:rPr>
+              <a:t>FN  EIS confirms   BUT  agent missed</a:t>
+            </a:r>
+          </a:p>
+          <a:p>
+            <a:pPr>
+              <a:spcBef>
+                <a:spcPts val="300"/>
+              </a:spcBef>
+            </a:pPr>
+            <a:r>
+              <a:rPr sz="1200" b="0">
+                <a:solidFill>
+                  <a:srgbClr val="FFFFFF"/>
+                </a:solidFill>
+              </a:rPr>
+              <a:t/>
+            </a:r>
+          </a:p>
+          <a:p>
+            <a:pPr>
+              <a:spcBef>
+                <a:spcPts val="300"/>
+              </a:spcBef>
+            </a:pPr>
+            <a:r>
+              <a:rPr sz="1200" b="1">
+                <a:solidFill>
+                  <a:srgbClr val="D1D5DB"/>
+                </a:solidFill>
+              </a:rPr>
+              <a:t>Precision = TP / (TP+FP)</a:t>
+            </a:r>
+          </a:p>
+          <a:p>
+            <a:pPr>
+              <a:spcBef>
+                <a:spcPts val="300"/>
+              </a:spcBef>
+            </a:pPr>
+            <a:r>
+              <a:rPr sz="1200" b="1">
+                <a:solidFill>
+                  <a:srgbClr val="D1D5DB"/>
+                </a:solidFill>
+              </a:rPr>
+              <a:t>Recall    = TP / (TP+FN)</a:t>
+            </a:r>
+          </a:p>
+          <a:p>
+            <a:pPr>
+              <a:spcBef>
+                <a:spcPts val="300"/>
+              </a:spcBef>
+            </a:pPr>
+            <a:r>
+              <a:rPr sz="1200" b="1">
+                <a:solidFill>
+                  <a:srgbClr val="D1D5DB"/>
+                </a:solidFill>
+              </a:rPr>
+              <a:t>F1 = 2·P·R / (P+R)</a:t>
+            </a:r>
+          </a:p>
+        </p:txBody>
+      </p:sp>
+      <p:sp>
+        <p:nvSpPr>
+          <p:cNvPr id="11" name="Rectangle 10"/>
+          <p:cNvSpPr/>
+          <p:nvPr/>
+        </p:nvSpPr>
+        <p:spPr>
+          <a:xfrm>
+            <a:off x="4315968" y="1005840"/>
+            <a:ext cx="3566160" cy="5029200"/>
+          </a:xfrm>
+          <a:prstGeom prst="rect">
+            <a:avLst/>
+          </a:prstGeom>
+          <a:solidFill>
+            <a:srgbClr val="2D3748"/>
+          </a:solidFill>
+          <a:ln w="25400">
+            <a:solidFill>
+              <a:srgbClr val="22C55E"/>
+            </a:solidFill>
+          </a:ln>
+        </p:spPr>
+        <p:style>
+          <a:lnRef idx="1">
+            <a:schemeClr val="accent1"/>
+          </a:lnRef>
+          <a:fillRef idx="3">
+            <a:schemeClr val="accent1"/>
+          </a:fillRef>
+          <a:effectRef idx="2">
+            <a:schemeClr val="accent1"/>
+          </a:effectRef>
+          <a:fontRef idx="minor">
+            <a:schemeClr val="lt1"/>
+          </a:fontRef>
+        </p:style>
+        <p:txBody>
+          <a:bodyPr rtlCol="0" anchor="ctr"/>
+          <a:lstStyle/>
+          <a:p>
+            <a:pPr algn="ctr"/>
+          </a:p>
+        </p:txBody>
+      </p:sp>
+      <p:sp>
+        <p:nvSpPr>
+          <p:cNvPr id="12" name="Rectangle 11"/>
+          <p:cNvSpPr/>
+          <p:nvPr/>
+        </p:nvSpPr>
+        <p:spPr>
+          <a:xfrm>
+            <a:off x="4315968" y="1005840"/>
+            <a:ext cx="3566160" cy="502920"/>
+          </a:xfrm>
+          <a:prstGeom prst="rect">
+            <a:avLst/>
+          </a:prstGeom>
+          <a:solidFill>
+            <a:srgbClr val="22C55E"/>
+          </a:solidFill>
+        </p:spPr>
+        <p:style>
+          <a:lnRef idx="1">
+            <a:schemeClr val="accent1"/>
+          </a:lnRef>
+          <a:fillRef idx="3">
+            <a:schemeClr val="accent1"/>
+          </a:fillRef>
+          <a:effectRef idx="2">
+            <a:schemeClr val="accent1"/>
+          </a:effectRef>
+          <a:fontRef idx="minor">
+            <a:schemeClr val="lt1"/>
+          </a:fontRef>
+        </p:style>
+        <p:txBody>
+          <a:bodyPr rtlCol="0" anchor="ctr"/>
+          <a:lstStyle/>
+          <a:p>
+            <a:pPr algn="ctr"/>
+          </a:p>
+        </p:txBody>
+      </p:sp>
+      <p:sp>
+        <p:nvSpPr>
+          <p:cNvPr id="13" name="TextBox 12"/>
+          <p:cNvSpPr txBox="1"/>
+          <p:nvPr/>
+        </p:nvSpPr>
+        <p:spPr>
+          <a:xfrm>
+            <a:off x="4407408" y="1042416"/>
+            <a:ext cx="3108960" cy="274320"/>
+          </a:xfrm>
+          <a:prstGeom prst="rect">
+            <a:avLst/>
+          </a:prstGeom>
+          <a:noFill/>
+        </p:spPr>
+        <p:txBody>
+          <a:bodyPr wrap="square">
+            <a:spAutoFit/>
+          </a:bodyPr>
+          <a:lstStyle/>
+          <a:p>
+            <a:pPr algn="l"/>
+            <a:r>
+              <a:rPr sz="1200" b="1" i="0">
+                <a:solidFill>
+                  <a:srgbClr val="FFFFFF"/>
+                </a:solidFill>
+              </a:rPr>
+              <a:t>SIGNIFICANCE ACCURACY</a:t>
+            </a:r>
+          </a:p>
+        </p:txBody>
+      </p:sp>
+      <p:sp>
+        <p:nvSpPr>
+          <p:cNvPr id="14" name="TextBox 13"/>
+          <p:cNvSpPr txBox="1"/>
+          <p:nvPr/>
+        </p:nvSpPr>
+        <p:spPr>
+          <a:xfrm>
+            <a:off x="7242048" y="1170432"/>
+            <a:ext cx="548640" cy="256032"/>
+          </a:xfrm>
+          <a:prstGeom prst="rect">
+            <a:avLst/>
+          </a:prstGeom>
+          <a:noFill/>
+        </p:spPr>
+        <p:txBody>
+          <a:bodyPr wrap="square">
+            <a:spAutoFit/>
+          </a:bodyPr>
+          <a:lstStyle/>
+          <a:p>
+            <a:pPr algn="r"/>
+            <a:r>
+              <a:rPr sz="1200" b="1" i="0">
+                <a:solidFill>
+                  <a:srgbClr val="FFFFFF"/>
+                </a:solidFill>
+              </a:rPr>
+              <a:t>× 0.40</a:t>
+            </a:r>
+          </a:p>
+        </p:txBody>
+      </p:sp>
+      <p:sp>
+        <p:nvSpPr>
+          <p:cNvPr id="15" name="TextBox 14"/>
+          <p:cNvSpPr txBox="1"/>
+          <p:nvPr/>
+        </p:nvSpPr>
+        <p:spPr>
+          <a:xfrm>
+            <a:off x="4425696" y="1572768"/>
+            <a:ext cx="3346704" cy="4251960"/>
+          </a:xfrm>
+          <a:prstGeom prst="rect">
+            <a:avLst/>
+          </a:prstGeom>
+          <a:noFill/>
+        </p:spPr>
+        <p:txBody>
+          <a:bodyPr wrap="square">
+            <a:spAutoFit/>
+          </a:bodyPr>
+          <a:lstStyle/>
+          <a:p>
+            <a:pPr>
+              <a:spcBef>
+                <a:spcPts val="300"/>
+              </a:spcBef>
+            </a:pPr>
+            <a:r>
+              <a:rPr sz="1200" b="0">
+                <a:solidFill>
+                  <a:srgbClr val="D1D5DB"/>
+                </a:solidFill>
+              </a:rPr>
+              <a:t>Ordinal significance scale:</a:t>
+            </a:r>
+          </a:p>
+          <a:p>
+            <a:pPr>
+              <a:spcBef>
+                <a:spcPts val="300"/>
+              </a:spcBef>
+            </a:pPr>
+            <a:r>
+              <a:rPr sz="1200" b="0">
+                <a:solidFill>
+                  <a:srgbClr val="D1D5DB"/>
+                </a:solidFill>
+              </a:rPr>
+              <a:t>  significant = 3</a:t>
+            </a:r>
+          </a:p>
+          <a:p>
+            <a:pPr>
+              <a:spcBef>
+                <a:spcPts val="300"/>
+              </a:spcBef>
+            </a:pPr>
+            <a:r>
+              <a:rPr sz="1200" b="0">
+                <a:solidFill>
+                  <a:srgbClr val="D1D5DB"/>
+                </a:solidFill>
+              </a:rPr>
+              <a:t>  moderate    = 2</a:t>
+            </a:r>
+          </a:p>
+          <a:p>
+            <a:pPr>
+              <a:spcBef>
+                <a:spcPts val="300"/>
+              </a:spcBef>
+            </a:pPr>
+            <a:r>
+              <a:rPr sz="1200" b="0">
+                <a:solidFill>
+                  <a:srgbClr val="D1D5DB"/>
+                </a:solidFill>
+              </a:rPr>
+              <a:t>  minimal     = 1</a:t>
+            </a:r>
+          </a:p>
+          <a:p>
+            <a:pPr>
+              <a:spcBef>
+                <a:spcPts val="300"/>
+              </a:spcBef>
+            </a:pPr>
+            <a:r>
+              <a:rPr sz="1200" b="0">
+                <a:solidFill>
+                  <a:srgbClr val="D1D5DB"/>
+                </a:solidFill>
+              </a:rPr>
+              <a:t>  none        = 0</a:t>
+            </a:r>
+          </a:p>
+          <a:p>
+            <a:pPr>
+              <a:spcBef>
+                <a:spcPts val="300"/>
+              </a:spcBef>
+            </a:pPr>
+            <a:r>
+              <a:rPr sz="1200" b="0">
+                <a:solidFill>
+                  <a:srgbClr val="FFFFFF"/>
+                </a:solidFill>
+              </a:rPr>
+              <a:t/>
+            </a:r>
+          </a:p>
+          <a:p>
+            <a:pPr>
+              <a:spcBef>
+                <a:spcPts val="300"/>
+              </a:spcBef>
+            </a:pPr>
+            <a:r>
+              <a:rPr sz="1200" b="0">
+                <a:solidFill>
+                  <a:srgbClr val="D1D5DB"/>
+                </a:solidFill>
+              </a:rPr>
+              <a:t>For each matched category:</a:t>
+            </a:r>
+          </a:p>
+          <a:p>
+            <a:pPr>
+              <a:spcBef>
+                <a:spcPts val="300"/>
+              </a:spcBef>
+            </a:pPr>
+            <a:r>
+              <a:rPr sz="1200" b="0">
+                <a:solidFill>
+                  <a:srgbClr val="D1D5DB"/>
+                </a:solidFill>
+              </a:rPr>
+              <a:t>  |diff| = 0  →  1.0  (exact match)</a:t>
+            </a:r>
+          </a:p>
+          <a:p>
+            <a:pPr>
+              <a:spcBef>
+                <a:spcPts val="300"/>
+              </a:spcBef>
+            </a:pPr>
+            <a:r>
+              <a:rPr sz="1200" b="0">
+                <a:solidFill>
+                  <a:srgbClr val="D1D5DB"/>
+                </a:solidFill>
+              </a:rPr>
+              <a:t>  |diff| = 1  →  0.5  (off by one)</a:t>
+            </a:r>
+          </a:p>
+          <a:p>
+            <a:pPr>
+              <a:spcBef>
+                <a:spcPts val="300"/>
+              </a:spcBef>
+            </a:pPr>
+            <a:r>
+              <a:rPr sz="1200" b="0">
+                <a:solidFill>
+                  <a:srgbClr val="D1D5DB"/>
+                </a:solidFill>
+              </a:rPr>
+              <a:t>  |diff| ≥ 2  →  0.0</a:t>
+            </a:r>
+          </a:p>
+          <a:p>
+            <a:pPr>
+              <a:spcBef>
+                <a:spcPts val="300"/>
+              </a:spcBef>
+            </a:pPr>
+            <a:r>
+              <a:rPr sz="1200" b="0">
+                <a:solidFill>
+                  <a:srgbClr val="FFFFFF"/>
+                </a:solidFill>
+              </a:rPr>
+              <a:t/>
+            </a:r>
+          </a:p>
+          <a:p>
+            <a:pPr>
+              <a:spcBef>
+                <a:spcPts val="300"/>
+              </a:spcBef>
+            </a:pPr>
+            <a:r>
+              <a:rPr sz="1200" b="0">
+                <a:solidFill>
+                  <a:srgbClr val="D1D5DB"/>
+                </a:solidFill>
+              </a:rPr>
+              <a:t>Score = mean across all pairs</a:t>
+            </a:r>
+          </a:p>
+        </p:txBody>
+      </p:sp>
+      <p:sp>
+        <p:nvSpPr>
+          <p:cNvPr id="16" name="Rectangle 15"/>
+          <p:cNvSpPr/>
+          <p:nvPr/>
+        </p:nvSpPr>
+        <p:spPr>
+          <a:xfrm>
+            <a:off x="8083296" y="1005840"/>
+            <a:ext cx="3566160" cy="5029200"/>
+          </a:xfrm>
+          <a:prstGeom prst="rect">
+            <a:avLst/>
+          </a:prstGeom>
+          <a:solidFill>
+            <a:srgbClr val="2D3748"/>
+          </a:solidFill>
+          <a:ln w="25400">
+            <a:solidFill>
+              <a:srgbClr val="EAB308"/>
+            </a:solidFill>
+          </a:ln>
+        </p:spPr>
+        <p:style>
+          <a:lnRef idx="1">
+            <a:schemeClr val="accent1"/>
+          </a:lnRef>
+          <a:fillRef idx="3">
+            <a:schemeClr val="accent1"/>
+          </a:fillRef>
+          <a:effectRef idx="2">
+            <a:schemeClr val="accent1"/>
+          </a:effectRef>
+          <a:fontRef idx="minor">
+            <a:schemeClr val="lt1"/>
+          </a:fontRef>
+        </p:style>
+        <p:txBody>
+          <a:bodyPr rtlCol="0" anchor="ctr"/>
+          <a:lstStyle/>
+          <a:p>
+            <a:pPr algn="ctr"/>
+          </a:p>
+        </p:txBody>
+      </p:sp>
+      <p:sp>
+        <p:nvSpPr>
+          <p:cNvPr id="17" name="Rectangle 16"/>
+          <p:cNvSpPr/>
+          <p:nvPr/>
+        </p:nvSpPr>
+        <p:spPr>
+          <a:xfrm>
+            <a:off x="8083296" y="1005840"/>
+            <a:ext cx="3566160" cy="502920"/>
+          </a:xfrm>
+          <a:prstGeom prst="rect">
+            <a:avLst/>
+          </a:prstGeom>
+          <a:solidFill>
+            <a:srgbClr val="EAB308"/>
+          </a:solidFill>
+        </p:spPr>
+        <p:style>
+          <a:lnRef idx="1">
+            <a:schemeClr val="accent1"/>
+          </a:lnRef>
+          <a:fillRef idx="3">
+            <a:schemeClr val="accent1"/>
+          </a:fillRef>
+          <a:effectRef idx="2">
+            <a:schemeClr val="accent1"/>
+          </a:effectRef>
+          <a:fontRef idx="minor">
+            <a:schemeClr val="lt1"/>
+          </a:fontRef>
+        </p:style>
+        <p:txBody>
+          <a:bodyPr rtlCol="0" anchor="ctr"/>
+          <a:lstStyle/>
+          <a:p>
+            <a:pPr algn="ctr"/>
+          </a:p>
+        </p:txBody>
+      </p:sp>
+      <p:sp>
+        <p:nvSpPr>
+          <p:cNvPr id="18" name="TextBox 17"/>
+          <p:cNvSpPr txBox="1"/>
+          <p:nvPr/>
+        </p:nvSpPr>
+        <p:spPr>
+          <a:xfrm>
+            <a:off x="8174736" y="1042416"/>
+            <a:ext cx="3108960" cy="274320"/>
+          </a:xfrm>
+          <a:prstGeom prst="rect">
+            <a:avLst/>
+          </a:prstGeom>
+          <a:noFill/>
+        </p:spPr>
+        <p:txBody>
+          <a:bodyPr wrap="square">
+            <a:spAutoFit/>
+          </a:bodyPr>
+          <a:lstStyle/>
+          <a:p>
+            <a:pPr algn="l"/>
+            <a:r>
+              <a:rPr sz="1200" b="1" i="0">
+                <a:solidFill>
+                  <a:srgbClr val="FFFFFF"/>
+                </a:solidFill>
+              </a:rPr>
+              <a:t>SEMANTIC COVERAGE</a:t>
+            </a:r>
+          </a:p>
+        </p:txBody>
+      </p:sp>
+      <p:sp>
+        <p:nvSpPr>
+          <p:cNvPr id="19" name="TextBox 18"/>
+          <p:cNvSpPr txBox="1"/>
+          <p:nvPr/>
+        </p:nvSpPr>
+        <p:spPr>
+          <a:xfrm>
+            <a:off x="11009376" y="1170432"/>
+            <a:ext cx="548640" cy="256032"/>
+          </a:xfrm>
+          <a:prstGeom prst="rect">
+            <a:avLst/>
+          </a:prstGeom>
+          <a:noFill/>
+        </p:spPr>
+        <p:txBody>
+          <a:bodyPr wrap="square">
+            <a:spAutoFit/>
+          </a:bodyPr>
+          <a:lstStyle/>
+          <a:p>
+            <a:pPr algn="r"/>
+            <a:r>
+              <a:rPr sz="1200" b="1" i="0">
+                <a:solidFill>
+                  <a:srgbClr val="FFFFFF"/>
+                </a:solidFill>
+              </a:rPr>
+              <a:t>× 0.20</a:t>
+            </a:r>
+          </a:p>
+        </p:txBody>
+      </p:sp>
+      <p:sp>
+        <p:nvSpPr>
+          <p:cNvPr id="20" name="TextBox 19"/>
+          <p:cNvSpPr txBox="1"/>
+          <p:nvPr/>
+        </p:nvSpPr>
+        <p:spPr>
+          <a:xfrm>
+            <a:off x="8193024" y="1572768"/>
+            <a:ext cx="3346704" cy="4251960"/>
+          </a:xfrm>
+          <a:prstGeom prst="rect">
+            <a:avLst/>
+          </a:prstGeom>
+          <a:noFill/>
+        </p:spPr>
+        <p:txBody>
+          <a:bodyPr wrap="square">
+            <a:spAutoFit/>
+          </a:bodyPr>
+          <a:lstStyle/>
+          <a:p>
+            <a:pPr>
+              <a:spcBef>
+                <a:spcPts val="300"/>
+              </a:spcBef>
+            </a:pPr>
+            <a:r>
+              <a:rPr sz="1200" b="0">
+                <a:solidFill>
+                  <a:srgbClr val="D1D5DB"/>
+                </a:solidFill>
+              </a:rPr>
+              <a:t>Measures: does the agent's reasoning</a:t>
+            </a:r>
+          </a:p>
+          <a:p>
+            <a:pPr>
+              <a:spcBef>
+                <a:spcPts val="300"/>
+              </a:spcBef>
+            </a:pPr>
+            <a:r>
+              <a:rPr sz="1200" b="0">
+                <a:solidFill>
+                  <a:srgbClr val="D1D5DB"/>
+                </a:solidFill>
+              </a:rPr>
+              <a:t>align with the actual EIS text?</a:t>
+            </a:r>
+          </a:p>
+          <a:p>
+            <a:pPr>
+              <a:spcBef>
+                <a:spcPts val="300"/>
+              </a:spcBef>
+            </a:pPr>
+            <a:r>
+              <a:rPr sz="1200" b="0">
+                <a:solidFill>
+                  <a:srgbClr val="FFFFFF"/>
+                </a:solidFill>
+              </a:rPr>
+              <a:t/>
+            </a:r>
+          </a:p>
+          <a:p>
+            <a:pPr>
+              <a:spcBef>
+                <a:spcPts val="300"/>
+              </a:spcBef>
+            </a:pPr>
+            <a:r>
+              <a:rPr sz="1200" b="0">
+                <a:solidFill>
+                  <a:srgbClr val="D1D5DB"/>
+                </a:solidFill>
+              </a:rPr>
+              <a:t>Up to 10 reasoning snippets embedded</a:t>
+            </a:r>
+          </a:p>
+          <a:p>
+            <a:pPr>
+              <a:spcBef>
+                <a:spcPts val="300"/>
+              </a:spcBef>
+            </a:pPr>
+            <a:r>
+              <a:rPr sz="1200" b="0">
+                <a:solidFill>
+                  <a:srgbClr val="D1D5DB"/>
+                </a:solidFill>
+              </a:rPr>
+              <a:t>→ cosine similarity vs. EIS chunks</a:t>
+            </a:r>
+          </a:p>
+          <a:p>
+            <a:pPr>
+              <a:spcBef>
+                <a:spcPts val="300"/>
+              </a:spcBef>
+            </a:pPr>
+            <a:r>
+              <a:rPr sz="1200" b="0">
+                <a:solidFill>
+                  <a:srgbClr val="FFFFFF"/>
+                </a:solidFill>
+              </a:rPr>
+              <a:t/>
+            </a:r>
+          </a:p>
+          <a:p>
+            <a:pPr>
+              <a:spcBef>
+                <a:spcPts val="300"/>
+              </a:spcBef>
+            </a:pPr>
+            <a:r>
+              <a:rPr sz="1200" b="1">
+                <a:solidFill>
+                  <a:srgbClr val="D1D5DB"/>
+                </a:solidFill>
+              </a:rPr>
+              <a:t>score = mean(max cosine similarity)</a:t>
+            </a:r>
+          </a:p>
+          <a:p>
+            <a:pPr>
+              <a:spcBef>
+                <a:spcPts val="300"/>
+              </a:spcBef>
+            </a:pPr>
+            <a:r>
+              <a:rPr sz="1200" b="0">
+                <a:solidFill>
+                  <a:srgbClr val="D1D5DB"/>
+                </a:solidFill>
+              </a:rPr>
+              <a:t>        over all reasoning snippets</a:t>
+            </a:r>
+          </a:p>
+          <a:p>
+            <a:pPr>
+              <a:spcBef>
+                <a:spcPts val="300"/>
+              </a:spcBef>
+            </a:pPr>
+            <a:r>
+              <a:rPr sz="1200" b="0">
+                <a:solidFill>
+                  <a:srgbClr val="FFFFFF"/>
+                </a:solidFill>
+              </a:rPr>
+              <a:t/>
+            </a:r>
+          </a:p>
+          <a:p>
+            <a:pPr>
+              <a:spcBef>
+                <a:spcPts val="300"/>
+              </a:spcBef>
+            </a:pPr>
+            <a:r>
+              <a:rPr sz="1200" b="0">
+                <a:solidFill>
+                  <a:srgbClr val="D1D5DB"/>
+                </a:solidFill>
+              </a:rPr>
+              <a:t>No LLM — pure vector math</a:t>
+            </a:r>
+          </a:p>
+          <a:p>
+            <a:pPr>
+              <a:spcBef>
+                <a:spcPts val="300"/>
+              </a:spcBef>
+            </a:pPr>
+            <a:r>
+              <a:rPr sz="1200" b="0">
+                <a:solidFill>
+                  <a:srgbClr val="D1D5DB"/>
+                </a:solidFill>
+              </a:rPr>
+              <a:t>on pre-stored embeddings</a:t>
+            </a:r>
+          </a:p>
+        </p:txBody>
+      </p:sp>
+      <p:sp>
+        <p:nvSpPr>
+          <p:cNvPr id="21" name="TextBox 20"/>
+          <p:cNvSpPr txBox="1"/>
+          <p:nvPr/>
+        </p:nvSpPr>
+        <p:spPr>
+          <a:xfrm>
+            <a:off x="548640" y="6172200"/>
+            <a:ext cx="11064240" cy="411480"/>
+          </a:xfrm>
+          <a:prstGeom prst="rect">
+            <a:avLst/>
+          </a:prstGeom>
+          <a:noFill/>
+        </p:spPr>
+        <p:txBody>
+          <a:bodyPr wrap="square">
+            <a:spAutoFit/>
+          </a:bodyPr>
+          <a:lstStyle/>
+          <a:p>
+            <a:pPr algn="ctr"/>
+            <a:r>
+              <a:rPr sz="1300" b="1" i="0">
+                <a:solidFill>
+                  <a:srgbClr val="F97316"/>
+                </a:solidFill>
+              </a:rPr>
+              <a:t>OVERALL  =  (F1 × 0.40)  +  (Significance Accuracy × 0.40)  +  (Semantic Coverage × 0.20)</a:t>
+            </a:r>
+          </a:p>
+        </p:txBody>
+      </p:sp>
+    </p:spTree>
+  </p:cSld>
+  <p:clrMapOvr>
+    <a:masterClrMapping/>
+  </p:clrMapOvr>
+</p:sld>
+</file>
+
+<file path=ppt/slides/slide17.xml><?xml version="1.0" encoding="utf-8"?>
+<p:sld xmlns:a="http://schemas.openxmlformats.org/drawingml/2006/main" xmlns:p="http://schemas.openxmlformats.org/presentationml/2006/main" xmlns:r="http://schemas.openxmlformats.org/officeDocument/2006/relationships">
+  <p:cSld>
+    <p:bg>
+      <p:bgPr>
+        <a:solidFill>
+          <a:srgbClr val="1F2833"/>
+        </a:solidFill>
+        <a:effectLst/>
+      </p:bgPr>
+    </p:bg>
+    <p:spTree>
+      <p:nvGrpSpPr>
+        <p:cNvPr id="1" name=""/>
+        <p:cNvGrpSpPr/>
+        <p:nvPr/>
+      </p:nvGrpSpPr>
+      <p:grpSpPr/>
+      <p:sp>
+        <p:nvSpPr>
+          <p:cNvPr id="2" name="Text Placeholder 1"/>
+          <p:cNvSpPr>
+            <a:spLocks noGrp="1"/>
+          </p:cNvSpPr>
+          <p:nvPr>
+            <p:ph type="body" idx="10" sz="quarter"/>
+          </p:nvPr>
+        </p:nvSpPr>
+        <p:spPr/>
+        <p:txBody>
+          <a:bodyPr/>
+          <a:lstStyle/>
+          <a:p/>
+        </p:txBody>
+      </p:sp>
+      <p:sp>
+        <p:nvSpPr>
+          <p:cNvPr id="3" name="Rectangle 2"/>
+          <p:cNvSpPr/>
+          <p:nvPr/>
+        </p:nvSpPr>
+        <p:spPr>
+          <a:xfrm>
+            <a:off x="0" y="0"/>
+            <a:ext cx="12188952" cy="73152"/>
+          </a:xfrm>
+          <a:prstGeom prst="rect">
+            <a:avLst/>
+          </a:prstGeom>
+          <a:solidFill>
+            <a:srgbClr val="F97316"/>
+          </a:solidFill>
+        </p:spPr>
+        <p:style>
+          <a:lnRef idx="1">
+            <a:schemeClr val="accent1"/>
+          </a:lnRef>
+          <a:fillRef idx="3">
+            <a:schemeClr val="accent1"/>
+          </a:fillRef>
+          <a:effectRef idx="2">
+            <a:schemeClr val="accent1"/>
+          </a:effectRef>
+          <a:fontRef idx="minor">
+            <a:schemeClr val="lt1"/>
+          </a:fontRef>
+        </p:style>
+        <p:txBody>
+          <a:bodyPr rtlCol="0" anchor="ctr"/>
+          <a:lstStyle/>
+          <a:p>
+            <a:pPr algn="ctr"/>
+          </a:p>
+        </p:txBody>
+      </p:sp>
+      <p:sp>
+        <p:nvSpPr>
+          <p:cNvPr id="4" name="TextBox 3"/>
+          <p:cNvSpPr txBox="1"/>
+          <p:nvPr/>
+        </p:nvSpPr>
+        <p:spPr>
+          <a:xfrm>
+            <a:off x="548640" y="146304"/>
+            <a:ext cx="11430000" cy="658368"/>
+          </a:xfrm>
+          <a:prstGeom prst="rect">
+            <a:avLst/>
+          </a:prstGeom>
+          <a:noFill/>
+        </p:spPr>
+        <p:txBody>
+          <a:bodyPr wrap="square">
+            <a:spAutoFit/>
+          </a:bodyPr>
+          <a:lstStyle/>
+          <a:p>
+            <a:pPr algn="l"/>
+            <a:r>
+              <a:rPr sz="2800" b="1" i="0">
+                <a:solidFill>
+                  <a:srgbClr val="F97316"/>
+                </a:solidFill>
+              </a:rPr>
+              <a:t>Discussion</a:t>
+            </a:r>
+          </a:p>
+        </p:txBody>
+      </p:sp>
+      <p:sp>
+        <p:nvSpPr>
+          <p:cNvPr id="5" name="Rectangle 4"/>
+          <p:cNvSpPr/>
+          <p:nvPr/>
+        </p:nvSpPr>
+        <p:spPr>
+          <a:xfrm>
+            <a:off x="548640" y="914400"/>
+            <a:ext cx="11064240" cy="22860"/>
+          </a:xfrm>
+          <a:prstGeom prst="rect">
+            <a:avLst/>
+          </a:prstGeom>
+          <a:solidFill>
+            <a:srgbClr val="3D4A5C"/>
+          </a:solidFill>
+        </p:spPr>
+        <p:style>
+          <a:lnRef idx="1">
+            <a:schemeClr val="accent1"/>
+          </a:lnRef>
+          <a:fillRef idx="3">
+            <a:schemeClr val="accent1"/>
+          </a:fillRef>
+          <a:effectRef idx="2">
+            <a:schemeClr val="accent1"/>
+          </a:effectRef>
+          <a:fontRef idx="minor">
+            <a:schemeClr val="lt1"/>
+          </a:fontRef>
+        </p:style>
+        <p:txBody>
+          <a:bodyPr rtlCol="0" anchor="ctr"/>
+          <a:lstStyle/>
+          <a:p>
+            <a:pPr algn="ctr"/>
+          </a:p>
+        </p:txBody>
+      </p:sp>
+      <p:sp>
+        <p:nvSpPr>
+          <p:cNvPr id="6" name="Rectangle 5"/>
+          <p:cNvSpPr/>
+          <p:nvPr/>
+        </p:nvSpPr>
+        <p:spPr>
+          <a:xfrm>
+            <a:off x="548640" y="1005840"/>
+            <a:ext cx="5303520" cy="329184"/>
+          </a:xfrm>
+          <a:prstGeom prst="rect">
+            <a:avLst/>
+          </a:prstGeom>
+          <a:solidFill>
+            <a:srgbClr val="2D3748"/>
+          </a:solidFill>
+        </p:spPr>
+        <p:style>
+          <a:lnRef idx="1">
+            <a:schemeClr val="accent1"/>
+          </a:lnRef>
+          <a:fillRef idx="3">
+            <a:schemeClr val="accent1"/>
+          </a:fillRef>
+          <a:effectRef idx="2">
+            <a:schemeClr val="accent1"/>
+          </a:effectRef>
+          <a:fontRef idx="minor">
+            <a:schemeClr val="lt1"/>
+          </a:fontRef>
+        </p:style>
+        <p:txBody>
+          <a:bodyPr rtlCol="0" anchor="ctr"/>
+          <a:lstStyle/>
+          <a:p>
+            <a:pPr algn="ctr"/>
+          </a:p>
+        </p:txBody>
+      </p:sp>
+      <p:sp>
+        <p:nvSpPr>
+          <p:cNvPr id="7" name="TextBox 6"/>
+          <p:cNvSpPr txBox="1"/>
+          <p:nvPr/>
+        </p:nvSpPr>
+        <p:spPr>
+          <a:xfrm>
+            <a:off x="658368" y="1051560"/>
+            <a:ext cx="5084064" cy="256032"/>
+          </a:xfrm>
+          <a:prstGeom prst="rect">
+            <a:avLst/>
+          </a:prstGeom>
+          <a:noFill/>
+        </p:spPr>
+        <p:txBody>
+          <a:bodyPr wrap="square">
+            <a:spAutoFit/>
+          </a:bodyPr>
+          <a:lstStyle/>
+          <a:p>
+            <a:pPr algn="l"/>
+            <a:r>
+              <a:rPr sz="1200" b="1" i="0">
+                <a:solidFill>
+                  <a:srgbClr val="EF4444"/>
+                </a:solidFill>
+              </a:rPr>
+              <a:t>CURRENT SHORTCOMINGS</a:t>
+            </a:r>
+          </a:p>
+        </p:txBody>
+      </p:sp>
+      <p:sp>
+        <p:nvSpPr>
+          <p:cNvPr id="8" name="TextBox 7"/>
+          <p:cNvSpPr txBox="1"/>
+          <p:nvPr/>
+        </p:nvSpPr>
+        <p:spPr>
+          <a:xfrm>
+            <a:off x="548640" y="1389888"/>
+            <a:ext cx="5303520" cy="4937760"/>
+          </a:xfrm>
+          <a:prstGeom prst="rect">
+            <a:avLst/>
+          </a:prstGeom>
+          <a:noFill/>
+        </p:spPr>
+        <p:txBody>
+          <a:bodyPr wrap="square">
+            <a:spAutoFit/>
+          </a:bodyPr>
+          <a:lstStyle/>
+          <a:p>
+            <a:pPr>
+              <a:spcBef>
+                <a:spcPts val="600"/>
+              </a:spcBef>
+            </a:pPr>
+            <a:r>
+              <a:rPr sz="1800" b="1">
+                <a:solidFill>
+                  <a:srgbClr val="FFFFFF"/>
+                </a:solidFill>
+              </a:rPr>
+              <a:t>▸ Ground truth is LLM-extracted, not annotated by humans</a:t>
+            </a:r>
+          </a:p>
+          <a:p>
+            <a:pPr>
+              <a:spcBef>
+                <a:spcPts val="200"/>
+              </a:spcBef>
+            </a:pPr>
+            <a:r>
+              <a:rPr sz="1400" b="0">
+                <a:solidFill>
+                  <a:srgbClr val="D1D5DB"/>
+                </a:solidFill>
+              </a:rPr>
+              <a:t>    · LLM misread of EIS → inflated scores</a:t>
+            </a:r>
+          </a:p>
+          <a:p>
+            <a:pPr>
+              <a:spcBef>
+                <a:spcPts val="600"/>
+              </a:spcBef>
+            </a:pPr>
+            <a:r>
+              <a:rPr sz="1800" b="1">
+                <a:solidFill>
+                  <a:srgbClr val="FFFFFF"/>
+                </a:solidFill>
+              </a:rPr>
+              <a:t>▸ Only 8 fixed categories scored (F1 scope)</a:t>
+            </a:r>
+          </a:p>
+          <a:p>
+            <a:pPr>
+              <a:spcBef>
+                <a:spcPts val="200"/>
+              </a:spcBef>
+            </a:pPr>
+            <a:r>
+              <a:rPr sz="1400" b="0">
+                <a:solidFill>
+                  <a:srgbClr val="D1D5DB"/>
+                </a:solidFill>
+              </a:rPr>
+              <a:t>    · Project-specific impacts invisible to metric</a:t>
+            </a:r>
+          </a:p>
+          <a:p>
+            <a:pPr>
+              <a:spcBef>
+                <a:spcPts val="600"/>
+              </a:spcBef>
+            </a:pPr>
+            <a:r>
+              <a:rPr sz="1800" b="1">
+                <a:solidFill>
+                  <a:srgbClr val="FFFFFF"/>
+                </a:solidFill>
+              </a:rPr>
+              <a:t>▸ Semantic similarity ≠ factual accuracy</a:t>
+            </a:r>
+          </a:p>
+          <a:p>
+            <a:pPr>
+              <a:spcBef>
+                <a:spcPts val="200"/>
+              </a:spcBef>
+            </a:pPr>
+            <a:r>
+              <a:rPr sz="1400" b="0">
+                <a:solidFill>
+                  <a:srgbClr val="D1D5DB"/>
+                </a:solidFill>
+              </a:rPr>
+              <a:t>    · Style match can score high without correct reasoning</a:t>
+            </a:r>
+          </a:p>
+          <a:p>
+            <a:pPr>
+              <a:spcBef>
+                <a:spcPts val="600"/>
+              </a:spcBef>
+            </a:pPr>
+            <a:r>
+              <a:rPr sz="1800" b="1">
+                <a:solidFill>
+                  <a:srgbClr val="FFFFFF"/>
+                </a:solidFill>
+              </a:rPr>
+              <a:t>▸ LLM non-determinism — same run, different score</a:t>
+            </a:r>
+          </a:p>
+        </p:txBody>
+      </p:sp>
+      <p:sp>
+        <p:nvSpPr>
+          <p:cNvPr id="9" name="Rectangle 8"/>
+          <p:cNvSpPr/>
+          <p:nvPr/>
+        </p:nvSpPr>
+        <p:spPr>
+          <a:xfrm>
+            <a:off x="6400800" y="1005840"/>
+            <a:ext cx="5394960" cy="329184"/>
+          </a:xfrm>
+          <a:prstGeom prst="rect">
+            <a:avLst/>
+          </a:prstGeom>
+          <a:solidFill>
+            <a:srgbClr val="2D3748"/>
+          </a:solidFill>
+        </p:spPr>
+        <p:style>
+          <a:lnRef idx="1">
+            <a:schemeClr val="accent1"/>
+          </a:lnRef>
+          <a:fillRef idx="3">
+            <a:schemeClr val="accent1"/>
+          </a:fillRef>
+          <a:effectRef idx="2">
+            <a:schemeClr val="accent1"/>
+          </a:effectRef>
+          <a:fontRef idx="minor">
+            <a:schemeClr val="lt1"/>
+          </a:fontRef>
+        </p:style>
+        <p:txBody>
+          <a:bodyPr rtlCol="0" anchor="ctr"/>
+          <a:lstStyle/>
+          <a:p>
+            <a:pPr algn="ctr"/>
+          </a:p>
+        </p:txBody>
+      </p:sp>
+      <p:sp>
+        <p:nvSpPr>
+          <p:cNvPr id="10" name="TextBox 9"/>
+          <p:cNvSpPr txBox="1"/>
+          <p:nvPr/>
+        </p:nvSpPr>
+        <p:spPr>
+          <a:xfrm>
+            <a:off x="6510528" y="1051560"/>
+            <a:ext cx="5175504" cy="256032"/>
+          </a:xfrm>
+          <a:prstGeom prst="rect">
+            <a:avLst/>
+          </a:prstGeom>
+          <a:noFill/>
+        </p:spPr>
+        <p:txBody>
+          <a:bodyPr wrap="square">
+            <a:spAutoFit/>
+          </a:bodyPr>
+          <a:lstStyle/>
+          <a:p>
+            <a:pPr algn="l"/>
+            <a:r>
+              <a:rPr sz="1200" b="1" i="0">
+                <a:solidFill>
+                  <a:srgbClr val="22C55E"/>
+                </a:solidFill>
+              </a:rPr>
+              <a:t>FUTURE IMPROVEMENTS</a:t>
+            </a:r>
+          </a:p>
+        </p:txBody>
+      </p:sp>
+      <p:sp>
+        <p:nvSpPr>
+          <p:cNvPr id="11" name="TextBox 10"/>
+          <p:cNvSpPr txBox="1"/>
+          <p:nvPr/>
+        </p:nvSpPr>
+        <p:spPr>
+          <a:xfrm>
+            <a:off x="6400800" y="1389888"/>
+            <a:ext cx="5394960" cy="4937760"/>
+          </a:xfrm>
+          <a:prstGeom prst="rect">
+            <a:avLst/>
+          </a:prstGeom>
+          <a:noFill/>
+        </p:spPr>
+        <p:txBody>
+          <a:bodyPr wrap="square">
+            <a:spAutoFit/>
+          </a:bodyPr>
+          <a:lstStyle/>
+          <a:p>
+            <a:pPr>
+              <a:spcBef>
+                <a:spcPts val="600"/>
+              </a:spcBef>
+            </a:pPr>
+            <a:r>
+              <a:rPr sz="1800" b="1">
+                <a:solidFill>
+                  <a:srgbClr val="FFFFFF"/>
+                </a:solidFill>
+              </a:rPr>
+              <a:t>▸ Human-annotated ground truth corpus</a:t>
+            </a:r>
+          </a:p>
+          <a:p>
+            <a:pPr>
+              <a:spcBef>
+                <a:spcPts val="200"/>
+              </a:spcBef>
+            </a:pPr>
+            <a:r>
+              <a:rPr sz="1400" b="0">
+                <a:solidFill>
+                  <a:srgbClr val="D1D5DB"/>
+                </a:solidFill>
+              </a:rPr>
+              <a:t>    · Domain experts review LLM extractions</a:t>
+            </a:r>
+          </a:p>
+          <a:p>
+            <a:pPr>
+              <a:spcBef>
+                <a:spcPts val="600"/>
+              </a:spcBef>
+            </a:pPr>
+            <a:r>
+              <a:rPr sz="1800" b="1">
+                <a:solidFill>
+                  <a:srgbClr val="FFFFFF"/>
+                </a:solidFill>
+              </a:rPr>
+              <a:t>▸ Dynamic category set per project type</a:t>
+            </a:r>
+          </a:p>
+          <a:p>
+            <a:pPr>
+              <a:spcBef>
+                <a:spcPts val="200"/>
+              </a:spcBef>
+            </a:pPr>
+            <a:r>
+              <a:rPr sz="1400" b="0">
+                <a:solidFill>
+                  <a:srgbClr val="D1D5DB"/>
+                </a:solidFill>
+              </a:rPr>
+              <a:t>    · Replace 8 fixed with project-driven taxonomy</a:t>
+            </a:r>
+          </a:p>
+          <a:p>
+            <a:pPr>
+              <a:spcBef>
+                <a:spcPts val="600"/>
+              </a:spcBef>
+            </a:pPr>
+            <a:r>
+              <a:rPr sz="1800" b="1">
+                <a:solidFill>
+                  <a:srgbClr val="FFFFFF"/>
+                </a:solidFill>
+              </a:rPr>
+              <a:t>▸ LLM-as-Judge for reasoning quality</a:t>
+            </a:r>
+          </a:p>
+          <a:p>
+            <a:pPr>
+              <a:spcBef>
+                <a:spcPts val="200"/>
+              </a:spcBef>
+            </a:pPr>
+            <a:r>
+              <a:rPr sz="1400" b="0">
+                <a:solidFill>
+                  <a:srgbClr val="D1D5DB"/>
+                </a:solidFill>
+              </a:rPr>
+              <a:t>    · Separate evaluator scores each reasoning chain</a:t>
+            </a:r>
+          </a:p>
+          <a:p>
+            <a:pPr>
+              <a:spcBef>
+                <a:spcPts val="600"/>
+              </a:spcBef>
+            </a:pPr>
+            <a:r>
+              <a:rPr sz="1800" b="1">
+                <a:solidFill>
+                  <a:srgbClr val="FFFFFF"/>
+                </a:solidFill>
+              </a:rPr>
+              <a:t>▸ Run-level repeatability tracking</a:t>
+            </a:r>
+          </a:p>
+        </p:txBody>
+      </p:sp>
+    </p:spTree>
+  </p:cSld>
+  <p:clrMapOvr>
+    <a:masterClrMapping/>
+  </p:clrMapOvr>
+</p:sld>
+</file>
+
+<file path=ppt/slides/slide18.xml><?xml version="1.0" encoding="utf-8"?>
 <p:sld xmlns:a="http://schemas.openxmlformats.org/drawingml/2006/main" xmlns:p="http://schemas.openxmlformats.org/presentationml/2006/main" xmlns:r="http://schemas.openxmlformats.org/officeDocument/2006/relationships">
   <p:cSld>
     <p:bg>
